--- a/BaoCaoTienDo_Tuan1-3_52300057_52300006.pptx
+++ b/BaoCaoTienDo_Tuan1-3_52300057_52300006.pptx
@@ -21,6 +21,7 @@
     <p:sldId id="269" r:id="rId20"/>
     <p:sldId id="270" r:id="rId21"/>
     <p:sldId id="271" r:id="rId22"/>
+    <p:sldId id="272" r:id="rId23"/>
   </p:sldIdLst>
   <p:sldSz cx="12191695" cy="6858000" type="screen4x3"/>
   <p:notesSz cx="6858000" cy="9144000"/>
@@ -3225,7 +3226,7 @@
                 </a:solidFill>
                 <a:latin typeface="Georgia"/>
               </a:rPr>
-              <a:t>Em kiểm tra lại giả thuyết</a:t>
+              <a:t>Thí nghiệm đối chứng cho thấy</a:t>
             </a:r>
           </a:p>
           <a:p>
@@ -3244,7 +3245,7 @@
                 </a:solidFill>
                 <a:latin typeface="Georgia"/>
               </a:rPr>
-              <a:t>của mình, và nó sai</a:t>
+              <a:t>giả thuyết ban đầu không đúng</a:t>
             </a:r>
           </a:p>
         </p:txBody>
@@ -3286,7 +3287,7 @@
                 </a:solidFill>
                 <a:latin typeface="Helvetica Neue"/>
               </a:rPr>
-              <a:t>Ba tuần đầu em chạy thí nghiệm và tưởng đã chứng minh được điều mình nghĩ. Sau đó em phát hiện</a:t>
+              <a:t>Ba tuần đầu, kết quả thí nghiệm tưởng như đã xác nhận giả thuyết. Sau đó phát hiện thiết kế đo</a:t>
             </a:r>
           </a:p>
           <a:p>
@@ -3305,7 +3306,7 @@
                 </a:solidFill>
                 <a:latin typeface="Helvetica Neue"/>
               </a:rPr>
-              <a:t>cách đo của mình có lỗi. Em đo lại cho đúng, và kết quả ngược với giả thuyết ban đầu.</a:t>
+              <a:t>có lỗi. Đo lại cho đúng thì kết quả ngược lại.</a:t>
             </a:r>
           </a:p>
         </p:txBody>
@@ -3556,7 +3557,7 @@
                 </a:solidFill>
                 <a:latin typeface="Georgia"/>
               </a:rPr>
-              <a:t>Đo lại cho đúng thì không còn thấy tụt nữa</a:t>
+              <a:t>Đo đúng cách thì không còn thấy tụt</a:t>
             </a:r>
           </a:p>
         </p:txBody>
@@ -3641,7 +3642,7 @@
                 </a:solidFill>
                 <a:latin typeface="Helvetica Neue"/>
               </a:rPr>
-              <a:t>Vậy cú tụt kia là do em đo sai, không phải do máy chấm.</a:t>
+              <a:t>Cú tụt ban đầu đến từ thiết kế đo, không phải từ máy chấm.</a:t>
             </a:r>
           </a:p>
         </p:txBody>
@@ -3698,7 +3699,7 @@
                 </a:solidFill>
                 <a:latin typeface="Helvetica Neue"/>
               </a:rPr>
-              <a:t>THÍ NGHIỆM QUAN TRỌNG NHẤT</a:t>
+              <a:t>THÍ NGHIỆM ĐỐI CHỨNG</a:t>
             </a:r>
           </a:p>
         </p:txBody>
@@ -3779,7 +3780,7 @@
                 </a:solidFill>
                 <a:latin typeface="Georgia"/>
               </a:rPr>
-              <a:t>Sửa máy chấm rồi mà không đổi gì cả</a:t>
+              <a:t>Sửa máy chấm nhưng kết quả không đổi</a:t>
             </a:r>
           </a:p>
         </p:txBody>
@@ -3845,7 +3846,7 @@
                 </a:solidFill>
                 <a:latin typeface="Helvetica Neue"/>
               </a:rPr>
-              <a:t>Hai đường nằm chồng lên nhau ở cả hai lần chạy. Em sửa đúng cái lỗi mà cả đề tài cho là nguyên nhân,</a:t>
+              <a:t>Hai đường nằm chồng lên nhau ở cả hai lần chạy. Đúng cái lỗi mà đề tài cho là nguyên nhân đã được</a:t>
             </a:r>
           </a:p>
           <a:p>
@@ -3864,7 +3865,7 @@
                 </a:solidFill>
                 <a:latin typeface="Helvetica Neue"/>
               </a:rPr>
-              <a:t>mà điểm không nhúc nhích. Chỗ này là bằng chứng mạnh nhất cho thấy em đã nghĩ sai.</a:t>
+              <a:t>sửa, nhưng điểm không nhúc nhích. Đây là bằng chứng mạnh nhất bác bỏ giả thuyết ban đầu.</a:t>
             </a:r>
           </a:p>
         </p:txBody>
@@ -3903,7 +3904,7 @@
                 </a:solidFill>
                 <a:latin typeface="Helvetica Neue"/>
               </a:rPr>
-              <a:t>Đề thi có 150 đề, nên mỗi đề đáng 0,67 điểm. A và B chênh nhau nhiều nhất 0,6 điểm, tức là đúng một đề.</a:t>
+              <a:t>Đề thi có 150 đề nên mỗi đề đáng 0,67 điểm. A và B chênh nhau nhiều nhất 0,6 điểm, tức đúng một đề.</a:t>
             </a:r>
           </a:p>
         </p:txBody>
@@ -4498,7 +4499,7 @@
                 </a:solidFill>
                 <a:latin typeface="Helvetica Neue"/>
               </a:rPr>
-              <a:t>Em còn đo được trực tiếp. Ở vòng 0 model chưa học gì, nên A và B làm ra y hệt một bộ bài. Khác nhau</a:t>
+              <a:t>Đo trực tiếp: ở vòng 0 model chưa học gì, nên A và B làm ra y hệt một bộ bài. Khác nhau duy nhất</a:t>
             </a:r>
           </a:p>
           <a:p>
@@ -4517,7 +4518,7 @@
                 </a:solidFill>
                 <a:latin typeface="Helvetica Neue"/>
               </a:rPr>
-              <a:t>chỉ là máy chấm nào chấm. Sửa máy chấm xong, kết quả đổi đúng 1 đề trên 150 đề.</a:t>
+              <a:t>là máy chấm nào chấm. Sửa máy chấm xong, kết quả đổi đúng 1 đề trên 150 đề.</a:t>
             </a:r>
           </a:p>
         </p:txBody>
@@ -4613,7 +4614,7 @@
                 </a:solidFill>
                 <a:latin typeface="Helvetica Neue"/>
               </a:rPr>
-              <a:t>ĐỀ TÀI ĐI TIẾP THẾ NÀO</a:t>
+              <a:t>PHẠM VI ĐỀ TÀI</a:t>
             </a:r>
           </a:p>
         </p:txBody>
@@ -4694,7 +4695,7 @@
                 </a:solidFill>
                 <a:latin typeface="Georgia"/>
               </a:rPr>
-              <a:t>Kết luận nhỏ lại, nhưng em chắc chắn về nó</a:t>
+              <a:t>Kết luận thu hẹp lại, nhưng có cơ sở vững</a:t>
             </a:r>
           </a:p>
         </p:txBody>
@@ -4917,7 +4918,7 @@
                 </a:solidFill>
                 <a:latin typeface="Helvetica Neue"/>
               </a:rPr>
-              <a:t>Em đã tự kiểm tra bằng thí nghiệm đối</a:t>
+              <a:t>Đã kiểm tra bằng thí nghiệm đối chứng,</a:t>
             </a:r>
           </a:p>
           <a:p>
@@ -4936,7 +4937,7 @@
                 </a:solidFill>
                 <a:latin typeface="Helvetica Neue"/>
               </a:rPr>
-              <a:t>chứng, chạy hai lần cho chắc. Không đúng.</a:t>
+              <a:t>chạy lặp hai lần. Không đúng.</a:t>
             </a:r>
           </a:p>
         </p:txBody>
@@ -5239,7 +5240,7 @@
                 </a:solidFill>
                 <a:latin typeface="Helvetica Neue"/>
               </a:rPr>
-              <a:t>Kết luận này nhỏ hơn cái em định làm lúc đầu. Nhưng cái bẫy em vấp phải thì nhiều người cũng đang</a:t>
+              <a:t>Kết luận này hẹp hơn mục tiêu ban đầu. Nhưng cái bẫy thiết kế ở đây khá phổ biến trong các</a:t>
             </a:r>
           </a:p>
           <a:p>
@@ -5258,7 +5259,7 @@
                 </a:solidFill>
                 <a:latin typeface="Helvetica Neue"/>
               </a:rPr>
-              <a:t>vấp, nên em nghĩ vẫn đáng viết ra.</a:t>
+              <a:t>nghiên cứu cùng hướng, nên vẫn là đóng góp có ích.</a:t>
             </a:r>
           </a:p>
         </p:txBody>
@@ -5315,7 +5316,7 @@
                 </a:solidFill>
                 <a:latin typeface="Helvetica Neue"/>
               </a:rPr>
-              <a:t>MỘT CHỖ EM CÒN CHƯA CHẮC</a:t>
+              <a:t>ĐỀ TÀI TIẾP THEO</a:t>
             </a:r>
           </a:p>
         </p:txBody>
@@ -5396,7 +5397,7 @@
                 </a:solidFill>
                 <a:latin typeface="Georgia"/>
               </a:rPr>
-              <a:t>Và em đang chạy thí nghiệm để kiểm tra</a:t>
+              <a:t>Lỗi máy chấm phải phổ biến tới mức nào mới gây hại?</a:t>
             </a:r>
           </a:p>
         </p:txBody>
@@ -5409,7 +5410,7 @@
         </p:nvSpPr>
         <p:spPr>
           <a:xfrm>
-            <a:off x="800100" y="1620000"/>
+            <a:off x="800100" y="1600000"/>
             <a:ext cx="10591495" cy="700000"/>
           </a:xfrm>
           <a:prstGeom prst="rect">
@@ -5425,53 +5426,92 @@
           <a:p>
             <a:pPr algn="l">
               <a:lnSpc>
-                <a:spcPct val="140000"/>
+                <a:spcPct val="145000"/>
               </a:lnSpc>
               <a:spcAft>
                 <a:spcPts val="600"/>
               </a:spcAft>
             </a:pPr>
             <a:r>
-              <a:rPr sz="1400" b="0">
-                <a:solidFill>
-                  <a:srgbClr val="16161A"/>
-                </a:solidFill>
-                <a:latin typeface="Helvetica Neue"/>
-              </a:rPr>
-              <a:t>Cả 7 lần chạy, điểm đều tụt khoảng 3 điểm ngay ở vòng 1 rồi đứng yên. Nhưng mấy bài báo lớn</a:t>
+              <a:rPr sz="1350" b="0">
+                <a:solidFill>
+                  <a:srgbClr val="3F4149"/>
+                </a:solidFill>
+                <a:latin typeface="Helvetica Neue"/>
+              </a:rPr>
+              <a:t>Kết quả ba tuần qua cho một quy luật: tác động của lỗi máy chấm bằng mức nặng nhân tần suất.</a:t>
             </a:r>
           </a:p>
           <a:p>
             <a:pPr algn="l">
               <a:lnSpc>
-                <a:spcPct val="140000"/>
+                <a:spcPct val="145000"/>
               </a:lnSpc>
               <a:spcAft>
                 <a:spcPts val="600"/>
               </a:spcAft>
             </a:pPr>
             <a:r>
-              <a:rPr sz="1400" b="0">
-                <a:solidFill>
-                  <a:srgbClr val="16161A"/>
-                </a:solidFill>
-                <a:latin typeface="Helvetica Neue"/>
-              </a:rPr>
-              <a:t>về tự học đều báo là model KHÁ LÊN. Em chưa giải thích được vì sao của em ngược lại.</a:t>
-            </a:r>
-          </a:p>
-        </p:txBody>
-      </p:sp>
-      <p:sp>
-        <p:nvSpPr>
-          <p:cNvPr id="6" name="Rounded Rectangle 5"/>
+              <a:rPr sz="1350" b="0">
+                <a:solidFill>
+                  <a:srgbClr val="3F4149"/>
+                </a:solidFill>
+                <a:latin typeface="Helvetica Neue"/>
+              </a:rPr>
+              <a:t>Nhưng mới đo được một điểm trên quy luật đó — điểm mà tần suất quá thấp nên không thấy gì.</a:t>
+            </a:r>
+          </a:p>
+        </p:txBody>
+      </p:sp>
+      <p:sp>
+        <p:nvSpPr>
+          <p:cNvPr id="6" name="TextBox 5"/>
+          <p:cNvSpPr txBox="1"/>
+          <p:nvPr/>
+        </p:nvSpPr>
+        <p:spPr>
+          <a:xfrm>
+            <a:off x="800100" y="2500000"/>
+            <a:ext cx="10591495" cy="300000"/>
+          </a:xfrm>
+          <a:prstGeom prst="rect">
+            <a:avLst/>
+          </a:prstGeom>
+          <a:noFill/>
+        </p:spPr>
+        <p:txBody>
+          <a:bodyPr wrap="square" lIns="0" rIns="0" tIns="0" bIns="0">
+            <a:spAutoFit/>
+          </a:bodyPr>
+          <a:lstStyle/>
+          <a:p>
+            <a:pPr algn="l">
+              <a:spcAft>
+                <a:spcPts val="600"/>
+              </a:spcAft>
+            </a:pPr>
+            <a:r>
+              <a:rPr sz="1100" b="1">
+                <a:solidFill>
+                  <a:srgbClr val="8A8D96"/>
+                </a:solidFill>
+                <a:latin typeface="Helvetica Neue"/>
+              </a:rPr>
+              <a:t>CÁCH LÀM: giữ nguyên vòng lặp, chỉ đổi chỗ máy chấm bị lệch</a:t>
+            </a:r>
+          </a:p>
+        </p:txBody>
+      </p:sp>
+      <p:sp>
+        <p:nvSpPr>
+          <p:cNvPr id="7" name="Rounded Rectangle 6"/>
           <p:cNvSpPr/>
           <p:nvPr/>
         </p:nvSpPr>
         <p:spPr>
           <a:xfrm>
-            <a:off x="680100" y="2550000"/>
-            <a:ext cx="10831495" cy="900000"/>
+            <a:off x="800100" y="2920000"/>
+            <a:ext cx="5190000" cy="1850000"/>
           </a:xfrm>
           <a:prstGeom prst="roundRect">
             <a:avLst>
@@ -5510,122 +5550,22 @@
       </p:sp>
       <p:sp>
         <p:nvSpPr>
-          <p:cNvPr id="7" name="TextBox 6"/>
-          <p:cNvSpPr txBox="1"/>
-          <p:nvPr/>
-        </p:nvSpPr>
-        <p:spPr>
-          <a:xfrm>
-            <a:off x="920100" y="2720000"/>
-            <a:ext cx="10351495" cy="640000"/>
-          </a:xfrm>
-          <a:prstGeom prst="rect">
-            <a:avLst/>
-          </a:prstGeom>
-          <a:noFill/>
-        </p:spPr>
-        <p:txBody>
-          <a:bodyPr wrap="square" lIns="0" rIns="0" tIns="0" bIns="0">
-            <a:spAutoFit/>
-          </a:bodyPr>
-          <a:lstStyle/>
-          <a:p>
-            <a:pPr algn="l">
-              <a:lnSpc>
-                <a:spcPct val="145000"/>
-              </a:lnSpc>
-              <a:spcAft>
-                <a:spcPts val="600"/>
-              </a:spcAft>
-            </a:pPr>
-            <a:r>
-              <a:rPr sz="1250" b="0">
-                <a:solidFill>
-                  <a:srgbClr val="3F4149"/>
-                </a:solidFill>
-                <a:latin typeface="Helvetica Neue"/>
-              </a:rPr>
-              <a:t>Có một khả năng đơn giản mà em chưa loại trừ được: model này vốn đã được tinh chỉnh rất kỹ rồi.</a:t>
-            </a:r>
-          </a:p>
-          <a:p>
-            <a:pPr algn="l">
-              <a:lnSpc>
-                <a:spcPct val="145000"/>
-              </a:lnSpc>
-              <a:spcAft>
-                <a:spcPts val="600"/>
-              </a:spcAft>
-            </a:pPr>
-            <a:r>
-              <a:rPr sz="1250" b="0">
-                <a:solidFill>
-                  <a:srgbClr val="3F4149"/>
-                </a:solidFill>
-                <a:latin typeface="Helvetica Neue"/>
-              </a:rPr>
-              <a:t>Em dạy thêm một chút nữa có thể chỉ làm nó lệch khỏi trạng thái tốt sẵn có, bất kể em dạy bằng gì.</a:t>
-            </a:r>
-          </a:p>
-        </p:txBody>
-      </p:sp>
-      <p:sp>
-        <p:nvSpPr>
-          <p:cNvPr id="8" name="TextBox 7"/>
-          <p:cNvSpPr txBox="1"/>
-          <p:nvPr/>
-        </p:nvSpPr>
-        <p:spPr>
-          <a:xfrm>
-            <a:off x="800100" y="3720000"/>
-            <a:ext cx="10591495" cy="300000"/>
-          </a:xfrm>
-          <a:prstGeom prst="rect">
-            <a:avLst/>
-          </a:prstGeom>
-          <a:noFill/>
-        </p:spPr>
-        <p:txBody>
-          <a:bodyPr wrap="square" lIns="0" rIns="0" tIns="0" bIns="0">
-            <a:spAutoFit/>
-          </a:bodyPr>
-          <a:lstStyle/>
-          <a:p>
-            <a:pPr algn="l">
-              <a:spcAft>
-                <a:spcPts val="600"/>
-              </a:spcAft>
-            </a:pPr>
-            <a:r>
-              <a:rPr sz="1100" b="1">
-                <a:solidFill>
-                  <a:srgbClr val="8A8D96"/>
-                </a:solidFill>
-                <a:latin typeface="Helvetica Neue"/>
-              </a:rPr>
-              <a:t>EM SẼ THỬ: dạy bằng lời giải mẫu của sách, thay vì bài model tự làm</a:t>
-            </a:r>
-          </a:p>
-        </p:txBody>
-      </p:sp>
-      <p:sp>
-        <p:nvSpPr>
-          <p:cNvPr id="9" name="Rounded Rectangle 8"/>
+          <p:cNvPr id="8" name="Rounded Rectangle 7"/>
           <p:cNvSpPr/>
           <p:nvPr/>
         </p:nvSpPr>
         <p:spPr>
           <a:xfrm>
-            <a:off x="800100" y="4180000"/>
-            <a:ext cx="5190000" cy="1350000"/>
+            <a:off x="1060100" y="3100000"/>
+            <a:ext cx="1250000" cy="300000"/>
           </a:xfrm>
           <a:prstGeom prst="roundRect">
             <a:avLst>
-              <a:gd name="adj" fmla="val 4000"/>
+              <a:gd name="adj" fmla="val 50000"/>
             </a:avLst>
           </a:prstGeom>
           <a:solidFill>
-            <a:srgbClr val="F5F5F7"/>
+            <a:srgbClr val="8A8D96"/>
           </a:solidFill>
           <a:ln>
             <a:noFill/>
@@ -5647,31 +5587,179 @@
           </a:fontRef>
         </p:style>
         <p:txBody>
-          <a:bodyPr rtlCol="0" anchor="ctr"/>
+          <a:bodyPr rtlCol="0" anchor="ctr" wrap="none" lIns="0" rIns="0"/>
           <a:lstStyle/>
           <a:p>
             <a:pPr algn="ctr"/>
-          </a:p>
-        </p:txBody>
-      </p:sp>
-      <p:sp>
-        <p:nvSpPr>
-          <p:cNvPr id="10" name="Rounded Rectangle 9"/>
+            <a:r>
+              <a:rPr sz="1050" b="1">
+                <a:solidFill>
+                  <a:srgbClr val="FFFFFF"/>
+                </a:solidFill>
+                <a:latin typeface="Helvetica Neue"/>
+              </a:rPr>
+              <a:t>ĐÃ CHẠY</a:t>
+            </a:r>
+          </a:p>
+        </p:txBody>
+      </p:sp>
+      <p:sp>
+        <p:nvSpPr>
+          <p:cNvPr id="9" name="TextBox 8"/>
+          <p:cNvSpPr txBox="1"/>
+          <p:nvPr/>
+        </p:nvSpPr>
+        <p:spPr>
+          <a:xfrm>
+            <a:off x="1060100" y="3560000"/>
+            <a:ext cx="2400000" cy="400000"/>
+          </a:xfrm>
+          <a:prstGeom prst="rect">
+            <a:avLst/>
+          </a:prstGeom>
+          <a:noFill/>
+        </p:spPr>
+        <p:txBody>
+          <a:bodyPr wrap="square" lIns="0" rIns="0" tIns="0" bIns="0">
+            <a:spAutoFit/>
+          </a:bodyPr>
+          <a:lstStyle/>
+          <a:p>
+            <a:pPr algn="l">
+              <a:spcAft>
+                <a:spcPts val="600"/>
+              </a:spcAft>
+            </a:pPr>
+            <a:r>
+              <a:rPr sz="1900" b="0">
+                <a:solidFill>
+                  <a:srgbClr val="16161A"/>
+                </a:solidFill>
+                <a:latin typeface="Helvetica Neue"/>
+              </a:rPr>
+              <a:t>\dfrac</a:t>
+            </a:r>
+          </a:p>
+        </p:txBody>
+      </p:sp>
+      <p:sp>
+        <p:nvSpPr>
+          <p:cNvPr id="10" name="TextBox 9"/>
+          <p:cNvSpPr txBox="1"/>
+          <p:nvPr/>
+        </p:nvSpPr>
+        <p:spPr>
+          <a:xfrm>
+            <a:off x="3700100" y="3560000"/>
+            <a:ext cx="2100000" cy="400000"/>
+          </a:xfrm>
+          <a:prstGeom prst="rect">
+            <a:avLst/>
+          </a:prstGeom>
+          <a:noFill/>
+        </p:spPr>
+        <p:txBody>
+          <a:bodyPr wrap="square" lIns="0" rIns="0" tIns="0" bIns="0">
+            <a:spAutoFit/>
+          </a:bodyPr>
+          <a:lstStyle/>
+          <a:p>
+            <a:pPr algn="l">
+              <a:spcAft>
+                <a:spcPts val="600"/>
+              </a:spcAft>
+            </a:pPr>
+            <a:r>
+              <a:rPr sz="2600" b="1">
+                <a:solidFill>
+                  <a:srgbClr val="8A8D96"/>
+                </a:solidFill>
+                <a:latin typeface="Georgia"/>
+              </a:rPr>
+              <a:t>0,55%</a:t>
+            </a:r>
+          </a:p>
+        </p:txBody>
+      </p:sp>
+      <p:sp>
+        <p:nvSpPr>
+          <p:cNvPr id="11" name="TextBox 10"/>
+          <p:cNvSpPr txBox="1"/>
+          <p:nvPr/>
+        </p:nvSpPr>
+        <p:spPr>
+          <a:xfrm>
+            <a:off x="1060100" y="4120000"/>
+            <a:ext cx="4700000" cy="550000"/>
+          </a:xfrm>
+          <a:prstGeom prst="rect">
+            <a:avLst/>
+          </a:prstGeom>
+          <a:noFill/>
+        </p:spPr>
+        <p:txBody>
+          <a:bodyPr wrap="square" lIns="0" rIns="0" tIns="0" bIns="0">
+            <a:spAutoFit/>
+          </a:bodyPr>
+          <a:lstStyle/>
+          <a:p>
+            <a:pPr algn="l">
+              <a:lnSpc>
+                <a:spcPct val="130000"/>
+              </a:lnSpc>
+              <a:spcAft>
+                <a:spcPts val="600"/>
+              </a:spcAft>
+            </a:pPr>
+            <a:r>
+              <a:rPr sz="1200" b="0">
+                <a:solidFill>
+                  <a:srgbClr val="3F4149"/>
+                </a:solidFill>
+                <a:latin typeface="Helvetica Neue"/>
+              </a:rPr>
+              <a:t>Cách viết rất hiếm.</a:t>
+            </a:r>
+          </a:p>
+          <a:p>
+            <a:pPr algn="l">
+              <a:lnSpc>
+                <a:spcPct val="130000"/>
+              </a:lnSpc>
+              <a:spcAft>
+                <a:spcPts val="600"/>
+              </a:spcAft>
+            </a:pPr>
+            <a:r>
+              <a:rPr sz="1200" b="0">
+                <a:solidFill>
+                  <a:srgbClr val="3F4149"/>
+                </a:solidFill>
+                <a:latin typeface="Helvetica Neue"/>
+              </a:rPr>
+              <a:t>Không thấy ảnh hưởng gì.</a:t>
+            </a:r>
+          </a:p>
+        </p:txBody>
+      </p:sp>
+      <p:sp>
+        <p:nvSpPr>
+          <p:cNvPr id="12" name="Rounded Rectangle 11"/>
           <p:cNvSpPr/>
           <p:nvPr/>
         </p:nvSpPr>
         <p:spPr>
           <a:xfrm>
-            <a:off x="1040100" y="4360000"/>
-            <a:ext cx="1500000" cy="310000"/>
+            <a:off x="6200100" y="2920000"/>
+            <a:ext cx="5190000" cy="1850000"/>
           </a:xfrm>
           <a:prstGeom prst="roundRect">
             <a:avLst>
-              <a:gd name="adj" fmla="val 50000"/>
+              <a:gd name="adj" fmla="val 4000"/>
             </a:avLst>
           </a:prstGeom>
           <a:solidFill>
-            <a:srgbClr val="029E73"/>
+            <a:srgbClr val="F0F6FA"/>
           </a:solidFill>
           <a:ln>
             <a:noFill/>
@@ -5693,101 +5781,31 @@
           </a:fontRef>
         </p:style>
         <p:txBody>
-          <a:bodyPr rtlCol="0" anchor="ctr" wrap="none" lIns="0" rIns="0"/>
+          <a:bodyPr rtlCol="0" anchor="ctr"/>
           <a:lstStyle/>
           <a:p>
             <a:pPr algn="ctr"/>
-            <a:r>
-              <a:rPr sz="1050" b="1">
-                <a:solidFill>
-                  <a:srgbClr val="FFFFFF"/>
-                </a:solidFill>
-                <a:latin typeface="Helvetica Neue"/>
-              </a:rPr>
-              <a:t>Nếu khá lên</a:t>
-            </a:r>
-          </a:p>
-        </p:txBody>
-      </p:sp>
-      <p:sp>
-        <p:nvSpPr>
-          <p:cNvPr id="11" name="TextBox 10"/>
-          <p:cNvSpPr txBox="1"/>
-          <p:nvPr/>
-        </p:nvSpPr>
-        <p:spPr>
-          <a:xfrm>
-            <a:off x="1040100" y="4830000"/>
-            <a:ext cx="4700000" cy="600000"/>
-          </a:xfrm>
-          <a:prstGeom prst="rect">
-            <a:avLst/>
-          </a:prstGeom>
-          <a:noFill/>
-        </p:spPr>
-        <p:txBody>
-          <a:bodyPr wrap="square" lIns="0" rIns="0" tIns="0" bIns="0">
-            <a:spAutoFit/>
-          </a:bodyPr>
-          <a:lstStyle/>
-          <a:p>
-            <a:pPr algn="l">
-              <a:lnSpc>
-                <a:spcPct val="135000"/>
-              </a:lnSpc>
-              <a:spcAft>
-                <a:spcPts val="600"/>
-              </a:spcAft>
-            </a:pPr>
-            <a:r>
-              <a:rPr sz="1200" b="0">
-                <a:solidFill>
-                  <a:srgbClr val="3F4149"/>
-                </a:solidFill>
-                <a:latin typeface="Helvetica Neue"/>
-              </a:rPr>
-              <a:t>thì vòng lặp không sao, và cái hại đúng là</a:t>
-            </a:r>
-          </a:p>
-          <a:p>
-            <a:pPr algn="l">
-              <a:lnSpc>
-                <a:spcPct val="135000"/>
-              </a:lnSpc>
-              <a:spcAft>
-                <a:spcPts val="600"/>
-              </a:spcAft>
-            </a:pPr>
-            <a:r>
-              <a:rPr sz="1200" b="0">
-                <a:solidFill>
-                  <a:srgbClr val="3F4149"/>
-                </a:solidFill>
-                <a:latin typeface="Helvetica Neue"/>
-              </a:rPr>
-              <a:t>do model học từ bài của chính nó.</a:t>
-            </a:r>
-          </a:p>
-        </p:txBody>
-      </p:sp>
-      <p:sp>
-        <p:nvSpPr>
-          <p:cNvPr id="12" name="Rounded Rectangle 11"/>
+          </a:p>
+        </p:txBody>
+      </p:sp>
+      <p:sp>
+        <p:nvSpPr>
+          <p:cNvPr id="13" name="Rounded Rectangle 12"/>
           <p:cNvSpPr/>
           <p:nvPr/>
         </p:nvSpPr>
         <p:spPr>
           <a:xfrm>
-            <a:off x="6200100" y="4180000"/>
-            <a:ext cx="5190000" cy="1350000"/>
+            <a:off x="6460100" y="3100000"/>
+            <a:ext cx="1250000" cy="300000"/>
           </a:xfrm>
           <a:prstGeom prst="roundRect">
             <a:avLst>
-              <a:gd name="adj" fmla="val 4000"/>
+              <a:gd name="adj" fmla="val 50000"/>
             </a:avLst>
           </a:prstGeom>
           <a:solidFill>
-            <a:srgbClr val="F5F5F7"/>
+            <a:srgbClr val="0173B2"/>
           </a:solidFill>
           <a:ln>
             <a:noFill/>
@@ -5809,31 +5827,179 @@
           </a:fontRef>
         </p:style>
         <p:txBody>
-          <a:bodyPr rtlCol="0" anchor="ctr"/>
+          <a:bodyPr rtlCol="0" anchor="ctr" wrap="none" lIns="0" rIns="0"/>
           <a:lstStyle/>
           <a:p>
             <a:pPr algn="ctr"/>
-          </a:p>
-        </p:txBody>
-      </p:sp>
-      <p:sp>
-        <p:nvSpPr>
-          <p:cNvPr id="13" name="Rounded Rectangle 12"/>
+            <a:r>
+              <a:rPr sz="1050" b="1">
+                <a:solidFill>
+                  <a:srgbClr val="FFFFFF"/>
+                </a:solidFill>
+                <a:latin typeface="Helvetica Neue"/>
+              </a:rPr>
+              <a:t>SẼ CHẠY</a:t>
+            </a:r>
+          </a:p>
+        </p:txBody>
+      </p:sp>
+      <p:sp>
+        <p:nvSpPr>
+          <p:cNvPr id="14" name="TextBox 13"/>
+          <p:cNvSpPr txBox="1"/>
+          <p:nvPr/>
+        </p:nvSpPr>
+        <p:spPr>
+          <a:xfrm>
+            <a:off x="6460100" y="3560000"/>
+            <a:ext cx="2400000" cy="400000"/>
+          </a:xfrm>
+          <a:prstGeom prst="rect">
+            <a:avLst/>
+          </a:prstGeom>
+          <a:noFill/>
+        </p:spPr>
+        <p:txBody>
+          <a:bodyPr wrap="square" lIns="0" rIns="0" tIns="0" bIns="0">
+            <a:spAutoFit/>
+          </a:bodyPr>
+          <a:lstStyle/>
+          <a:p>
+            <a:pPr algn="l">
+              <a:spcAft>
+                <a:spcPts val="600"/>
+              </a:spcAft>
+            </a:pPr>
+            <a:r>
+              <a:rPr sz="1900" b="0">
+                <a:solidFill>
+                  <a:srgbClr val="16161A"/>
+                </a:solidFill>
+                <a:latin typeface="Helvetica Neue"/>
+              </a:rPr>
+              <a:t>\boxed</a:t>
+            </a:r>
+          </a:p>
+        </p:txBody>
+      </p:sp>
+      <p:sp>
+        <p:nvSpPr>
+          <p:cNvPr id="15" name="TextBox 14"/>
+          <p:cNvSpPr txBox="1"/>
+          <p:nvPr/>
+        </p:nvSpPr>
+        <p:spPr>
+          <a:xfrm>
+            <a:off x="9100100" y="3560000"/>
+            <a:ext cx="2100000" cy="400000"/>
+          </a:xfrm>
+          <a:prstGeom prst="rect">
+            <a:avLst/>
+          </a:prstGeom>
+          <a:noFill/>
+        </p:spPr>
+        <p:txBody>
+          <a:bodyPr wrap="square" lIns="0" rIns="0" tIns="0" bIns="0">
+            <a:spAutoFit/>
+          </a:bodyPr>
+          <a:lstStyle/>
+          <a:p>
+            <a:pPr algn="l">
+              <a:spcAft>
+                <a:spcPts val="600"/>
+              </a:spcAft>
+            </a:pPr>
+            <a:r>
+              <a:rPr sz="2600" b="1">
+                <a:solidFill>
+                  <a:srgbClr val="0173B2"/>
+                </a:solidFill>
+                <a:latin typeface="Georgia"/>
+              </a:rPr>
+              <a:t>51%</a:t>
+            </a:r>
+          </a:p>
+        </p:txBody>
+      </p:sp>
+      <p:sp>
+        <p:nvSpPr>
+          <p:cNvPr id="16" name="TextBox 15"/>
+          <p:cNvSpPr txBox="1"/>
+          <p:nvPr/>
+        </p:nvSpPr>
+        <p:spPr>
+          <a:xfrm>
+            <a:off x="6460100" y="4120000"/>
+            <a:ext cx="4700000" cy="550000"/>
+          </a:xfrm>
+          <a:prstGeom prst="rect">
+            <a:avLst/>
+          </a:prstGeom>
+          <a:noFill/>
+        </p:spPr>
+        <p:txBody>
+          <a:bodyPr wrap="square" lIns="0" rIns="0" tIns="0" bIns="0">
+            <a:spAutoFit/>
+          </a:bodyPr>
+          <a:lstStyle/>
+          <a:p>
+            <a:pPr algn="l">
+              <a:lnSpc>
+                <a:spcPct val="130000"/>
+              </a:lnSpc>
+              <a:spcAft>
+                <a:spcPts val="600"/>
+              </a:spcAft>
+            </a:pPr>
+            <a:r>
+              <a:rPr sz="1200" b="0">
+                <a:solidFill>
+                  <a:srgbClr val="3F4149"/>
+                </a:solidFill>
+                <a:latin typeface="Helvetica Neue"/>
+              </a:rPr>
+              <a:t>Cách viết model dùng thường xuyên.</a:t>
+            </a:r>
+          </a:p>
+          <a:p>
+            <a:pPr algn="l">
+              <a:lnSpc>
+                <a:spcPct val="130000"/>
+              </a:lnSpc>
+              <a:spcAft>
+                <a:spcPts val="600"/>
+              </a:spcAft>
+            </a:pPr>
+            <a:r>
+              <a:rPr sz="1200" b="0">
+                <a:solidFill>
+                  <a:srgbClr val="3F4149"/>
+                </a:solidFill>
+                <a:latin typeface="Helvetica Neue"/>
+              </a:rPr>
+              <a:t>Gấp khoảng 90 lần cách trên.</a:t>
+            </a:r>
+          </a:p>
+        </p:txBody>
+      </p:sp>
+      <p:sp>
+        <p:nvSpPr>
+          <p:cNvPr id="17" name="Rounded Rectangle 16"/>
           <p:cNvSpPr/>
           <p:nvPr/>
         </p:nvSpPr>
         <p:spPr>
           <a:xfrm>
-            <a:off x="6440100" y="4360000"/>
-            <a:ext cx="1500000" cy="310000"/>
+            <a:off x="680100" y="5000000"/>
+            <a:ext cx="10831495" cy="1180000"/>
           </a:xfrm>
           <a:prstGeom prst="roundRect">
             <a:avLst>
-              <a:gd name="adj" fmla="val 50000"/>
+              <a:gd name="adj" fmla="val 4000"/>
             </a:avLst>
           </a:prstGeom>
           <a:solidFill>
-            <a:srgbClr val="B85C00"/>
+            <a:srgbClr val="FDFAF0"/>
           </a:solidFill>
           <a:ln>
             <a:noFill/>
@@ -5855,32 +6021,23 @@
           </a:fontRef>
         </p:style>
         <p:txBody>
-          <a:bodyPr rtlCol="0" anchor="ctr" wrap="none" lIns="0" rIns="0"/>
+          <a:bodyPr rtlCol="0" anchor="ctr"/>
           <a:lstStyle/>
           <a:p>
             <a:pPr algn="ctr"/>
-            <a:r>
-              <a:rPr sz="1050" b="1">
-                <a:solidFill>
-                  <a:srgbClr val="FFFFFF"/>
-                </a:solidFill>
-                <a:latin typeface="Helvetica Neue"/>
-              </a:rPr>
-              <a:t>Nếu cũng tụt</a:t>
-            </a:r>
-          </a:p>
-        </p:txBody>
-      </p:sp>
-      <p:sp>
-        <p:nvSpPr>
-          <p:cNvPr id="14" name="TextBox 13"/>
-          <p:cNvSpPr txBox="1"/>
-          <p:nvPr/>
-        </p:nvSpPr>
-        <p:spPr>
-          <a:xfrm>
-            <a:off x="6440100" y="4830000"/>
-            <a:ext cx="4700000" cy="600000"/>
+          </a:p>
+        </p:txBody>
+      </p:sp>
+      <p:sp>
+        <p:nvSpPr>
+          <p:cNvPr id="18" name="TextBox 17"/>
+          <p:cNvSpPr txBox="1"/>
+          <p:nvPr/>
+        </p:nvSpPr>
+        <p:spPr>
+          <a:xfrm>
+            <a:off x="920100" y="5180000"/>
+            <a:ext cx="10351495" cy="850000"/>
           </a:xfrm>
           <a:prstGeom prst="rect">
             <a:avLst/>
@@ -5895,78 +6052,58 @@
           <a:p>
             <a:pPr algn="l">
               <a:lnSpc>
-                <a:spcPct val="135000"/>
+                <a:spcPct val="140000"/>
               </a:lnSpc>
               <a:spcAft>
                 <a:spcPts val="600"/>
               </a:spcAft>
             </a:pPr>
             <a:r>
-              <a:rPr sz="1200" b="0">
-                <a:solidFill>
-                  <a:srgbClr val="3F4149"/>
-                </a:solidFill>
-                <a:latin typeface="Helvetica Neue"/>
-              </a:rPr>
-              <a:t>thì cú tụt là do việc dạy thêm, không liên</a:t>
+              <a:rPr sz="1250" b="0">
+                <a:solidFill>
+                  <a:srgbClr val="16161A"/>
+                </a:solidFill>
+                <a:latin typeface="Helvetica Neue"/>
+              </a:rPr>
+              <a:t>Nếu bắt máy chấm gạch một cách viết phổ biến mà model bắt đầu tụt điểm, thì quy luật trên được</a:t>
             </a:r>
           </a:p>
           <a:p>
             <a:pPr algn="l">
               <a:lnSpc>
-                <a:spcPct val="135000"/>
+                <a:spcPct val="140000"/>
               </a:lnSpc>
               <a:spcAft>
                 <a:spcPts val="600"/>
               </a:spcAft>
             </a:pPr>
             <a:r>
-              <a:rPr sz="1200" b="0">
-                <a:solidFill>
-                  <a:srgbClr val="3F4149"/>
-                </a:solidFill>
-                <a:latin typeface="Helvetica Neue"/>
-              </a:rPr>
-              <a:t>quan tự học. Em phải sửa kết luận lần nữa.</a:t>
-            </a:r>
-          </a:p>
-        </p:txBody>
-      </p:sp>
-      <p:sp>
-        <p:nvSpPr>
-          <p:cNvPr id="15" name="TextBox 14"/>
-          <p:cNvSpPr txBox="1"/>
-          <p:nvPr/>
-        </p:nvSpPr>
-        <p:spPr>
-          <a:xfrm>
-            <a:off x="800100" y="5800000"/>
-            <a:ext cx="10591495" cy="300000"/>
-          </a:xfrm>
-          <a:prstGeom prst="rect">
-            <a:avLst/>
-          </a:prstGeom>
-          <a:noFill/>
-        </p:spPr>
-        <p:txBody>
-          <a:bodyPr wrap="square" lIns="0" rIns="0" tIns="0" bIns="0">
-            <a:spAutoFit/>
-          </a:bodyPr>
-          <a:lstStyle/>
-          <a:p>
-            <a:pPr algn="l">
-              <a:spcAft>
-                <a:spcPts val="600"/>
-              </a:spcAft>
-            </a:pPr>
-            <a:r>
-              <a:rPr sz="1050" b="0">
-                <a:solidFill>
-                  <a:srgbClr val="8A8D96"/>
-                </a:solidFill>
-                <a:latin typeface="Helvetica Neue"/>
-              </a:rPr>
-              <a:t>Code đã viết xong, đang chờ tới lượt GPU.</a:t>
+              <a:rPr sz="1250" b="0">
+                <a:solidFill>
+                  <a:srgbClr val="16161A"/>
+                </a:solidFill>
+                <a:latin typeface="Helvetica Neue"/>
+              </a:rPr>
+              <a:t>chứng minh bằng thực nghiệm, chứ không còn là lời giải thích cho một kết quả âm tính. Khi đó đề tài</a:t>
+            </a:r>
+          </a:p>
+          <a:p>
+            <a:pPr algn="l">
+              <a:lnSpc>
+                <a:spcPct val="140000"/>
+              </a:lnSpc>
+              <a:spcAft>
+                <a:spcPts val="600"/>
+              </a:spcAft>
+            </a:pPr>
+            <a:r>
+              <a:rPr sz="1250" b="0">
+                <a:solidFill>
+                  <a:srgbClr val="16161A"/>
+                </a:solidFill>
+                <a:latin typeface="Helvetica Neue"/>
+              </a:rPr>
+              <a:t>có một con số dùng được: lỗi máy chấm phải phổ biến tới ngưỡng nào thì mới đáng lo.</a:t>
             </a:r>
           </a:p>
         </p:txBody>
@@ -6023,7 +6160,7 @@
                 </a:solidFill>
                 <a:latin typeface="Helvetica Neue"/>
               </a:rPr>
-              <a:t>NHỮNG CHỖ CÒN YẾU</a:t>
+              <a:t>CÂU HỎI CHƯA TRẢ LỜI ĐƯỢC</a:t>
             </a:r>
           </a:p>
         </p:txBody>
@@ -6104,21 +6241,82 @@
                 </a:solidFill>
                 <a:latin typeface="Georgia"/>
               </a:rPr>
-              <a:t>Em xin nói trước</a:t>
-            </a:r>
-          </a:p>
-        </p:txBody>
-      </p:sp>
-      <p:sp>
-        <p:nvSpPr>
-          <p:cNvPr id="5" name="Rounded Rectangle 4"/>
+              <a:t>Thí nghiệm kiểm chứng đang chạy</a:t>
+            </a:r>
+          </a:p>
+        </p:txBody>
+      </p:sp>
+      <p:sp>
+        <p:nvSpPr>
+          <p:cNvPr id="5" name="TextBox 4"/>
+          <p:cNvSpPr txBox="1"/>
+          <p:nvPr/>
+        </p:nvSpPr>
+        <p:spPr>
+          <a:xfrm>
+            <a:off x="800100" y="1620000"/>
+            <a:ext cx="10591495" cy="700000"/>
+          </a:xfrm>
+          <a:prstGeom prst="rect">
+            <a:avLst/>
+          </a:prstGeom>
+          <a:noFill/>
+        </p:spPr>
+        <p:txBody>
+          <a:bodyPr wrap="square" lIns="0" rIns="0" tIns="0" bIns="0">
+            <a:spAutoFit/>
+          </a:bodyPr>
+          <a:lstStyle/>
+          <a:p>
+            <a:pPr algn="l">
+              <a:lnSpc>
+                <a:spcPct val="140000"/>
+              </a:lnSpc>
+              <a:spcAft>
+                <a:spcPts val="600"/>
+              </a:spcAft>
+            </a:pPr>
+            <a:r>
+              <a:rPr sz="1400" b="0">
+                <a:solidFill>
+                  <a:srgbClr val="16161A"/>
+                </a:solidFill>
+                <a:latin typeface="Helvetica Neue"/>
+              </a:rPr>
+              <a:t>Cả 7 lần chạy, điểm đều tụt khoảng 3 điểm ngay ở vòng 1 rồi đứng yên. Nhưng các công trình lớn</a:t>
+            </a:r>
+          </a:p>
+          <a:p>
+            <a:pPr algn="l">
+              <a:lnSpc>
+                <a:spcPct val="140000"/>
+              </a:lnSpc>
+              <a:spcAft>
+                <a:spcPts val="600"/>
+              </a:spcAft>
+            </a:pPr>
+            <a:r>
+              <a:rPr sz="1400" b="0">
+                <a:solidFill>
+                  <a:srgbClr val="16161A"/>
+                </a:solidFill>
+                <a:latin typeface="Helvetica Neue"/>
+              </a:rPr>
+              <a:t>về tự học đều báo cáo model KHÁ LÊN. Chưa giải thích được vì sao kết quả ở đây ngược lại.</a:t>
+            </a:r>
+          </a:p>
+        </p:txBody>
+      </p:sp>
+      <p:sp>
+        <p:nvSpPr>
+          <p:cNvPr id="6" name="Rounded Rectangle 5"/>
           <p:cNvSpPr/>
           <p:nvPr/>
         </p:nvSpPr>
         <p:spPr>
           <a:xfrm>
-            <a:off x="680100" y="2000000"/>
-            <a:ext cx="10831495" cy="1150000"/>
+            <a:off x="680100" y="2550000"/>
+            <a:ext cx="10831495" cy="900000"/>
           </a:xfrm>
           <a:prstGeom prst="roundRect">
             <a:avLst>
@@ -6157,78 +6355,61 @@
       </p:sp>
       <p:sp>
         <p:nvSpPr>
-          <p:cNvPr id="6" name="TextBox 5"/>
-          <p:cNvSpPr txBox="1"/>
-          <p:nvPr/>
-        </p:nvSpPr>
-        <p:spPr>
-          <a:xfrm>
-            <a:off x="920100" y="2200000"/>
-            <a:ext cx="400000" cy="300000"/>
-          </a:xfrm>
-          <a:prstGeom prst="rect">
-            <a:avLst/>
-          </a:prstGeom>
-          <a:noFill/>
-        </p:spPr>
-        <p:txBody>
-          <a:bodyPr wrap="square" lIns="0" rIns="0" tIns="0" bIns="0">
-            <a:spAutoFit/>
-          </a:bodyPr>
-          <a:lstStyle/>
-          <a:p>
-            <a:pPr algn="l">
-              <a:spcAft>
-                <a:spcPts val="600"/>
-              </a:spcAft>
-            </a:pPr>
-            <a:r>
-              <a:rPr sz="1300" b="1">
-                <a:solidFill>
-                  <a:srgbClr val="9E2B34"/>
-                </a:solidFill>
-                <a:latin typeface="Georgia"/>
-              </a:rPr>
-              <a:t>01</a:t>
-            </a:r>
-          </a:p>
-        </p:txBody>
-      </p:sp>
-      <p:sp>
-        <p:nvSpPr>
           <p:cNvPr id="7" name="TextBox 6"/>
           <p:cNvSpPr txBox="1"/>
           <p:nvPr/>
         </p:nvSpPr>
         <p:spPr>
           <a:xfrm>
-            <a:off x="1500100" y="2190000"/>
-            <a:ext cx="9500000" cy="300000"/>
-          </a:xfrm>
-          <a:prstGeom prst="rect">
-            <a:avLst/>
-          </a:prstGeom>
-          <a:noFill/>
-        </p:spPr>
-        <p:txBody>
-          <a:bodyPr wrap="square" lIns="0" rIns="0" tIns="0" bIns="0">
-            <a:spAutoFit/>
-          </a:bodyPr>
-          <a:lstStyle/>
-          <a:p>
-            <a:pPr algn="l">
-              <a:spcAft>
-                <a:spcPts val="600"/>
-              </a:spcAft>
-            </a:pPr>
-            <a:r>
-              <a:rPr sz="1400" b="1">
-                <a:solidFill>
-                  <a:srgbClr val="16161A"/>
-                </a:solidFill>
-                <a:latin typeface="Helvetica Neue"/>
-              </a:rPr>
-              <a:t>Đề thi chỉ có 150 đề</a:t>
+            <a:off x="920100" y="2720000"/>
+            <a:ext cx="10351495" cy="640000"/>
+          </a:xfrm>
+          <a:prstGeom prst="rect">
+            <a:avLst/>
+          </a:prstGeom>
+          <a:noFill/>
+        </p:spPr>
+        <p:txBody>
+          <a:bodyPr wrap="square" lIns="0" rIns="0" tIns="0" bIns="0">
+            <a:spAutoFit/>
+          </a:bodyPr>
+          <a:lstStyle/>
+          <a:p>
+            <a:pPr algn="l">
+              <a:lnSpc>
+                <a:spcPct val="145000"/>
+              </a:lnSpc>
+              <a:spcAft>
+                <a:spcPts val="600"/>
+              </a:spcAft>
+            </a:pPr>
+            <a:r>
+              <a:rPr sz="1250" b="0">
+                <a:solidFill>
+                  <a:srgbClr val="3F4149"/>
+                </a:solidFill>
+                <a:latin typeface="Helvetica Neue"/>
+              </a:rPr>
+              <a:t>Có một khả năng đơn giản chưa loại trừ được: model này vốn đã được tinh chỉnh rất kỹ. Dạy thêm</a:t>
+            </a:r>
+          </a:p>
+          <a:p>
+            <a:pPr algn="l">
+              <a:lnSpc>
+                <a:spcPct val="145000"/>
+              </a:lnSpc>
+              <a:spcAft>
+                <a:spcPts val="600"/>
+              </a:spcAft>
+            </a:pPr>
+            <a:r>
+              <a:rPr sz="1250" b="0">
+                <a:solidFill>
+                  <a:srgbClr val="3F4149"/>
+                </a:solidFill>
+                <a:latin typeface="Helvetica Neue"/>
+              </a:rPr>
+              <a:t>một lượng nhỏ có thể chỉ làm nó lệch khỏi trạng thái tốt sẵn có, bất kể dạy bằng dữ liệu gì.</a:t>
             </a:r>
           </a:p>
         </p:txBody>
@@ -6241,36 +6422,33 @@
         </p:nvSpPr>
         <p:spPr>
           <a:xfrm>
-            <a:off x="1500100" y="2600000"/>
-            <a:ext cx="9500000" cy="450000"/>
-          </a:xfrm>
-          <a:prstGeom prst="rect">
-            <a:avLst/>
-          </a:prstGeom>
-          <a:noFill/>
-        </p:spPr>
-        <p:txBody>
-          <a:bodyPr wrap="square" lIns="0" rIns="0" tIns="0" bIns="0">
-            <a:spAutoFit/>
-          </a:bodyPr>
-          <a:lstStyle/>
-          <a:p>
-            <a:pPr algn="l">
-              <a:lnSpc>
-                <a:spcPct val="130000"/>
-              </a:lnSpc>
-              <a:spcAft>
-                <a:spcPts val="600"/>
-              </a:spcAft>
-            </a:pPr>
-            <a:r>
-              <a:rPr sz="1200" b="0">
-                <a:solidFill>
-                  <a:srgbClr val="3F4149"/>
-                </a:solidFill>
-                <a:latin typeface="Helvetica Neue"/>
-              </a:rPr>
-              <a:t>Mỗi đề đáng 0,67 điểm. Chỉ cần đổi cách bốc đề thi thôi là điểm vòng 0 đã lệch 4,7 điểm, nhiều hơn cả cái em đang đo.</a:t>
+            <a:off x="800100" y="3720000"/>
+            <a:ext cx="10591495" cy="300000"/>
+          </a:xfrm>
+          <a:prstGeom prst="rect">
+            <a:avLst/>
+          </a:prstGeom>
+          <a:noFill/>
+        </p:spPr>
+        <p:txBody>
+          <a:bodyPr wrap="square" lIns="0" rIns="0" tIns="0" bIns="0">
+            <a:spAutoFit/>
+          </a:bodyPr>
+          <a:lstStyle/>
+          <a:p>
+            <a:pPr algn="l">
+              <a:spcAft>
+                <a:spcPts val="600"/>
+              </a:spcAft>
+            </a:pPr>
+            <a:r>
+              <a:rPr sz="1100" b="1">
+                <a:solidFill>
+                  <a:srgbClr val="8A8D96"/>
+                </a:solidFill>
+                <a:latin typeface="Helvetica Neue"/>
+              </a:rPr>
+              <a:t>THÍ NGHIỆM PHÂN ĐỊNH: dạy bằng lời giải mẫu của sách, thay vì bài model tự làm</a:t>
             </a:r>
           </a:p>
         </p:txBody>
@@ -6283,8 +6461,8 @@
         </p:nvSpPr>
         <p:spPr>
           <a:xfrm>
-            <a:off x="680100" y="3330000"/>
-            <a:ext cx="10831495" cy="1150000"/>
+            <a:off x="800100" y="4180000"/>
+            <a:ext cx="5190000" cy="1350000"/>
           </a:xfrm>
           <a:prstGeom prst="roundRect">
             <a:avLst>
@@ -6323,142 +6501,22 @@
       </p:sp>
       <p:sp>
         <p:nvSpPr>
-          <p:cNvPr id="10" name="TextBox 9"/>
-          <p:cNvSpPr txBox="1"/>
-          <p:nvPr/>
-        </p:nvSpPr>
-        <p:spPr>
-          <a:xfrm>
-            <a:off x="920100" y="3530000"/>
-            <a:ext cx="400000" cy="300000"/>
-          </a:xfrm>
-          <a:prstGeom prst="rect">
-            <a:avLst/>
-          </a:prstGeom>
-          <a:noFill/>
-        </p:spPr>
-        <p:txBody>
-          <a:bodyPr wrap="square" lIns="0" rIns="0" tIns="0" bIns="0">
-            <a:spAutoFit/>
-          </a:bodyPr>
-          <a:lstStyle/>
-          <a:p>
-            <a:pPr algn="l">
-              <a:spcAft>
-                <a:spcPts val="600"/>
-              </a:spcAft>
-            </a:pPr>
-            <a:r>
-              <a:rPr sz="1300" b="1">
-                <a:solidFill>
-                  <a:srgbClr val="9E2B34"/>
-                </a:solidFill>
-                <a:latin typeface="Georgia"/>
-              </a:rPr>
-              <a:t>02</a:t>
-            </a:r>
-          </a:p>
-        </p:txBody>
-      </p:sp>
-      <p:sp>
-        <p:nvSpPr>
-          <p:cNvPr id="11" name="TextBox 10"/>
-          <p:cNvSpPr txBox="1"/>
-          <p:nvPr/>
-        </p:nvSpPr>
-        <p:spPr>
-          <a:xfrm>
-            <a:off x="1500100" y="3520000"/>
-            <a:ext cx="9500000" cy="300000"/>
-          </a:xfrm>
-          <a:prstGeom prst="rect">
-            <a:avLst/>
-          </a:prstGeom>
-          <a:noFill/>
-        </p:spPr>
-        <p:txBody>
-          <a:bodyPr wrap="square" lIns="0" rIns="0" tIns="0" bIns="0">
-            <a:spAutoFit/>
-          </a:bodyPr>
-          <a:lstStyle/>
-          <a:p>
-            <a:pPr algn="l">
-              <a:spcAft>
-                <a:spcPts val="600"/>
-              </a:spcAft>
-            </a:pPr>
-            <a:r>
-              <a:rPr sz="1400" b="1">
-                <a:solidFill>
-                  <a:srgbClr val="16161A"/>
-                </a:solidFill>
-                <a:latin typeface="Helvetica Neue"/>
-              </a:rPr>
-              <a:t>Mỗi cấu hình mới chạy 2 lần</a:t>
-            </a:r>
-          </a:p>
-        </p:txBody>
-      </p:sp>
-      <p:sp>
-        <p:nvSpPr>
-          <p:cNvPr id="12" name="TextBox 11"/>
-          <p:cNvSpPr txBox="1"/>
-          <p:nvPr/>
-        </p:nvSpPr>
-        <p:spPr>
-          <a:xfrm>
-            <a:off x="1500100" y="3930000"/>
-            <a:ext cx="9500000" cy="450000"/>
-          </a:xfrm>
-          <a:prstGeom prst="rect">
-            <a:avLst/>
-          </a:prstGeom>
-          <a:noFill/>
-        </p:spPr>
-        <p:txBody>
-          <a:bodyPr wrap="square" lIns="0" rIns="0" tIns="0" bIns="0">
-            <a:spAutoFit/>
-          </a:bodyPr>
-          <a:lstStyle/>
-          <a:p>
-            <a:pPr algn="l">
-              <a:lnSpc>
-                <a:spcPct val="130000"/>
-              </a:lnSpc>
-              <a:spcAft>
-                <a:spcPts val="600"/>
-              </a:spcAft>
-            </a:pPr>
-            <a:r>
-              <a:rPr sz="1200" b="0">
-                <a:solidFill>
-                  <a:srgbClr val="3F4149"/>
-                </a:solidFill>
-                <a:latin typeface="Helvetica Neue"/>
-              </a:rPr>
-              <a:t>Riêng lần chạy C và mấy lần cũ thì mới 1 lần. Nên em chưa dám chắc về cú tụt 12,7 điểm của GSM8K.</a:t>
-            </a:r>
-          </a:p>
-        </p:txBody>
-      </p:sp>
-      <p:sp>
-        <p:nvSpPr>
-          <p:cNvPr id="13" name="Rounded Rectangle 12"/>
+          <p:cNvPr id="10" name="Rounded Rectangle 9"/>
           <p:cNvSpPr/>
           <p:nvPr/>
         </p:nvSpPr>
         <p:spPr>
           <a:xfrm>
-            <a:off x="680100" y="4660000"/>
-            <a:ext cx="10831495" cy="1150000"/>
+            <a:off x="1040100" y="4360000"/>
+            <a:ext cx="1500000" cy="310000"/>
           </a:xfrm>
           <a:prstGeom prst="roundRect">
             <a:avLst>
-              <a:gd name="adj" fmla="val 4000"/>
+              <a:gd name="adj" fmla="val 50000"/>
             </a:avLst>
           </a:prstGeom>
           <a:solidFill>
-            <a:srgbClr val="F5F5F7"/>
+            <a:srgbClr val="029E73"/>
           </a:solidFill>
           <a:ln>
             <a:noFill/>
@@ -6480,6 +6538,122 @@
           </a:fontRef>
         </p:style>
         <p:txBody>
+          <a:bodyPr rtlCol="0" anchor="ctr" wrap="none" lIns="0" rIns="0"/>
+          <a:lstStyle/>
+          <a:p>
+            <a:pPr algn="ctr"/>
+            <a:r>
+              <a:rPr sz="1050" b="1">
+                <a:solidFill>
+                  <a:srgbClr val="FFFFFF"/>
+                </a:solidFill>
+                <a:latin typeface="Helvetica Neue"/>
+              </a:rPr>
+              <a:t>Nếu khá lên</a:t>
+            </a:r>
+          </a:p>
+        </p:txBody>
+      </p:sp>
+      <p:sp>
+        <p:nvSpPr>
+          <p:cNvPr id="11" name="TextBox 10"/>
+          <p:cNvSpPr txBox="1"/>
+          <p:nvPr/>
+        </p:nvSpPr>
+        <p:spPr>
+          <a:xfrm>
+            <a:off x="1040100" y="4830000"/>
+            <a:ext cx="4700000" cy="600000"/>
+          </a:xfrm>
+          <a:prstGeom prst="rect">
+            <a:avLst/>
+          </a:prstGeom>
+          <a:noFill/>
+        </p:spPr>
+        <p:txBody>
+          <a:bodyPr wrap="square" lIns="0" rIns="0" tIns="0" bIns="0">
+            <a:spAutoFit/>
+          </a:bodyPr>
+          <a:lstStyle/>
+          <a:p>
+            <a:pPr algn="l">
+              <a:lnSpc>
+                <a:spcPct val="135000"/>
+              </a:lnSpc>
+              <a:spcAft>
+                <a:spcPts val="600"/>
+              </a:spcAft>
+            </a:pPr>
+            <a:r>
+              <a:rPr sz="1200" b="0">
+                <a:solidFill>
+                  <a:srgbClr val="3F4149"/>
+                </a:solidFill>
+                <a:latin typeface="Helvetica Neue"/>
+              </a:rPr>
+              <a:t>thì vòng lặp không sao, và cái hại đúng là</a:t>
+            </a:r>
+          </a:p>
+          <a:p>
+            <a:pPr algn="l">
+              <a:lnSpc>
+                <a:spcPct val="135000"/>
+              </a:lnSpc>
+              <a:spcAft>
+                <a:spcPts val="600"/>
+              </a:spcAft>
+            </a:pPr>
+            <a:r>
+              <a:rPr sz="1200" b="0">
+                <a:solidFill>
+                  <a:srgbClr val="3F4149"/>
+                </a:solidFill>
+                <a:latin typeface="Helvetica Neue"/>
+              </a:rPr>
+              <a:t>do model học từ bài của chính nó.</a:t>
+            </a:r>
+          </a:p>
+        </p:txBody>
+      </p:sp>
+      <p:sp>
+        <p:nvSpPr>
+          <p:cNvPr id="12" name="Rounded Rectangle 11"/>
+          <p:cNvSpPr/>
+          <p:nvPr/>
+        </p:nvSpPr>
+        <p:spPr>
+          <a:xfrm>
+            <a:off x="6200100" y="4180000"/>
+            <a:ext cx="5190000" cy="1350000"/>
+          </a:xfrm>
+          <a:prstGeom prst="roundRect">
+            <a:avLst>
+              <a:gd name="adj" fmla="val 4000"/>
+            </a:avLst>
+          </a:prstGeom>
+          <a:solidFill>
+            <a:srgbClr val="F5F5F7"/>
+          </a:solidFill>
+          <a:ln>
+            <a:noFill/>
+          </a:ln>
+          <a:effectLst/>
+        </p:spPr>
+        <p:style>
+          <a:lnRef idx="1">
+            <a:schemeClr val="accent1"/>
+          </a:lnRef>
+          <a:fillRef idx="3">
+            <a:schemeClr val="accent1"/>
+          </a:fillRef>
+          <a:effectRef idx="2">
+            <a:schemeClr val="accent1"/>
+          </a:effectRef>
+          <a:fontRef idx="minor">
+            <a:schemeClr val="lt1"/>
+          </a:fontRef>
+        </p:style>
+        <p:txBody>
           <a:bodyPr rtlCol="0" anchor="ctr"/>
           <a:lstStyle/>
           <a:p>
@@ -6489,39 +6663,116 @@
       </p:sp>
       <p:sp>
         <p:nvSpPr>
+          <p:cNvPr id="13" name="Rounded Rectangle 12"/>
+          <p:cNvSpPr/>
+          <p:nvPr/>
+        </p:nvSpPr>
+        <p:spPr>
+          <a:xfrm>
+            <a:off x="6440100" y="4360000"/>
+            <a:ext cx="1500000" cy="310000"/>
+          </a:xfrm>
+          <a:prstGeom prst="roundRect">
+            <a:avLst>
+              <a:gd name="adj" fmla="val 50000"/>
+            </a:avLst>
+          </a:prstGeom>
+          <a:solidFill>
+            <a:srgbClr val="B85C00"/>
+          </a:solidFill>
+          <a:ln>
+            <a:noFill/>
+          </a:ln>
+          <a:effectLst/>
+        </p:spPr>
+        <p:style>
+          <a:lnRef idx="1">
+            <a:schemeClr val="accent1"/>
+          </a:lnRef>
+          <a:fillRef idx="3">
+            <a:schemeClr val="accent1"/>
+          </a:fillRef>
+          <a:effectRef idx="2">
+            <a:schemeClr val="accent1"/>
+          </a:effectRef>
+          <a:fontRef idx="minor">
+            <a:schemeClr val="lt1"/>
+          </a:fontRef>
+        </p:style>
+        <p:txBody>
+          <a:bodyPr rtlCol="0" anchor="ctr" wrap="none" lIns="0" rIns="0"/>
+          <a:lstStyle/>
+          <a:p>
+            <a:pPr algn="ctr"/>
+            <a:r>
+              <a:rPr sz="1050" b="1">
+                <a:solidFill>
+                  <a:srgbClr val="FFFFFF"/>
+                </a:solidFill>
+                <a:latin typeface="Helvetica Neue"/>
+              </a:rPr>
+              <a:t>Nếu cũng tụt</a:t>
+            </a:r>
+          </a:p>
+        </p:txBody>
+      </p:sp>
+      <p:sp>
+        <p:nvSpPr>
           <p:cNvPr id="14" name="TextBox 13"/>
           <p:cNvSpPr txBox="1"/>
           <p:nvPr/>
         </p:nvSpPr>
         <p:spPr>
           <a:xfrm>
-            <a:off x="920100" y="4860000"/>
-            <a:ext cx="400000" cy="300000"/>
-          </a:xfrm>
-          <a:prstGeom prst="rect">
-            <a:avLst/>
-          </a:prstGeom>
-          <a:noFill/>
-        </p:spPr>
-        <p:txBody>
-          <a:bodyPr wrap="square" lIns="0" rIns="0" tIns="0" bIns="0">
-            <a:spAutoFit/>
-          </a:bodyPr>
-          <a:lstStyle/>
-          <a:p>
-            <a:pPr algn="l">
-              <a:spcAft>
-                <a:spcPts val="600"/>
-              </a:spcAft>
-            </a:pPr>
-            <a:r>
-              <a:rPr sz="1300" b="1">
-                <a:solidFill>
-                  <a:srgbClr val="9E2B34"/>
-                </a:solidFill>
-                <a:latin typeface="Georgia"/>
-              </a:rPr>
-              <a:t>03</a:t>
+            <a:off x="6440100" y="4830000"/>
+            <a:ext cx="4700000" cy="600000"/>
+          </a:xfrm>
+          <a:prstGeom prst="rect">
+            <a:avLst/>
+          </a:prstGeom>
+          <a:noFill/>
+        </p:spPr>
+        <p:txBody>
+          <a:bodyPr wrap="square" lIns="0" rIns="0" tIns="0" bIns="0">
+            <a:spAutoFit/>
+          </a:bodyPr>
+          <a:lstStyle/>
+          <a:p>
+            <a:pPr algn="l">
+              <a:lnSpc>
+                <a:spcPct val="135000"/>
+              </a:lnSpc>
+              <a:spcAft>
+                <a:spcPts val="600"/>
+              </a:spcAft>
+            </a:pPr>
+            <a:r>
+              <a:rPr sz="1200" b="0">
+                <a:solidFill>
+                  <a:srgbClr val="3F4149"/>
+                </a:solidFill>
+                <a:latin typeface="Helvetica Neue"/>
+              </a:rPr>
+              <a:t>thì cú tụt là do việc dạy thêm, không liên</a:t>
+            </a:r>
+          </a:p>
+          <a:p>
+            <a:pPr algn="l">
+              <a:lnSpc>
+                <a:spcPct val="135000"/>
+              </a:lnSpc>
+              <a:spcAft>
+                <a:spcPts val="600"/>
+              </a:spcAft>
+            </a:pPr>
+            <a:r>
+              <a:rPr sz="1200" b="0">
+                <a:solidFill>
+                  <a:srgbClr val="3F4149"/>
+                </a:solidFill>
+                <a:latin typeface="Helvetica Neue"/>
+              </a:rPr>
+              <a:t>quan tự học. Kết luận phải sửa lần nữa.</a:t>
             </a:r>
           </a:p>
         </p:txBody>
@@ -6534,75 +6785,33 @@
         </p:nvSpPr>
         <p:spPr>
           <a:xfrm>
-            <a:off x="1500100" y="4850000"/>
-            <a:ext cx="9500000" cy="300000"/>
-          </a:xfrm>
-          <a:prstGeom prst="rect">
-            <a:avLst/>
-          </a:prstGeom>
-          <a:noFill/>
-        </p:spPr>
-        <p:txBody>
-          <a:bodyPr wrap="square" lIns="0" rIns="0" tIns="0" bIns="0">
-            <a:spAutoFit/>
-          </a:bodyPr>
-          <a:lstStyle/>
-          <a:p>
-            <a:pPr algn="l">
-              <a:spcAft>
-                <a:spcPts val="600"/>
-              </a:spcAft>
-            </a:pPr>
-            <a:r>
-              <a:rPr sz="1400" b="1">
-                <a:solidFill>
-                  <a:srgbClr val="16161A"/>
-                </a:solidFill>
-                <a:latin typeface="Helvetica Neue"/>
-              </a:rPr>
-              <a:t>Lần chạy mới khác lần cũ ba chỗ</a:t>
-            </a:r>
-          </a:p>
-        </p:txBody>
-      </p:sp>
-      <p:sp>
-        <p:nvSpPr>
-          <p:cNvPr id="16" name="TextBox 15"/>
-          <p:cNvSpPr txBox="1"/>
-          <p:nvPr/>
-        </p:nvSpPr>
-        <p:spPr>
-          <a:xfrm>
-            <a:off x="1500100" y="5260000"/>
-            <a:ext cx="9500000" cy="450000"/>
-          </a:xfrm>
-          <a:prstGeom prst="rect">
-            <a:avLst/>
-          </a:prstGeom>
-          <a:noFill/>
-        </p:spPr>
-        <p:txBody>
-          <a:bodyPr wrap="square" lIns="0" rIns="0" tIns="0" bIns="0">
-            <a:spAutoFit/>
-          </a:bodyPr>
-          <a:lstStyle/>
-          <a:p>
-            <a:pPr algn="l">
-              <a:lnSpc>
-                <a:spcPct val="130000"/>
-              </a:lnSpc>
-              <a:spcAft>
-                <a:spcPts val="600"/>
-              </a:spcAft>
-            </a:pPr>
-            <a:r>
-              <a:rPr sz="1200" b="0">
-                <a:solidFill>
-                  <a:srgbClr val="3F4149"/>
-                </a:solidFill>
-                <a:latin typeface="Helvetica Neue"/>
-              </a:rPr>
-              <a:t>Bỏ gộp bộ đề, thêm đề thi riêng, và giảm số đề. Nên em chỉ dám kết luận dựa trên so sánh A với B, vì hai lần đó chỉ khác nhau một chỗ.</a:t>
+            <a:off x="800100" y="5800000"/>
+            <a:ext cx="10591495" cy="300000"/>
+          </a:xfrm>
+          <a:prstGeom prst="rect">
+            <a:avLst/>
+          </a:prstGeom>
+          <a:noFill/>
+        </p:spPr>
+        <p:txBody>
+          <a:bodyPr wrap="square" lIns="0" rIns="0" tIns="0" bIns="0">
+            <a:spAutoFit/>
+          </a:bodyPr>
+          <a:lstStyle/>
+          <a:p>
+            <a:pPr algn="l">
+              <a:spcAft>
+                <a:spcPts val="600"/>
+              </a:spcAft>
+            </a:pPr>
+            <a:r>
+              <a:rPr sz="1050" b="0">
+                <a:solidFill>
+                  <a:srgbClr val="8A8D96"/>
+                </a:solidFill>
+                <a:latin typeface="Helvetica Neue"/>
+              </a:rPr>
+              <a:t>Phần code đã hoàn tất, đang chờ tới lượt GPU.</a:t>
             </a:r>
           </a:p>
         </p:txBody>
@@ -6659,7 +6868,7 @@
                 </a:solidFill>
                 <a:latin typeface="Helvetica Neue"/>
               </a:rPr>
-              <a:t>TÓM TẮT</a:t>
+              <a:t>HẠN CHẾ</a:t>
             </a:r>
           </a:p>
         </p:txBody>
@@ -6740,7 +6949,7 @@
                 </a:solidFill>
                 <a:latin typeface="Georgia"/>
               </a:rPr>
-              <a:t>Ba tuần vừa rồi, và việc sắp tới</a:t>
+              <a:t>Ba điểm cần lưu ý khi đọc kết quả</a:t>
             </a:r>
           </a:p>
         </p:txBody>
@@ -6753,8 +6962,8 @@
         </p:nvSpPr>
         <p:spPr>
           <a:xfrm>
-            <a:off x="680100" y="1900000"/>
-            <a:ext cx="10831495" cy="1460000"/>
+            <a:off x="680100" y="2000000"/>
+            <a:ext cx="10831495" cy="1150000"/>
           </a:xfrm>
           <a:prstGeom prst="roundRect">
             <a:avLst>
@@ -6762,7 +6971,7 @@
             </a:avLst>
           </a:prstGeom>
           <a:solidFill>
-            <a:srgbClr val="F0F6FA"/>
+            <a:srgbClr val="F5F5F7"/>
           </a:solidFill>
           <a:ln>
             <a:noFill/>
@@ -6799,6 +7008,642 @@
         </p:nvSpPr>
         <p:spPr>
           <a:xfrm>
+            <a:off x="920100" y="2200000"/>
+            <a:ext cx="400000" cy="300000"/>
+          </a:xfrm>
+          <a:prstGeom prst="rect">
+            <a:avLst/>
+          </a:prstGeom>
+          <a:noFill/>
+        </p:spPr>
+        <p:txBody>
+          <a:bodyPr wrap="square" lIns="0" rIns="0" tIns="0" bIns="0">
+            <a:spAutoFit/>
+          </a:bodyPr>
+          <a:lstStyle/>
+          <a:p>
+            <a:pPr algn="l">
+              <a:spcAft>
+                <a:spcPts val="600"/>
+              </a:spcAft>
+            </a:pPr>
+            <a:r>
+              <a:rPr sz="1300" b="1">
+                <a:solidFill>
+                  <a:srgbClr val="9E2B34"/>
+                </a:solidFill>
+                <a:latin typeface="Georgia"/>
+              </a:rPr>
+              <a:t>01</a:t>
+            </a:r>
+          </a:p>
+        </p:txBody>
+      </p:sp>
+      <p:sp>
+        <p:nvSpPr>
+          <p:cNvPr id="7" name="TextBox 6"/>
+          <p:cNvSpPr txBox="1"/>
+          <p:nvPr/>
+        </p:nvSpPr>
+        <p:spPr>
+          <a:xfrm>
+            <a:off x="1500100" y="2190000"/>
+            <a:ext cx="9500000" cy="300000"/>
+          </a:xfrm>
+          <a:prstGeom prst="rect">
+            <a:avLst/>
+          </a:prstGeom>
+          <a:noFill/>
+        </p:spPr>
+        <p:txBody>
+          <a:bodyPr wrap="square" lIns="0" rIns="0" tIns="0" bIns="0">
+            <a:spAutoFit/>
+          </a:bodyPr>
+          <a:lstStyle/>
+          <a:p>
+            <a:pPr algn="l">
+              <a:spcAft>
+                <a:spcPts val="600"/>
+              </a:spcAft>
+            </a:pPr>
+            <a:r>
+              <a:rPr sz="1400" b="1">
+                <a:solidFill>
+                  <a:srgbClr val="16161A"/>
+                </a:solidFill>
+                <a:latin typeface="Helvetica Neue"/>
+              </a:rPr>
+              <a:t>Đề thi chỉ có 150 đề</a:t>
+            </a:r>
+          </a:p>
+        </p:txBody>
+      </p:sp>
+      <p:sp>
+        <p:nvSpPr>
+          <p:cNvPr id="8" name="TextBox 7"/>
+          <p:cNvSpPr txBox="1"/>
+          <p:nvPr/>
+        </p:nvSpPr>
+        <p:spPr>
+          <a:xfrm>
+            <a:off x="1500100" y="2600000"/>
+            <a:ext cx="9500000" cy="450000"/>
+          </a:xfrm>
+          <a:prstGeom prst="rect">
+            <a:avLst/>
+          </a:prstGeom>
+          <a:noFill/>
+        </p:spPr>
+        <p:txBody>
+          <a:bodyPr wrap="square" lIns="0" rIns="0" tIns="0" bIns="0">
+            <a:spAutoFit/>
+          </a:bodyPr>
+          <a:lstStyle/>
+          <a:p>
+            <a:pPr algn="l">
+              <a:lnSpc>
+                <a:spcPct val="130000"/>
+              </a:lnSpc>
+              <a:spcAft>
+                <a:spcPts val="600"/>
+              </a:spcAft>
+            </a:pPr>
+            <a:r>
+              <a:rPr sz="1200" b="0">
+                <a:solidFill>
+                  <a:srgbClr val="3F4149"/>
+                </a:solidFill>
+                <a:latin typeface="Helvetica Neue"/>
+              </a:rPr>
+              <a:t>Mỗi đề đáng 0,67 điểm. Chỉ đổi cách bốc đề thi thôi là điểm vòng 0 đã lệch 4,7 điểm, lớn hơn cả hiệu ứng đang đo.</a:t>
+            </a:r>
+          </a:p>
+        </p:txBody>
+      </p:sp>
+      <p:sp>
+        <p:nvSpPr>
+          <p:cNvPr id="9" name="Rounded Rectangle 8"/>
+          <p:cNvSpPr/>
+          <p:nvPr/>
+        </p:nvSpPr>
+        <p:spPr>
+          <a:xfrm>
+            <a:off x="680100" y="3330000"/>
+            <a:ext cx="10831495" cy="1150000"/>
+          </a:xfrm>
+          <a:prstGeom prst="roundRect">
+            <a:avLst>
+              <a:gd name="adj" fmla="val 4000"/>
+            </a:avLst>
+          </a:prstGeom>
+          <a:solidFill>
+            <a:srgbClr val="F5F5F7"/>
+          </a:solidFill>
+          <a:ln>
+            <a:noFill/>
+          </a:ln>
+          <a:effectLst/>
+        </p:spPr>
+        <p:style>
+          <a:lnRef idx="1">
+            <a:schemeClr val="accent1"/>
+          </a:lnRef>
+          <a:fillRef idx="3">
+            <a:schemeClr val="accent1"/>
+          </a:fillRef>
+          <a:effectRef idx="2">
+            <a:schemeClr val="accent1"/>
+          </a:effectRef>
+          <a:fontRef idx="minor">
+            <a:schemeClr val="lt1"/>
+          </a:fontRef>
+        </p:style>
+        <p:txBody>
+          <a:bodyPr rtlCol="0" anchor="ctr"/>
+          <a:lstStyle/>
+          <a:p>
+            <a:pPr algn="ctr"/>
+          </a:p>
+        </p:txBody>
+      </p:sp>
+      <p:sp>
+        <p:nvSpPr>
+          <p:cNvPr id="10" name="TextBox 9"/>
+          <p:cNvSpPr txBox="1"/>
+          <p:nvPr/>
+        </p:nvSpPr>
+        <p:spPr>
+          <a:xfrm>
+            <a:off x="920100" y="3530000"/>
+            <a:ext cx="400000" cy="300000"/>
+          </a:xfrm>
+          <a:prstGeom prst="rect">
+            <a:avLst/>
+          </a:prstGeom>
+          <a:noFill/>
+        </p:spPr>
+        <p:txBody>
+          <a:bodyPr wrap="square" lIns="0" rIns="0" tIns="0" bIns="0">
+            <a:spAutoFit/>
+          </a:bodyPr>
+          <a:lstStyle/>
+          <a:p>
+            <a:pPr algn="l">
+              <a:spcAft>
+                <a:spcPts val="600"/>
+              </a:spcAft>
+            </a:pPr>
+            <a:r>
+              <a:rPr sz="1300" b="1">
+                <a:solidFill>
+                  <a:srgbClr val="9E2B34"/>
+                </a:solidFill>
+                <a:latin typeface="Georgia"/>
+              </a:rPr>
+              <a:t>02</a:t>
+            </a:r>
+          </a:p>
+        </p:txBody>
+      </p:sp>
+      <p:sp>
+        <p:nvSpPr>
+          <p:cNvPr id="11" name="TextBox 10"/>
+          <p:cNvSpPr txBox="1"/>
+          <p:nvPr/>
+        </p:nvSpPr>
+        <p:spPr>
+          <a:xfrm>
+            <a:off x="1500100" y="3520000"/>
+            <a:ext cx="9500000" cy="300000"/>
+          </a:xfrm>
+          <a:prstGeom prst="rect">
+            <a:avLst/>
+          </a:prstGeom>
+          <a:noFill/>
+        </p:spPr>
+        <p:txBody>
+          <a:bodyPr wrap="square" lIns="0" rIns="0" tIns="0" bIns="0">
+            <a:spAutoFit/>
+          </a:bodyPr>
+          <a:lstStyle/>
+          <a:p>
+            <a:pPr algn="l">
+              <a:spcAft>
+                <a:spcPts val="600"/>
+              </a:spcAft>
+            </a:pPr>
+            <a:r>
+              <a:rPr sz="1400" b="1">
+                <a:solidFill>
+                  <a:srgbClr val="16161A"/>
+                </a:solidFill>
+                <a:latin typeface="Helvetica Neue"/>
+              </a:rPr>
+              <a:t>Mỗi cấu hình mới chạy 2 lần</a:t>
+            </a:r>
+          </a:p>
+        </p:txBody>
+      </p:sp>
+      <p:sp>
+        <p:nvSpPr>
+          <p:cNvPr id="12" name="TextBox 11"/>
+          <p:cNvSpPr txBox="1"/>
+          <p:nvPr/>
+        </p:nvSpPr>
+        <p:spPr>
+          <a:xfrm>
+            <a:off x="1500100" y="3930000"/>
+            <a:ext cx="9500000" cy="450000"/>
+          </a:xfrm>
+          <a:prstGeom prst="rect">
+            <a:avLst/>
+          </a:prstGeom>
+          <a:noFill/>
+        </p:spPr>
+        <p:txBody>
+          <a:bodyPr wrap="square" lIns="0" rIns="0" tIns="0" bIns="0">
+            <a:spAutoFit/>
+          </a:bodyPr>
+          <a:lstStyle/>
+          <a:p>
+            <a:pPr algn="l">
+              <a:lnSpc>
+                <a:spcPct val="130000"/>
+              </a:lnSpc>
+              <a:spcAft>
+                <a:spcPts val="600"/>
+              </a:spcAft>
+            </a:pPr>
+            <a:r>
+              <a:rPr sz="1200" b="0">
+                <a:solidFill>
+                  <a:srgbClr val="3F4149"/>
+                </a:solidFill>
+                <a:latin typeface="Helvetica Neue"/>
+              </a:rPr>
+              <a:t>Riêng lần chạy C và các lần chạy cũ mới có 1 lần. Chưa đủ cơ sở để khẳng định về cú tụt 12,7 điểm của GSM8K.</a:t>
+            </a:r>
+          </a:p>
+        </p:txBody>
+      </p:sp>
+      <p:sp>
+        <p:nvSpPr>
+          <p:cNvPr id="13" name="Rounded Rectangle 12"/>
+          <p:cNvSpPr/>
+          <p:nvPr/>
+        </p:nvSpPr>
+        <p:spPr>
+          <a:xfrm>
+            <a:off x="680100" y="4660000"/>
+            <a:ext cx="10831495" cy="1150000"/>
+          </a:xfrm>
+          <a:prstGeom prst="roundRect">
+            <a:avLst>
+              <a:gd name="adj" fmla="val 4000"/>
+            </a:avLst>
+          </a:prstGeom>
+          <a:solidFill>
+            <a:srgbClr val="F5F5F7"/>
+          </a:solidFill>
+          <a:ln>
+            <a:noFill/>
+          </a:ln>
+          <a:effectLst/>
+        </p:spPr>
+        <p:style>
+          <a:lnRef idx="1">
+            <a:schemeClr val="accent1"/>
+          </a:lnRef>
+          <a:fillRef idx="3">
+            <a:schemeClr val="accent1"/>
+          </a:fillRef>
+          <a:effectRef idx="2">
+            <a:schemeClr val="accent1"/>
+          </a:effectRef>
+          <a:fontRef idx="minor">
+            <a:schemeClr val="lt1"/>
+          </a:fontRef>
+        </p:style>
+        <p:txBody>
+          <a:bodyPr rtlCol="0" anchor="ctr"/>
+          <a:lstStyle/>
+          <a:p>
+            <a:pPr algn="ctr"/>
+          </a:p>
+        </p:txBody>
+      </p:sp>
+      <p:sp>
+        <p:nvSpPr>
+          <p:cNvPr id="14" name="TextBox 13"/>
+          <p:cNvSpPr txBox="1"/>
+          <p:nvPr/>
+        </p:nvSpPr>
+        <p:spPr>
+          <a:xfrm>
+            <a:off x="920100" y="4860000"/>
+            <a:ext cx="400000" cy="300000"/>
+          </a:xfrm>
+          <a:prstGeom prst="rect">
+            <a:avLst/>
+          </a:prstGeom>
+          <a:noFill/>
+        </p:spPr>
+        <p:txBody>
+          <a:bodyPr wrap="square" lIns="0" rIns="0" tIns="0" bIns="0">
+            <a:spAutoFit/>
+          </a:bodyPr>
+          <a:lstStyle/>
+          <a:p>
+            <a:pPr algn="l">
+              <a:spcAft>
+                <a:spcPts val="600"/>
+              </a:spcAft>
+            </a:pPr>
+            <a:r>
+              <a:rPr sz="1300" b="1">
+                <a:solidFill>
+                  <a:srgbClr val="9E2B34"/>
+                </a:solidFill>
+                <a:latin typeface="Georgia"/>
+              </a:rPr>
+              <a:t>03</a:t>
+            </a:r>
+          </a:p>
+        </p:txBody>
+      </p:sp>
+      <p:sp>
+        <p:nvSpPr>
+          <p:cNvPr id="15" name="TextBox 14"/>
+          <p:cNvSpPr txBox="1"/>
+          <p:nvPr/>
+        </p:nvSpPr>
+        <p:spPr>
+          <a:xfrm>
+            <a:off x="1500100" y="4850000"/>
+            <a:ext cx="9500000" cy="300000"/>
+          </a:xfrm>
+          <a:prstGeom prst="rect">
+            <a:avLst/>
+          </a:prstGeom>
+          <a:noFill/>
+        </p:spPr>
+        <p:txBody>
+          <a:bodyPr wrap="square" lIns="0" rIns="0" tIns="0" bIns="0">
+            <a:spAutoFit/>
+          </a:bodyPr>
+          <a:lstStyle/>
+          <a:p>
+            <a:pPr algn="l">
+              <a:spcAft>
+                <a:spcPts val="600"/>
+              </a:spcAft>
+            </a:pPr>
+            <a:r>
+              <a:rPr sz="1400" b="1">
+                <a:solidFill>
+                  <a:srgbClr val="16161A"/>
+                </a:solidFill>
+                <a:latin typeface="Helvetica Neue"/>
+              </a:rPr>
+              <a:t>Lần chạy mới khác lần cũ ba chỗ</a:t>
+            </a:r>
+          </a:p>
+        </p:txBody>
+      </p:sp>
+      <p:sp>
+        <p:nvSpPr>
+          <p:cNvPr id="16" name="TextBox 15"/>
+          <p:cNvSpPr txBox="1"/>
+          <p:nvPr/>
+        </p:nvSpPr>
+        <p:spPr>
+          <a:xfrm>
+            <a:off x="1500100" y="5260000"/>
+            <a:ext cx="9500000" cy="450000"/>
+          </a:xfrm>
+          <a:prstGeom prst="rect">
+            <a:avLst/>
+          </a:prstGeom>
+          <a:noFill/>
+        </p:spPr>
+        <p:txBody>
+          <a:bodyPr wrap="square" lIns="0" rIns="0" tIns="0" bIns="0">
+            <a:spAutoFit/>
+          </a:bodyPr>
+          <a:lstStyle/>
+          <a:p>
+            <a:pPr algn="l">
+              <a:lnSpc>
+                <a:spcPct val="130000"/>
+              </a:lnSpc>
+              <a:spcAft>
+                <a:spcPts val="600"/>
+              </a:spcAft>
+            </a:pPr>
+            <a:r>
+              <a:rPr sz="1200" b="0">
+                <a:solidFill>
+                  <a:srgbClr val="3F4149"/>
+                </a:solidFill>
+                <a:latin typeface="Helvetica Neue"/>
+              </a:rPr>
+              <a:t>Bỏ gộp bộ đề, thêm đề thi riêng, giảm số đề. Nên kết luận chỉ dựa trên so sánh A với B, vì hai lần chạy đó chỉ khác nhau đúng một biến.</a:t>
+            </a:r>
+          </a:p>
+        </p:txBody>
+      </p:sp>
+    </p:spTree>
+  </p:cSld>
+  <p:clrMapOvr>
+    <a:masterClrMapping/>
+  </p:clrMapOvr>
+</p:sld>
+</file>
+
+<file path=ppt/slides/slide17.xml><?xml version="1.0" encoding="utf-8"?>
+<p:sld xmlns:a="http://schemas.openxmlformats.org/drawingml/2006/main" xmlns:p="http://schemas.openxmlformats.org/presentationml/2006/main" xmlns:r="http://schemas.openxmlformats.org/officeDocument/2006/relationships">
+  <p:cSld>
+    <p:spTree>
+      <p:nvGrpSpPr>
+        <p:cNvPr id="1" name=""/>
+        <p:cNvGrpSpPr/>
+        <p:nvPr/>
+      </p:nvGrpSpPr>
+      <p:grpSpPr/>
+      <p:sp>
+        <p:nvSpPr>
+          <p:cNvPr id="2" name="TextBox 1"/>
+          <p:cNvSpPr txBox="1"/>
+          <p:nvPr/>
+        </p:nvSpPr>
+        <p:spPr>
+          <a:xfrm>
+            <a:off x="800100" y="430000"/>
+            <a:ext cx="7000000" cy="250000"/>
+          </a:xfrm>
+          <a:prstGeom prst="rect">
+            <a:avLst/>
+          </a:prstGeom>
+          <a:noFill/>
+        </p:spPr>
+        <p:txBody>
+          <a:bodyPr wrap="square" lIns="0" rIns="0" tIns="0" bIns="0">
+            <a:spAutoFit/>
+          </a:bodyPr>
+          <a:lstStyle/>
+          <a:p>
+            <a:pPr algn="l">
+              <a:spcAft>
+                <a:spcPts val="600"/>
+              </a:spcAft>
+            </a:pPr>
+            <a:r>
+              <a:rPr sz="1050" b="1">
+                <a:solidFill>
+                  <a:srgbClr val="9E2B34"/>
+                </a:solidFill>
+                <a:latin typeface="Helvetica Neue"/>
+              </a:rPr>
+              <a:t>TÓM TẮT</a:t>
+            </a:r>
+          </a:p>
+        </p:txBody>
+      </p:sp>
+      <p:sp>
+        <p:nvSpPr>
+          <p:cNvPr id="3" name="TextBox 2"/>
+          <p:cNvSpPr txBox="1"/>
+          <p:nvPr/>
+        </p:nvSpPr>
+        <p:spPr>
+          <a:xfrm>
+            <a:off x="10491595" y="400000"/>
+            <a:ext cx="900000" cy="400000"/>
+          </a:xfrm>
+          <a:prstGeom prst="rect">
+            <a:avLst/>
+          </a:prstGeom>
+          <a:noFill/>
+        </p:spPr>
+        <p:txBody>
+          <a:bodyPr wrap="square" lIns="0" rIns="0" tIns="0" bIns="0">
+            <a:spAutoFit/>
+          </a:bodyPr>
+          <a:lstStyle/>
+          <a:p>
+            <a:pPr algn="r">
+              <a:spcAft>
+                <a:spcPts val="600"/>
+              </a:spcAft>
+            </a:pPr>
+            <a:r>
+              <a:rPr sz="1500" b="1">
+                <a:solidFill>
+                  <a:srgbClr val="E6E6EA"/>
+                </a:solidFill>
+                <a:latin typeface="Georgia"/>
+              </a:rPr>
+              <a:t>15</a:t>
+            </a:r>
+          </a:p>
+        </p:txBody>
+      </p:sp>
+      <p:sp>
+        <p:nvSpPr>
+          <p:cNvPr id="4" name="TextBox 3"/>
+          <p:cNvSpPr txBox="1"/>
+          <p:nvPr/>
+        </p:nvSpPr>
+        <p:spPr>
+          <a:xfrm>
+            <a:off x="800100" y="790000"/>
+            <a:ext cx="10591495" cy="620000"/>
+          </a:xfrm>
+          <a:prstGeom prst="rect">
+            <a:avLst/>
+          </a:prstGeom>
+          <a:noFill/>
+        </p:spPr>
+        <p:txBody>
+          <a:bodyPr wrap="square" lIns="0" rIns="0" tIns="0" bIns="0">
+            <a:spAutoFit/>
+          </a:bodyPr>
+          <a:lstStyle/>
+          <a:p>
+            <a:pPr algn="l">
+              <a:lnSpc>
+                <a:spcPct val="105000"/>
+              </a:lnSpc>
+              <a:spcAft>
+                <a:spcPts val="600"/>
+              </a:spcAft>
+            </a:pPr>
+            <a:r>
+              <a:rPr sz="2900" b="1">
+                <a:solidFill>
+                  <a:srgbClr val="16161A"/>
+                </a:solidFill>
+                <a:latin typeface="Georgia"/>
+              </a:rPr>
+              <a:t>Kết quả ba tuần và hướng tiếp theo</a:t>
+            </a:r>
+          </a:p>
+        </p:txBody>
+      </p:sp>
+      <p:sp>
+        <p:nvSpPr>
+          <p:cNvPr id="5" name="Rounded Rectangle 4"/>
+          <p:cNvSpPr/>
+          <p:nvPr/>
+        </p:nvSpPr>
+        <p:spPr>
+          <a:xfrm>
+            <a:off x="680100" y="1900000"/>
+            <a:ext cx="10831495" cy="1460000"/>
+          </a:xfrm>
+          <a:prstGeom prst="roundRect">
+            <a:avLst>
+              <a:gd name="adj" fmla="val 4000"/>
+            </a:avLst>
+          </a:prstGeom>
+          <a:solidFill>
+            <a:srgbClr val="F0F6FA"/>
+          </a:solidFill>
+          <a:ln>
+            <a:noFill/>
+          </a:ln>
+          <a:effectLst/>
+        </p:spPr>
+        <p:style>
+          <a:lnRef idx="1">
+            <a:schemeClr val="accent1"/>
+          </a:lnRef>
+          <a:fillRef idx="3">
+            <a:schemeClr val="accent1"/>
+          </a:fillRef>
+          <a:effectRef idx="2">
+            <a:schemeClr val="accent1"/>
+          </a:effectRef>
+          <a:fontRef idx="minor">
+            <a:schemeClr val="lt1"/>
+          </a:fontRef>
+        </p:style>
+        <p:txBody>
+          <a:bodyPr rtlCol="0" anchor="ctr"/>
+          <a:lstStyle/>
+          <a:p>
+            <a:pPr algn="ctr"/>
+          </a:p>
+        </p:txBody>
+      </p:sp>
+      <p:sp>
+        <p:nvSpPr>
+          <p:cNvPr id="6" name="TextBox 5"/>
+          <p:cNvSpPr txBox="1"/>
+          <p:nvPr/>
+        </p:nvSpPr>
+        <p:spPr>
+          <a:xfrm>
             <a:off x="920100" y="2100000"/>
             <a:ext cx="10351495" cy="1100000"/>
           </a:xfrm>
@@ -6828,7 +7673,7 @@
                 </a:solidFill>
                 <a:latin typeface="Georgia"/>
               </a:rPr>
-              <a:t>Em dựng một thí nghiệm để kiểm tra giả thuyết của chính mình, và nó cho thấy em sai.</a:t>
+              <a:t>Thí nghiệm đối chứng cho thấy giả thuyết ban đầu không đúng. Nguyên nhân đã xác định được:</a:t>
             </a:r>
           </a:p>
           <a:p>
@@ -6847,7 +7692,7 @@
                 </a:solidFill>
                 <a:latin typeface="Georgia"/>
               </a:rPr>
-              <a:t>Lý do em cũng tìm ra: lỗi của máy chấm tuy nặng nhưng chỉ xảy ra ở 0,55% số bài.</a:t>
+              <a:t>lỗi của máy chấm tuy nặng nhưng chỉ xảy ra ở 0,55% số bài.</a:t>
             </a:r>
           </a:p>
           <a:p>
@@ -6866,7 +7711,7 @@
                 </a:solidFill>
                 <a:latin typeface="Georgia"/>
               </a:rPr>
-              <a:t>Đề tài chuyển sang cảnh báo về cách đo, nhỏ hơn nhưng em chắc chắn.</a:t>
+              <a:t>Đề tài chuyển sang cảnh báo về thiết kế đo — hẹp hơn, nhưng có cơ sở vững.</a:t>
             </a:r>
           </a:p>
         </p:txBody>
@@ -6944,7 +7789,7 @@
                 </a:solidFill>
                 <a:latin typeface="Helvetica Neue"/>
               </a:rPr>
-              <a:t>7 lần chạy, khoảng 40 giờ GPU. Tìm ra lỗi trong cách đo và sửa lại.</a:t>
+              <a:t>7 lần chạy, khoảng 40 giờ GPU. Phát hiện lỗi trong thiết kế đo và sửa lại.</a:t>
             </a:r>
           </a:p>
         </p:txBody>
@@ -7022,7 +7867,7 @@
                 </a:solidFill>
                 <a:latin typeface="Helvetica Neue"/>
               </a:rPr>
-              <a:t>Giả thuyết ban đầu không đúng, và em đo được vì sao nó không đúng.</a:t>
+              <a:t>Giả thuyết ban đầu không đúng, và đo được nguyên nhân vì sao.</a:t>
             </a:r>
           </a:p>
         </p:txBody>
@@ -7178,7 +8023,7 @@
                 </a:solidFill>
                 <a:latin typeface="Helvetica Neue"/>
               </a:rPr>
-              <a:t>Chạy lặp thêm cho chắc, rồi viết lại bài báo theo kết luận mới.</a:t>
+              <a:t>Thí nghiệm điều khiển tần suất lỗi, để tìm ngưỡng gây hại.</a:t>
             </a:r>
           </a:p>
         </p:txBody>
@@ -7252,7 +8097,7 @@
                 </a:solidFill>
                 <a:latin typeface="Helvetica Neue"/>
               </a:rPr>
-              <a:t>Em cảm ơn thầy. Mong thầy góp ý giúp em.</a:t>
+              <a:t>Cảm ơn đã theo dõi. Rất mong nhận được góp ý.</a:t>
             </a:r>
           </a:p>
         </p:txBody>
@@ -7390,7 +8235,7 @@
                 </a:solidFill>
                 <a:latin typeface="Georgia"/>
               </a:rPr>
-              <a:t>Em sẽ trình bày theo thứ tự này</a:t>
+              <a:t>Thứ tự trình bày</a:t>
             </a:r>
           </a:p>
         </p:txBody>
@@ -7468,7 +8313,7 @@
                 </a:solidFill>
                 <a:latin typeface="Helvetica Neue"/>
               </a:rPr>
-              <a:t>Đề tài của em là gì</a:t>
+              <a:t>Bối cảnh đề tài</a:t>
             </a:r>
           </a:p>
         </p:txBody>
@@ -7507,7 +8352,7 @@
                 </a:solidFill>
                 <a:latin typeface="Helvetica Neue"/>
               </a:rPr>
-              <a:t>và một vòng thí nghiệm chạy ra sao</a:t>
+              <a:t>và quy trình một vòng thí nghiệm</a:t>
             </a:r>
           </a:p>
         </p:txBody>
@@ -7620,7 +8465,7 @@
                 </a:solidFill>
                 <a:latin typeface="Helvetica Neue"/>
               </a:rPr>
-              <a:t>Máy chấm sai ở chỗ nào</a:t>
+              <a:t>Lỗi của máy chấm</a:t>
             </a:r>
           </a:p>
         </p:txBody>
@@ -7659,7 +8504,7 @@
                 </a:solidFill>
                 <a:latin typeface="Helvetica Neue"/>
               </a:rPr>
-              <a:t>em đo được trước khi chạy</a:t>
+              <a:t>đo được trước khi chạy thí nghiệm</a:t>
             </a:r>
           </a:p>
         </p:txBody>
@@ -7772,7 +8617,7 @@
                 </a:solidFill>
                 <a:latin typeface="Helvetica Neue"/>
               </a:rPr>
-              <a:t>Tuần 1 và tuần 2</a:t>
+              <a:t>Kết quả tuần 1 và tuần 2</a:t>
             </a:r>
           </a:p>
         </p:txBody>
@@ -7811,7 +8656,7 @@
                 </a:solidFill>
                 <a:latin typeface="Helvetica Neue"/>
               </a:rPr>
-              <a:t>chạy thật, và cả hai model đều tụt điểm</a:t>
+              <a:t>cả hai model đều tụt điểm</a:t>
             </a:r>
           </a:p>
         </p:txBody>
@@ -7924,7 +8769,7 @@
                 </a:solidFill>
                 <a:latin typeface="Helvetica Neue"/>
               </a:rPr>
-              <a:t>Chỗ em thấy không ổn</a:t>
+              <a:t>Vấn đề trong thiết kế</a:t>
             </a:r>
           </a:p>
         </p:txBody>
@@ -7963,7 +8808,7 @@
                 </a:solidFill>
                 <a:latin typeface="Helvetica Neue"/>
               </a:rPr>
-              <a:t>cách đo của em có hai lỗi</a:t>
+              <a:t>hai lỗi khiến số liệu không dùng được</a:t>
             </a:r>
           </a:p>
         </p:txBody>
@@ -8076,7 +8921,7 @@
                 </a:solidFill>
                 <a:latin typeface="Helvetica Neue"/>
               </a:rPr>
-              <a:t>Đo lại cho đúng</a:t>
+              <a:t>Thí nghiệm làm lại</a:t>
             </a:r>
           </a:p>
         </p:txBody>
@@ -8228,7 +9073,7 @@
                 </a:solidFill>
                 <a:latin typeface="Helvetica Neue"/>
               </a:rPr>
-              <a:t>Vì sao lại như vậy</a:t>
+              <a:t>Nguyên nhân và đề tài tiếp theo</a:t>
             </a:r>
           </a:p>
         </p:txBody>
@@ -8267,7 +9112,7 @@
                 </a:solidFill>
                 <a:latin typeface="Helvetica Neue"/>
               </a:rPr>
-              <a:t>và đề tài đi tiếp thế nào</a:t>
+              <a:t>hướng nghiên cứu sau khi điều chỉnh</a:t>
             </a:r>
           </a:p>
         </p:txBody>
@@ -8692,7 +9537,7 @@
                 </a:solidFill>
                 <a:latin typeface="Georgia"/>
               </a:rPr>
-              <a:t>Máy chấm của em có sai, và sai theo một quy luật cố định. Vậy sau nhiều vòng tự học,</a:t>
+              <a:t>Máy chấm có sai, và sai theo một quy luật cố định.</a:t>
             </a:r>
           </a:p>
           <a:p>
@@ -8711,7 +9556,7 @@
                 </a:solidFill>
                 <a:latin typeface="Georgia"/>
               </a:rPr>
-              <a:t>model có bị dở đi không?</a:t>
+              <a:t>Sau nhiều vòng tự học, model có bị dở đi không?</a:t>
             </a:r>
           </a:p>
         </p:txBody>
@@ -9481,7 +10326,7 @@
                 </a:solidFill>
                 <a:latin typeface="Helvetica Neue"/>
               </a:rPr>
-              <a:t>Mỗi vòng em dạy lại từ model gốc, chỉ bằng những bài của vòng trước. Nên nếu máy chấm bỏ sót</a:t>
+              <a:t>Mỗi vòng dạy lại từ model gốc, chỉ bằng bài của vòng trước. Nên nếu máy chấm bỏ sót một kiểu</a:t>
             </a:r>
           </a:p>
           <a:p>
@@ -9500,7 +10345,7 @@
                 </a:solidFill>
                 <a:latin typeface="Helvetica Neue"/>
               </a:rPr>
-              <a:t>một kiểu bài nào đó, thì vòng sau model càng ít gặp kiểu bài đó. Vòng sau nữa lại càng ít hơn.</a:t>
+              <a:t>bài nào đó, vòng sau model càng ít gặp kiểu bài đó. Vòng sau nữa lại càng ít hơn.</a:t>
             </a:r>
           </a:p>
         </p:txBody>
@@ -9588,7 +10433,7 @@
                 </a:solidFill>
                 <a:latin typeface="Helvetica Neue"/>
               </a:rPr>
-              <a:t>Hai con số em dùng để đo suốt bài:</a:t>
+              <a:t>Hai chỉ số dùng xuyên suốt:</a:t>
             </a:r>
           </a:p>
           <a:p>
@@ -9934,7 +10779,7 @@
                 </a:solidFill>
                 <a:latin typeface="Helvetica Neue"/>
               </a:rPr>
-              <a:t>Em kiểm tra tay 128 bài đúng trên MATH-500: máy gạch nhầm 10 bài, tức 7,8%. Trên GSM8K thì không gạch nhầm bài nào.</a:t>
+              <a:t>Kiểm tra tay 128 bài làm đúng trên MATH-500: máy gạch nhầm 10 bài, tức 7,8%. Trên GSM8K không gạch nhầm bài nào.</a:t>
             </a:r>
           </a:p>
         </p:txBody>
@@ -10072,7 +10917,7 @@
                 </a:solidFill>
                 <a:latin typeface="Georgia"/>
               </a:rPr>
-              <a:t>Lần chạy đầu tiên, model nhỏ</a:t>
+              <a:t>Lần chạy đầu tiên trên model nhỏ</a:t>
             </a:r>
           </a:p>
         </p:txBody>
@@ -10111,7 +10956,7 @@
                 </a:solidFill>
                 <a:latin typeface="Helvetica Neue"/>
               </a:rPr>
-              <a:t>Em chạy model Qwen 0.5B, 500 đề mỗi bộ, 5 vòng, trên GPU của Kaggle.</a:t>
+              <a:t>Cấu hình: Qwen 0.5B, 500 đề mỗi bộ, 5 vòng, chạy trên GPU của Kaggle.</a:t>
             </a:r>
           </a:p>
         </p:txBody>
@@ -10479,7 +11324,7 @@
                 </a:solidFill>
                 <a:latin typeface="Helvetica Neue"/>
               </a:rPr>
-              <a:t>Cả hai con số đều tụt. Em thấy vậy là khớp với điều mình nghĩ: máy chấm gạch nhầm bài đúng,</a:t>
+              <a:t>Cả hai chỉ số đều tụt, khớp với giả thuyết: máy chấm gạch nhầm bài đúng, model học thiếu nên</a:t>
             </a:r>
           </a:p>
           <a:p>
@@ -10498,7 +11343,7 @@
                 </a:solidFill>
                 <a:latin typeface="Helvetica Neue"/>
               </a:rPr>
-              <a:t>model học thiếu, nên dở đi. Nhưng model này nhỏ, mức tụt cũng ít, nên em chưa dám chắc.</a:t>
+              <a:t>dở đi. Nhưng model này nhỏ và mức tụt cũng ít, chưa đủ cơ sở để kết luận.</a:t>
             </a:r>
           </a:p>
         </p:txBody>
@@ -10583,7 +11428,7 @@
                 </a:solidFill>
                 <a:latin typeface="Helvetica Neue"/>
               </a:rPr>
-              <a:t>Nên tuần 2 em chạy lại với model to gấp ba, xem hiện tượng có rõ hơn không.</a:t>
+              <a:t>Tuần 2 chạy lại với model to gấp ba, để xem hiện tượng có rõ hơn không.</a:t>
             </a:r>
           </a:p>
         </p:txBody>
@@ -11694,7 +12539,7 @@
                 </a:solidFill>
                 <a:latin typeface="Helvetica Neue"/>
               </a:rPr>
-              <a:t>Model 1.5B tụt rất sâu, vòng nào cũng tụt, không vòng nào gượng lại. Đến đây em gần như tin chắc</a:t>
+              <a:t>Model 1.5B tụt rất sâu, vòng nào cũng tụt, không vòng nào gượng lại. Đến đây giả thuyết ban đầu</a:t>
             </a:r>
           </a:p>
           <a:p>
@@ -11713,7 +12558,7 @@
                 </a:solidFill>
                 <a:latin typeface="Helvetica Neue"/>
               </a:rPr>
-              <a:t>là giả thuyết của mình đúng.</a:t>
+              <a:t>gần như đã được xác nhận.</a:t>
             </a:r>
           </a:p>
         </p:txBody>
@@ -11801,7 +12646,7 @@
                 </a:solidFill>
                 <a:latin typeface="Helvetica Neue"/>
               </a:rPr>
-              <a:t>Nhưng có một chỗ em thấy lạ: bộ GSM8K lại tụt nhiều nhất.</a:t>
+              <a:t>Nhưng có một điểm bất thường: GSM8K lại tụt nhiều nhất.</a:t>
             </a:r>
           </a:p>
           <a:p>
@@ -11820,7 +12665,7 @@
                 </a:solidFill>
                 <a:latin typeface="Helvetica Neue"/>
               </a:rPr>
-              <a:t>Mà GSM8K là bộ máy chấm gần như không gạch nhầm bài nào.</a:t>
+              <a:t>Mà GSM8K chính là bộ máy chấm gần như không gạch nhầm bài nào.</a:t>
             </a:r>
           </a:p>
         </p:txBody>
@@ -11877,7 +12722,7 @@
                 </a:solidFill>
                 <a:latin typeface="Helvetica Neue"/>
               </a:rPr>
-              <a:t>CHỖ EM THẤY KHÔNG ỔN</a:t>
+              <a:t>VẤN ĐỀ TRONG THIẾT KẾ</a:t>
             </a:r>
           </a:p>
         </p:txBody>
@@ -11958,7 +12803,7 @@
                 </a:solidFill>
                 <a:latin typeface="Georgia"/>
               </a:rPr>
-              <a:t>Cách đo của em có hai lỗi</a:t>
+              <a:t>Thiết kế đo có hai lỗi</a:t>
             </a:r>
           </a:p>
         </p:txBody>
@@ -11997,7 +12842,7 @@
                 </a:solidFill>
                 <a:latin typeface="Helvetica Neue"/>
               </a:rPr>
-              <a:t>LỖI 1 — em gộp hai bộ đề lại rồi dạy chung một lần</a:t>
+              <a:t>LỖI 1 — hai bộ đề bị gộp chung trong cùng một lần dạy</a:t>
             </a:r>
           </a:p>
         </p:txBody>
@@ -13110,7 +13955,7 @@
                 </a:solidFill>
                 <a:latin typeface="Helvetica Neue"/>
               </a:rPr>
-              <a:t>xảy ra bên GSM8K. Em không tách được hai thứ đó ra khỏi nhau.</a:t>
+              <a:t>xảy ra bên GSM8K. Không tách được hai yếu tố này ra khỏi nhau.</a:t>
             </a:r>
           </a:p>
         </p:txBody>
@@ -13198,7 +14043,7 @@
                 </a:solidFill>
                 <a:latin typeface="Helvetica Neue"/>
               </a:rPr>
-              <a:t>LỖI 2 — em chấm điểm trên chính những đề đã dùng để chọn bài dạy.</a:t>
+              <a:t>LỖI 2 — chấm điểm trên chính những đề đã dùng để chọn bài dạy.</a:t>
             </a:r>
           </a:p>
           <a:p>
@@ -13217,7 +14062,7 @@
                 </a:solidFill>
                 <a:latin typeface="Helvetica Neue"/>
               </a:rPr>
-              <a:t>Nên điểm tụt có thể chỉ là model quên bài cũ, chứ không phải nó dở đi thật.</a:t>
+              <a:t>Nên điểm tụt có thể chỉ là model quên bài cũ, chứ chưa chắc năng lực giảm thật.</a:t>
             </a:r>
           </a:p>
         </p:txBody>
@@ -13274,7 +14119,7 @@
                 </a:solidFill>
                 <a:latin typeface="Helvetica Neue"/>
               </a:rPr>
-              <a:t>ĐO LẠI CHO ĐÚNG</a:t>
+              <a:t>THÍ NGHIỆM LÀM LẠI</a:t>
             </a:r>
           </a:p>
         </p:txBody>
@@ -13397,7 +14242,7 @@
                 </a:solidFill>
                 <a:latin typeface="Helvetica Neue"/>
               </a:rPr>
-              <a:t>Mỗi lần chỉ chạy một bộ đề. Giữ riêng 30% số đề làm đề thi, chưa từng cho model học.</a:t>
+              <a:t>Mỗi lần chỉ chạy một bộ đề. Giữ riêng 30% số đề làm đề thi, model chưa từng được học.</a:t>
             </a:r>
           </a:p>
         </p:txBody>
@@ -14841,7 +15686,7 @@
                 </a:solidFill>
                 <a:latin typeface="Helvetica Neue"/>
               </a:rPr>
-              <a:t>A và B giống hệt nhau, chỉ khác đúng một chỗ: B em đã sửa lỗi của máy chấm.</a:t>
+              <a:t>A và B giống hệt nhau, chỉ khác đúng một chỗ: ở B, lỗi của máy chấm đã được sửa.</a:t>
             </a:r>
           </a:p>
           <a:p>
@@ -14860,7 +15705,7 @@
                 </a:solidFill>
                 <a:latin typeface="Helvetica Neue"/>
               </a:rPr>
-              <a:t>Nếu giả thuyết của em đúng thì B phải khá hơn A rõ rệt.</a:t>
+              <a:t>Nếu giả thuyết ban đầu đúng thì B phải khá hơn A rõ rệt.</a:t>
             </a:r>
           </a:p>
         </p:txBody>

--- a/BaoCaoTienDo_Tuan1-3_52300057_52300006.pptx
+++ b/BaoCaoTienDo_Tuan1-3_52300057_52300006.pptx
@@ -22,6 +22,7 @@
     <p:sldId id="270" r:id="rId21"/>
     <p:sldId id="271" r:id="rId22"/>
     <p:sldId id="272" r:id="rId23"/>
+    <p:sldId id="273" r:id="rId24"/>
   </p:sldIdLst>
   <p:sldSz cx="12191695" cy="6858000" type="screen4x3"/>
   <p:notesSz cx="6858000" cy="9144000"/>
@@ -5316,7 +5317,7 @@
                 </a:solidFill>
                 <a:latin typeface="Helvetica Neue"/>
               </a:rPr>
-              <a:t>ĐỀ TÀI TIẾP THEO</a:t>
+              <a:t>BÀI HỌC RÚT RA</a:t>
             </a:r>
           </a:p>
         </p:txBody>
@@ -5397,7 +5398,7 @@
                 </a:solidFill>
                 <a:latin typeface="Georgia"/>
               </a:rPr>
-              <a:t>Lỗi máy chấm phải phổ biến tới mức nào mới gây hại?</a:t>
+              <a:t>Lần vừa rồi chọn nhầm chỗ để tìm hiệu ứng</a:t>
             </a:r>
           </a:p>
         </p:txBody>
@@ -5411,54 +5412,32 @@
         <p:spPr>
           <a:xfrm>
             <a:off x="800100" y="1600000"/>
-            <a:ext cx="10591495" cy="700000"/>
-          </a:xfrm>
-          <a:prstGeom prst="rect">
-            <a:avLst/>
-          </a:prstGeom>
-          <a:noFill/>
-        </p:spPr>
-        <p:txBody>
-          <a:bodyPr wrap="square" lIns="0" rIns="0" tIns="0" bIns="0">
-            <a:spAutoFit/>
-          </a:bodyPr>
-          <a:lstStyle/>
-          <a:p>
-            <a:pPr algn="l">
-              <a:lnSpc>
-                <a:spcPct val="145000"/>
-              </a:lnSpc>
-              <a:spcAft>
-                <a:spcPts val="600"/>
-              </a:spcAft>
-            </a:pPr>
-            <a:r>
-              <a:rPr sz="1350" b="0">
+            <a:ext cx="10591495" cy="330000"/>
+          </a:xfrm>
+          <a:prstGeom prst="rect">
+            <a:avLst/>
+          </a:prstGeom>
+          <a:noFill/>
+        </p:spPr>
+        <p:txBody>
+          <a:bodyPr wrap="square" lIns="0" rIns="0" tIns="0" bIns="0">
+            <a:spAutoFit/>
+          </a:bodyPr>
+          <a:lstStyle/>
+          <a:p>
+            <a:pPr algn="l">
+              <a:spcAft>
+                <a:spcPts val="600"/>
+              </a:spcAft>
+            </a:pPr>
+            <a:r>
+              <a:rPr sz="1250" b="0">
                 <a:solidFill>
                   <a:srgbClr val="3F4149"/>
                 </a:solidFill>
                 <a:latin typeface="Helvetica Neue"/>
               </a:rPr>
-              <a:t>Kết quả ba tuần qua cho một quy luật: tác động của lỗi máy chấm bằng mức nặng nhân tần suất.</a:t>
-            </a:r>
-          </a:p>
-          <a:p>
-            <a:pPr algn="l">
-              <a:lnSpc>
-                <a:spcPct val="145000"/>
-              </a:lnSpc>
-              <a:spcAft>
-                <a:spcPts val="600"/>
-              </a:spcAft>
-            </a:pPr>
-            <a:r>
-              <a:rPr sz="1350" b="0">
-                <a:solidFill>
-                  <a:srgbClr val="3F4149"/>
-                </a:solidFill>
-                <a:latin typeface="Helvetica Neue"/>
-              </a:rPr>
-              <a:t>Nhưng mới đo được một điểm trên quy luật đó — điểm mà tần suất quá thấp nên không thấy gì.</a:t>
+              <a:t>Cả hai con số dưới đây đều là số đã đo của đề tài, không phải ước lượng.</a:t>
             </a:r>
           </a:p>
         </p:txBody>
@@ -5471,8 +5450,8 @@
         </p:nvSpPr>
         <p:spPr>
           <a:xfrm>
-            <a:off x="800100" y="2500000"/>
-            <a:ext cx="10591495" cy="300000"/>
+            <a:off x="800100" y="2050000"/>
+            <a:ext cx="3000000" cy="300000"/>
           </a:xfrm>
           <a:prstGeom prst="rect">
             <a:avLst/>
@@ -5497,21 +5476,138 @@
                 </a:solidFill>
                 <a:latin typeface="Helvetica Neue"/>
               </a:rPr>
-              <a:t>CÁCH LÀM: giữ nguyên vòng lặp, chỉ đổi chỗ máy chấm bị lệch</a:t>
-            </a:r>
-          </a:p>
-        </p:txBody>
-      </p:sp>
-      <p:sp>
-        <p:nvSpPr>
-          <p:cNvPr id="7" name="Rounded Rectangle 6"/>
+              <a:t>CÁCH VIẾT ĐÁP ÁN</a:t>
+            </a:r>
+          </a:p>
+        </p:txBody>
+      </p:sp>
+      <p:sp>
+        <p:nvSpPr>
+          <p:cNvPr id="7" name="TextBox 6"/>
+          <p:cNvSpPr txBox="1"/>
+          <p:nvPr/>
+        </p:nvSpPr>
+        <p:spPr>
+          <a:xfrm>
+            <a:off x="4000100" y="2050000"/>
+            <a:ext cx="2500000" cy="300000"/>
+          </a:xfrm>
+          <a:prstGeom prst="rect">
+            <a:avLst/>
+          </a:prstGeom>
+          <a:noFill/>
+        </p:spPr>
+        <p:txBody>
+          <a:bodyPr wrap="square" lIns="0" rIns="0" tIns="0" bIns="0">
+            <a:spAutoFit/>
+          </a:bodyPr>
+          <a:lstStyle/>
+          <a:p>
+            <a:pPr algn="l">
+              <a:spcAft>
+                <a:spcPts val="600"/>
+              </a:spcAft>
+            </a:pPr>
+            <a:r>
+              <a:rPr sz="1100" b="1">
+                <a:solidFill>
+                  <a:srgbClr val="8A8D96"/>
+                </a:solidFill>
+                <a:latin typeface="Helvetica Neue"/>
+              </a:rPr>
+              <a:t>MODEL DÙNG BAO NHIÊU</a:t>
+            </a:r>
+          </a:p>
+        </p:txBody>
+      </p:sp>
+      <p:sp>
+        <p:nvSpPr>
+          <p:cNvPr id="8" name="TextBox 7"/>
+          <p:cNvSpPr txBox="1"/>
+          <p:nvPr/>
+        </p:nvSpPr>
+        <p:spPr>
+          <a:xfrm>
+            <a:off x="6500100" y="2050000"/>
+            <a:ext cx="2400000" cy="300000"/>
+          </a:xfrm>
+          <a:prstGeom prst="rect">
+            <a:avLst/>
+          </a:prstGeom>
+          <a:noFill/>
+        </p:spPr>
+        <p:txBody>
+          <a:bodyPr wrap="square" lIns="0" rIns="0" tIns="0" bIns="0">
+            <a:spAutoFit/>
+          </a:bodyPr>
+          <a:lstStyle/>
+          <a:p>
+            <a:pPr algn="l">
+              <a:spcAft>
+                <a:spcPts val="600"/>
+              </a:spcAft>
+            </a:pPr>
+            <a:r>
+              <a:rPr sz="1100" b="1">
+                <a:solidFill>
+                  <a:srgbClr val="8A8D96"/>
+                </a:solidFill>
+                <a:latin typeface="Helvetica Neue"/>
+              </a:rPr>
+              <a:t>MÁY CHẤM GẠCH</a:t>
+            </a:r>
+          </a:p>
+        </p:txBody>
+      </p:sp>
+      <p:sp>
+        <p:nvSpPr>
+          <p:cNvPr id="9" name="TextBox 8"/>
+          <p:cNvSpPr txBox="1"/>
+          <p:nvPr/>
+        </p:nvSpPr>
+        <p:spPr>
+          <a:xfrm>
+            <a:off x="8900100" y="2050000"/>
+            <a:ext cx="2400000" cy="300000"/>
+          </a:xfrm>
+          <a:prstGeom prst="rect">
+            <a:avLst/>
+          </a:prstGeom>
+          <a:noFill/>
+        </p:spPr>
+        <p:txBody>
+          <a:bodyPr wrap="square" lIns="0" rIns="0" tIns="0" bIns="0">
+            <a:spAutoFit/>
+          </a:bodyPr>
+          <a:lstStyle/>
+          <a:p>
+            <a:pPr algn="l">
+              <a:spcAft>
+                <a:spcPts val="600"/>
+              </a:spcAft>
+            </a:pPr>
+            <a:r>
+              <a:rPr sz="1100" b="1">
+                <a:solidFill>
+                  <a:srgbClr val="8A8D96"/>
+                </a:solidFill>
+                <a:latin typeface="Helvetica Neue"/>
+              </a:rPr>
+              <a:t>THIỆT HẠI THỰC TẾ</a:t>
+            </a:r>
+          </a:p>
+        </p:txBody>
+      </p:sp>
+      <p:sp>
+        <p:nvSpPr>
+          <p:cNvPr id="10" name="Rounded Rectangle 9"/>
           <p:cNvSpPr/>
           <p:nvPr/>
         </p:nvSpPr>
         <p:spPr>
           <a:xfrm>
-            <a:off x="800100" y="2920000"/>
-            <a:ext cx="5190000" cy="1850000"/>
+            <a:off x="680100" y="2430000"/>
+            <a:ext cx="10831495" cy="2510000"/>
           </a:xfrm>
           <a:prstGeom prst="roundRect">
             <a:avLst>
@@ -5550,88 +5646,797 @@
       </p:sp>
       <p:sp>
         <p:nvSpPr>
-          <p:cNvPr id="8" name="Rounded Rectangle 7"/>
-          <p:cNvSpPr/>
-          <p:nvPr/>
-        </p:nvSpPr>
-        <p:spPr>
-          <a:xfrm>
-            <a:off x="1060100" y="3100000"/>
-            <a:ext cx="1250000" cy="300000"/>
-          </a:xfrm>
-          <a:prstGeom prst="roundRect">
-            <a:avLst>
-              <a:gd name="adj" fmla="val 50000"/>
-            </a:avLst>
-          </a:prstGeom>
-          <a:solidFill>
-            <a:srgbClr val="8A8D96"/>
-          </a:solidFill>
-          <a:ln>
-            <a:noFill/>
+          <p:cNvPr id="11" name="TextBox 10"/>
+          <p:cNvSpPr txBox="1"/>
+          <p:nvPr/>
+        </p:nvSpPr>
+        <p:spPr>
+          <a:xfrm>
+            <a:off x="800100" y="2570000"/>
+            <a:ext cx="3000000" cy="330000"/>
+          </a:xfrm>
+          <a:prstGeom prst="rect">
+            <a:avLst/>
+          </a:prstGeom>
+          <a:noFill/>
+        </p:spPr>
+        <p:txBody>
+          <a:bodyPr wrap="square" lIns="0" rIns="0" tIns="0" bIns="0">
+            <a:spAutoFit/>
+          </a:bodyPr>
+          <a:lstStyle/>
+          <a:p>
+            <a:pPr algn="l">
+              <a:spcAft>
+                <a:spcPts val="600"/>
+              </a:spcAft>
+            </a:pPr>
+            <a:r>
+              <a:rPr sz="1150" b="0">
+                <a:solidFill>
+                  <a:srgbClr val="3F4149"/>
+                </a:solidFill>
+                <a:latin typeface="Helvetica Neue"/>
+              </a:rPr>
+              <a:t>\frac</a:t>
+            </a:r>
+          </a:p>
+        </p:txBody>
+      </p:sp>
+      <p:sp>
+        <p:nvSpPr>
+          <p:cNvPr id="12" name="TextBox 11"/>
+          <p:cNvSpPr txBox="1"/>
+          <p:nvPr/>
+        </p:nvSpPr>
+        <p:spPr>
+          <a:xfrm>
+            <a:off x="4000100" y="2570000"/>
+            <a:ext cx="2500000" cy="330000"/>
+          </a:xfrm>
+          <a:prstGeom prst="rect">
+            <a:avLst/>
+          </a:prstGeom>
+          <a:noFill/>
+        </p:spPr>
+        <p:txBody>
+          <a:bodyPr wrap="square" lIns="0" rIns="0" tIns="0" bIns="0">
+            <a:spAutoFit/>
+          </a:bodyPr>
+          <a:lstStyle/>
+          <a:p>
+            <a:pPr algn="l">
+              <a:spcAft>
+                <a:spcPts val="600"/>
+              </a:spcAft>
+            </a:pPr>
+            <a:r>
+              <a:rPr sz="1150" b="0">
+                <a:solidFill>
+                  <a:srgbClr val="3F4149"/>
+                </a:solidFill>
+                <a:latin typeface="Helvetica Neue"/>
+              </a:rPr>
+              <a:t>55,8%</a:t>
+            </a:r>
+          </a:p>
+        </p:txBody>
+      </p:sp>
+      <p:sp>
+        <p:nvSpPr>
+          <p:cNvPr id="13" name="TextBox 12"/>
+          <p:cNvSpPr txBox="1"/>
+          <p:nvPr/>
+        </p:nvSpPr>
+        <p:spPr>
+          <a:xfrm>
+            <a:off x="6500100" y="2570000"/>
+            <a:ext cx="2400000" cy="330000"/>
+          </a:xfrm>
+          <a:prstGeom prst="rect">
+            <a:avLst/>
+          </a:prstGeom>
+          <a:noFill/>
+        </p:spPr>
+        <p:txBody>
+          <a:bodyPr wrap="square" lIns="0" rIns="0" tIns="0" bIns="0">
+            <a:spAutoFit/>
+          </a:bodyPr>
+          <a:lstStyle/>
+          <a:p>
+            <a:pPr algn="l">
+              <a:spcAft>
+                <a:spcPts val="600"/>
+              </a:spcAft>
+            </a:pPr>
+            <a:r>
+              <a:rPr sz="1150" b="0">
+                <a:solidFill>
+                  <a:srgbClr val="3F4149"/>
+                </a:solidFill>
+                <a:latin typeface="Helvetica Neue"/>
+              </a:rPr>
+              <a:t>0%</a:t>
+            </a:r>
+          </a:p>
+        </p:txBody>
+      </p:sp>
+      <p:sp>
+        <p:nvSpPr>
+          <p:cNvPr id="14" name="TextBox 13"/>
+          <p:cNvSpPr txBox="1"/>
+          <p:nvPr/>
+        </p:nvSpPr>
+        <p:spPr>
+          <a:xfrm>
+            <a:off x="8900100" y="2570000"/>
+            <a:ext cx="2400000" cy="330000"/>
+          </a:xfrm>
+          <a:prstGeom prst="rect">
+            <a:avLst/>
+          </a:prstGeom>
+          <a:noFill/>
+        </p:spPr>
+        <p:txBody>
+          <a:bodyPr wrap="square" lIns="0" rIns="0" tIns="0" bIns="0">
+            <a:spAutoFit/>
+          </a:bodyPr>
+          <a:lstStyle/>
+          <a:p>
+            <a:pPr algn="l">
+              <a:spcAft>
+                <a:spcPts val="600"/>
+              </a:spcAft>
+            </a:pPr>
+            <a:r>
+              <a:rPr sz="1150" b="0">
+                <a:solidFill>
+                  <a:srgbClr val="3F4149"/>
+                </a:solidFill>
+                <a:latin typeface="Helvetica Neue"/>
+              </a:rPr>
+              <a:t>0%</a:t>
+            </a:r>
+          </a:p>
+        </p:txBody>
+      </p:sp>
+      <p:cxnSp>
+        <p:nvCxnSpPr>
+          <p:cNvPr id="15" name="Connector 14"/>
+          <p:cNvCxnSpPr/>
+          <p:nvPr/>
+        </p:nvCxnSpPr>
+        <p:spPr>
+          <a:xfrm>
+            <a:off x="760100" y="2905000"/>
+            <a:ext cx="10671495" cy="0"/>
+          </a:xfrm>
+          <a:prstGeom prst="line">
+            <a:avLst/>
+          </a:prstGeom>
+          <a:ln w="9525">
+            <a:solidFill>
+              <a:srgbClr val="E9E9ED"/>
+            </a:solidFill>
           </a:ln>
-          <a:effectLst/>
         </p:spPr>
         <p:style>
-          <a:lnRef idx="1">
+          <a:lnRef idx="2">
             <a:schemeClr val="accent1"/>
           </a:lnRef>
-          <a:fillRef idx="3">
+          <a:fillRef idx="0">
             <a:schemeClr val="accent1"/>
           </a:fillRef>
-          <a:effectRef idx="2">
+          <a:effectRef idx="1">
             <a:schemeClr val="accent1"/>
           </a:effectRef>
           <a:fontRef idx="minor">
-            <a:schemeClr val="lt1"/>
+            <a:schemeClr val="tx1"/>
           </a:fontRef>
         </p:style>
-        <p:txBody>
-          <a:bodyPr rtlCol="0" anchor="ctr" wrap="none" lIns="0" rIns="0"/>
-          <a:lstStyle/>
-          <a:p>
-            <a:pPr algn="ctr"/>
-            <a:r>
-              <a:rPr sz="1050" b="1">
-                <a:solidFill>
-                  <a:srgbClr val="FFFFFF"/>
-                </a:solidFill>
-                <a:latin typeface="Helvetica Neue"/>
-              </a:rPr>
-              <a:t>ĐÃ CHẠY</a:t>
-            </a:r>
-          </a:p>
-        </p:txBody>
-      </p:sp>
-      <p:sp>
-        <p:nvSpPr>
-          <p:cNvPr id="9" name="TextBox 8"/>
-          <p:cNvSpPr txBox="1"/>
-          <p:nvPr/>
-        </p:nvSpPr>
-        <p:spPr>
-          <a:xfrm>
-            <a:off x="1060100" y="3560000"/>
-            <a:ext cx="2400000" cy="400000"/>
-          </a:xfrm>
-          <a:prstGeom prst="rect">
-            <a:avLst/>
-          </a:prstGeom>
-          <a:noFill/>
-        </p:spPr>
-        <p:txBody>
-          <a:bodyPr wrap="square" lIns="0" rIns="0" tIns="0" bIns="0">
-            <a:spAutoFit/>
-          </a:bodyPr>
-          <a:lstStyle/>
-          <a:p>
-            <a:pPr algn="l">
-              <a:spcAft>
-                <a:spcPts val="600"/>
-              </a:spcAft>
-            </a:pPr>
-            <a:r>
-              <a:rPr sz="1900" b="0">
+      </p:cxnSp>
+      <p:sp>
+        <p:nvSpPr>
+          <p:cNvPr id="16" name="TextBox 15"/>
+          <p:cNvSpPr txBox="1"/>
+          <p:nvPr/>
+        </p:nvSpPr>
+        <p:spPr>
+          <a:xfrm>
+            <a:off x="800100" y="2960000"/>
+            <a:ext cx="3000000" cy="330000"/>
+          </a:xfrm>
+          <a:prstGeom prst="rect">
+            <a:avLst/>
+          </a:prstGeom>
+          <a:noFill/>
+        </p:spPr>
+        <p:txBody>
+          <a:bodyPr wrap="square" lIns="0" rIns="0" tIns="0" bIns="0">
+            <a:spAutoFit/>
+          </a:bodyPr>
+          <a:lstStyle/>
+          <a:p>
+            <a:pPr algn="l">
+              <a:spcAft>
+                <a:spcPts val="600"/>
+              </a:spcAft>
+            </a:pPr>
+            <a:r>
+              <a:rPr sz="1150" b="0">
+                <a:solidFill>
+                  <a:srgbClr val="3F4149"/>
+                </a:solidFill>
+                <a:latin typeface="Helvetica Neue"/>
+              </a:rPr>
+              <a:t>\boxed</a:t>
+            </a:r>
+          </a:p>
+        </p:txBody>
+      </p:sp>
+      <p:sp>
+        <p:nvSpPr>
+          <p:cNvPr id="17" name="TextBox 16"/>
+          <p:cNvSpPr txBox="1"/>
+          <p:nvPr/>
+        </p:nvSpPr>
+        <p:spPr>
+          <a:xfrm>
+            <a:off x="4000100" y="2960000"/>
+            <a:ext cx="2500000" cy="330000"/>
+          </a:xfrm>
+          <a:prstGeom prst="rect">
+            <a:avLst/>
+          </a:prstGeom>
+          <a:noFill/>
+        </p:spPr>
+        <p:txBody>
+          <a:bodyPr wrap="square" lIns="0" rIns="0" tIns="0" bIns="0">
+            <a:spAutoFit/>
+          </a:bodyPr>
+          <a:lstStyle/>
+          <a:p>
+            <a:pPr algn="l">
+              <a:spcAft>
+                <a:spcPts val="600"/>
+              </a:spcAft>
+            </a:pPr>
+            <a:r>
+              <a:rPr sz="1150" b="0">
+                <a:solidFill>
+                  <a:srgbClr val="3F4149"/>
+                </a:solidFill>
+                <a:latin typeface="Helvetica Neue"/>
+              </a:rPr>
+              <a:t>51,5%</a:t>
+            </a:r>
+          </a:p>
+        </p:txBody>
+      </p:sp>
+      <p:sp>
+        <p:nvSpPr>
+          <p:cNvPr id="18" name="TextBox 17"/>
+          <p:cNvSpPr txBox="1"/>
+          <p:nvPr/>
+        </p:nvSpPr>
+        <p:spPr>
+          <a:xfrm>
+            <a:off x="6500100" y="2960000"/>
+            <a:ext cx="2400000" cy="330000"/>
+          </a:xfrm>
+          <a:prstGeom prst="rect">
+            <a:avLst/>
+          </a:prstGeom>
+          <a:noFill/>
+        </p:spPr>
+        <p:txBody>
+          <a:bodyPr wrap="square" lIns="0" rIns="0" tIns="0" bIns="0">
+            <a:spAutoFit/>
+          </a:bodyPr>
+          <a:lstStyle/>
+          <a:p>
+            <a:pPr algn="l">
+              <a:spcAft>
+                <a:spcPts val="600"/>
+              </a:spcAft>
+            </a:pPr>
+            <a:r>
+              <a:rPr sz="1150" b="0">
+                <a:solidFill>
+                  <a:srgbClr val="3F4149"/>
+                </a:solidFill>
+                <a:latin typeface="Helvetica Neue"/>
+              </a:rPr>
+              <a:t>~20%</a:t>
+            </a:r>
+          </a:p>
+        </p:txBody>
+      </p:sp>
+      <p:sp>
+        <p:nvSpPr>
+          <p:cNvPr id="19" name="TextBox 18"/>
+          <p:cNvSpPr txBox="1"/>
+          <p:nvPr/>
+        </p:nvSpPr>
+        <p:spPr>
+          <a:xfrm>
+            <a:off x="8900100" y="2960000"/>
+            <a:ext cx="2400000" cy="330000"/>
+          </a:xfrm>
+          <a:prstGeom prst="rect">
+            <a:avLst/>
+          </a:prstGeom>
+          <a:noFill/>
+        </p:spPr>
+        <p:txBody>
+          <a:bodyPr wrap="square" lIns="0" rIns="0" tIns="0" bIns="0">
+            <a:spAutoFit/>
+          </a:bodyPr>
+          <a:lstStyle/>
+          <a:p>
+            <a:pPr algn="l">
+              <a:spcAft>
+                <a:spcPts val="600"/>
+              </a:spcAft>
+            </a:pPr>
+            <a:r>
+              <a:rPr sz="1150" b="0">
+                <a:solidFill>
+                  <a:srgbClr val="3F4149"/>
+                </a:solidFill>
+                <a:latin typeface="Helvetica Neue"/>
+              </a:rPr>
+              <a:t>~10%</a:t>
+            </a:r>
+          </a:p>
+        </p:txBody>
+      </p:sp>
+      <p:cxnSp>
+        <p:nvCxnSpPr>
+          <p:cNvPr id="20" name="Connector 19"/>
+          <p:cNvCxnSpPr/>
+          <p:nvPr/>
+        </p:nvCxnSpPr>
+        <p:spPr>
+          <a:xfrm>
+            <a:off x="760100" y="3295000"/>
+            <a:ext cx="10671495" cy="0"/>
+          </a:xfrm>
+          <a:prstGeom prst="line">
+            <a:avLst/>
+          </a:prstGeom>
+          <a:ln w="9525">
+            <a:solidFill>
+              <a:srgbClr val="E9E9ED"/>
+            </a:solidFill>
+          </a:ln>
+        </p:spPr>
+        <p:style>
+          <a:lnRef idx="2">
+            <a:schemeClr val="accent1"/>
+          </a:lnRef>
+          <a:fillRef idx="0">
+            <a:schemeClr val="accent1"/>
+          </a:fillRef>
+          <a:effectRef idx="1">
+            <a:schemeClr val="accent1"/>
+          </a:effectRef>
+          <a:fontRef idx="minor">
+            <a:schemeClr val="tx1"/>
+          </a:fontRef>
+        </p:style>
+      </p:cxnSp>
+      <p:sp>
+        <p:nvSpPr>
+          <p:cNvPr id="21" name="TextBox 20"/>
+          <p:cNvSpPr txBox="1"/>
+          <p:nvPr/>
+        </p:nvSpPr>
+        <p:spPr>
+          <a:xfrm>
+            <a:off x="800100" y="3350000"/>
+            <a:ext cx="3000000" cy="330000"/>
+          </a:xfrm>
+          <a:prstGeom prst="rect">
+            <a:avLst/>
+          </a:prstGeom>
+          <a:noFill/>
+        </p:spPr>
+        <p:txBody>
+          <a:bodyPr wrap="square" lIns="0" rIns="0" tIns="0" bIns="0">
+            <a:spAutoFit/>
+          </a:bodyPr>
+          <a:lstStyle/>
+          <a:p>
+            <a:pPr algn="l">
+              <a:spcAft>
+                <a:spcPts val="600"/>
+              </a:spcAft>
+            </a:pPr>
+            <a:r>
+              <a:rPr sz="1150" b="0">
+                <a:solidFill>
+                  <a:srgbClr val="3F4149"/>
+                </a:solidFill>
+                <a:latin typeface="Helvetica Neue"/>
+              </a:rPr>
+              <a:t>số thập phân</a:t>
+            </a:r>
+          </a:p>
+        </p:txBody>
+      </p:sp>
+      <p:sp>
+        <p:nvSpPr>
+          <p:cNvPr id="22" name="TextBox 21"/>
+          <p:cNvSpPr txBox="1"/>
+          <p:nvPr/>
+        </p:nvSpPr>
+        <p:spPr>
+          <a:xfrm>
+            <a:off x="4000100" y="3350000"/>
+            <a:ext cx="2500000" cy="330000"/>
+          </a:xfrm>
+          <a:prstGeom prst="rect">
+            <a:avLst/>
+          </a:prstGeom>
+          <a:noFill/>
+        </p:spPr>
+        <p:txBody>
+          <a:bodyPr wrap="square" lIns="0" rIns="0" tIns="0" bIns="0">
+            <a:spAutoFit/>
+          </a:bodyPr>
+          <a:lstStyle/>
+          <a:p>
+            <a:pPr algn="l">
+              <a:spcAft>
+                <a:spcPts val="600"/>
+              </a:spcAft>
+            </a:pPr>
+            <a:r>
+              <a:rPr sz="1150" b="0">
+                <a:solidFill>
+                  <a:srgbClr val="3F4149"/>
+                </a:solidFill>
+                <a:latin typeface="Helvetica Neue"/>
+              </a:rPr>
+              <a:t>11,6%</a:t>
+            </a:r>
+          </a:p>
+        </p:txBody>
+      </p:sp>
+      <p:sp>
+        <p:nvSpPr>
+          <p:cNvPr id="23" name="TextBox 22"/>
+          <p:cNvSpPr txBox="1"/>
+          <p:nvPr/>
+        </p:nvSpPr>
+        <p:spPr>
+          <a:xfrm>
+            <a:off x="6500100" y="3350000"/>
+            <a:ext cx="2400000" cy="330000"/>
+          </a:xfrm>
+          <a:prstGeom prst="rect">
+            <a:avLst/>
+          </a:prstGeom>
+          <a:noFill/>
+        </p:spPr>
+        <p:txBody>
+          <a:bodyPr wrap="square" lIns="0" rIns="0" tIns="0" bIns="0">
+            <a:spAutoFit/>
+          </a:bodyPr>
+          <a:lstStyle/>
+          <a:p>
+            <a:pPr algn="l">
+              <a:spcAft>
+                <a:spcPts val="600"/>
+              </a:spcAft>
+            </a:pPr>
+            <a:r>
+              <a:rPr sz="1150" b="0">
+                <a:solidFill>
+                  <a:srgbClr val="3F4149"/>
+                </a:solidFill>
+                <a:latin typeface="Helvetica Neue"/>
+              </a:rPr>
+              <a:t>thấp</a:t>
+            </a:r>
+          </a:p>
+        </p:txBody>
+      </p:sp>
+      <p:sp>
+        <p:nvSpPr>
+          <p:cNvPr id="24" name="TextBox 23"/>
+          <p:cNvSpPr txBox="1"/>
+          <p:nvPr/>
+        </p:nvSpPr>
+        <p:spPr>
+          <a:xfrm>
+            <a:off x="8900100" y="3350000"/>
+            <a:ext cx="2400000" cy="330000"/>
+          </a:xfrm>
+          <a:prstGeom prst="rect">
+            <a:avLst/>
+          </a:prstGeom>
+          <a:noFill/>
+        </p:spPr>
+        <p:txBody>
+          <a:bodyPr wrap="square" lIns="0" rIns="0" tIns="0" bIns="0">
+            <a:spAutoFit/>
+          </a:bodyPr>
+          <a:lstStyle/>
+          <a:p>
+            <a:pPr algn="l">
+              <a:spcAft>
+                <a:spcPts val="600"/>
+              </a:spcAft>
+            </a:pPr>
+            <a:r>
+              <a:rPr sz="1150" b="0">
+                <a:solidFill>
+                  <a:srgbClr val="3F4149"/>
+                </a:solidFill>
+                <a:latin typeface="Helvetica Neue"/>
+              </a:rPr>
+              <a:t>thấp</a:t>
+            </a:r>
+          </a:p>
+        </p:txBody>
+      </p:sp>
+      <p:cxnSp>
+        <p:nvCxnSpPr>
+          <p:cNvPr id="25" name="Connector 24"/>
+          <p:cNvCxnSpPr/>
+          <p:nvPr/>
+        </p:nvCxnSpPr>
+        <p:spPr>
+          <a:xfrm>
+            <a:off x="760100" y="3685000"/>
+            <a:ext cx="10671495" cy="0"/>
+          </a:xfrm>
+          <a:prstGeom prst="line">
+            <a:avLst/>
+          </a:prstGeom>
+          <a:ln w="9525">
+            <a:solidFill>
+              <a:srgbClr val="E9E9ED"/>
+            </a:solidFill>
+          </a:ln>
+        </p:spPr>
+        <p:style>
+          <a:lnRef idx="2">
+            <a:schemeClr val="accent1"/>
+          </a:lnRef>
+          <a:fillRef idx="0">
+            <a:schemeClr val="accent1"/>
+          </a:fillRef>
+          <a:effectRef idx="1">
+            <a:schemeClr val="accent1"/>
+          </a:effectRef>
+          <a:fontRef idx="minor">
+            <a:schemeClr val="tx1"/>
+          </a:fontRef>
+        </p:style>
+      </p:cxnSp>
+      <p:sp>
+        <p:nvSpPr>
+          <p:cNvPr id="26" name="TextBox 25"/>
+          <p:cNvSpPr txBox="1"/>
+          <p:nvPr/>
+        </p:nvSpPr>
+        <p:spPr>
+          <a:xfrm>
+            <a:off x="800100" y="3740000"/>
+            <a:ext cx="3000000" cy="330000"/>
+          </a:xfrm>
+          <a:prstGeom prst="rect">
+            <a:avLst/>
+          </a:prstGeom>
+          <a:noFill/>
+        </p:spPr>
+        <p:txBody>
+          <a:bodyPr wrap="square" lIns="0" rIns="0" tIns="0" bIns="0">
+            <a:spAutoFit/>
+          </a:bodyPr>
+          <a:lstStyle/>
+          <a:p>
+            <a:pPr algn="l">
+              <a:spcAft>
+                <a:spcPts val="600"/>
+              </a:spcAft>
+            </a:pPr>
+            <a:r>
+              <a:rPr sz="1150" b="0">
+                <a:solidFill>
+                  <a:srgbClr val="3F4149"/>
+                </a:solidFill>
+                <a:latin typeface="Helvetica Neue"/>
+              </a:rPr>
+              <a:t>0,50  (thừa số 0)</a:t>
+            </a:r>
+          </a:p>
+        </p:txBody>
+      </p:sp>
+      <p:sp>
+        <p:nvSpPr>
+          <p:cNvPr id="27" name="TextBox 26"/>
+          <p:cNvSpPr txBox="1"/>
+          <p:nvPr/>
+        </p:nvSpPr>
+        <p:spPr>
+          <a:xfrm>
+            <a:off x="4000100" y="3740000"/>
+            <a:ext cx="2500000" cy="330000"/>
+          </a:xfrm>
+          <a:prstGeom prst="rect">
+            <a:avLst/>
+          </a:prstGeom>
+          <a:noFill/>
+        </p:spPr>
+        <p:txBody>
+          <a:bodyPr wrap="square" lIns="0" rIns="0" tIns="0" bIns="0">
+            <a:spAutoFit/>
+          </a:bodyPr>
+          <a:lstStyle/>
+          <a:p>
+            <a:pPr algn="l">
+              <a:spcAft>
+                <a:spcPts val="600"/>
+              </a:spcAft>
+            </a:pPr>
+            <a:r>
+              <a:rPr sz="1150" b="0">
+                <a:solidFill>
+                  <a:srgbClr val="3F4149"/>
+                </a:solidFill>
+                <a:latin typeface="Helvetica Neue"/>
+              </a:rPr>
+              <a:t>1,2%</a:t>
+            </a:r>
+          </a:p>
+        </p:txBody>
+      </p:sp>
+      <p:sp>
+        <p:nvSpPr>
+          <p:cNvPr id="28" name="TextBox 27"/>
+          <p:cNvSpPr txBox="1"/>
+          <p:nvPr/>
+        </p:nvSpPr>
+        <p:spPr>
+          <a:xfrm>
+            <a:off x="6500100" y="3740000"/>
+            <a:ext cx="2400000" cy="330000"/>
+          </a:xfrm>
+          <a:prstGeom prst="rect">
+            <a:avLst/>
+          </a:prstGeom>
+          <a:noFill/>
+        </p:spPr>
+        <p:txBody>
+          <a:bodyPr wrap="square" lIns="0" rIns="0" tIns="0" bIns="0">
+            <a:spAutoFit/>
+          </a:bodyPr>
+          <a:lstStyle/>
+          <a:p>
+            <a:pPr algn="l">
+              <a:spcAft>
+                <a:spcPts val="600"/>
+              </a:spcAft>
+            </a:pPr>
+            <a:r>
+              <a:rPr sz="1150" b="0">
+                <a:solidFill>
+                  <a:srgbClr val="3F4149"/>
+                </a:solidFill>
+                <a:latin typeface="Helvetica Neue"/>
+              </a:rPr>
+              <a:t>59%</a:t>
+            </a:r>
+          </a:p>
+        </p:txBody>
+      </p:sp>
+      <p:sp>
+        <p:nvSpPr>
+          <p:cNvPr id="29" name="TextBox 28"/>
+          <p:cNvSpPr txBox="1"/>
+          <p:nvPr/>
+        </p:nvSpPr>
+        <p:spPr>
+          <a:xfrm>
+            <a:off x="8900100" y="3740000"/>
+            <a:ext cx="2400000" cy="330000"/>
+          </a:xfrm>
+          <a:prstGeom prst="rect">
+            <a:avLst/>
+          </a:prstGeom>
+          <a:noFill/>
+        </p:spPr>
+        <p:txBody>
+          <a:bodyPr wrap="square" lIns="0" rIns="0" tIns="0" bIns="0">
+            <a:spAutoFit/>
+          </a:bodyPr>
+          <a:lstStyle/>
+          <a:p>
+            <a:pPr algn="l">
+              <a:spcAft>
+                <a:spcPts val="600"/>
+              </a:spcAft>
+            </a:pPr>
+            <a:r>
+              <a:rPr sz="1150" b="0">
+                <a:solidFill>
+                  <a:srgbClr val="3F4149"/>
+                </a:solidFill>
+                <a:latin typeface="Helvetica Neue"/>
+              </a:rPr>
+              <a:t>0,7%</a:t>
+            </a:r>
+          </a:p>
+        </p:txBody>
+      </p:sp>
+      <p:cxnSp>
+        <p:nvCxnSpPr>
+          <p:cNvPr id="30" name="Connector 29"/>
+          <p:cNvCxnSpPr/>
+          <p:nvPr/>
+        </p:nvCxnSpPr>
+        <p:spPr>
+          <a:xfrm>
+            <a:off x="760100" y="4075000"/>
+            <a:ext cx="10671495" cy="0"/>
+          </a:xfrm>
+          <a:prstGeom prst="line">
+            <a:avLst/>
+          </a:prstGeom>
+          <a:ln w="9525">
+            <a:solidFill>
+              <a:srgbClr val="E9E9ED"/>
+            </a:solidFill>
+          </a:ln>
+        </p:spPr>
+        <p:style>
+          <a:lnRef idx="2">
+            <a:schemeClr val="accent1"/>
+          </a:lnRef>
+          <a:fillRef idx="0">
+            <a:schemeClr val="accent1"/>
+          </a:fillRef>
+          <a:effectRef idx="1">
+            <a:schemeClr val="accent1"/>
+          </a:effectRef>
+          <a:fontRef idx="minor">
+            <a:schemeClr val="tx1"/>
+          </a:fontRef>
+        </p:style>
+      </p:cxnSp>
+      <p:sp>
+        <p:nvSpPr>
+          <p:cNvPr id="31" name="TextBox 30"/>
+          <p:cNvSpPr txBox="1"/>
+          <p:nvPr/>
+        </p:nvSpPr>
+        <p:spPr>
+          <a:xfrm>
+            <a:off x="800100" y="4130000"/>
+            <a:ext cx="3000000" cy="330000"/>
+          </a:xfrm>
+          <a:prstGeom prst="rect">
+            <a:avLst/>
+          </a:prstGeom>
+          <a:noFill/>
+        </p:spPr>
+        <p:txBody>
+          <a:bodyPr wrap="square" lIns="0" rIns="0" tIns="0" bIns="0">
+            <a:spAutoFit/>
+          </a:bodyPr>
+          <a:lstStyle/>
+          <a:p>
+            <a:pPr algn="l">
+              <a:spcAft>
+                <a:spcPts val="600"/>
+              </a:spcAft>
+            </a:pPr>
+            <a:r>
+              <a:rPr sz="1150" b="1">
                 <a:solidFill>
                   <a:srgbClr val="16161A"/>
                 </a:solidFill>
@@ -5644,37 +6449,37 @@
       </p:sp>
       <p:sp>
         <p:nvSpPr>
-          <p:cNvPr id="10" name="TextBox 9"/>
-          <p:cNvSpPr txBox="1"/>
-          <p:nvPr/>
-        </p:nvSpPr>
-        <p:spPr>
-          <a:xfrm>
-            <a:off x="3700100" y="3560000"/>
-            <a:ext cx="2100000" cy="400000"/>
-          </a:xfrm>
-          <a:prstGeom prst="rect">
-            <a:avLst/>
-          </a:prstGeom>
-          <a:noFill/>
-        </p:spPr>
-        <p:txBody>
-          <a:bodyPr wrap="square" lIns="0" rIns="0" tIns="0" bIns="0">
-            <a:spAutoFit/>
-          </a:bodyPr>
-          <a:lstStyle/>
-          <a:p>
-            <a:pPr algn="l">
-              <a:spcAft>
-                <a:spcPts val="600"/>
-              </a:spcAft>
-            </a:pPr>
-            <a:r>
-              <a:rPr sz="2600" b="1">
-                <a:solidFill>
-                  <a:srgbClr val="8A8D96"/>
-                </a:solidFill>
-                <a:latin typeface="Georgia"/>
+          <p:cNvPr id="32" name="TextBox 31"/>
+          <p:cNvSpPr txBox="1"/>
+          <p:nvPr/>
+        </p:nvSpPr>
+        <p:spPr>
+          <a:xfrm>
+            <a:off x="4000100" y="4130000"/>
+            <a:ext cx="2500000" cy="330000"/>
+          </a:xfrm>
+          <a:prstGeom prst="rect">
+            <a:avLst/>
+          </a:prstGeom>
+          <a:noFill/>
+        </p:spPr>
+        <p:txBody>
+          <a:bodyPr wrap="square" lIns="0" rIns="0" tIns="0" bIns="0">
+            <a:spAutoFit/>
+          </a:bodyPr>
+          <a:lstStyle/>
+          <a:p>
+            <a:pPr algn="l">
+              <a:spcAft>
+                <a:spcPts val="600"/>
+              </a:spcAft>
+            </a:pPr>
+            <a:r>
+              <a:rPr sz="1150" b="1">
+                <a:solidFill>
+                  <a:srgbClr val="16161A"/>
+                </a:solidFill>
+                <a:latin typeface="Helvetica Neue"/>
               </a:rPr>
               <a:t>0,55%</a:t>
             </a:r>
@@ -5683,14 +6488,283 @@
       </p:sp>
       <p:sp>
         <p:nvSpPr>
-          <p:cNvPr id="11" name="TextBox 10"/>
-          <p:cNvSpPr txBox="1"/>
-          <p:nvPr/>
-        </p:nvSpPr>
-        <p:spPr>
-          <a:xfrm>
-            <a:off x="1060100" y="4120000"/>
-            <a:ext cx="4700000" cy="550000"/>
+          <p:cNvPr id="33" name="TextBox 32"/>
+          <p:cNvSpPr txBox="1"/>
+          <p:nvPr/>
+        </p:nvSpPr>
+        <p:spPr>
+          <a:xfrm>
+            <a:off x="6500100" y="4130000"/>
+            <a:ext cx="2400000" cy="330000"/>
+          </a:xfrm>
+          <a:prstGeom prst="rect">
+            <a:avLst/>
+          </a:prstGeom>
+          <a:noFill/>
+        </p:spPr>
+        <p:txBody>
+          <a:bodyPr wrap="square" lIns="0" rIns="0" tIns="0" bIns="0">
+            <a:spAutoFit/>
+          </a:bodyPr>
+          <a:lstStyle/>
+          <a:p>
+            <a:pPr algn="l">
+              <a:spcAft>
+                <a:spcPts val="600"/>
+              </a:spcAft>
+            </a:pPr>
+            <a:r>
+              <a:rPr sz="1150" b="1">
+                <a:solidFill>
+                  <a:srgbClr val="16161A"/>
+                </a:solidFill>
+                <a:latin typeface="Helvetica Neue"/>
+              </a:rPr>
+              <a:t>100%</a:t>
+            </a:r>
+          </a:p>
+        </p:txBody>
+      </p:sp>
+      <p:sp>
+        <p:nvSpPr>
+          <p:cNvPr id="34" name="TextBox 33"/>
+          <p:cNvSpPr txBox="1"/>
+          <p:nvPr/>
+        </p:nvSpPr>
+        <p:spPr>
+          <a:xfrm>
+            <a:off x="8900100" y="4130000"/>
+            <a:ext cx="2400000" cy="330000"/>
+          </a:xfrm>
+          <a:prstGeom prst="rect">
+            <a:avLst/>
+          </a:prstGeom>
+          <a:noFill/>
+        </p:spPr>
+        <p:txBody>
+          <a:bodyPr wrap="square" lIns="0" rIns="0" tIns="0" bIns="0">
+            <a:spAutoFit/>
+          </a:bodyPr>
+          <a:lstStyle/>
+          <a:p>
+            <a:pPr algn="l">
+              <a:spcAft>
+                <a:spcPts val="600"/>
+              </a:spcAft>
+            </a:pPr>
+            <a:r>
+              <a:rPr sz="1150" b="1">
+                <a:solidFill>
+                  <a:srgbClr val="16161A"/>
+                </a:solidFill>
+                <a:latin typeface="Helvetica Neue"/>
+              </a:rPr>
+              <a:t>0,55%</a:t>
+            </a:r>
+          </a:p>
+        </p:txBody>
+      </p:sp>
+      <p:cxnSp>
+        <p:nvCxnSpPr>
+          <p:cNvPr id="35" name="Connector 34"/>
+          <p:cNvCxnSpPr/>
+          <p:nvPr/>
+        </p:nvCxnSpPr>
+        <p:spPr>
+          <a:xfrm>
+            <a:off x="760100" y="4465000"/>
+            <a:ext cx="10671495" cy="0"/>
+          </a:xfrm>
+          <a:prstGeom prst="line">
+            <a:avLst/>
+          </a:prstGeom>
+          <a:ln w="9525">
+            <a:solidFill>
+              <a:srgbClr val="E9E9ED"/>
+            </a:solidFill>
+          </a:ln>
+        </p:spPr>
+        <p:style>
+          <a:lnRef idx="2">
+            <a:schemeClr val="accent1"/>
+          </a:lnRef>
+          <a:fillRef idx="0">
+            <a:schemeClr val="accent1"/>
+          </a:fillRef>
+          <a:effectRef idx="1">
+            <a:schemeClr val="accent1"/>
+          </a:effectRef>
+          <a:fontRef idx="minor">
+            <a:schemeClr val="tx1"/>
+          </a:fontRef>
+        </p:style>
+      </p:cxnSp>
+      <p:sp>
+        <p:nvSpPr>
+          <p:cNvPr id="36" name="TextBox 35"/>
+          <p:cNvSpPr txBox="1"/>
+          <p:nvPr/>
+        </p:nvSpPr>
+        <p:spPr>
+          <a:xfrm>
+            <a:off x="800100" y="4520000"/>
+            <a:ext cx="3000000" cy="330000"/>
+          </a:xfrm>
+          <a:prstGeom prst="rect">
+            <a:avLst/>
+          </a:prstGeom>
+          <a:noFill/>
+        </p:spPr>
+        <p:txBody>
+          <a:bodyPr wrap="square" lIns="0" rIns="0" tIns="0" bIns="0">
+            <a:spAutoFit/>
+          </a:bodyPr>
+          <a:lstStyle/>
+          <a:p>
+            <a:pPr algn="l">
+              <a:spcAft>
+                <a:spcPts val="600"/>
+              </a:spcAft>
+            </a:pPr>
+            <a:r>
+              <a:rPr sz="1150" b="0">
+                <a:solidFill>
+                  <a:srgbClr val="3F4149"/>
+                </a:solidFill>
+                <a:latin typeface="Helvetica Neue"/>
+              </a:rPr>
+              <a:t>\tfrac</a:t>
+            </a:r>
+          </a:p>
+        </p:txBody>
+      </p:sp>
+      <p:sp>
+        <p:nvSpPr>
+          <p:cNvPr id="37" name="TextBox 36"/>
+          <p:cNvSpPr txBox="1"/>
+          <p:nvPr/>
+        </p:nvSpPr>
+        <p:spPr>
+          <a:xfrm>
+            <a:off x="4000100" y="4520000"/>
+            <a:ext cx="2500000" cy="330000"/>
+          </a:xfrm>
+          <a:prstGeom prst="rect">
+            <a:avLst/>
+          </a:prstGeom>
+          <a:noFill/>
+        </p:spPr>
+        <p:txBody>
+          <a:bodyPr wrap="square" lIns="0" rIns="0" tIns="0" bIns="0">
+            <a:spAutoFit/>
+          </a:bodyPr>
+          <a:lstStyle/>
+          <a:p>
+            <a:pPr algn="l">
+              <a:spcAft>
+                <a:spcPts val="600"/>
+              </a:spcAft>
+            </a:pPr>
+            <a:r>
+              <a:rPr sz="1150" b="0">
+                <a:solidFill>
+                  <a:srgbClr val="3F4149"/>
+                </a:solidFill>
+                <a:latin typeface="Helvetica Neue"/>
+              </a:rPr>
+              <a:t>0%</a:t>
+            </a:r>
+          </a:p>
+        </p:txBody>
+      </p:sp>
+      <p:sp>
+        <p:nvSpPr>
+          <p:cNvPr id="38" name="TextBox 37"/>
+          <p:cNvSpPr txBox="1"/>
+          <p:nvPr/>
+        </p:nvSpPr>
+        <p:spPr>
+          <a:xfrm>
+            <a:off x="6500100" y="4520000"/>
+            <a:ext cx="2400000" cy="330000"/>
+          </a:xfrm>
+          <a:prstGeom prst="rect">
+            <a:avLst/>
+          </a:prstGeom>
+          <a:noFill/>
+        </p:spPr>
+        <p:txBody>
+          <a:bodyPr wrap="square" lIns="0" rIns="0" tIns="0" bIns="0">
+            <a:spAutoFit/>
+          </a:bodyPr>
+          <a:lstStyle/>
+          <a:p>
+            <a:pPr algn="l">
+              <a:spcAft>
+                <a:spcPts val="600"/>
+              </a:spcAft>
+            </a:pPr>
+            <a:r>
+              <a:rPr sz="1150" b="0">
+                <a:solidFill>
+                  <a:srgbClr val="3F4149"/>
+                </a:solidFill>
+                <a:latin typeface="Helvetica Neue"/>
+              </a:rPr>
+              <a:t>100%</a:t>
+            </a:r>
+          </a:p>
+        </p:txBody>
+      </p:sp>
+      <p:sp>
+        <p:nvSpPr>
+          <p:cNvPr id="39" name="TextBox 38"/>
+          <p:cNvSpPr txBox="1"/>
+          <p:nvPr/>
+        </p:nvSpPr>
+        <p:spPr>
+          <a:xfrm>
+            <a:off x="8900100" y="4520000"/>
+            <a:ext cx="2400000" cy="330000"/>
+          </a:xfrm>
+          <a:prstGeom prst="rect">
+            <a:avLst/>
+          </a:prstGeom>
+          <a:noFill/>
+        </p:spPr>
+        <p:txBody>
+          <a:bodyPr wrap="square" lIns="0" rIns="0" tIns="0" bIns="0">
+            <a:spAutoFit/>
+          </a:bodyPr>
+          <a:lstStyle/>
+          <a:p>
+            <a:pPr algn="l">
+              <a:spcAft>
+                <a:spcPts val="600"/>
+              </a:spcAft>
+            </a:pPr>
+            <a:r>
+              <a:rPr sz="1150" b="0">
+                <a:solidFill>
+                  <a:srgbClr val="3F4149"/>
+                </a:solidFill>
+                <a:latin typeface="Helvetica Neue"/>
+              </a:rPr>
+              <a:t>0%</a:t>
+            </a:r>
+          </a:p>
+        </p:txBody>
+      </p:sp>
+      <p:sp>
+        <p:nvSpPr>
+          <p:cNvPr id="40" name="TextBox 39"/>
+          <p:cNvSpPr txBox="1"/>
+          <p:nvPr/>
+        </p:nvSpPr>
+        <p:spPr>
+          <a:xfrm>
+            <a:off x="800100" y="5200000"/>
+            <a:ext cx="10591495" cy="700000"/>
           </a:xfrm>
           <a:prstGeom prst="rect">
             <a:avLst/>
@@ -5705,53 +6779,53 @@
           <a:p>
             <a:pPr algn="l">
               <a:lnSpc>
-                <a:spcPct val="130000"/>
+                <a:spcPct val="140000"/>
               </a:lnSpc>
               <a:spcAft>
                 <a:spcPts val="600"/>
               </a:spcAft>
             </a:pPr>
             <a:r>
-              <a:rPr sz="1200" b="0">
+              <a:rPr sz="1250" b="0">
                 <a:solidFill>
                   <a:srgbClr val="3F4149"/>
                 </a:solidFill>
                 <a:latin typeface="Helvetica Neue"/>
               </a:rPr>
-              <a:t>Cách viết rất hiếm.</a:t>
+              <a:t>Thiệt hại thực tế bằng tỉ lệ gạch nhân tần suất. Cách viết đã đem ra thử là \dfrac — gạch nặng nhất,</a:t>
             </a:r>
           </a:p>
           <a:p>
             <a:pPr algn="l">
               <a:lnSpc>
-                <a:spcPct val="130000"/>
+                <a:spcPct val="140000"/>
               </a:lnSpc>
               <a:spcAft>
                 <a:spcPts val="600"/>
               </a:spcAft>
             </a:pPr>
             <a:r>
-              <a:rPr sz="1200" b="0">
+              <a:rPr sz="1250" b="0">
                 <a:solidFill>
                   <a:srgbClr val="3F4149"/>
                 </a:solidFill>
                 <a:latin typeface="Helvetica Neue"/>
               </a:rPr>
-              <a:t>Không thấy ảnh hưởng gì.</a:t>
-            </a:r>
-          </a:p>
-        </p:txBody>
-      </p:sp>
-      <p:sp>
-        <p:nvSpPr>
-          <p:cNvPr id="12" name="Rounded Rectangle 11"/>
+              <a:t>nhưng cũng hiếm nhất. Đó là ô cho hiệu ứng nhỏ nhất trong cả bảng.</a:t>
+            </a:r>
+          </a:p>
+        </p:txBody>
+      </p:sp>
+      <p:sp>
+        <p:nvSpPr>
+          <p:cNvPr id="41" name="Rounded Rectangle 40"/>
           <p:cNvSpPr/>
           <p:nvPr/>
         </p:nvSpPr>
         <p:spPr>
           <a:xfrm>
-            <a:off x="6200100" y="2920000"/>
-            <a:ext cx="5190000" cy="1850000"/>
+            <a:off x="680100" y="5870000"/>
+            <a:ext cx="10831495" cy="560000"/>
           </a:xfrm>
           <a:prstGeom prst="roundRect">
             <a:avLst>
@@ -5790,320 +6864,78 @@
       </p:sp>
       <p:sp>
         <p:nvSpPr>
-          <p:cNvPr id="13" name="Rounded Rectangle 12"/>
-          <p:cNvSpPr/>
-          <p:nvPr/>
-        </p:nvSpPr>
-        <p:spPr>
-          <a:xfrm>
-            <a:off x="6460100" y="3100000"/>
-            <a:ext cx="1250000" cy="300000"/>
-          </a:xfrm>
-          <a:prstGeom prst="roundRect">
-            <a:avLst>
-              <a:gd name="adj" fmla="val 50000"/>
-            </a:avLst>
-          </a:prstGeom>
-          <a:solidFill>
-            <a:srgbClr val="0173B2"/>
-          </a:solidFill>
-          <a:ln>
-            <a:noFill/>
-          </a:ln>
-          <a:effectLst/>
-        </p:spPr>
-        <p:style>
-          <a:lnRef idx="1">
-            <a:schemeClr val="accent1"/>
-          </a:lnRef>
-          <a:fillRef idx="3">
-            <a:schemeClr val="accent1"/>
-          </a:fillRef>
-          <a:effectRef idx="2">
-            <a:schemeClr val="accent1"/>
-          </a:effectRef>
-          <a:fontRef idx="minor">
-            <a:schemeClr val="lt1"/>
-          </a:fontRef>
-        </p:style>
-        <p:txBody>
-          <a:bodyPr rtlCol="0" anchor="ctr" wrap="none" lIns="0" rIns="0"/>
-          <a:lstStyle/>
-          <a:p>
-            <a:pPr algn="ctr"/>
-            <a:r>
-              <a:rPr sz="1050" b="1">
-                <a:solidFill>
-                  <a:srgbClr val="FFFFFF"/>
-                </a:solidFill>
-                <a:latin typeface="Helvetica Neue"/>
-              </a:rPr>
-              <a:t>SẼ CHẠY</a:t>
-            </a:r>
-          </a:p>
-        </p:txBody>
-      </p:sp>
-      <p:sp>
-        <p:nvSpPr>
-          <p:cNvPr id="14" name="TextBox 13"/>
-          <p:cNvSpPr txBox="1"/>
-          <p:nvPr/>
-        </p:nvSpPr>
-        <p:spPr>
-          <a:xfrm>
-            <a:off x="6460100" y="3560000"/>
-            <a:ext cx="2400000" cy="400000"/>
-          </a:xfrm>
-          <a:prstGeom prst="rect">
-            <a:avLst/>
-          </a:prstGeom>
-          <a:noFill/>
-        </p:spPr>
-        <p:txBody>
-          <a:bodyPr wrap="square" lIns="0" rIns="0" tIns="0" bIns="0">
-            <a:spAutoFit/>
-          </a:bodyPr>
-          <a:lstStyle/>
-          <a:p>
-            <a:pPr algn="l">
-              <a:spcAft>
-                <a:spcPts val="600"/>
-              </a:spcAft>
-            </a:pPr>
-            <a:r>
-              <a:rPr sz="1900" b="0">
-                <a:solidFill>
-                  <a:srgbClr val="16161A"/>
-                </a:solidFill>
-                <a:latin typeface="Helvetica Neue"/>
-              </a:rPr>
-              <a:t>\boxed</a:t>
-            </a:r>
-          </a:p>
-        </p:txBody>
-      </p:sp>
-      <p:sp>
-        <p:nvSpPr>
-          <p:cNvPr id="15" name="TextBox 14"/>
-          <p:cNvSpPr txBox="1"/>
-          <p:nvPr/>
-        </p:nvSpPr>
-        <p:spPr>
-          <a:xfrm>
-            <a:off x="9100100" y="3560000"/>
-            <a:ext cx="2100000" cy="400000"/>
-          </a:xfrm>
-          <a:prstGeom prst="rect">
-            <a:avLst/>
-          </a:prstGeom>
-          <a:noFill/>
-        </p:spPr>
-        <p:txBody>
-          <a:bodyPr wrap="square" lIns="0" rIns="0" tIns="0" bIns="0">
-            <a:spAutoFit/>
-          </a:bodyPr>
-          <a:lstStyle/>
-          <a:p>
-            <a:pPr algn="l">
-              <a:spcAft>
-                <a:spcPts val="600"/>
-              </a:spcAft>
-            </a:pPr>
-            <a:r>
-              <a:rPr sz="2600" b="1">
+          <p:cNvPr id="42" name="TextBox 41"/>
+          <p:cNvSpPr txBox="1"/>
+          <p:nvPr/>
+        </p:nvSpPr>
+        <p:spPr>
+          <a:xfrm>
+            <a:off x="920100" y="5985000"/>
+            <a:ext cx="10351495" cy="330000"/>
+          </a:xfrm>
+          <a:prstGeom prst="rect">
+            <a:avLst/>
+          </a:prstGeom>
+          <a:noFill/>
+        </p:spPr>
+        <p:txBody>
+          <a:bodyPr wrap="square" lIns="0" rIns="0" tIns="0" bIns="0">
+            <a:spAutoFit/>
+          </a:bodyPr>
+          <a:lstStyle/>
+          <a:p>
+            <a:pPr algn="l">
+              <a:spcAft>
+                <a:spcPts val="600"/>
+              </a:spcAft>
+            </a:pPr>
+            <a:r>
+              <a:rPr sz="1250" b="1">
                 <a:solidFill>
                   <a:srgbClr val="0173B2"/>
                 </a:solidFill>
-                <a:latin typeface="Georgia"/>
-              </a:rPr>
-              <a:t>51%</a:t>
-            </a:r>
-          </a:p>
-        </p:txBody>
-      </p:sp>
-      <p:sp>
-        <p:nvSpPr>
-          <p:cNvPr id="16" name="TextBox 15"/>
-          <p:cNvSpPr txBox="1"/>
-          <p:nvPr/>
-        </p:nvSpPr>
-        <p:spPr>
-          <a:xfrm>
-            <a:off x="6460100" y="4120000"/>
-            <a:ext cx="4700000" cy="550000"/>
-          </a:xfrm>
-          <a:prstGeom prst="rect">
-            <a:avLst/>
-          </a:prstGeom>
-          <a:noFill/>
-        </p:spPr>
-        <p:txBody>
-          <a:bodyPr wrap="square" lIns="0" rIns="0" tIns="0" bIns="0">
-            <a:spAutoFit/>
-          </a:bodyPr>
-          <a:lstStyle/>
-          <a:p>
-            <a:pPr algn="l">
-              <a:lnSpc>
-                <a:spcPct val="130000"/>
-              </a:lnSpc>
-              <a:spcAft>
-                <a:spcPts val="600"/>
-              </a:spcAft>
-            </a:pPr>
-            <a:r>
-              <a:rPr sz="1200" b="0">
-                <a:solidFill>
-                  <a:srgbClr val="3F4149"/>
-                </a:solidFill>
-                <a:latin typeface="Helvetica Neue"/>
-              </a:rPr>
-              <a:t>Cách viết model dùng thường xuyên.</a:t>
-            </a:r>
-          </a:p>
-          <a:p>
-            <a:pPr algn="l">
-              <a:lnSpc>
-                <a:spcPct val="130000"/>
-              </a:lnSpc>
-              <a:spcAft>
-                <a:spcPts val="600"/>
-              </a:spcAft>
-            </a:pPr>
-            <a:r>
-              <a:rPr sz="1200" b="0">
-                <a:solidFill>
-                  <a:srgbClr val="3F4149"/>
-                </a:solidFill>
-                <a:latin typeface="Helvetica Neue"/>
-              </a:rPr>
-              <a:t>Gấp khoảng 90 lần cách trên.</a:t>
-            </a:r>
-          </a:p>
-        </p:txBody>
-      </p:sp>
-      <p:sp>
-        <p:nvSpPr>
-          <p:cNvPr id="17" name="Rounded Rectangle 16"/>
-          <p:cNvSpPr/>
-          <p:nvPr/>
-        </p:nvSpPr>
-        <p:spPr>
-          <a:xfrm>
-            <a:off x="680100" y="5000000"/>
-            <a:ext cx="10831495" cy="1180000"/>
-          </a:xfrm>
-          <a:prstGeom prst="roundRect">
-            <a:avLst>
-              <a:gd name="adj" fmla="val 4000"/>
-            </a:avLst>
-          </a:prstGeom>
-          <a:solidFill>
-            <a:srgbClr val="FDFAF0"/>
-          </a:solidFill>
-          <a:ln>
-            <a:noFill/>
-          </a:ln>
-          <a:effectLst/>
-        </p:spPr>
-        <p:style>
-          <a:lnRef idx="1">
-            <a:schemeClr val="accent1"/>
-          </a:lnRef>
-          <a:fillRef idx="3">
-            <a:schemeClr val="accent1"/>
-          </a:fillRef>
-          <a:effectRef idx="2">
-            <a:schemeClr val="accent1"/>
-          </a:effectRef>
-          <a:fontRef idx="minor">
-            <a:schemeClr val="lt1"/>
-          </a:fontRef>
-        </p:style>
-        <p:txBody>
-          <a:bodyPr rtlCol="0" anchor="ctr"/>
-          <a:lstStyle/>
-          <a:p>
-            <a:pPr algn="ctr"/>
-          </a:p>
-        </p:txBody>
-      </p:sp>
-      <p:sp>
-        <p:nvSpPr>
-          <p:cNvPr id="18" name="TextBox 17"/>
-          <p:cNvSpPr txBox="1"/>
-          <p:nvPr/>
-        </p:nvSpPr>
-        <p:spPr>
-          <a:xfrm>
-            <a:off x="920100" y="5180000"/>
-            <a:ext cx="10351495" cy="850000"/>
-          </a:xfrm>
-          <a:prstGeom prst="rect">
-            <a:avLst/>
-          </a:prstGeom>
-          <a:noFill/>
-        </p:spPr>
-        <p:txBody>
-          <a:bodyPr wrap="square" lIns="0" rIns="0" tIns="0" bIns="0">
-            <a:spAutoFit/>
-          </a:bodyPr>
-          <a:lstStyle/>
-          <a:p>
-            <a:pPr algn="l">
-              <a:lnSpc>
-                <a:spcPct val="140000"/>
-              </a:lnSpc>
-              <a:spcAft>
-                <a:spcPts val="600"/>
-              </a:spcAft>
-            </a:pPr>
-            <a:r>
-              <a:rPr sz="1250" b="0">
-                <a:solidFill>
-                  <a:srgbClr val="16161A"/>
-                </a:solidFill>
-                <a:latin typeface="Helvetica Neue"/>
-              </a:rPr>
-              <a:t>Nếu bắt máy chấm gạch một cách viết phổ biến mà model bắt đầu tụt điểm, thì quy luật trên được</a:t>
-            </a:r>
-          </a:p>
-          <a:p>
-            <a:pPr algn="l">
-              <a:lnSpc>
-                <a:spcPct val="140000"/>
-              </a:lnSpc>
-              <a:spcAft>
-                <a:spcPts val="600"/>
-              </a:spcAft>
-            </a:pPr>
-            <a:r>
-              <a:rPr sz="1250" b="0">
-                <a:solidFill>
-                  <a:srgbClr val="16161A"/>
-                </a:solidFill>
-                <a:latin typeface="Helvetica Neue"/>
-              </a:rPr>
-              <a:t>chứng minh bằng thực nghiệm, chứ không còn là lời giải thích cho một kết quả âm tính. Khi đó đề tài</a:t>
-            </a:r>
-          </a:p>
-          <a:p>
-            <a:pPr algn="l">
-              <a:lnSpc>
-                <a:spcPct val="140000"/>
-              </a:lnSpc>
-              <a:spcAft>
-                <a:spcPts val="600"/>
-              </a:spcAft>
-            </a:pPr>
-            <a:r>
-              <a:rPr sz="1250" b="0">
-                <a:solidFill>
-                  <a:srgbClr val="16161A"/>
-                </a:solidFill>
-                <a:latin typeface="Helvetica Neue"/>
-              </a:rPr>
-              <a:t>có một con số dùng được: lỗi máy chấm phải phổ biến tới ngưỡng nào thì mới đáng lo.</a:t>
+                <a:latin typeface="Helvetica Neue"/>
+              </a:rPr>
+              <a:t>Vùng đáng quan tâm — cách viết vừa phổ biến vừa bị gạch — thì chưa ai đo, kể cả đề tài này.</a:t>
+            </a:r>
+          </a:p>
+        </p:txBody>
+      </p:sp>
+      <p:sp>
+        <p:nvSpPr>
+          <p:cNvPr id="43" name="TextBox 42"/>
+          <p:cNvSpPr txBox="1"/>
+          <p:nvPr/>
+        </p:nvSpPr>
+        <p:spPr>
+          <a:xfrm>
+            <a:off x="800100" y="6560000"/>
+            <a:ext cx="10591495" cy="260000"/>
+          </a:xfrm>
+          <a:prstGeom prst="rect">
+            <a:avLst/>
+          </a:prstGeom>
+          <a:noFill/>
+        </p:spPr>
+        <p:txBody>
+          <a:bodyPr wrap="square" lIns="0" rIns="0" tIns="0" bIns="0">
+            <a:spAutoFit/>
+          </a:bodyPr>
+          <a:lstStyle/>
+          <a:p>
+            <a:pPr algn="l">
+              <a:spcAft>
+                <a:spcPts val="600"/>
+              </a:spcAft>
+            </a:pPr>
+            <a:r>
+              <a:rPr sz="950" b="0">
+                <a:solidFill>
+                  <a:srgbClr val="8A8D96"/>
+                </a:solidFill>
+                <a:latin typeface="Helvetica Neue"/>
+              </a:rPr>
+              <a:t>Tỉ lệ gạch lấy từ phép thử ép máy chấm trên đáp án viết lại; tần suất lấy từ 4000 lời giải model sinh mỗi vòng.</a:t>
             </a:r>
           </a:p>
         </p:txBody>
@@ -6160,7 +6992,7 @@
                 </a:solidFill>
                 <a:latin typeface="Helvetica Neue"/>
               </a:rPr>
-              <a:t>CÂU HỎI CHƯA TRẢ LỜI ĐƯỢC</a:t>
+              <a:t>ĐỀ TÀI TIẾP THEO</a:t>
             </a:r>
           </a:p>
         </p:txBody>
@@ -6241,7 +7073,7 @@
                 </a:solidFill>
                 <a:latin typeface="Georgia"/>
               </a:rPr>
-              <a:t>Thí nghiệm kiểm chứng đang chạy</a:t>
+              <a:t>Đo ngưỡng: lỗi phải phổ biến tới mức nào mới gây hại?</a:t>
             </a:r>
           </a:p>
         </p:txBody>
@@ -6254,7 +7086,7 @@
         </p:nvSpPr>
         <p:spPr>
           <a:xfrm>
-            <a:off x="800100" y="1620000"/>
+            <a:off x="800100" y="1600000"/>
             <a:ext cx="10591495" cy="700000"/>
           </a:xfrm>
           <a:prstGeom prst="rect">
@@ -6270,39 +7102,39 @@
           <a:p>
             <a:pPr algn="l">
               <a:lnSpc>
-                <a:spcPct val="140000"/>
+                <a:spcPct val="145000"/>
               </a:lnSpc>
               <a:spcAft>
                 <a:spcPts val="600"/>
               </a:spcAft>
             </a:pPr>
             <a:r>
-              <a:rPr sz="1400" b="0">
-                <a:solidFill>
-                  <a:srgbClr val="16161A"/>
-                </a:solidFill>
-                <a:latin typeface="Helvetica Neue"/>
-              </a:rPr>
-              <a:t>Cả 7 lần chạy, điểm đều tụt khoảng 3 điểm ngay ở vòng 1 rồi đứng yên. Nhưng các công trình lớn</a:t>
+              <a:rPr sz="1350" b="0">
+                <a:solidFill>
+                  <a:srgbClr val="3F4149"/>
+                </a:solidFill>
+                <a:latin typeface="Helvetica Neue"/>
+              </a:rPr>
+              <a:t>Cách làm giữ nguyên toàn bộ vòng lặp, chỉ đổi chỗ máy chấm bị lệch. Mỗi lần chạy là một điểm</a:t>
             </a:r>
           </a:p>
           <a:p>
             <a:pPr algn="l">
               <a:lnSpc>
-                <a:spcPct val="140000"/>
+                <a:spcPct val="145000"/>
               </a:lnSpc>
               <a:spcAft>
                 <a:spcPts val="600"/>
               </a:spcAft>
             </a:pPr>
             <a:r>
-              <a:rPr sz="1400" b="0">
-                <a:solidFill>
-                  <a:srgbClr val="16161A"/>
-                </a:solidFill>
-                <a:latin typeface="Helvetica Neue"/>
-              </a:rPr>
-              <a:t>về tự học đều báo cáo model KHÁ LÊN. Chưa giải thích được vì sao kết quả ở đây ngược lại.</a:t>
+              <a:rPr sz="1350" b="0">
+                <a:solidFill>
+                  <a:srgbClr val="3F4149"/>
+                </a:solidFill>
+                <a:latin typeface="Helvetica Neue"/>
+              </a:rPr>
+              <a:t>trên trục tần suất, và điểm đầu tiên thì đã có sẵn từ ba tuần qua.</a:t>
             </a:r>
           </a:p>
         </p:txBody>
@@ -6315,8 +7147,8 @@
         </p:nvSpPr>
         <p:spPr>
           <a:xfrm>
-            <a:off x="680100" y="2550000"/>
-            <a:ext cx="10831495" cy="900000"/>
+            <a:off x="800100" y="2500000"/>
+            <a:ext cx="5190000" cy="1800000"/>
           </a:xfrm>
           <a:prstGeom prst="roundRect">
             <a:avLst>
@@ -6355,122 +7187,22 @@
       </p:sp>
       <p:sp>
         <p:nvSpPr>
-          <p:cNvPr id="7" name="TextBox 6"/>
-          <p:cNvSpPr txBox="1"/>
-          <p:nvPr/>
-        </p:nvSpPr>
-        <p:spPr>
-          <a:xfrm>
-            <a:off x="920100" y="2720000"/>
-            <a:ext cx="10351495" cy="640000"/>
-          </a:xfrm>
-          <a:prstGeom prst="rect">
-            <a:avLst/>
-          </a:prstGeom>
-          <a:noFill/>
-        </p:spPr>
-        <p:txBody>
-          <a:bodyPr wrap="square" lIns="0" rIns="0" tIns="0" bIns="0">
-            <a:spAutoFit/>
-          </a:bodyPr>
-          <a:lstStyle/>
-          <a:p>
-            <a:pPr algn="l">
-              <a:lnSpc>
-                <a:spcPct val="145000"/>
-              </a:lnSpc>
-              <a:spcAft>
-                <a:spcPts val="600"/>
-              </a:spcAft>
-            </a:pPr>
-            <a:r>
-              <a:rPr sz="1250" b="0">
-                <a:solidFill>
-                  <a:srgbClr val="3F4149"/>
-                </a:solidFill>
-                <a:latin typeface="Helvetica Neue"/>
-              </a:rPr>
-              <a:t>Có một khả năng đơn giản chưa loại trừ được: model này vốn đã được tinh chỉnh rất kỹ. Dạy thêm</a:t>
-            </a:r>
-          </a:p>
-          <a:p>
-            <a:pPr algn="l">
-              <a:lnSpc>
-                <a:spcPct val="145000"/>
-              </a:lnSpc>
-              <a:spcAft>
-                <a:spcPts val="600"/>
-              </a:spcAft>
-            </a:pPr>
-            <a:r>
-              <a:rPr sz="1250" b="0">
-                <a:solidFill>
-                  <a:srgbClr val="3F4149"/>
-                </a:solidFill>
-                <a:latin typeface="Helvetica Neue"/>
-              </a:rPr>
-              <a:t>một lượng nhỏ có thể chỉ làm nó lệch khỏi trạng thái tốt sẵn có, bất kể dạy bằng dữ liệu gì.</a:t>
-            </a:r>
-          </a:p>
-        </p:txBody>
-      </p:sp>
-      <p:sp>
-        <p:nvSpPr>
-          <p:cNvPr id="8" name="TextBox 7"/>
-          <p:cNvSpPr txBox="1"/>
-          <p:nvPr/>
-        </p:nvSpPr>
-        <p:spPr>
-          <a:xfrm>
-            <a:off x="800100" y="3720000"/>
-            <a:ext cx="10591495" cy="300000"/>
-          </a:xfrm>
-          <a:prstGeom prst="rect">
-            <a:avLst/>
-          </a:prstGeom>
-          <a:noFill/>
-        </p:spPr>
-        <p:txBody>
-          <a:bodyPr wrap="square" lIns="0" rIns="0" tIns="0" bIns="0">
-            <a:spAutoFit/>
-          </a:bodyPr>
-          <a:lstStyle/>
-          <a:p>
-            <a:pPr algn="l">
-              <a:spcAft>
-                <a:spcPts val="600"/>
-              </a:spcAft>
-            </a:pPr>
-            <a:r>
-              <a:rPr sz="1100" b="1">
-                <a:solidFill>
-                  <a:srgbClr val="8A8D96"/>
-                </a:solidFill>
-                <a:latin typeface="Helvetica Neue"/>
-              </a:rPr>
-              <a:t>THÍ NGHIỆM PHÂN ĐỊNH: dạy bằng lời giải mẫu của sách, thay vì bài model tự làm</a:t>
-            </a:r>
-          </a:p>
-        </p:txBody>
-      </p:sp>
-      <p:sp>
-        <p:nvSpPr>
-          <p:cNvPr id="9" name="Rounded Rectangle 8"/>
+          <p:cNvPr id="7" name="Rounded Rectangle 6"/>
           <p:cNvSpPr/>
           <p:nvPr/>
         </p:nvSpPr>
         <p:spPr>
           <a:xfrm>
-            <a:off x="800100" y="4180000"/>
-            <a:ext cx="5190000" cy="1350000"/>
+            <a:off x="1060100" y="2680000"/>
+            <a:ext cx="1900000" cy="300000"/>
           </a:xfrm>
           <a:prstGeom prst="roundRect">
             <a:avLst>
-              <a:gd name="adj" fmla="val 4000"/>
+              <a:gd name="adj" fmla="val 50000"/>
             </a:avLst>
           </a:prstGeom>
           <a:solidFill>
-            <a:srgbClr val="F5F5F7"/>
+            <a:srgbClr val="8A8D96"/>
           </a:solidFill>
           <a:ln>
             <a:noFill/>
@@ -6492,6 +7224,200 @@
           </a:fontRef>
         </p:style>
         <p:txBody>
+          <a:bodyPr rtlCol="0" anchor="ctr" wrap="none" lIns="0" rIns="0"/>
+          <a:lstStyle/>
+          <a:p>
+            <a:pPr algn="ctr"/>
+            <a:r>
+              <a:rPr sz="1050" b="1">
+                <a:solidFill>
+                  <a:srgbClr val="FFFFFF"/>
+                </a:solidFill>
+                <a:latin typeface="Helvetica Neue"/>
+              </a:rPr>
+              <a:t>ĐIỂM 1 — ĐÃ CÓ</a:t>
+            </a:r>
+          </a:p>
+        </p:txBody>
+      </p:sp>
+      <p:sp>
+        <p:nvSpPr>
+          <p:cNvPr id="8" name="TextBox 7"/>
+          <p:cNvSpPr txBox="1"/>
+          <p:nvPr/>
+        </p:nvSpPr>
+        <p:spPr>
+          <a:xfrm>
+            <a:off x="1060100" y="3130000"/>
+            <a:ext cx="2400000" cy="400000"/>
+          </a:xfrm>
+          <a:prstGeom prst="rect">
+            <a:avLst/>
+          </a:prstGeom>
+          <a:noFill/>
+        </p:spPr>
+        <p:txBody>
+          <a:bodyPr wrap="square" lIns="0" rIns="0" tIns="0" bIns="0">
+            <a:spAutoFit/>
+          </a:bodyPr>
+          <a:lstStyle/>
+          <a:p>
+            <a:pPr algn="l">
+              <a:spcAft>
+                <a:spcPts val="600"/>
+              </a:spcAft>
+            </a:pPr>
+            <a:r>
+              <a:rPr sz="1900" b="0">
+                <a:solidFill>
+                  <a:srgbClr val="16161A"/>
+                </a:solidFill>
+                <a:latin typeface="Helvetica Neue"/>
+              </a:rPr>
+              <a:t>\dfrac</a:t>
+            </a:r>
+          </a:p>
+        </p:txBody>
+      </p:sp>
+      <p:sp>
+        <p:nvSpPr>
+          <p:cNvPr id="9" name="TextBox 8"/>
+          <p:cNvSpPr txBox="1"/>
+          <p:nvPr/>
+        </p:nvSpPr>
+        <p:spPr>
+          <a:xfrm>
+            <a:off x="3700100" y="3130000"/>
+            <a:ext cx="2100000" cy="400000"/>
+          </a:xfrm>
+          <a:prstGeom prst="rect">
+            <a:avLst/>
+          </a:prstGeom>
+          <a:noFill/>
+        </p:spPr>
+        <p:txBody>
+          <a:bodyPr wrap="square" lIns="0" rIns="0" tIns="0" bIns="0">
+            <a:spAutoFit/>
+          </a:bodyPr>
+          <a:lstStyle/>
+          <a:p>
+            <a:pPr algn="l">
+              <a:spcAft>
+                <a:spcPts val="600"/>
+              </a:spcAft>
+            </a:pPr>
+            <a:r>
+              <a:rPr sz="2600" b="1">
+                <a:solidFill>
+                  <a:srgbClr val="8A8D96"/>
+                </a:solidFill>
+                <a:latin typeface="Georgia"/>
+              </a:rPr>
+              <a:t>0,55%</a:t>
+            </a:r>
+          </a:p>
+        </p:txBody>
+      </p:sp>
+      <p:sp>
+        <p:nvSpPr>
+          <p:cNvPr id="10" name="TextBox 9"/>
+          <p:cNvSpPr txBox="1"/>
+          <p:nvPr/>
+        </p:nvSpPr>
+        <p:spPr>
+          <a:xfrm>
+            <a:off x="1060100" y="3670000"/>
+            <a:ext cx="4700000" cy="550000"/>
+          </a:xfrm>
+          <a:prstGeom prst="rect">
+            <a:avLst/>
+          </a:prstGeom>
+          <a:noFill/>
+        </p:spPr>
+        <p:txBody>
+          <a:bodyPr wrap="square" lIns="0" rIns="0" tIns="0" bIns="0">
+            <a:spAutoFit/>
+          </a:bodyPr>
+          <a:lstStyle/>
+          <a:p>
+            <a:pPr algn="l">
+              <a:lnSpc>
+                <a:spcPct val="130000"/>
+              </a:lnSpc>
+              <a:spcAft>
+                <a:spcPts val="600"/>
+              </a:spcAft>
+            </a:pPr>
+            <a:r>
+              <a:rPr sz="1200" b="0">
+                <a:solidFill>
+                  <a:srgbClr val="3F4149"/>
+                </a:solidFill>
+                <a:latin typeface="Helvetica Neue"/>
+              </a:rPr>
+              <a:t>Không thấy ảnh hưởng.</a:t>
+            </a:r>
+          </a:p>
+          <a:p>
+            <a:pPr algn="l">
+              <a:lnSpc>
+                <a:spcPct val="130000"/>
+              </a:lnSpc>
+              <a:spcAft>
+                <a:spcPts val="600"/>
+              </a:spcAft>
+            </a:pPr>
+            <a:r>
+              <a:rPr sz="1200" b="0">
+                <a:solidFill>
+                  <a:srgbClr val="3F4149"/>
+                </a:solidFill>
+                <a:latin typeface="Helvetica Neue"/>
+              </a:rPr>
+              <a:t>Đây là kết quả ba tuần vừa rồi.</a:t>
+            </a:r>
+          </a:p>
+        </p:txBody>
+      </p:sp>
+      <p:sp>
+        <p:nvSpPr>
+          <p:cNvPr id="11" name="Rounded Rectangle 10"/>
+          <p:cNvSpPr/>
+          <p:nvPr/>
+        </p:nvSpPr>
+        <p:spPr>
+          <a:xfrm>
+            <a:off x="6200100" y="2500000"/>
+            <a:ext cx="5190000" cy="1800000"/>
+          </a:xfrm>
+          <a:prstGeom prst="roundRect">
+            <a:avLst>
+              <a:gd name="adj" fmla="val 4000"/>
+            </a:avLst>
+          </a:prstGeom>
+          <a:solidFill>
+            <a:srgbClr val="F0F6FA"/>
+          </a:solidFill>
+          <a:ln>
+            <a:noFill/>
+          </a:ln>
+          <a:effectLst/>
+        </p:spPr>
+        <p:style>
+          <a:lnRef idx="1">
+            <a:schemeClr val="accent1"/>
+          </a:lnRef>
+          <a:fillRef idx="3">
+            <a:schemeClr val="accent1"/>
+          </a:fillRef>
+          <a:effectRef idx="2">
+            <a:schemeClr val="accent1"/>
+          </a:effectRef>
+          <a:fontRef idx="minor">
+            <a:schemeClr val="lt1"/>
+          </a:fontRef>
+        </p:style>
+        <p:txBody>
           <a:bodyPr rtlCol="0" anchor="ctr"/>
           <a:lstStyle/>
           <a:p>
@@ -6501,14 +7427,247 @@
       </p:sp>
       <p:sp>
         <p:nvSpPr>
-          <p:cNvPr id="10" name="Rounded Rectangle 9"/>
+          <p:cNvPr id="12" name="Rounded Rectangle 11"/>
           <p:cNvSpPr/>
           <p:nvPr/>
         </p:nvSpPr>
         <p:spPr>
           <a:xfrm>
-            <a:off x="1040100" y="4360000"/>
-            <a:ext cx="1500000" cy="310000"/>
+            <a:off x="6460100" y="2680000"/>
+            <a:ext cx="1900000" cy="300000"/>
+          </a:xfrm>
+          <a:prstGeom prst="roundRect">
+            <a:avLst>
+              <a:gd name="adj" fmla="val 50000"/>
+            </a:avLst>
+          </a:prstGeom>
+          <a:solidFill>
+            <a:srgbClr val="0173B2"/>
+          </a:solidFill>
+          <a:ln>
+            <a:noFill/>
+          </a:ln>
+          <a:effectLst/>
+        </p:spPr>
+        <p:style>
+          <a:lnRef idx="1">
+            <a:schemeClr val="accent1"/>
+          </a:lnRef>
+          <a:fillRef idx="3">
+            <a:schemeClr val="accent1"/>
+          </a:fillRef>
+          <a:effectRef idx="2">
+            <a:schemeClr val="accent1"/>
+          </a:effectRef>
+          <a:fontRef idx="minor">
+            <a:schemeClr val="lt1"/>
+          </a:fontRef>
+        </p:style>
+        <p:txBody>
+          <a:bodyPr rtlCol="0" anchor="ctr" wrap="none" lIns="0" rIns="0"/>
+          <a:lstStyle/>
+          <a:p>
+            <a:pPr algn="ctr"/>
+            <a:r>
+              <a:rPr sz="1050" b="1">
+                <a:solidFill>
+                  <a:srgbClr val="FFFFFF"/>
+                </a:solidFill>
+                <a:latin typeface="Helvetica Neue"/>
+              </a:rPr>
+              <a:t>ĐIỂM 2 — SẼ CHẠY</a:t>
+            </a:r>
+          </a:p>
+        </p:txBody>
+      </p:sp>
+      <p:sp>
+        <p:nvSpPr>
+          <p:cNvPr id="13" name="TextBox 12"/>
+          <p:cNvSpPr txBox="1"/>
+          <p:nvPr/>
+        </p:nvSpPr>
+        <p:spPr>
+          <a:xfrm>
+            <a:off x="6460100" y="3130000"/>
+            <a:ext cx="2400000" cy="400000"/>
+          </a:xfrm>
+          <a:prstGeom prst="rect">
+            <a:avLst/>
+          </a:prstGeom>
+          <a:noFill/>
+        </p:spPr>
+        <p:txBody>
+          <a:bodyPr wrap="square" lIns="0" rIns="0" tIns="0" bIns="0">
+            <a:spAutoFit/>
+          </a:bodyPr>
+          <a:lstStyle/>
+          <a:p>
+            <a:pPr algn="l">
+              <a:spcAft>
+                <a:spcPts val="600"/>
+              </a:spcAft>
+            </a:pPr>
+            <a:r>
+              <a:rPr sz="1900" b="0">
+                <a:solidFill>
+                  <a:srgbClr val="16161A"/>
+                </a:solidFill>
+                <a:latin typeface="Helvetica Neue"/>
+              </a:rPr>
+              <a:t>\boxed</a:t>
+            </a:r>
+          </a:p>
+        </p:txBody>
+      </p:sp>
+      <p:sp>
+        <p:nvSpPr>
+          <p:cNvPr id="14" name="TextBox 13"/>
+          <p:cNvSpPr txBox="1"/>
+          <p:nvPr/>
+        </p:nvSpPr>
+        <p:spPr>
+          <a:xfrm>
+            <a:off x="9100100" y="3130000"/>
+            <a:ext cx="2100000" cy="400000"/>
+          </a:xfrm>
+          <a:prstGeom prst="rect">
+            <a:avLst/>
+          </a:prstGeom>
+          <a:noFill/>
+        </p:spPr>
+        <p:txBody>
+          <a:bodyPr wrap="square" lIns="0" rIns="0" tIns="0" bIns="0">
+            <a:spAutoFit/>
+          </a:bodyPr>
+          <a:lstStyle/>
+          <a:p>
+            <a:pPr algn="l">
+              <a:spcAft>
+                <a:spcPts val="600"/>
+              </a:spcAft>
+            </a:pPr>
+            <a:r>
+              <a:rPr sz="2600" b="1">
+                <a:solidFill>
+                  <a:srgbClr val="0173B2"/>
+                </a:solidFill>
+                <a:latin typeface="Georgia"/>
+              </a:rPr>
+              <a:t>51%</a:t>
+            </a:r>
+          </a:p>
+        </p:txBody>
+      </p:sp>
+      <p:sp>
+        <p:nvSpPr>
+          <p:cNvPr id="15" name="TextBox 14"/>
+          <p:cNvSpPr txBox="1"/>
+          <p:nvPr/>
+        </p:nvSpPr>
+        <p:spPr>
+          <a:xfrm>
+            <a:off x="6460100" y="3670000"/>
+            <a:ext cx="4700000" cy="550000"/>
+          </a:xfrm>
+          <a:prstGeom prst="rect">
+            <a:avLst/>
+          </a:prstGeom>
+          <a:noFill/>
+        </p:spPr>
+        <p:txBody>
+          <a:bodyPr wrap="square" lIns="0" rIns="0" tIns="0" bIns="0">
+            <a:spAutoFit/>
+          </a:bodyPr>
+          <a:lstStyle/>
+          <a:p>
+            <a:pPr algn="l">
+              <a:lnSpc>
+                <a:spcPct val="130000"/>
+              </a:lnSpc>
+              <a:spcAft>
+                <a:spcPts val="600"/>
+              </a:spcAft>
+            </a:pPr>
+            <a:r>
+              <a:rPr sz="1200" b="0">
+                <a:solidFill>
+                  <a:srgbClr val="3F4149"/>
+                </a:solidFill>
+                <a:latin typeface="Helvetica Neue"/>
+              </a:rPr>
+              <a:t>Phổ biến gấp khoảng 90 lần.</a:t>
+            </a:r>
+          </a:p>
+          <a:p>
+            <a:pPr algn="l">
+              <a:lnSpc>
+                <a:spcPct val="130000"/>
+              </a:lnSpc>
+              <a:spcAft>
+                <a:spcPts val="600"/>
+              </a:spcAft>
+            </a:pPr>
+            <a:r>
+              <a:rPr sz="1200" b="0">
+                <a:solidFill>
+                  <a:srgbClr val="3F4149"/>
+                </a:solidFill>
+                <a:latin typeface="Helvetica Neue"/>
+              </a:rPr>
+              <a:t>Một lần chạy, khoảng 5 giờ GPU.</a:t>
+            </a:r>
+          </a:p>
+        </p:txBody>
+      </p:sp>
+      <p:sp>
+        <p:nvSpPr>
+          <p:cNvPr id="16" name="TextBox 15"/>
+          <p:cNvSpPr txBox="1"/>
+          <p:nvPr/>
+        </p:nvSpPr>
+        <p:spPr>
+          <a:xfrm>
+            <a:off x="800100" y="4520000"/>
+            <a:ext cx="10591495" cy="300000"/>
+          </a:xfrm>
+          <a:prstGeom prst="rect">
+            <a:avLst/>
+          </a:prstGeom>
+          <a:noFill/>
+        </p:spPr>
+        <p:txBody>
+          <a:bodyPr wrap="square" lIns="0" rIns="0" tIns="0" bIns="0">
+            <a:spAutoFit/>
+          </a:bodyPr>
+          <a:lstStyle/>
+          <a:p>
+            <a:pPr algn="l">
+              <a:spcAft>
+                <a:spcPts val="600"/>
+              </a:spcAft>
+            </a:pPr>
+            <a:r>
+              <a:rPr sz="1100" b="1">
+                <a:solidFill>
+                  <a:srgbClr val="8A8D96"/>
+                </a:solidFill>
+                <a:latin typeface="Helvetica Neue"/>
+              </a:rPr>
+              <a:t>HAI KHẢ NĂNG, CẢ HAI ĐỀU RA KẾT QUẢ DÙNG ĐƯỢC</a:t>
+            </a:r>
+          </a:p>
+        </p:txBody>
+      </p:sp>
+      <p:sp>
+        <p:nvSpPr>
+          <p:cNvPr id="17" name="Rounded Rectangle 16"/>
+          <p:cNvSpPr/>
+          <p:nvPr/>
+        </p:nvSpPr>
+        <p:spPr>
+          <a:xfrm>
+            <a:off x="800100" y="4930000"/>
+            <a:ext cx="1750000" cy="310000"/>
           </a:xfrm>
           <a:prstGeom prst="roundRect">
             <a:avLst>
@@ -6549,21 +7708,21 @@
                 </a:solidFill>
                 <a:latin typeface="Helvetica Neue"/>
               </a:rPr>
-              <a:t>Nếu khá lên</a:t>
-            </a:r>
-          </a:p>
-        </p:txBody>
-      </p:sp>
-      <p:sp>
-        <p:nvSpPr>
-          <p:cNvPr id="11" name="TextBox 10"/>
-          <p:cNvSpPr txBox="1"/>
-          <p:nvPr/>
-        </p:nvSpPr>
-        <p:spPr>
-          <a:xfrm>
-            <a:off x="1040100" y="4830000"/>
-            <a:ext cx="4700000" cy="600000"/>
+              <a:t>Nếu tụt điểm</a:t>
+            </a:r>
+          </a:p>
+        </p:txBody>
+      </p:sp>
+      <p:sp>
+        <p:nvSpPr>
+          <p:cNvPr id="18" name="TextBox 17"/>
+          <p:cNvSpPr txBox="1"/>
+          <p:nvPr/>
+        </p:nvSpPr>
+        <p:spPr>
+          <a:xfrm>
+            <a:off x="800100" y="5400000"/>
+            <a:ext cx="5000000" cy="600000"/>
           </a:xfrm>
           <a:prstGeom prst="rect">
             <a:avLst/>
@@ -6591,7 +7750,7 @@
                 </a:solidFill>
                 <a:latin typeface="Helvetica Neue"/>
               </a:rPr>
-              <a:t>thì vòng lặp không sao, và cái hại đúng là</a:t>
+              <a:t>quy luật được chứng minh bằng thực nghiệm, và đề tài</a:t>
             </a:r>
           </a:p>
           <a:p>
@@ -6610,67 +7769,21 @@
                 </a:solidFill>
                 <a:latin typeface="Helvetica Neue"/>
               </a:rPr>
-              <a:t>do model học từ bài của chính nó.</a:t>
-            </a:r>
-          </a:p>
-        </p:txBody>
-      </p:sp>
-      <p:sp>
-        <p:nvSpPr>
-          <p:cNvPr id="12" name="Rounded Rectangle 11"/>
+              <a:t>có một ngưỡng cụ thể để cảnh báo người dùng.</a:t>
+            </a:r>
+          </a:p>
+        </p:txBody>
+      </p:sp>
+      <p:sp>
+        <p:nvSpPr>
+          <p:cNvPr id="19" name="Rounded Rectangle 18"/>
           <p:cNvSpPr/>
           <p:nvPr/>
         </p:nvSpPr>
         <p:spPr>
           <a:xfrm>
-            <a:off x="6200100" y="4180000"/>
-            <a:ext cx="5190000" cy="1350000"/>
-          </a:xfrm>
-          <a:prstGeom prst="roundRect">
-            <a:avLst>
-              <a:gd name="adj" fmla="val 4000"/>
-            </a:avLst>
-          </a:prstGeom>
-          <a:solidFill>
-            <a:srgbClr val="F5F5F7"/>
-          </a:solidFill>
-          <a:ln>
-            <a:noFill/>
-          </a:ln>
-          <a:effectLst/>
-        </p:spPr>
-        <p:style>
-          <a:lnRef idx="1">
-            <a:schemeClr val="accent1"/>
-          </a:lnRef>
-          <a:fillRef idx="3">
-            <a:schemeClr val="accent1"/>
-          </a:fillRef>
-          <a:effectRef idx="2">
-            <a:schemeClr val="accent1"/>
-          </a:effectRef>
-          <a:fontRef idx="minor">
-            <a:schemeClr val="lt1"/>
-          </a:fontRef>
-        </p:style>
-        <p:txBody>
-          <a:bodyPr rtlCol="0" anchor="ctr"/>
-          <a:lstStyle/>
-          <a:p>
-            <a:pPr algn="ctr"/>
-          </a:p>
-        </p:txBody>
-      </p:sp>
-      <p:sp>
-        <p:nvSpPr>
-          <p:cNvPr id="13" name="Rounded Rectangle 12"/>
-          <p:cNvSpPr/>
-          <p:nvPr/>
-        </p:nvSpPr>
-        <p:spPr>
-          <a:xfrm>
-            <a:off x="6440100" y="4360000"/>
-            <a:ext cx="1500000" cy="310000"/>
+            <a:off x="6200100" y="4930000"/>
+            <a:ext cx="1750000" cy="310000"/>
           </a:xfrm>
           <a:prstGeom prst="roundRect">
             <a:avLst>
@@ -6711,21 +7824,21 @@
                 </a:solidFill>
                 <a:latin typeface="Helvetica Neue"/>
               </a:rPr>
-              <a:t>Nếu cũng tụt</a:t>
-            </a:r>
-          </a:p>
-        </p:txBody>
-      </p:sp>
-      <p:sp>
-        <p:nvSpPr>
-          <p:cNvPr id="14" name="TextBox 13"/>
-          <p:cNvSpPr txBox="1"/>
-          <p:nvPr/>
-        </p:nvSpPr>
-        <p:spPr>
-          <a:xfrm>
-            <a:off x="6440100" y="4830000"/>
-            <a:ext cx="4700000" cy="600000"/>
+              <a:t>Nếu vẫn không tụt</a:t>
+            </a:r>
+          </a:p>
+        </p:txBody>
+      </p:sp>
+      <p:sp>
+        <p:nvSpPr>
+          <p:cNvPr id="20" name="TextBox 19"/>
+          <p:cNvSpPr txBox="1"/>
+          <p:nvPr/>
+        </p:nvSpPr>
+        <p:spPr>
+          <a:xfrm>
+            <a:off x="6200100" y="5400000"/>
+            <a:ext cx="5000000" cy="600000"/>
           </a:xfrm>
           <a:prstGeom prst="rect">
             <a:avLst/>
@@ -6753,7 +7866,7 @@
                 </a:solidFill>
                 <a:latin typeface="Helvetica Neue"/>
               </a:rPr>
-              <a:t>thì cú tụt là do việc dạy thêm, không liên</a:t>
+              <a:t>thì lỗi máy chấm không phải thứ đáng lo trong</a:t>
             </a:r>
           </a:p>
           <a:p>
@@ -6772,20 +7885,20 @@
                 </a:solidFill>
                 <a:latin typeface="Helvetica Neue"/>
               </a:rPr>
-              <a:t>quan tự học. Kết luận phải sửa lần nữa.</a:t>
-            </a:r>
-          </a:p>
-        </p:txBody>
-      </p:sp>
-      <p:sp>
-        <p:nvSpPr>
-          <p:cNvPr id="15" name="TextBox 14"/>
-          <p:cNvSpPr txBox="1"/>
-          <p:nvPr/>
-        </p:nvSpPr>
-        <p:spPr>
-          <a:xfrm>
-            <a:off x="800100" y="5800000"/>
+              <a:t>self-training, cũng là một kết luận rõ ràng.</a:t>
+            </a:r>
+          </a:p>
+        </p:txBody>
+      </p:sp>
+      <p:sp>
+        <p:nvSpPr>
+          <p:cNvPr id="21" name="TextBox 20"/>
+          <p:cNvSpPr txBox="1"/>
+          <p:nvPr/>
+        </p:nvSpPr>
+        <p:spPr>
+          <a:xfrm>
+            <a:off x="800100" y="6300000"/>
             <a:ext cx="10591495" cy="300000"/>
           </a:xfrm>
           <a:prstGeom prst="rect">
@@ -6811,7 +7924,7 @@
                 </a:solidFill>
                 <a:latin typeface="Helvetica Neue"/>
               </a:rPr>
-              <a:t>Phần code đã hoàn tất, đang chờ tới lượt GPU.</a:t>
+              <a:t>Toàn bộ code và dữ liệu cũ dùng lại được; chỉ cần thêm một tuỳ chọn cho máy chấm.</a:t>
             </a:r>
           </a:p>
         </p:txBody>
@@ -6868,7 +7981,7 @@
                 </a:solidFill>
                 <a:latin typeface="Helvetica Neue"/>
               </a:rPr>
-              <a:t>HẠN CHẾ</a:t>
+              <a:t>CÂU HỎI CHƯA TRẢ LỜI ĐƯỢC</a:t>
             </a:r>
           </a:p>
         </p:txBody>
@@ -6949,21 +8062,82 @@
                 </a:solidFill>
                 <a:latin typeface="Georgia"/>
               </a:rPr>
-              <a:t>Ba điểm cần lưu ý khi đọc kết quả</a:t>
-            </a:r>
-          </a:p>
-        </p:txBody>
-      </p:sp>
-      <p:sp>
-        <p:nvSpPr>
-          <p:cNvPr id="5" name="Rounded Rectangle 4"/>
+              <a:t>Thí nghiệm kiểm chứng đang chạy</a:t>
+            </a:r>
+          </a:p>
+        </p:txBody>
+      </p:sp>
+      <p:sp>
+        <p:nvSpPr>
+          <p:cNvPr id="5" name="TextBox 4"/>
+          <p:cNvSpPr txBox="1"/>
+          <p:nvPr/>
+        </p:nvSpPr>
+        <p:spPr>
+          <a:xfrm>
+            <a:off x="800100" y="1620000"/>
+            <a:ext cx="10591495" cy="700000"/>
+          </a:xfrm>
+          <a:prstGeom prst="rect">
+            <a:avLst/>
+          </a:prstGeom>
+          <a:noFill/>
+        </p:spPr>
+        <p:txBody>
+          <a:bodyPr wrap="square" lIns="0" rIns="0" tIns="0" bIns="0">
+            <a:spAutoFit/>
+          </a:bodyPr>
+          <a:lstStyle/>
+          <a:p>
+            <a:pPr algn="l">
+              <a:lnSpc>
+                <a:spcPct val="140000"/>
+              </a:lnSpc>
+              <a:spcAft>
+                <a:spcPts val="600"/>
+              </a:spcAft>
+            </a:pPr>
+            <a:r>
+              <a:rPr sz="1400" b="0">
+                <a:solidFill>
+                  <a:srgbClr val="16161A"/>
+                </a:solidFill>
+                <a:latin typeface="Helvetica Neue"/>
+              </a:rPr>
+              <a:t>Cả 7 lần chạy, điểm đều tụt khoảng 3 điểm ngay ở vòng 1 rồi đứng yên. Nhưng các công trình lớn</a:t>
+            </a:r>
+          </a:p>
+          <a:p>
+            <a:pPr algn="l">
+              <a:lnSpc>
+                <a:spcPct val="140000"/>
+              </a:lnSpc>
+              <a:spcAft>
+                <a:spcPts val="600"/>
+              </a:spcAft>
+            </a:pPr>
+            <a:r>
+              <a:rPr sz="1400" b="0">
+                <a:solidFill>
+                  <a:srgbClr val="16161A"/>
+                </a:solidFill>
+                <a:latin typeface="Helvetica Neue"/>
+              </a:rPr>
+              <a:t>về tự học đều báo cáo model KHÁ LÊN. Chưa giải thích được vì sao kết quả ở đây ngược lại.</a:t>
+            </a:r>
+          </a:p>
+        </p:txBody>
+      </p:sp>
+      <p:sp>
+        <p:nvSpPr>
+          <p:cNvPr id="6" name="Rounded Rectangle 5"/>
           <p:cNvSpPr/>
           <p:nvPr/>
         </p:nvSpPr>
         <p:spPr>
           <a:xfrm>
-            <a:off x="680100" y="2000000"/>
-            <a:ext cx="10831495" cy="1150000"/>
+            <a:off x="680100" y="2550000"/>
+            <a:ext cx="10831495" cy="900000"/>
           </a:xfrm>
           <a:prstGeom prst="roundRect">
             <a:avLst>
@@ -7002,78 +8176,61 @@
       </p:sp>
       <p:sp>
         <p:nvSpPr>
-          <p:cNvPr id="6" name="TextBox 5"/>
-          <p:cNvSpPr txBox="1"/>
-          <p:nvPr/>
-        </p:nvSpPr>
-        <p:spPr>
-          <a:xfrm>
-            <a:off x="920100" y="2200000"/>
-            <a:ext cx="400000" cy="300000"/>
-          </a:xfrm>
-          <a:prstGeom prst="rect">
-            <a:avLst/>
-          </a:prstGeom>
-          <a:noFill/>
-        </p:spPr>
-        <p:txBody>
-          <a:bodyPr wrap="square" lIns="0" rIns="0" tIns="0" bIns="0">
-            <a:spAutoFit/>
-          </a:bodyPr>
-          <a:lstStyle/>
-          <a:p>
-            <a:pPr algn="l">
-              <a:spcAft>
-                <a:spcPts val="600"/>
-              </a:spcAft>
-            </a:pPr>
-            <a:r>
-              <a:rPr sz="1300" b="1">
-                <a:solidFill>
-                  <a:srgbClr val="9E2B34"/>
-                </a:solidFill>
-                <a:latin typeface="Georgia"/>
-              </a:rPr>
-              <a:t>01</a:t>
-            </a:r>
-          </a:p>
-        </p:txBody>
-      </p:sp>
-      <p:sp>
-        <p:nvSpPr>
           <p:cNvPr id="7" name="TextBox 6"/>
           <p:cNvSpPr txBox="1"/>
           <p:nvPr/>
         </p:nvSpPr>
         <p:spPr>
           <a:xfrm>
-            <a:off x="1500100" y="2190000"/>
-            <a:ext cx="9500000" cy="300000"/>
-          </a:xfrm>
-          <a:prstGeom prst="rect">
-            <a:avLst/>
-          </a:prstGeom>
-          <a:noFill/>
-        </p:spPr>
-        <p:txBody>
-          <a:bodyPr wrap="square" lIns="0" rIns="0" tIns="0" bIns="0">
-            <a:spAutoFit/>
-          </a:bodyPr>
-          <a:lstStyle/>
-          <a:p>
-            <a:pPr algn="l">
-              <a:spcAft>
-                <a:spcPts val="600"/>
-              </a:spcAft>
-            </a:pPr>
-            <a:r>
-              <a:rPr sz="1400" b="1">
-                <a:solidFill>
-                  <a:srgbClr val="16161A"/>
-                </a:solidFill>
-                <a:latin typeface="Helvetica Neue"/>
-              </a:rPr>
-              <a:t>Đề thi chỉ có 150 đề</a:t>
+            <a:off x="920100" y="2720000"/>
+            <a:ext cx="10351495" cy="640000"/>
+          </a:xfrm>
+          <a:prstGeom prst="rect">
+            <a:avLst/>
+          </a:prstGeom>
+          <a:noFill/>
+        </p:spPr>
+        <p:txBody>
+          <a:bodyPr wrap="square" lIns="0" rIns="0" tIns="0" bIns="0">
+            <a:spAutoFit/>
+          </a:bodyPr>
+          <a:lstStyle/>
+          <a:p>
+            <a:pPr algn="l">
+              <a:lnSpc>
+                <a:spcPct val="145000"/>
+              </a:lnSpc>
+              <a:spcAft>
+                <a:spcPts val="600"/>
+              </a:spcAft>
+            </a:pPr>
+            <a:r>
+              <a:rPr sz="1250" b="0">
+                <a:solidFill>
+                  <a:srgbClr val="3F4149"/>
+                </a:solidFill>
+                <a:latin typeface="Helvetica Neue"/>
+              </a:rPr>
+              <a:t>Có một khả năng đơn giản chưa loại trừ được: model này vốn đã được tinh chỉnh rất kỹ. Dạy thêm</a:t>
+            </a:r>
+          </a:p>
+          <a:p>
+            <a:pPr algn="l">
+              <a:lnSpc>
+                <a:spcPct val="145000"/>
+              </a:lnSpc>
+              <a:spcAft>
+                <a:spcPts val="600"/>
+              </a:spcAft>
+            </a:pPr>
+            <a:r>
+              <a:rPr sz="1250" b="0">
+                <a:solidFill>
+                  <a:srgbClr val="3F4149"/>
+                </a:solidFill>
+                <a:latin typeface="Helvetica Neue"/>
+              </a:rPr>
+              <a:t>một lượng nhỏ có thể chỉ làm nó lệch khỏi trạng thái tốt sẵn có, bất kể dạy bằng dữ liệu gì.</a:t>
             </a:r>
           </a:p>
         </p:txBody>
@@ -7086,36 +8243,33 @@
         </p:nvSpPr>
         <p:spPr>
           <a:xfrm>
-            <a:off x="1500100" y="2600000"/>
-            <a:ext cx="9500000" cy="450000"/>
-          </a:xfrm>
-          <a:prstGeom prst="rect">
-            <a:avLst/>
-          </a:prstGeom>
-          <a:noFill/>
-        </p:spPr>
-        <p:txBody>
-          <a:bodyPr wrap="square" lIns="0" rIns="0" tIns="0" bIns="0">
-            <a:spAutoFit/>
-          </a:bodyPr>
-          <a:lstStyle/>
-          <a:p>
-            <a:pPr algn="l">
-              <a:lnSpc>
-                <a:spcPct val="130000"/>
-              </a:lnSpc>
-              <a:spcAft>
-                <a:spcPts val="600"/>
-              </a:spcAft>
-            </a:pPr>
-            <a:r>
-              <a:rPr sz="1200" b="0">
-                <a:solidFill>
-                  <a:srgbClr val="3F4149"/>
-                </a:solidFill>
-                <a:latin typeface="Helvetica Neue"/>
-              </a:rPr>
-              <a:t>Mỗi đề đáng 0,67 điểm. Chỉ đổi cách bốc đề thi thôi là điểm vòng 0 đã lệch 4,7 điểm, lớn hơn cả hiệu ứng đang đo.</a:t>
+            <a:off x="800100" y="3720000"/>
+            <a:ext cx="10591495" cy="300000"/>
+          </a:xfrm>
+          <a:prstGeom prst="rect">
+            <a:avLst/>
+          </a:prstGeom>
+          <a:noFill/>
+        </p:spPr>
+        <p:txBody>
+          <a:bodyPr wrap="square" lIns="0" rIns="0" tIns="0" bIns="0">
+            <a:spAutoFit/>
+          </a:bodyPr>
+          <a:lstStyle/>
+          <a:p>
+            <a:pPr algn="l">
+              <a:spcAft>
+                <a:spcPts val="600"/>
+              </a:spcAft>
+            </a:pPr>
+            <a:r>
+              <a:rPr sz="1100" b="1">
+                <a:solidFill>
+                  <a:srgbClr val="8A8D96"/>
+                </a:solidFill>
+                <a:latin typeface="Helvetica Neue"/>
+              </a:rPr>
+              <a:t>THÍ NGHIỆM PHÂN ĐỊNH: dạy bằng lời giải mẫu của sách, thay vì bài model tự làm</a:t>
             </a:r>
           </a:p>
         </p:txBody>
@@ -7128,8 +8282,8 @@
         </p:nvSpPr>
         <p:spPr>
           <a:xfrm>
-            <a:off x="680100" y="3330000"/>
-            <a:ext cx="10831495" cy="1150000"/>
+            <a:off x="800100" y="4180000"/>
+            <a:ext cx="5190000" cy="1350000"/>
           </a:xfrm>
           <a:prstGeom prst="roundRect">
             <a:avLst>
@@ -7168,39 +8322,55 @@
       </p:sp>
       <p:sp>
         <p:nvSpPr>
-          <p:cNvPr id="10" name="TextBox 9"/>
-          <p:cNvSpPr txBox="1"/>
-          <p:nvPr/>
-        </p:nvSpPr>
-        <p:spPr>
-          <a:xfrm>
-            <a:off x="920100" y="3530000"/>
-            <a:ext cx="400000" cy="300000"/>
-          </a:xfrm>
-          <a:prstGeom prst="rect">
-            <a:avLst/>
-          </a:prstGeom>
-          <a:noFill/>
-        </p:spPr>
-        <p:txBody>
-          <a:bodyPr wrap="square" lIns="0" rIns="0" tIns="0" bIns="0">
-            <a:spAutoFit/>
-          </a:bodyPr>
-          <a:lstStyle/>
-          <a:p>
-            <a:pPr algn="l">
-              <a:spcAft>
-                <a:spcPts val="600"/>
-              </a:spcAft>
-            </a:pPr>
-            <a:r>
-              <a:rPr sz="1300" b="1">
-                <a:solidFill>
-                  <a:srgbClr val="9E2B34"/>
-                </a:solidFill>
-                <a:latin typeface="Georgia"/>
-              </a:rPr>
-              <a:t>02</a:t>
+          <p:cNvPr id="10" name="Rounded Rectangle 9"/>
+          <p:cNvSpPr/>
+          <p:nvPr/>
+        </p:nvSpPr>
+        <p:spPr>
+          <a:xfrm>
+            <a:off x="1040100" y="4360000"/>
+            <a:ext cx="1500000" cy="310000"/>
+          </a:xfrm>
+          <a:prstGeom prst="roundRect">
+            <a:avLst>
+              <a:gd name="adj" fmla="val 50000"/>
+            </a:avLst>
+          </a:prstGeom>
+          <a:solidFill>
+            <a:srgbClr val="029E73"/>
+          </a:solidFill>
+          <a:ln>
+            <a:noFill/>
+          </a:ln>
+          <a:effectLst/>
+        </p:spPr>
+        <p:style>
+          <a:lnRef idx="1">
+            <a:schemeClr val="accent1"/>
+          </a:lnRef>
+          <a:fillRef idx="3">
+            <a:schemeClr val="accent1"/>
+          </a:fillRef>
+          <a:effectRef idx="2">
+            <a:schemeClr val="accent1"/>
+          </a:effectRef>
+          <a:fontRef idx="minor">
+            <a:schemeClr val="lt1"/>
+          </a:fontRef>
+        </p:style>
+        <p:txBody>
+          <a:bodyPr rtlCol="0" anchor="ctr" wrap="none" lIns="0" rIns="0"/>
+          <a:lstStyle/>
+          <a:p>
+            <a:pPr algn="ctr"/>
+            <a:r>
+              <a:rPr sz="1050" b="1">
+                <a:solidFill>
+                  <a:srgbClr val="FFFFFF"/>
+                </a:solidFill>
+                <a:latin typeface="Helvetica Neue"/>
+              </a:rPr>
+              <a:t>Nếu khá lên</a:t>
             </a:r>
           </a:p>
         </p:txBody>
@@ -7213,47 +8383,8 @@
         </p:nvSpPr>
         <p:spPr>
           <a:xfrm>
-            <a:off x="1500100" y="3520000"/>
-            <a:ext cx="9500000" cy="300000"/>
-          </a:xfrm>
-          <a:prstGeom prst="rect">
-            <a:avLst/>
-          </a:prstGeom>
-          <a:noFill/>
-        </p:spPr>
-        <p:txBody>
-          <a:bodyPr wrap="square" lIns="0" rIns="0" tIns="0" bIns="0">
-            <a:spAutoFit/>
-          </a:bodyPr>
-          <a:lstStyle/>
-          <a:p>
-            <a:pPr algn="l">
-              <a:spcAft>
-                <a:spcPts val="600"/>
-              </a:spcAft>
-            </a:pPr>
-            <a:r>
-              <a:rPr sz="1400" b="1">
-                <a:solidFill>
-                  <a:srgbClr val="16161A"/>
-                </a:solidFill>
-                <a:latin typeface="Helvetica Neue"/>
-              </a:rPr>
-              <a:t>Mỗi cấu hình mới chạy 2 lần</a:t>
-            </a:r>
-          </a:p>
-        </p:txBody>
-      </p:sp>
-      <p:sp>
-        <p:nvSpPr>
-          <p:cNvPr id="12" name="TextBox 11"/>
-          <p:cNvSpPr txBox="1"/>
-          <p:nvPr/>
-        </p:nvSpPr>
-        <p:spPr>
-          <a:xfrm>
-            <a:off x="1500100" y="3930000"/>
-            <a:ext cx="9500000" cy="450000"/>
+            <a:off x="1040100" y="4830000"/>
+            <a:ext cx="4700000" cy="600000"/>
           </a:xfrm>
           <a:prstGeom prst="rect">
             <a:avLst/>
@@ -7268,7 +8399,7 @@
           <a:p>
             <a:pPr algn="l">
               <a:lnSpc>
-                <a:spcPct val="130000"/>
+                <a:spcPct val="135000"/>
               </a:lnSpc>
               <a:spcAft>
                 <a:spcPts val="600"/>
@@ -7281,21 +8412,40 @@
                 </a:solidFill>
                 <a:latin typeface="Helvetica Neue"/>
               </a:rPr>
-              <a:t>Riêng lần chạy C và các lần chạy cũ mới có 1 lần. Chưa đủ cơ sở để khẳng định về cú tụt 12,7 điểm của GSM8K.</a:t>
-            </a:r>
-          </a:p>
-        </p:txBody>
-      </p:sp>
-      <p:sp>
-        <p:nvSpPr>
-          <p:cNvPr id="13" name="Rounded Rectangle 12"/>
+              <a:t>thì vòng lặp không sao, và cái hại đúng là</a:t>
+            </a:r>
+          </a:p>
+          <a:p>
+            <a:pPr algn="l">
+              <a:lnSpc>
+                <a:spcPct val="135000"/>
+              </a:lnSpc>
+              <a:spcAft>
+                <a:spcPts val="600"/>
+              </a:spcAft>
+            </a:pPr>
+            <a:r>
+              <a:rPr sz="1200" b="0">
+                <a:solidFill>
+                  <a:srgbClr val="3F4149"/>
+                </a:solidFill>
+                <a:latin typeface="Helvetica Neue"/>
+              </a:rPr>
+              <a:t>do model học từ bài của chính nó.</a:t>
+            </a:r>
+          </a:p>
+        </p:txBody>
+      </p:sp>
+      <p:sp>
+        <p:nvSpPr>
+          <p:cNvPr id="12" name="Rounded Rectangle 11"/>
           <p:cNvSpPr/>
           <p:nvPr/>
         </p:nvSpPr>
         <p:spPr>
           <a:xfrm>
-            <a:off x="680100" y="4660000"/>
-            <a:ext cx="10831495" cy="1150000"/>
+            <a:off x="6200100" y="4180000"/>
+            <a:ext cx="5190000" cy="1350000"/>
           </a:xfrm>
           <a:prstGeom prst="roundRect">
             <a:avLst>
@@ -7334,39 +8484,116 @@
       </p:sp>
       <p:sp>
         <p:nvSpPr>
+          <p:cNvPr id="13" name="Rounded Rectangle 12"/>
+          <p:cNvSpPr/>
+          <p:nvPr/>
+        </p:nvSpPr>
+        <p:spPr>
+          <a:xfrm>
+            <a:off x="6440100" y="4360000"/>
+            <a:ext cx="1500000" cy="310000"/>
+          </a:xfrm>
+          <a:prstGeom prst="roundRect">
+            <a:avLst>
+              <a:gd name="adj" fmla="val 50000"/>
+            </a:avLst>
+          </a:prstGeom>
+          <a:solidFill>
+            <a:srgbClr val="B85C00"/>
+          </a:solidFill>
+          <a:ln>
+            <a:noFill/>
+          </a:ln>
+          <a:effectLst/>
+        </p:spPr>
+        <p:style>
+          <a:lnRef idx="1">
+            <a:schemeClr val="accent1"/>
+          </a:lnRef>
+          <a:fillRef idx="3">
+            <a:schemeClr val="accent1"/>
+          </a:fillRef>
+          <a:effectRef idx="2">
+            <a:schemeClr val="accent1"/>
+          </a:effectRef>
+          <a:fontRef idx="minor">
+            <a:schemeClr val="lt1"/>
+          </a:fontRef>
+        </p:style>
+        <p:txBody>
+          <a:bodyPr rtlCol="0" anchor="ctr" wrap="none" lIns="0" rIns="0"/>
+          <a:lstStyle/>
+          <a:p>
+            <a:pPr algn="ctr"/>
+            <a:r>
+              <a:rPr sz="1050" b="1">
+                <a:solidFill>
+                  <a:srgbClr val="FFFFFF"/>
+                </a:solidFill>
+                <a:latin typeface="Helvetica Neue"/>
+              </a:rPr>
+              <a:t>Nếu cũng tụt</a:t>
+            </a:r>
+          </a:p>
+        </p:txBody>
+      </p:sp>
+      <p:sp>
+        <p:nvSpPr>
           <p:cNvPr id="14" name="TextBox 13"/>
           <p:cNvSpPr txBox="1"/>
           <p:nvPr/>
         </p:nvSpPr>
         <p:spPr>
           <a:xfrm>
-            <a:off x="920100" y="4860000"/>
-            <a:ext cx="400000" cy="300000"/>
-          </a:xfrm>
-          <a:prstGeom prst="rect">
-            <a:avLst/>
-          </a:prstGeom>
-          <a:noFill/>
-        </p:spPr>
-        <p:txBody>
-          <a:bodyPr wrap="square" lIns="0" rIns="0" tIns="0" bIns="0">
-            <a:spAutoFit/>
-          </a:bodyPr>
-          <a:lstStyle/>
-          <a:p>
-            <a:pPr algn="l">
-              <a:spcAft>
-                <a:spcPts val="600"/>
-              </a:spcAft>
-            </a:pPr>
-            <a:r>
-              <a:rPr sz="1300" b="1">
-                <a:solidFill>
-                  <a:srgbClr val="9E2B34"/>
-                </a:solidFill>
-                <a:latin typeface="Georgia"/>
-              </a:rPr>
-              <a:t>03</a:t>
+            <a:off x="6440100" y="4830000"/>
+            <a:ext cx="4700000" cy="600000"/>
+          </a:xfrm>
+          <a:prstGeom prst="rect">
+            <a:avLst/>
+          </a:prstGeom>
+          <a:noFill/>
+        </p:spPr>
+        <p:txBody>
+          <a:bodyPr wrap="square" lIns="0" rIns="0" tIns="0" bIns="0">
+            <a:spAutoFit/>
+          </a:bodyPr>
+          <a:lstStyle/>
+          <a:p>
+            <a:pPr algn="l">
+              <a:lnSpc>
+                <a:spcPct val="135000"/>
+              </a:lnSpc>
+              <a:spcAft>
+                <a:spcPts val="600"/>
+              </a:spcAft>
+            </a:pPr>
+            <a:r>
+              <a:rPr sz="1200" b="0">
+                <a:solidFill>
+                  <a:srgbClr val="3F4149"/>
+                </a:solidFill>
+                <a:latin typeface="Helvetica Neue"/>
+              </a:rPr>
+              <a:t>thì cú tụt là do việc dạy thêm, không liên</a:t>
+            </a:r>
+          </a:p>
+          <a:p>
+            <a:pPr algn="l">
+              <a:lnSpc>
+                <a:spcPct val="135000"/>
+              </a:lnSpc>
+              <a:spcAft>
+                <a:spcPts val="600"/>
+              </a:spcAft>
+            </a:pPr>
+            <a:r>
+              <a:rPr sz="1200" b="0">
+                <a:solidFill>
+                  <a:srgbClr val="3F4149"/>
+                </a:solidFill>
+                <a:latin typeface="Helvetica Neue"/>
+              </a:rPr>
+              <a:t>quan tự học. Kết luận phải sửa lần nữa.</a:t>
             </a:r>
           </a:p>
         </p:txBody>
@@ -7379,75 +8606,33 @@
         </p:nvSpPr>
         <p:spPr>
           <a:xfrm>
-            <a:off x="1500100" y="4850000"/>
-            <a:ext cx="9500000" cy="300000"/>
-          </a:xfrm>
-          <a:prstGeom prst="rect">
-            <a:avLst/>
-          </a:prstGeom>
-          <a:noFill/>
-        </p:spPr>
-        <p:txBody>
-          <a:bodyPr wrap="square" lIns="0" rIns="0" tIns="0" bIns="0">
-            <a:spAutoFit/>
-          </a:bodyPr>
-          <a:lstStyle/>
-          <a:p>
-            <a:pPr algn="l">
-              <a:spcAft>
-                <a:spcPts val="600"/>
-              </a:spcAft>
-            </a:pPr>
-            <a:r>
-              <a:rPr sz="1400" b="1">
-                <a:solidFill>
-                  <a:srgbClr val="16161A"/>
-                </a:solidFill>
-                <a:latin typeface="Helvetica Neue"/>
-              </a:rPr>
-              <a:t>Lần chạy mới khác lần cũ ba chỗ</a:t>
-            </a:r>
-          </a:p>
-        </p:txBody>
-      </p:sp>
-      <p:sp>
-        <p:nvSpPr>
-          <p:cNvPr id="16" name="TextBox 15"/>
-          <p:cNvSpPr txBox="1"/>
-          <p:nvPr/>
-        </p:nvSpPr>
-        <p:spPr>
-          <a:xfrm>
-            <a:off x="1500100" y="5260000"/>
-            <a:ext cx="9500000" cy="450000"/>
-          </a:xfrm>
-          <a:prstGeom prst="rect">
-            <a:avLst/>
-          </a:prstGeom>
-          <a:noFill/>
-        </p:spPr>
-        <p:txBody>
-          <a:bodyPr wrap="square" lIns="0" rIns="0" tIns="0" bIns="0">
-            <a:spAutoFit/>
-          </a:bodyPr>
-          <a:lstStyle/>
-          <a:p>
-            <a:pPr algn="l">
-              <a:lnSpc>
-                <a:spcPct val="130000"/>
-              </a:lnSpc>
-              <a:spcAft>
-                <a:spcPts val="600"/>
-              </a:spcAft>
-            </a:pPr>
-            <a:r>
-              <a:rPr sz="1200" b="0">
-                <a:solidFill>
-                  <a:srgbClr val="3F4149"/>
-                </a:solidFill>
-                <a:latin typeface="Helvetica Neue"/>
-              </a:rPr>
-              <a:t>Bỏ gộp bộ đề, thêm đề thi riêng, giảm số đề. Nên kết luận chỉ dựa trên so sánh A với B, vì hai lần chạy đó chỉ khác nhau đúng một biến.</a:t>
+            <a:off x="800100" y="5800000"/>
+            <a:ext cx="10591495" cy="300000"/>
+          </a:xfrm>
+          <a:prstGeom prst="rect">
+            <a:avLst/>
+          </a:prstGeom>
+          <a:noFill/>
+        </p:spPr>
+        <p:txBody>
+          <a:bodyPr wrap="square" lIns="0" rIns="0" tIns="0" bIns="0">
+            <a:spAutoFit/>
+          </a:bodyPr>
+          <a:lstStyle/>
+          <a:p>
+            <a:pPr algn="l">
+              <a:spcAft>
+                <a:spcPts val="600"/>
+              </a:spcAft>
+            </a:pPr>
+            <a:r>
+              <a:rPr sz="1050" b="0">
+                <a:solidFill>
+                  <a:srgbClr val="8A8D96"/>
+                </a:solidFill>
+                <a:latin typeface="Helvetica Neue"/>
+              </a:rPr>
+              <a:t>Phần code đã hoàn tất, đang chờ tới lượt GPU.</a:t>
             </a:r>
           </a:p>
         </p:txBody>
@@ -7504,7 +8689,7 @@
                 </a:solidFill>
                 <a:latin typeface="Helvetica Neue"/>
               </a:rPr>
-              <a:t>TÓM TẮT</a:t>
+              <a:t>HẠN CHẾ</a:t>
             </a:r>
           </a:p>
         </p:txBody>
@@ -7544,6 +8729,642 @@
                 <a:latin typeface="Georgia"/>
               </a:rPr>
               <a:t>15</a:t>
+            </a:r>
+          </a:p>
+        </p:txBody>
+      </p:sp>
+      <p:sp>
+        <p:nvSpPr>
+          <p:cNvPr id="4" name="TextBox 3"/>
+          <p:cNvSpPr txBox="1"/>
+          <p:nvPr/>
+        </p:nvSpPr>
+        <p:spPr>
+          <a:xfrm>
+            <a:off x="800100" y="790000"/>
+            <a:ext cx="10591495" cy="620000"/>
+          </a:xfrm>
+          <a:prstGeom prst="rect">
+            <a:avLst/>
+          </a:prstGeom>
+          <a:noFill/>
+        </p:spPr>
+        <p:txBody>
+          <a:bodyPr wrap="square" lIns="0" rIns="0" tIns="0" bIns="0">
+            <a:spAutoFit/>
+          </a:bodyPr>
+          <a:lstStyle/>
+          <a:p>
+            <a:pPr algn="l">
+              <a:lnSpc>
+                <a:spcPct val="105000"/>
+              </a:lnSpc>
+              <a:spcAft>
+                <a:spcPts val="600"/>
+              </a:spcAft>
+            </a:pPr>
+            <a:r>
+              <a:rPr sz="2900" b="1">
+                <a:solidFill>
+                  <a:srgbClr val="16161A"/>
+                </a:solidFill>
+                <a:latin typeface="Georgia"/>
+              </a:rPr>
+              <a:t>Ba điểm cần lưu ý khi đọc kết quả</a:t>
+            </a:r>
+          </a:p>
+        </p:txBody>
+      </p:sp>
+      <p:sp>
+        <p:nvSpPr>
+          <p:cNvPr id="5" name="Rounded Rectangle 4"/>
+          <p:cNvSpPr/>
+          <p:nvPr/>
+        </p:nvSpPr>
+        <p:spPr>
+          <a:xfrm>
+            <a:off x="680100" y="2000000"/>
+            <a:ext cx="10831495" cy="1150000"/>
+          </a:xfrm>
+          <a:prstGeom prst="roundRect">
+            <a:avLst>
+              <a:gd name="adj" fmla="val 4000"/>
+            </a:avLst>
+          </a:prstGeom>
+          <a:solidFill>
+            <a:srgbClr val="F5F5F7"/>
+          </a:solidFill>
+          <a:ln>
+            <a:noFill/>
+          </a:ln>
+          <a:effectLst/>
+        </p:spPr>
+        <p:style>
+          <a:lnRef idx="1">
+            <a:schemeClr val="accent1"/>
+          </a:lnRef>
+          <a:fillRef idx="3">
+            <a:schemeClr val="accent1"/>
+          </a:fillRef>
+          <a:effectRef idx="2">
+            <a:schemeClr val="accent1"/>
+          </a:effectRef>
+          <a:fontRef idx="minor">
+            <a:schemeClr val="lt1"/>
+          </a:fontRef>
+        </p:style>
+        <p:txBody>
+          <a:bodyPr rtlCol="0" anchor="ctr"/>
+          <a:lstStyle/>
+          <a:p>
+            <a:pPr algn="ctr"/>
+          </a:p>
+        </p:txBody>
+      </p:sp>
+      <p:sp>
+        <p:nvSpPr>
+          <p:cNvPr id="6" name="TextBox 5"/>
+          <p:cNvSpPr txBox="1"/>
+          <p:nvPr/>
+        </p:nvSpPr>
+        <p:spPr>
+          <a:xfrm>
+            <a:off x="920100" y="2200000"/>
+            <a:ext cx="400000" cy="300000"/>
+          </a:xfrm>
+          <a:prstGeom prst="rect">
+            <a:avLst/>
+          </a:prstGeom>
+          <a:noFill/>
+        </p:spPr>
+        <p:txBody>
+          <a:bodyPr wrap="square" lIns="0" rIns="0" tIns="0" bIns="0">
+            <a:spAutoFit/>
+          </a:bodyPr>
+          <a:lstStyle/>
+          <a:p>
+            <a:pPr algn="l">
+              <a:spcAft>
+                <a:spcPts val="600"/>
+              </a:spcAft>
+            </a:pPr>
+            <a:r>
+              <a:rPr sz="1300" b="1">
+                <a:solidFill>
+                  <a:srgbClr val="9E2B34"/>
+                </a:solidFill>
+                <a:latin typeface="Georgia"/>
+              </a:rPr>
+              <a:t>01</a:t>
+            </a:r>
+          </a:p>
+        </p:txBody>
+      </p:sp>
+      <p:sp>
+        <p:nvSpPr>
+          <p:cNvPr id="7" name="TextBox 6"/>
+          <p:cNvSpPr txBox="1"/>
+          <p:nvPr/>
+        </p:nvSpPr>
+        <p:spPr>
+          <a:xfrm>
+            <a:off x="1500100" y="2190000"/>
+            <a:ext cx="9500000" cy="300000"/>
+          </a:xfrm>
+          <a:prstGeom prst="rect">
+            <a:avLst/>
+          </a:prstGeom>
+          <a:noFill/>
+        </p:spPr>
+        <p:txBody>
+          <a:bodyPr wrap="square" lIns="0" rIns="0" tIns="0" bIns="0">
+            <a:spAutoFit/>
+          </a:bodyPr>
+          <a:lstStyle/>
+          <a:p>
+            <a:pPr algn="l">
+              <a:spcAft>
+                <a:spcPts val="600"/>
+              </a:spcAft>
+            </a:pPr>
+            <a:r>
+              <a:rPr sz="1400" b="1">
+                <a:solidFill>
+                  <a:srgbClr val="16161A"/>
+                </a:solidFill>
+                <a:latin typeface="Helvetica Neue"/>
+              </a:rPr>
+              <a:t>Đề thi chỉ có 150 đề</a:t>
+            </a:r>
+          </a:p>
+        </p:txBody>
+      </p:sp>
+      <p:sp>
+        <p:nvSpPr>
+          <p:cNvPr id="8" name="TextBox 7"/>
+          <p:cNvSpPr txBox="1"/>
+          <p:nvPr/>
+        </p:nvSpPr>
+        <p:spPr>
+          <a:xfrm>
+            <a:off x="1500100" y="2600000"/>
+            <a:ext cx="9500000" cy="450000"/>
+          </a:xfrm>
+          <a:prstGeom prst="rect">
+            <a:avLst/>
+          </a:prstGeom>
+          <a:noFill/>
+        </p:spPr>
+        <p:txBody>
+          <a:bodyPr wrap="square" lIns="0" rIns="0" tIns="0" bIns="0">
+            <a:spAutoFit/>
+          </a:bodyPr>
+          <a:lstStyle/>
+          <a:p>
+            <a:pPr algn="l">
+              <a:lnSpc>
+                <a:spcPct val="130000"/>
+              </a:lnSpc>
+              <a:spcAft>
+                <a:spcPts val="600"/>
+              </a:spcAft>
+            </a:pPr>
+            <a:r>
+              <a:rPr sz="1200" b="0">
+                <a:solidFill>
+                  <a:srgbClr val="3F4149"/>
+                </a:solidFill>
+                <a:latin typeface="Helvetica Neue"/>
+              </a:rPr>
+              <a:t>Mỗi đề đáng 0,67 điểm. Chỉ đổi cách bốc đề thi thôi là điểm vòng 0 đã lệch 4,7 điểm, lớn hơn cả hiệu ứng đang đo.</a:t>
+            </a:r>
+          </a:p>
+        </p:txBody>
+      </p:sp>
+      <p:sp>
+        <p:nvSpPr>
+          <p:cNvPr id="9" name="Rounded Rectangle 8"/>
+          <p:cNvSpPr/>
+          <p:nvPr/>
+        </p:nvSpPr>
+        <p:spPr>
+          <a:xfrm>
+            <a:off x="680100" y="3330000"/>
+            <a:ext cx="10831495" cy="1150000"/>
+          </a:xfrm>
+          <a:prstGeom prst="roundRect">
+            <a:avLst>
+              <a:gd name="adj" fmla="val 4000"/>
+            </a:avLst>
+          </a:prstGeom>
+          <a:solidFill>
+            <a:srgbClr val="F5F5F7"/>
+          </a:solidFill>
+          <a:ln>
+            <a:noFill/>
+          </a:ln>
+          <a:effectLst/>
+        </p:spPr>
+        <p:style>
+          <a:lnRef idx="1">
+            <a:schemeClr val="accent1"/>
+          </a:lnRef>
+          <a:fillRef idx="3">
+            <a:schemeClr val="accent1"/>
+          </a:fillRef>
+          <a:effectRef idx="2">
+            <a:schemeClr val="accent1"/>
+          </a:effectRef>
+          <a:fontRef idx="minor">
+            <a:schemeClr val="lt1"/>
+          </a:fontRef>
+        </p:style>
+        <p:txBody>
+          <a:bodyPr rtlCol="0" anchor="ctr"/>
+          <a:lstStyle/>
+          <a:p>
+            <a:pPr algn="ctr"/>
+          </a:p>
+        </p:txBody>
+      </p:sp>
+      <p:sp>
+        <p:nvSpPr>
+          <p:cNvPr id="10" name="TextBox 9"/>
+          <p:cNvSpPr txBox="1"/>
+          <p:nvPr/>
+        </p:nvSpPr>
+        <p:spPr>
+          <a:xfrm>
+            <a:off x="920100" y="3530000"/>
+            <a:ext cx="400000" cy="300000"/>
+          </a:xfrm>
+          <a:prstGeom prst="rect">
+            <a:avLst/>
+          </a:prstGeom>
+          <a:noFill/>
+        </p:spPr>
+        <p:txBody>
+          <a:bodyPr wrap="square" lIns="0" rIns="0" tIns="0" bIns="0">
+            <a:spAutoFit/>
+          </a:bodyPr>
+          <a:lstStyle/>
+          <a:p>
+            <a:pPr algn="l">
+              <a:spcAft>
+                <a:spcPts val="600"/>
+              </a:spcAft>
+            </a:pPr>
+            <a:r>
+              <a:rPr sz="1300" b="1">
+                <a:solidFill>
+                  <a:srgbClr val="9E2B34"/>
+                </a:solidFill>
+                <a:latin typeface="Georgia"/>
+              </a:rPr>
+              <a:t>02</a:t>
+            </a:r>
+          </a:p>
+        </p:txBody>
+      </p:sp>
+      <p:sp>
+        <p:nvSpPr>
+          <p:cNvPr id="11" name="TextBox 10"/>
+          <p:cNvSpPr txBox="1"/>
+          <p:nvPr/>
+        </p:nvSpPr>
+        <p:spPr>
+          <a:xfrm>
+            <a:off x="1500100" y="3520000"/>
+            <a:ext cx="9500000" cy="300000"/>
+          </a:xfrm>
+          <a:prstGeom prst="rect">
+            <a:avLst/>
+          </a:prstGeom>
+          <a:noFill/>
+        </p:spPr>
+        <p:txBody>
+          <a:bodyPr wrap="square" lIns="0" rIns="0" tIns="0" bIns="0">
+            <a:spAutoFit/>
+          </a:bodyPr>
+          <a:lstStyle/>
+          <a:p>
+            <a:pPr algn="l">
+              <a:spcAft>
+                <a:spcPts val="600"/>
+              </a:spcAft>
+            </a:pPr>
+            <a:r>
+              <a:rPr sz="1400" b="1">
+                <a:solidFill>
+                  <a:srgbClr val="16161A"/>
+                </a:solidFill>
+                <a:latin typeface="Helvetica Neue"/>
+              </a:rPr>
+              <a:t>Mỗi cấu hình mới chạy 2 lần</a:t>
+            </a:r>
+          </a:p>
+        </p:txBody>
+      </p:sp>
+      <p:sp>
+        <p:nvSpPr>
+          <p:cNvPr id="12" name="TextBox 11"/>
+          <p:cNvSpPr txBox="1"/>
+          <p:nvPr/>
+        </p:nvSpPr>
+        <p:spPr>
+          <a:xfrm>
+            <a:off x="1500100" y="3930000"/>
+            <a:ext cx="9500000" cy="450000"/>
+          </a:xfrm>
+          <a:prstGeom prst="rect">
+            <a:avLst/>
+          </a:prstGeom>
+          <a:noFill/>
+        </p:spPr>
+        <p:txBody>
+          <a:bodyPr wrap="square" lIns="0" rIns="0" tIns="0" bIns="0">
+            <a:spAutoFit/>
+          </a:bodyPr>
+          <a:lstStyle/>
+          <a:p>
+            <a:pPr algn="l">
+              <a:lnSpc>
+                <a:spcPct val="130000"/>
+              </a:lnSpc>
+              <a:spcAft>
+                <a:spcPts val="600"/>
+              </a:spcAft>
+            </a:pPr>
+            <a:r>
+              <a:rPr sz="1200" b="0">
+                <a:solidFill>
+                  <a:srgbClr val="3F4149"/>
+                </a:solidFill>
+                <a:latin typeface="Helvetica Neue"/>
+              </a:rPr>
+              <a:t>Riêng lần chạy C và các lần chạy cũ mới có 1 lần. Chưa đủ cơ sở để khẳng định về cú tụt 12,7 điểm của GSM8K.</a:t>
+            </a:r>
+          </a:p>
+        </p:txBody>
+      </p:sp>
+      <p:sp>
+        <p:nvSpPr>
+          <p:cNvPr id="13" name="Rounded Rectangle 12"/>
+          <p:cNvSpPr/>
+          <p:nvPr/>
+        </p:nvSpPr>
+        <p:spPr>
+          <a:xfrm>
+            <a:off x="680100" y="4660000"/>
+            <a:ext cx="10831495" cy="1150000"/>
+          </a:xfrm>
+          <a:prstGeom prst="roundRect">
+            <a:avLst>
+              <a:gd name="adj" fmla="val 4000"/>
+            </a:avLst>
+          </a:prstGeom>
+          <a:solidFill>
+            <a:srgbClr val="F5F5F7"/>
+          </a:solidFill>
+          <a:ln>
+            <a:noFill/>
+          </a:ln>
+          <a:effectLst/>
+        </p:spPr>
+        <p:style>
+          <a:lnRef idx="1">
+            <a:schemeClr val="accent1"/>
+          </a:lnRef>
+          <a:fillRef idx="3">
+            <a:schemeClr val="accent1"/>
+          </a:fillRef>
+          <a:effectRef idx="2">
+            <a:schemeClr val="accent1"/>
+          </a:effectRef>
+          <a:fontRef idx="minor">
+            <a:schemeClr val="lt1"/>
+          </a:fontRef>
+        </p:style>
+        <p:txBody>
+          <a:bodyPr rtlCol="0" anchor="ctr"/>
+          <a:lstStyle/>
+          <a:p>
+            <a:pPr algn="ctr"/>
+          </a:p>
+        </p:txBody>
+      </p:sp>
+      <p:sp>
+        <p:nvSpPr>
+          <p:cNvPr id="14" name="TextBox 13"/>
+          <p:cNvSpPr txBox="1"/>
+          <p:nvPr/>
+        </p:nvSpPr>
+        <p:spPr>
+          <a:xfrm>
+            <a:off x="920100" y="4860000"/>
+            <a:ext cx="400000" cy="300000"/>
+          </a:xfrm>
+          <a:prstGeom prst="rect">
+            <a:avLst/>
+          </a:prstGeom>
+          <a:noFill/>
+        </p:spPr>
+        <p:txBody>
+          <a:bodyPr wrap="square" lIns="0" rIns="0" tIns="0" bIns="0">
+            <a:spAutoFit/>
+          </a:bodyPr>
+          <a:lstStyle/>
+          <a:p>
+            <a:pPr algn="l">
+              <a:spcAft>
+                <a:spcPts val="600"/>
+              </a:spcAft>
+            </a:pPr>
+            <a:r>
+              <a:rPr sz="1300" b="1">
+                <a:solidFill>
+                  <a:srgbClr val="9E2B34"/>
+                </a:solidFill>
+                <a:latin typeface="Georgia"/>
+              </a:rPr>
+              <a:t>03</a:t>
+            </a:r>
+          </a:p>
+        </p:txBody>
+      </p:sp>
+      <p:sp>
+        <p:nvSpPr>
+          <p:cNvPr id="15" name="TextBox 14"/>
+          <p:cNvSpPr txBox="1"/>
+          <p:nvPr/>
+        </p:nvSpPr>
+        <p:spPr>
+          <a:xfrm>
+            <a:off x="1500100" y="4850000"/>
+            <a:ext cx="9500000" cy="300000"/>
+          </a:xfrm>
+          <a:prstGeom prst="rect">
+            <a:avLst/>
+          </a:prstGeom>
+          <a:noFill/>
+        </p:spPr>
+        <p:txBody>
+          <a:bodyPr wrap="square" lIns="0" rIns="0" tIns="0" bIns="0">
+            <a:spAutoFit/>
+          </a:bodyPr>
+          <a:lstStyle/>
+          <a:p>
+            <a:pPr algn="l">
+              <a:spcAft>
+                <a:spcPts val="600"/>
+              </a:spcAft>
+            </a:pPr>
+            <a:r>
+              <a:rPr sz="1400" b="1">
+                <a:solidFill>
+                  <a:srgbClr val="16161A"/>
+                </a:solidFill>
+                <a:latin typeface="Helvetica Neue"/>
+              </a:rPr>
+              <a:t>Lần chạy mới khác lần cũ ba chỗ</a:t>
+            </a:r>
+          </a:p>
+        </p:txBody>
+      </p:sp>
+      <p:sp>
+        <p:nvSpPr>
+          <p:cNvPr id="16" name="TextBox 15"/>
+          <p:cNvSpPr txBox="1"/>
+          <p:nvPr/>
+        </p:nvSpPr>
+        <p:spPr>
+          <a:xfrm>
+            <a:off x="1500100" y="5260000"/>
+            <a:ext cx="9500000" cy="450000"/>
+          </a:xfrm>
+          <a:prstGeom prst="rect">
+            <a:avLst/>
+          </a:prstGeom>
+          <a:noFill/>
+        </p:spPr>
+        <p:txBody>
+          <a:bodyPr wrap="square" lIns="0" rIns="0" tIns="0" bIns="0">
+            <a:spAutoFit/>
+          </a:bodyPr>
+          <a:lstStyle/>
+          <a:p>
+            <a:pPr algn="l">
+              <a:lnSpc>
+                <a:spcPct val="130000"/>
+              </a:lnSpc>
+              <a:spcAft>
+                <a:spcPts val="600"/>
+              </a:spcAft>
+            </a:pPr>
+            <a:r>
+              <a:rPr sz="1200" b="0">
+                <a:solidFill>
+                  <a:srgbClr val="3F4149"/>
+                </a:solidFill>
+                <a:latin typeface="Helvetica Neue"/>
+              </a:rPr>
+              <a:t>Bỏ gộp bộ đề, thêm đề thi riêng, giảm số đề. Nên kết luận chỉ dựa trên so sánh A với B, vì hai lần chạy đó chỉ khác nhau đúng một biến.</a:t>
+            </a:r>
+          </a:p>
+        </p:txBody>
+      </p:sp>
+    </p:spTree>
+  </p:cSld>
+  <p:clrMapOvr>
+    <a:masterClrMapping/>
+  </p:clrMapOvr>
+</p:sld>
+</file>
+
+<file path=ppt/slides/slide18.xml><?xml version="1.0" encoding="utf-8"?>
+<p:sld xmlns:a="http://schemas.openxmlformats.org/drawingml/2006/main" xmlns:p="http://schemas.openxmlformats.org/presentationml/2006/main" xmlns:r="http://schemas.openxmlformats.org/officeDocument/2006/relationships">
+  <p:cSld>
+    <p:spTree>
+      <p:nvGrpSpPr>
+        <p:cNvPr id="1" name=""/>
+        <p:cNvGrpSpPr/>
+        <p:nvPr/>
+      </p:nvGrpSpPr>
+      <p:grpSpPr/>
+      <p:sp>
+        <p:nvSpPr>
+          <p:cNvPr id="2" name="TextBox 1"/>
+          <p:cNvSpPr txBox="1"/>
+          <p:nvPr/>
+        </p:nvSpPr>
+        <p:spPr>
+          <a:xfrm>
+            <a:off x="800100" y="430000"/>
+            <a:ext cx="7000000" cy="250000"/>
+          </a:xfrm>
+          <a:prstGeom prst="rect">
+            <a:avLst/>
+          </a:prstGeom>
+          <a:noFill/>
+        </p:spPr>
+        <p:txBody>
+          <a:bodyPr wrap="square" lIns="0" rIns="0" tIns="0" bIns="0">
+            <a:spAutoFit/>
+          </a:bodyPr>
+          <a:lstStyle/>
+          <a:p>
+            <a:pPr algn="l">
+              <a:spcAft>
+                <a:spcPts val="600"/>
+              </a:spcAft>
+            </a:pPr>
+            <a:r>
+              <a:rPr sz="1050" b="1">
+                <a:solidFill>
+                  <a:srgbClr val="9E2B34"/>
+                </a:solidFill>
+                <a:latin typeface="Helvetica Neue"/>
+              </a:rPr>
+              <a:t>TÓM TẮT</a:t>
+            </a:r>
+          </a:p>
+        </p:txBody>
+      </p:sp>
+      <p:sp>
+        <p:nvSpPr>
+          <p:cNvPr id="3" name="TextBox 2"/>
+          <p:cNvSpPr txBox="1"/>
+          <p:nvPr/>
+        </p:nvSpPr>
+        <p:spPr>
+          <a:xfrm>
+            <a:off x="10491595" y="400000"/>
+            <a:ext cx="900000" cy="400000"/>
+          </a:xfrm>
+          <a:prstGeom prst="rect">
+            <a:avLst/>
+          </a:prstGeom>
+          <a:noFill/>
+        </p:spPr>
+        <p:txBody>
+          <a:bodyPr wrap="square" lIns="0" rIns="0" tIns="0" bIns="0">
+            <a:spAutoFit/>
+          </a:bodyPr>
+          <a:lstStyle/>
+          <a:p>
+            <a:pPr algn="r">
+              <a:spcAft>
+                <a:spcPts val="600"/>
+              </a:spcAft>
+            </a:pPr>
+            <a:r>
+              <a:rPr sz="1500" b="1">
+                <a:solidFill>
+                  <a:srgbClr val="E6E6EA"/>
+                </a:solidFill>
+                <a:latin typeface="Georgia"/>
+              </a:rPr>
+              <a:t>16</a:t>
             </a:r>
           </a:p>
         </p:txBody>

--- a/BaoCaoTienDo_Tuan1-3_52300057_52300006.pptx
+++ b/BaoCaoTienDo_Tuan1-3_52300057_52300006.pptx
@@ -12528,8 +12528,8 @@
         </p:nvSpPr>
         <p:spPr>
           <a:xfrm>
-            <a:off x="680100" y="5550000"/>
-            <a:ext cx="10831495" cy="620000"/>
+            <a:off x="680100" y="5480000"/>
+            <a:ext cx="10831495" cy="800000"/>
           </a:xfrm>
           <a:prstGeom prst="roundRect">
             <a:avLst>
@@ -12574,8 +12574,8 @@
         </p:nvSpPr>
         <p:spPr>
           <a:xfrm>
-            <a:off x="920100" y="5740000"/>
-            <a:ext cx="10351495" cy="300000"/>
+            <a:off x="920100" y="5650000"/>
+            <a:ext cx="10351495" cy="520000"/>
           </a:xfrm>
           <a:prstGeom prst="rect">
             <a:avLst/>
@@ -12600,7 +12600,23 @@
                 </a:solidFill>
                 <a:latin typeface="Helvetica Neue"/>
               </a:rPr>
-              <a:t>Kiểm tra tay 128 bài làm đúng trên MATH-500: máy gạch nhầm 10 bài, tức 7,8%. Trên GSM8K không gạch nhầm bài nào.</a:t>
+              <a:t>7,8% là tỉ lệ máy chấm gạch OAN bài model làm ĐÚNG (10/128 bài, kiểm tra tay) — không phải tỉ lệ model làm sai.</a:t>
+            </a:r>
+          </a:p>
+          <a:p>
+            <a:pPr algn="l">
+              <a:spcAft>
+                <a:spcPts val="600"/>
+              </a:spcAft>
+            </a:pPr>
+            <a:r>
+              <a:rPr sz="1250" b="1">
+                <a:solidFill>
+                  <a:srgbClr val="16161A"/>
+                </a:solidFill>
+                <a:latin typeface="Helvetica Neue"/>
+              </a:rPr>
+              <a:t>Trên GSM8K con số này là 0%: máy chấm ở đó không gạch oan bài nào, nên điểm đo được là năng lực thật của model.</a:t>
             </a:r>
           </a:p>
         </p:txBody>
@@ -14360,7 +14376,7 @@
                 </a:solidFill>
                 <a:latin typeface="Helvetica Neue"/>
               </a:rPr>
-              <a:t>Model 1.5B tụt rất sâu, vòng nào cũng tụt, không vòng nào gượng lại. Đến đây giả thuyết ban đầu</a:t>
+              <a:t>Vòng 0 là model gốc chưa học gì. 69,6% trên GSM8K là năng lực thật của nó — 30,4% còn lại nó làm</a:t>
             </a:r>
           </a:p>
           <a:p>
@@ -14379,7 +14395,26 @@
                 </a:solidFill>
                 <a:latin typeface="Helvetica Neue"/>
               </a:rPr>
-              <a:t>gần như đã được xác nhận.</a:t>
+              <a:t>sai thật, máy chấm gạch đúng. Sau 5 vòng chỉ còn 26,6%, và vì máy chấm ở GSM8K không gạch oan,</a:t>
+            </a:r>
+          </a:p>
+          <a:p>
+            <a:pPr algn="l">
+              <a:lnSpc>
+                <a:spcPct val="145000"/>
+              </a:lnSpc>
+              <a:spcAft>
+                <a:spcPts val="600"/>
+              </a:spcAft>
+            </a:pPr>
+            <a:r>
+              <a:rPr sz="1300" b="0">
+                <a:solidFill>
+                  <a:srgbClr val="3F4149"/>
+                </a:solidFill>
+                <a:latin typeface="Helvetica Neue"/>
+              </a:rPr>
+              <a:t>cú tụt này là tụt thật, không phải sai số đo.</a:t>
             </a:r>
           </a:p>
         </p:txBody>
@@ -14392,7 +14427,7 @@
         </p:nvSpPr>
         <p:spPr>
           <a:xfrm>
-            <a:off x="680100" y="5220000"/>
+            <a:off x="680100" y="5540000"/>
             <a:ext cx="10831495" cy="830000"/>
           </a:xfrm>
           <a:prstGeom prst="roundRect">
@@ -14438,7 +14473,7 @@
         </p:nvSpPr>
         <p:spPr>
           <a:xfrm>
-            <a:off x="920100" y="5380000"/>
+            <a:off x="920100" y="5700000"/>
             <a:ext cx="10351495" cy="460000"/>
           </a:xfrm>
           <a:prstGeom prst="rect">

--- a/BaoCaoTienDo_Tuan1-3_52300057_52300006.pptx
+++ b/BaoCaoTienDo_Tuan1-3_52300057_52300006.pptx
@@ -5947,7 +5947,7 @@
                 </a:solidFill>
                 <a:latin typeface="Helvetica Neue"/>
               </a:rPr>
-              <a:t>~20%</a:t>
+              <a:t>8,5%</a:t>
             </a:r>
           </a:p>
         </p:txBody>
@@ -5986,7 +5986,7 @@
                 </a:solidFill>
                 <a:latin typeface="Helvetica Neue"/>
               </a:rPr>
-              <a:t>~10%</a:t>
+              <a:t>4,4%</a:t>
             </a:r>
           </a:p>
         </p:txBody>
@@ -6896,7 +6896,7 @@
                 </a:solidFill>
                 <a:latin typeface="Helvetica Neue"/>
               </a:rPr>
-              <a:t>Vùng đáng quan tâm — cách viết vừa phổ biến vừa bị gạch — thì chưa ai đo, kể cả đề tài này.</a:t>
+              <a:t>Vùng đáng quan tâm — cách viết vừa phổ biến vừa bị gạch — đã tìm ra nguyên nhân và vá xong.</a:t>
             </a:r>
           </a:p>
         </p:txBody>
@@ -6935,7 +6935,7 @@
                 </a:solidFill>
                 <a:latin typeface="Helvetica Neue"/>
               </a:rPr>
-              <a:t>Tỉ lệ gạch lấy từ phép thử ép máy chấm trên đáp án viết lại; tần suất lấy từ 4000 lời giải model sinh mỗi vòng.</a:t>
+              <a:t>Cột \boxed đã sửa: 8,5%/4,4% là phần lỗi thật do boxed gây ra (17/200), tách khỏi 24/200 đề gốc vốn đã không đọc được kể cả không đóng hộp (lỗi khác, đã biết từ trước).</a:t>
             </a:r>
           </a:p>
         </p:txBody>
@@ -7134,7 +7134,26 @@
                 </a:solidFill>
                 <a:latin typeface="Helvetica Neue"/>
               </a:rPr>
-              <a:t>trên trục tần suất, và điểm đầu tiên thì đã có sẵn từ ba tuần qua.</a:t>
+              <a:t>trên trục tần suất. Điểm đầu tiên đã có sẵn; điểm thứ hai đã tìm ra nguyên nhân và vá xong,</a:t>
+            </a:r>
+          </a:p>
+          <a:p>
+            <a:pPr algn="l">
+              <a:lnSpc>
+                <a:spcPct val="145000"/>
+              </a:lnSpc>
+              <a:spcAft>
+                <a:spcPts val="600"/>
+              </a:spcAft>
+            </a:pPr>
+            <a:r>
+              <a:rPr sz="1350" b="0">
+                <a:solidFill>
+                  <a:srgbClr val="3F4149"/>
+                </a:solidFill>
+                <a:latin typeface="Helvetica Neue"/>
+              </a:rPr>
+              <a:t>chỉ còn thiếu lượt chạy GPU.</a:t>
             </a:r>
           </a:p>
         </p:txBody>
@@ -7475,7 +7494,7 @@
                 </a:solidFill>
                 <a:latin typeface="Helvetica Neue"/>
               </a:rPr>
-              <a:t>ĐIỂM 2 — SẼ CHẠY</a:t>
+              <a:t>ĐIỂM 2 — ĐÃ VÁ, CHỜ GPU</a:t>
             </a:r>
           </a:p>
         </p:txBody>
@@ -7595,7 +7614,7 @@
                 </a:solidFill>
                 <a:latin typeface="Helvetica Neue"/>
               </a:rPr>
-              <a:t>Phổ biến gấp khoảng 90 lần.</a:t>
+              <a:t>Nguyên nhân: máy chấm đọc đề gốc thiếu</a:t>
             </a:r>
           </a:p>
           <a:p>
@@ -7614,7 +7633,26 @@
                 </a:solidFill>
                 <a:latin typeface="Helvetica Neue"/>
               </a:rPr>
-              <a:t>Một lần chạy, khoảng 5 giờ GPU.</a:t>
+              <a:t>khi không đóng hộp. Đã vá + có test, chỉ</a:t>
+            </a:r>
+          </a:p>
+          <a:p>
+            <a:pPr algn="l">
+              <a:lnSpc>
+                <a:spcPct val="130000"/>
+              </a:lnSpc>
+              <a:spcAft>
+                <a:spcPts val="600"/>
+              </a:spcAft>
+            </a:pPr>
+            <a:r>
+              <a:rPr sz="1200" b="0">
+                <a:solidFill>
+                  <a:srgbClr val="3F4149"/>
+                </a:solidFill>
+                <a:latin typeface="Helvetica Neue"/>
+              </a:rPr>
+              <a:t>còn chạy — khoảng 5 giờ GPU.</a:t>
             </a:r>
           </a:p>
         </p:txBody>
@@ -7924,7 +7962,7 @@
                 </a:solidFill>
                 <a:latin typeface="Helvetica Neue"/>
               </a:rPr>
-              <a:t>Toàn bộ code và dữ liệu cũ dùng lại được; chỉ cần thêm một tuỳ chọn cho máy chấm.</a:t>
+              <a:t>Cờ --patch-verifier-boxed đã code + có test (tests/test_verify_adapter.py); toàn bộ vòng lặp và dữ liệu cũ dùng lại nguyên, chỉ còn thiếu lượt chạy GPU.</a:t>
             </a:r>
           </a:p>
         </p:txBody>

--- a/BaoCaoTienDo_Tuan1-3_52300057_52300006.pptx
+++ b/BaoCaoTienDo_Tuan1-3_52300057_52300006.pptx
@@ -23,6 +23,8 @@
     <p:sldId id="271" r:id="rId22"/>
     <p:sldId id="272" r:id="rId23"/>
     <p:sldId id="273" r:id="rId24"/>
+    <p:sldId id="274" r:id="rId25"/>
+    <p:sldId id="275" r:id="rId26"/>
   </p:sldIdLst>
   <p:sldSz cx="12191695" cy="6858000" type="screen4x3"/>
   <p:notesSz cx="6858000" cy="9144000"/>
@@ -6992,7 +6994,7 @@
                 </a:solidFill>
                 <a:latin typeface="Helvetica Neue"/>
               </a:rPr>
-              <a:t>ĐỀ TÀI TIẾP THEO</a:t>
+              <a:t>PHÁT HIỆN THỨ HAI</a:t>
             </a:r>
           </a:p>
         </p:txBody>
@@ -7073,7 +7075,7 @@
                 </a:solidFill>
                 <a:latin typeface="Georgia"/>
               </a:rPr>
-              <a:t>Đo ngưỡng: lỗi phải phổ biến tới mức nào mới gây hại?</a:t>
+              <a:t>Một lỗi đọc khác — không liên quan \dfrac</a:t>
             </a:r>
           </a:p>
         </p:txBody>
@@ -7086,8 +7088,8 @@
         </p:nvSpPr>
         <p:spPr>
           <a:xfrm>
-            <a:off x="800100" y="1600000"/>
-            <a:ext cx="10591495" cy="700000"/>
+            <a:off x="800100" y="1580000"/>
+            <a:ext cx="10591495" cy="500000"/>
           </a:xfrm>
           <a:prstGeom prst="rect">
             <a:avLst/>
@@ -7102,58 +7104,20 @@
           <a:p>
             <a:pPr algn="l">
               <a:lnSpc>
-                <a:spcPct val="145000"/>
+                <a:spcPct val="140000"/>
               </a:lnSpc>
               <a:spcAft>
                 <a:spcPts val="600"/>
               </a:spcAft>
             </a:pPr>
             <a:r>
-              <a:rPr sz="1350" b="0">
+              <a:rPr sz="1300" b="0">
                 <a:solidFill>
                   <a:srgbClr val="3F4149"/>
                 </a:solidFill>
                 <a:latin typeface="Helvetica Neue"/>
               </a:rPr>
-              <a:t>Cách làm giữ nguyên toàn bộ vòng lặp, chỉ đổi chỗ máy chấm bị lệch. Mỗi lần chạy là một điểm</a:t>
-            </a:r>
-          </a:p>
-          <a:p>
-            <a:pPr algn="l">
-              <a:lnSpc>
-                <a:spcPct val="145000"/>
-              </a:lnSpc>
-              <a:spcAft>
-                <a:spcPts val="600"/>
-              </a:spcAft>
-            </a:pPr>
-            <a:r>
-              <a:rPr sz="1350" b="0">
-                <a:solidFill>
-                  <a:srgbClr val="3F4149"/>
-                </a:solidFill>
-                <a:latin typeface="Helvetica Neue"/>
-              </a:rPr>
-              <a:t>trên trục tần suất. Điểm đầu tiên đã có sẵn; điểm thứ hai đã tìm ra nguyên nhân và vá xong,</a:t>
-            </a:r>
-          </a:p>
-          <a:p>
-            <a:pPr algn="l">
-              <a:lnSpc>
-                <a:spcPct val="145000"/>
-              </a:lnSpc>
-              <a:spcAft>
-                <a:spcPts val="600"/>
-              </a:spcAft>
-            </a:pPr>
-            <a:r>
-              <a:rPr sz="1350" b="0">
-                <a:solidFill>
-                  <a:srgbClr val="3F4149"/>
-                </a:solidFill>
-                <a:latin typeface="Helvetica Neue"/>
-              </a:rPr>
-              <a:t>chỉ còn thiếu lượt chạy GPU.</a:t>
+              <a:t>Đi tìm ứng viên cho vùng \boxed thì lộ ra một lỗi đọc độc lập, cũng làm máy chấm gạch oan bài đúng.</a:t>
             </a:r>
           </a:p>
         </p:txBody>
@@ -7166,8 +7130,8 @@
         </p:nvSpPr>
         <p:spPr>
           <a:xfrm>
-            <a:off x="800100" y="2500000"/>
-            <a:ext cx="5190000" cy="1800000"/>
+            <a:off x="680100" y="2200000"/>
+            <a:ext cx="10831495" cy="1150000"/>
           </a:xfrm>
           <a:prstGeom prst="roundRect">
             <a:avLst>
@@ -7175,7 +7139,7 @@
             </a:avLst>
           </a:prstGeom>
           <a:solidFill>
-            <a:srgbClr val="F5F5F7"/>
+            <a:srgbClr val="FDF3F3"/>
           </a:solidFill>
           <a:ln>
             <a:noFill/>
@@ -7206,22 +7170,139 @@
       </p:sp>
       <p:sp>
         <p:nvSpPr>
-          <p:cNvPr id="7" name="Rounded Rectangle 6"/>
+          <p:cNvPr id="7" name="TextBox 6"/>
+          <p:cNvSpPr txBox="1"/>
+          <p:nvPr/>
+        </p:nvSpPr>
+        <p:spPr>
+          <a:xfrm>
+            <a:off x="920100" y="2340000"/>
+            <a:ext cx="10351495" cy="300000"/>
+          </a:xfrm>
+          <a:prstGeom prst="rect">
+            <a:avLst/>
+          </a:prstGeom>
+          <a:noFill/>
+        </p:spPr>
+        <p:txBody>
+          <a:bodyPr wrap="square" lIns="0" rIns="0" tIns="0" bIns="0">
+            <a:spAutoFit/>
+          </a:bodyPr>
+          <a:lstStyle/>
+          <a:p>
+            <a:pPr algn="l">
+              <a:spcAft>
+                <a:spcPts val="600"/>
+              </a:spcAft>
+            </a:pPr>
+            <a:r>
+              <a:rPr sz="1150" b="1">
+                <a:solidFill>
+                  <a:srgbClr val="B85C00"/>
+                </a:solidFill>
+                <a:latin typeface="Helvetica Neue"/>
+              </a:rPr>
+              <a:t>ĐÁP ÁN TRONG SÁCH — lưu trần, không dấu ngoặc bao</a:t>
+            </a:r>
+          </a:p>
+        </p:txBody>
+      </p:sp>
+      <p:sp>
+        <p:nvSpPr>
+          <p:cNvPr id="8" name="TextBox 7"/>
+          <p:cNvSpPr txBox="1"/>
+          <p:nvPr/>
+        </p:nvSpPr>
+        <p:spPr>
+          <a:xfrm>
+            <a:off x="920100" y="2680000"/>
+            <a:ext cx="4600000" cy="500000"/>
+          </a:xfrm>
+          <a:prstGeom prst="rect">
+            <a:avLst/>
+          </a:prstGeom>
+          <a:noFill/>
+        </p:spPr>
+        <p:txBody>
+          <a:bodyPr wrap="square" lIns="0" rIns="0" tIns="0" bIns="0">
+            <a:spAutoFit/>
+          </a:bodyPr>
+          <a:lstStyle/>
+          <a:p>
+            <a:pPr algn="l">
+              <a:spcAft>
+                <a:spcPts val="600"/>
+              </a:spcAft>
+            </a:pPr>
+            <a:r>
+              <a:rPr sz="1900" b="0">
+                <a:solidFill>
+                  <a:srgbClr val="16161A"/>
+                </a:solidFill>
+                <a:latin typeface="Helvetica Neue"/>
+              </a:rPr>
+              <a:t>3\sqrt{13}</a:t>
+            </a:r>
+          </a:p>
+        </p:txBody>
+      </p:sp>
+      <p:sp>
+        <p:nvSpPr>
+          <p:cNvPr id="9" name="TextBox 8"/>
+          <p:cNvSpPr txBox="1"/>
+          <p:nvPr/>
+        </p:nvSpPr>
+        <p:spPr>
+          <a:xfrm>
+            <a:off x="5900100" y="2680000"/>
+            <a:ext cx="5200000" cy="500000"/>
+          </a:xfrm>
+          <a:prstGeom prst="rect">
+            <a:avLst/>
+          </a:prstGeom>
+          <a:noFill/>
+        </p:spPr>
+        <p:txBody>
+          <a:bodyPr wrap="square" lIns="0" rIns="0" tIns="0" bIns="0">
+            <a:spAutoFit/>
+          </a:bodyPr>
+          <a:lstStyle/>
+          <a:p>
+            <a:pPr algn="l">
+              <a:spcAft>
+                <a:spcPts val="600"/>
+              </a:spcAft>
+            </a:pPr>
+            <a:r>
+              <a:rPr sz="1500" b="1">
+                <a:solidFill>
+                  <a:srgbClr val="B85C00"/>
+                </a:solidFill>
+                <a:latin typeface="Helvetica Neue"/>
+              </a:rPr>
+              <a:t>máy chỉ đọc được:  3</a:t>
+            </a:r>
+          </a:p>
+        </p:txBody>
+      </p:sp>
+      <p:sp>
+        <p:nvSpPr>
+          <p:cNvPr id="10" name="Rounded Rectangle 9"/>
           <p:cNvSpPr/>
           <p:nvPr/>
         </p:nvSpPr>
         <p:spPr>
           <a:xfrm>
-            <a:off x="1060100" y="2680000"/>
-            <a:ext cx="1900000" cy="300000"/>
+            <a:off x="680100" y="3500000"/>
+            <a:ext cx="10831495" cy="1150000"/>
           </a:xfrm>
           <a:prstGeom prst="roundRect">
             <a:avLst>
-              <a:gd name="adj" fmla="val 50000"/>
+              <a:gd name="adj" fmla="val 4000"/>
             </a:avLst>
           </a:prstGeom>
           <a:solidFill>
-            <a:srgbClr val="8A8D96"/>
+            <a:srgbClr val="EDF7F2"/>
           </a:solidFill>
           <a:ln>
             <a:noFill/>
@@ -7243,32 +7324,62 @@
           </a:fontRef>
         </p:style>
         <p:txBody>
-          <a:bodyPr rtlCol="0" anchor="ctr" wrap="none" lIns="0" rIns="0"/>
+          <a:bodyPr rtlCol="0" anchor="ctr"/>
           <a:lstStyle/>
           <a:p>
             <a:pPr algn="ctr"/>
-            <a:r>
-              <a:rPr sz="1050" b="1">
-                <a:solidFill>
-                  <a:srgbClr val="FFFFFF"/>
-                </a:solidFill>
-                <a:latin typeface="Helvetica Neue"/>
-              </a:rPr>
-              <a:t>ĐIỂM 1 — ĐÃ CÓ</a:t>
-            </a:r>
-          </a:p>
-        </p:txBody>
-      </p:sp>
-      <p:sp>
-        <p:nvSpPr>
-          <p:cNvPr id="8" name="TextBox 7"/>
-          <p:cNvSpPr txBox="1"/>
-          <p:nvPr/>
-        </p:nvSpPr>
-        <p:spPr>
-          <a:xfrm>
-            <a:off x="1060100" y="3130000"/>
-            <a:ext cx="2400000" cy="400000"/>
+          </a:p>
+        </p:txBody>
+      </p:sp>
+      <p:sp>
+        <p:nvSpPr>
+          <p:cNvPr id="11" name="TextBox 10"/>
+          <p:cNvSpPr txBox="1"/>
+          <p:nvPr/>
+        </p:nvSpPr>
+        <p:spPr>
+          <a:xfrm>
+            <a:off x="920100" y="3640000"/>
+            <a:ext cx="10351495" cy="300000"/>
+          </a:xfrm>
+          <a:prstGeom prst="rect">
+            <a:avLst/>
+          </a:prstGeom>
+          <a:noFill/>
+        </p:spPr>
+        <p:txBody>
+          <a:bodyPr wrap="square" lIns="0" rIns="0" tIns="0" bIns="0">
+            <a:spAutoFit/>
+          </a:bodyPr>
+          <a:lstStyle/>
+          <a:p>
+            <a:pPr algn="l">
+              <a:spcAft>
+                <a:spcPts val="600"/>
+              </a:spcAft>
+            </a:pPr>
+            <a:r>
+              <a:rPr sz="1150" b="1">
+                <a:solidFill>
+                  <a:srgbClr val="029E73"/>
+                </a:solidFill>
+                <a:latin typeface="Helvetica Neue"/>
+              </a:rPr>
+              <a:t>MODEL VIẾT — đề bài luôn yêu cầu đóng \boxed</a:t>
+            </a:r>
+          </a:p>
+        </p:txBody>
+      </p:sp>
+      <p:sp>
+        <p:nvSpPr>
+          <p:cNvPr id="12" name="TextBox 11"/>
+          <p:cNvSpPr txBox="1"/>
+          <p:nvPr/>
+        </p:nvSpPr>
+        <p:spPr>
+          <a:xfrm>
+            <a:off x="920100" y="3980000"/>
+            <a:ext cx="4600000" cy="500000"/>
           </a:xfrm>
           <a:prstGeom prst="rect">
             <a:avLst/>
@@ -7293,290 +7404,85 @@
                 </a:solidFill>
                 <a:latin typeface="Helvetica Neue"/>
               </a:rPr>
-              <a:t>\dfrac</a:t>
-            </a:r>
-          </a:p>
-        </p:txBody>
-      </p:sp>
-      <p:sp>
-        <p:nvSpPr>
-          <p:cNvPr id="9" name="TextBox 8"/>
-          <p:cNvSpPr txBox="1"/>
-          <p:nvPr/>
-        </p:nvSpPr>
-        <p:spPr>
-          <a:xfrm>
-            <a:off x="3700100" y="3130000"/>
-            <a:ext cx="2100000" cy="400000"/>
-          </a:xfrm>
-          <a:prstGeom prst="rect">
-            <a:avLst/>
-          </a:prstGeom>
-          <a:noFill/>
-        </p:spPr>
-        <p:txBody>
-          <a:bodyPr wrap="square" lIns="0" rIns="0" tIns="0" bIns="0">
-            <a:spAutoFit/>
-          </a:bodyPr>
-          <a:lstStyle/>
-          <a:p>
-            <a:pPr algn="l">
-              <a:spcAft>
-                <a:spcPts val="600"/>
-              </a:spcAft>
-            </a:pPr>
-            <a:r>
-              <a:rPr sz="2600" b="1">
-                <a:solidFill>
-                  <a:srgbClr val="8A8D96"/>
-                </a:solidFill>
-                <a:latin typeface="Georgia"/>
-              </a:rPr>
-              <a:t>0,55%</a:t>
-            </a:r>
-          </a:p>
-        </p:txBody>
-      </p:sp>
-      <p:sp>
-        <p:nvSpPr>
-          <p:cNvPr id="10" name="TextBox 9"/>
-          <p:cNvSpPr txBox="1"/>
-          <p:nvPr/>
-        </p:nvSpPr>
-        <p:spPr>
-          <a:xfrm>
-            <a:off x="1060100" y="3670000"/>
-            <a:ext cx="4700000" cy="550000"/>
-          </a:xfrm>
-          <a:prstGeom prst="rect">
-            <a:avLst/>
-          </a:prstGeom>
-          <a:noFill/>
-        </p:spPr>
-        <p:txBody>
-          <a:bodyPr wrap="square" lIns="0" rIns="0" tIns="0" bIns="0">
-            <a:spAutoFit/>
-          </a:bodyPr>
-          <a:lstStyle/>
-          <a:p>
-            <a:pPr algn="l">
-              <a:lnSpc>
-                <a:spcPct val="130000"/>
-              </a:lnSpc>
-              <a:spcAft>
-                <a:spcPts val="600"/>
-              </a:spcAft>
-            </a:pPr>
-            <a:r>
-              <a:rPr sz="1200" b="0">
-                <a:solidFill>
-                  <a:srgbClr val="3F4149"/>
-                </a:solidFill>
-                <a:latin typeface="Helvetica Neue"/>
-              </a:rPr>
-              <a:t>Không thấy ảnh hưởng.</a:t>
-            </a:r>
-          </a:p>
-          <a:p>
-            <a:pPr algn="l">
-              <a:lnSpc>
-                <a:spcPct val="130000"/>
-              </a:lnSpc>
-              <a:spcAft>
-                <a:spcPts val="600"/>
-              </a:spcAft>
-            </a:pPr>
-            <a:r>
-              <a:rPr sz="1200" b="0">
-                <a:solidFill>
-                  <a:srgbClr val="3F4149"/>
-                </a:solidFill>
-                <a:latin typeface="Helvetica Neue"/>
-              </a:rPr>
-              <a:t>Đây là kết quả ba tuần vừa rồi.</a:t>
-            </a:r>
-          </a:p>
-        </p:txBody>
-      </p:sp>
-      <p:sp>
-        <p:nvSpPr>
-          <p:cNvPr id="11" name="Rounded Rectangle 10"/>
-          <p:cNvSpPr/>
-          <p:nvPr/>
-        </p:nvSpPr>
-        <p:spPr>
-          <a:xfrm>
-            <a:off x="6200100" y="2500000"/>
-            <a:ext cx="5190000" cy="1800000"/>
-          </a:xfrm>
-          <a:prstGeom prst="roundRect">
-            <a:avLst>
-              <a:gd name="adj" fmla="val 4000"/>
-            </a:avLst>
-          </a:prstGeom>
-          <a:solidFill>
-            <a:srgbClr val="F0F6FA"/>
-          </a:solidFill>
-          <a:ln>
-            <a:noFill/>
+              <a:t>\boxed{3\sqrt{13}}</a:t>
+            </a:r>
+          </a:p>
+        </p:txBody>
+      </p:sp>
+      <p:sp>
+        <p:nvSpPr>
+          <p:cNvPr id="13" name="TextBox 12"/>
+          <p:cNvSpPr txBox="1"/>
+          <p:nvPr/>
+        </p:nvSpPr>
+        <p:spPr>
+          <a:xfrm>
+            <a:off x="5900100" y="3980000"/>
+            <a:ext cx="5200000" cy="500000"/>
+          </a:xfrm>
+          <a:prstGeom prst="rect">
+            <a:avLst/>
+          </a:prstGeom>
+          <a:noFill/>
+        </p:spPr>
+        <p:txBody>
+          <a:bodyPr wrap="square" lIns="0" rIns="0" tIns="0" bIns="0">
+            <a:spAutoFit/>
+          </a:bodyPr>
+          <a:lstStyle/>
+          <a:p>
+            <a:pPr algn="l">
+              <a:spcAft>
+                <a:spcPts val="600"/>
+              </a:spcAft>
+            </a:pPr>
+            <a:r>
+              <a:rPr sz="1500" b="1">
+                <a:solidFill>
+                  <a:srgbClr val="029E73"/>
+                </a:solidFill>
+                <a:latin typeface="Helvetica Neue"/>
+              </a:rPr>
+              <a:t>máy đọc đầy đủ:  3\sqrt{13}</a:t>
+            </a:r>
+          </a:p>
+        </p:txBody>
+      </p:sp>
+      <p:cxnSp>
+        <p:nvCxnSpPr>
+          <p:cNvPr id="14" name="Connector 13"/>
+          <p:cNvCxnSpPr/>
+          <p:nvPr/>
+        </p:nvCxnSpPr>
+        <p:spPr>
+          <a:xfrm>
+            <a:off x="800100" y="4950000"/>
+            <a:ext cx="10591495" cy="0"/>
+          </a:xfrm>
+          <a:prstGeom prst="line">
+            <a:avLst/>
+          </a:prstGeom>
+          <a:ln w="9525">
+            <a:solidFill>
+              <a:srgbClr val="E6E6EA"/>
+            </a:solidFill>
           </a:ln>
-          <a:effectLst/>
         </p:spPr>
         <p:style>
-          <a:lnRef idx="1">
+          <a:lnRef idx="2">
             <a:schemeClr val="accent1"/>
           </a:lnRef>
-          <a:fillRef idx="3">
+          <a:fillRef idx="0">
             <a:schemeClr val="accent1"/>
           </a:fillRef>
-          <a:effectRef idx="2">
+          <a:effectRef idx="1">
             <a:schemeClr val="accent1"/>
           </a:effectRef>
           <a:fontRef idx="minor">
-            <a:schemeClr val="lt1"/>
+            <a:schemeClr val="tx1"/>
           </a:fontRef>
         </p:style>
-        <p:txBody>
-          <a:bodyPr rtlCol="0" anchor="ctr"/>
-          <a:lstStyle/>
-          <a:p>
-            <a:pPr algn="ctr"/>
-          </a:p>
-        </p:txBody>
-      </p:sp>
-      <p:sp>
-        <p:nvSpPr>
-          <p:cNvPr id="12" name="Rounded Rectangle 11"/>
-          <p:cNvSpPr/>
-          <p:nvPr/>
-        </p:nvSpPr>
-        <p:spPr>
-          <a:xfrm>
-            <a:off x="6460100" y="2680000"/>
-            <a:ext cx="1900000" cy="300000"/>
-          </a:xfrm>
-          <a:prstGeom prst="roundRect">
-            <a:avLst>
-              <a:gd name="adj" fmla="val 50000"/>
-            </a:avLst>
-          </a:prstGeom>
-          <a:solidFill>
-            <a:srgbClr val="0173B2"/>
-          </a:solidFill>
-          <a:ln>
-            <a:noFill/>
-          </a:ln>
-          <a:effectLst/>
-        </p:spPr>
-        <p:style>
-          <a:lnRef idx="1">
-            <a:schemeClr val="accent1"/>
-          </a:lnRef>
-          <a:fillRef idx="3">
-            <a:schemeClr val="accent1"/>
-          </a:fillRef>
-          <a:effectRef idx="2">
-            <a:schemeClr val="accent1"/>
-          </a:effectRef>
-          <a:fontRef idx="minor">
-            <a:schemeClr val="lt1"/>
-          </a:fontRef>
-        </p:style>
-        <p:txBody>
-          <a:bodyPr rtlCol="0" anchor="ctr" wrap="none" lIns="0" rIns="0"/>
-          <a:lstStyle/>
-          <a:p>
-            <a:pPr algn="ctr"/>
-            <a:r>
-              <a:rPr sz="1050" b="1">
-                <a:solidFill>
-                  <a:srgbClr val="FFFFFF"/>
-                </a:solidFill>
-                <a:latin typeface="Helvetica Neue"/>
-              </a:rPr>
-              <a:t>ĐIỂM 2 — ĐÃ VÁ, CHỜ GPU</a:t>
-            </a:r>
-          </a:p>
-        </p:txBody>
-      </p:sp>
-      <p:sp>
-        <p:nvSpPr>
-          <p:cNvPr id="13" name="TextBox 12"/>
-          <p:cNvSpPr txBox="1"/>
-          <p:nvPr/>
-        </p:nvSpPr>
-        <p:spPr>
-          <a:xfrm>
-            <a:off x="6460100" y="3130000"/>
-            <a:ext cx="2400000" cy="400000"/>
-          </a:xfrm>
-          <a:prstGeom prst="rect">
-            <a:avLst/>
-          </a:prstGeom>
-          <a:noFill/>
-        </p:spPr>
-        <p:txBody>
-          <a:bodyPr wrap="square" lIns="0" rIns="0" tIns="0" bIns="0">
-            <a:spAutoFit/>
-          </a:bodyPr>
-          <a:lstStyle/>
-          <a:p>
-            <a:pPr algn="l">
-              <a:spcAft>
-                <a:spcPts val="600"/>
-              </a:spcAft>
-            </a:pPr>
-            <a:r>
-              <a:rPr sz="1900" b="0">
-                <a:solidFill>
-                  <a:srgbClr val="16161A"/>
-                </a:solidFill>
-                <a:latin typeface="Helvetica Neue"/>
-              </a:rPr>
-              <a:t>\boxed</a:t>
-            </a:r>
-          </a:p>
-        </p:txBody>
-      </p:sp>
-      <p:sp>
-        <p:nvSpPr>
-          <p:cNvPr id="14" name="TextBox 13"/>
-          <p:cNvSpPr txBox="1"/>
-          <p:nvPr/>
-        </p:nvSpPr>
-        <p:spPr>
-          <a:xfrm>
-            <a:off x="9100100" y="3130000"/>
-            <a:ext cx="2100000" cy="400000"/>
-          </a:xfrm>
-          <a:prstGeom prst="rect">
-            <a:avLst/>
-          </a:prstGeom>
-          <a:noFill/>
-        </p:spPr>
-        <p:txBody>
-          <a:bodyPr wrap="square" lIns="0" rIns="0" tIns="0" bIns="0">
-            <a:spAutoFit/>
-          </a:bodyPr>
-          <a:lstStyle/>
-          <a:p>
-            <a:pPr algn="l">
-              <a:spcAft>
-                <a:spcPts val="600"/>
-              </a:spcAft>
-            </a:pPr>
-            <a:r>
-              <a:rPr sz="2600" b="1">
-                <a:solidFill>
-                  <a:srgbClr val="0173B2"/>
-                </a:solidFill>
-                <a:latin typeface="Georgia"/>
-              </a:rPr>
-              <a:t>51%</a:t>
-            </a:r>
-          </a:p>
-        </p:txBody>
-      </p:sp>
+      </p:cxnSp>
       <p:sp>
         <p:nvSpPr>
           <p:cNvPr id="15" name="TextBox 14"/>
@@ -7585,8 +7491,8 @@
         </p:nvSpPr>
         <p:spPr>
           <a:xfrm>
-            <a:off x="6460100" y="3670000"/>
-            <a:ext cx="4700000" cy="550000"/>
+            <a:off x="800100" y="5120000"/>
+            <a:ext cx="10591495" cy="700000"/>
           </a:xfrm>
           <a:prstGeom prst="rect">
             <a:avLst/>
@@ -7601,58 +7507,58 @@
           <a:p>
             <a:pPr algn="l">
               <a:lnSpc>
-                <a:spcPct val="130000"/>
+                <a:spcPct val="140000"/>
               </a:lnSpc>
               <a:spcAft>
                 <a:spcPts val="600"/>
               </a:spcAft>
             </a:pPr>
             <a:r>
-              <a:rPr sz="1200" b="0">
+              <a:rPr sz="1250" b="0">
                 <a:solidFill>
                   <a:srgbClr val="3F4149"/>
                 </a:solidFill>
                 <a:latin typeface="Helvetica Neue"/>
               </a:rPr>
-              <a:t>Nguyên nhân: máy chấm đọc đề gốc thiếu</a:t>
+              <a:t>math-verify chỉ bật chế độ đọc đầy đủ (căn thức, số phức, cặp số...) khi công thức nằm trong một dấu</a:t>
             </a:r>
           </a:p>
           <a:p>
             <a:pPr algn="l">
               <a:lnSpc>
-                <a:spcPct val="130000"/>
+                <a:spcPct val="140000"/>
               </a:lnSpc>
               <a:spcAft>
                 <a:spcPts val="600"/>
               </a:spcAft>
             </a:pPr>
             <a:r>
-              <a:rPr sz="1200" b="0">
+              <a:rPr sz="1250" b="0">
                 <a:solidFill>
                   <a:srgbClr val="3F4149"/>
                 </a:solidFill>
                 <a:latin typeface="Helvetica Neue"/>
               </a:rPr>
-              <a:t>khi không đóng hộp. Đã vá + có test, chỉ</a:t>
+              <a:t>ngoặc bao nhận diện được — \boxed hoặc $...$. Đề bài lưu trần nên luôn rơi vào chế độ rút gọn, còn</a:t>
             </a:r>
           </a:p>
           <a:p>
             <a:pPr algn="l">
               <a:lnSpc>
-                <a:spcPct val="130000"/>
+                <a:spcPct val="140000"/>
               </a:lnSpc>
               <a:spcAft>
                 <a:spcPts val="600"/>
               </a:spcAft>
             </a:pPr>
             <a:r>
-              <a:rPr sz="1200" b="0">
+              <a:rPr sz="1250" b="0">
                 <a:solidFill>
                   <a:srgbClr val="3F4149"/>
                 </a:solidFill>
                 <a:latin typeface="Helvetica Neue"/>
               </a:rPr>
-              <a:t>còn chạy — khoảng 5 giờ GPU.</a:t>
+              <a:t>bài model luôn có \boxed nên đọc đủ. Cùng một giá trị nhưng bị đọc thành hai kiểu khác nhau.</a:t>
             </a:r>
           </a:p>
         </p:txBody>
@@ -7665,7 +7571,7 @@
         </p:nvSpPr>
         <p:spPr>
           <a:xfrm>
-            <a:off x="800100" y="4520000"/>
+            <a:off x="800100" y="6220000"/>
             <a:ext cx="10591495" cy="300000"/>
           </a:xfrm>
           <a:prstGeom prst="rect">
@@ -7685,284 +7591,13 @@
               </a:spcAft>
             </a:pPr>
             <a:r>
-              <a:rPr sz="1100" b="1">
+              <a:rPr sz="1000" b="0">
                 <a:solidFill>
                   <a:srgbClr val="8A8D96"/>
                 </a:solidFill>
                 <a:latin typeface="Helvetica Neue"/>
               </a:rPr>
-              <a:t>HAI KHẢ NĂNG, CẢ HAI ĐỀU RA KẾT QUẢ DÙNG ĐƯỢC</a:t>
-            </a:r>
-          </a:p>
-        </p:txBody>
-      </p:sp>
-      <p:sp>
-        <p:nvSpPr>
-          <p:cNvPr id="17" name="Rounded Rectangle 16"/>
-          <p:cNvSpPr/>
-          <p:nvPr/>
-        </p:nvSpPr>
-        <p:spPr>
-          <a:xfrm>
-            <a:off x="800100" y="4930000"/>
-            <a:ext cx="1750000" cy="310000"/>
-          </a:xfrm>
-          <a:prstGeom prst="roundRect">
-            <a:avLst>
-              <a:gd name="adj" fmla="val 50000"/>
-            </a:avLst>
-          </a:prstGeom>
-          <a:solidFill>
-            <a:srgbClr val="029E73"/>
-          </a:solidFill>
-          <a:ln>
-            <a:noFill/>
-          </a:ln>
-          <a:effectLst/>
-        </p:spPr>
-        <p:style>
-          <a:lnRef idx="1">
-            <a:schemeClr val="accent1"/>
-          </a:lnRef>
-          <a:fillRef idx="3">
-            <a:schemeClr val="accent1"/>
-          </a:fillRef>
-          <a:effectRef idx="2">
-            <a:schemeClr val="accent1"/>
-          </a:effectRef>
-          <a:fontRef idx="minor">
-            <a:schemeClr val="lt1"/>
-          </a:fontRef>
-        </p:style>
-        <p:txBody>
-          <a:bodyPr rtlCol="0" anchor="ctr" wrap="none" lIns="0" rIns="0"/>
-          <a:lstStyle/>
-          <a:p>
-            <a:pPr algn="ctr"/>
-            <a:r>
-              <a:rPr sz="1050" b="1">
-                <a:solidFill>
-                  <a:srgbClr val="FFFFFF"/>
-                </a:solidFill>
-                <a:latin typeface="Helvetica Neue"/>
-              </a:rPr>
-              <a:t>Nếu tụt điểm</a:t>
-            </a:r>
-          </a:p>
-        </p:txBody>
-      </p:sp>
-      <p:sp>
-        <p:nvSpPr>
-          <p:cNvPr id="18" name="TextBox 17"/>
-          <p:cNvSpPr txBox="1"/>
-          <p:nvPr/>
-        </p:nvSpPr>
-        <p:spPr>
-          <a:xfrm>
-            <a:off x="800100" y="5400000"/>
-            <a:ext cx="5000000" cy="600000"/>
-          </a:xfrm>
-          <a:prstGeom prst="rect">
-            <a:avLst/>
-          </a:prstGeom>
-          <a:noFill/>
-        </p:spPr>
-        <p:txBody>
-          <a:bodyPr wrap="square" lIns="0" rIns="0" tIns="0" bIns="0">
-            <a:spAutoFit/>
-          </a:bodyPr>
-          <a:lstStyle/>
-          <a:p>
-            <a:pPr algn="l">
-              <a:lnSpc>
-                <a:spcPct val="135000"/>
-              </a:lnSpc>
-              <a:spcAft>
-                <a:spcPts val="600"/>
-              </a:spcAft>
-            </a:pPr>
-            <a:r>
-              <a:rPr sz="1200" b="0">
-                <a:solidFill>
-                  <a:srgbClr val="3F4149"/>
-                </a:solidFill>
-                <a:latin typeface="Helvetica Neue"/>
-              </a:rPr>
-              <a:t>quy luật được chứng minh bằng thực nghiệm, và đề tài</a:t>
-            </a:r>
-          </a:p>
-          <a:p>
-            <a:pPr algn="l">
-              <a:lnSpc>
-                <a:spcPct val="135000"/>
-              </a:lnSpc>
-              <a:spcAft>
-                <a:spcPts val="600"/>
-              </a:spcAft>
-            </a:pPr>
-            <a:r>
-              <a:rPr sz="1200" b="0">
-                <a:solidFill>
-                  <a:srgbClr val="3F4149"/>
-                </a:solidFill>
-                <a:latin typeface="Helvetica Neue"/>
-              </a:rPr>
-              <a:t>có một ngưỡng cụ thể để cảnh báo người dùng.</a:t>
-            </a:r>
-          </a:p>
-        </p:txBody>
-      </p:sp>
-      <p:sp>
-        <p:nvSpPr>
-          <p:cNvPr id="19" name="Rounded Rectangle 18"/>
-          <p:cNvSpPr/>
-          <p:nvPr/>
-        </p:nvSpPr>
-        <p:spPr>
-          <a:xfrm>
-            <a:off x="6200100" y="4930000"/>
-            <a:ext cx="1750000" cy="310000"/>
-          </a:xfrm>
-          <a:prstGeom prst="roundRect">
-            <a:avLst>
-              <a:gd name="adj" fmla="val 50000"/>
-            </a:avLst>
-          </a:prstGeom>
-          <a:solidFill>
-            <a:srgbClr val="B85C00"/>
-          </a:solidFill>
-          <a:ln>
-            <a:noFill/>
-          </a:ln>
-          <a:effectLst/>
-        </p:spPr>
-        <p:style>
-          <a:lnRef idx="1">
-            <a:schemeClr val="accent1"/>
-          </a:lnRef>
-          <a:fillRef idx="3">
-            <a:schemeClr val="accent1"/>
-          </a:fillRef>
-          <a:effectRef idx="2">
-            <a:schemeClr val="accent1"/>
-          </a:effectRef>
-          <a:fontRef idx="minor">
-            <a:schemeClr val="lt1"/>
-          </a:fontRef>
-        </p:style>
-        <p:txBody>
-          <a:bodyPr rtlCol="0" anchor="ctr" wrap="none" lIns="0" rIns="0"/>
-          <a:lstStyle/>
-          <a:p>
-            <a:pPr algn="ctr"/>
-            <a:r>
-              <a:rPr sz="1050" b="1">
-                <a:solidFill>
-                  <a:srgbClr val="FFFFFF"/>
-                </a:solidFill>
-                <a:latin typeface="Helvetica Neue"/>
-              </a:rPr>
-              <a:t>Nếu vẫn không tụt</a:t>
-            </a:r>
-          </a:p>
-        </p:txBody>
-      </p:sp>
-      <p:sp>
-        <p:nvSpPr>
-          <p:cNvPr id="20" name="TextBox 19"/>
-          <p:cNvSpPr txBox="1"/>
-          <p:nvPr/>
-        </p:nvSpPr>
-        <p:spPr>
-          <a:xfrm>
-            <a:off x="6200100" y="5400000"/>
-            <a:ext cx="5000000" cy="600000"/>
-          </a:xfrm>
-          <a:prstGeom prst="rect">
-            <a:avLst/>
-          </a:prstGeom>
-          <a:noFill/>
-        </p:spPr>
-        <p:txBody>
-          <a:bodyPr wrap="square" lIns="0" rIns="0" tIns="0" bIns="0">
-            <a:spAutoFit/>
-          </a:bodyPr>
-          <a:lstStyle/>
-          <a:p>
-            <a:pPr algn="l">
-              <a:lnSpc>
-                <a:spcPct val="135000"/>
-              </a:lnSpc>
-              <a:spcAft>
-                <a:spcPts val="600"/>
-              </a:spcAft>
-            </a:pPr>
-            <a:r>
-              <a:rPr sz="1200" b="0">
-                <a:solidFill>
-                  <a:srgbClr val="3F4149"/>
-                </a:solidFill>
-                <a:latin typeface="Helvetica Neue"/>
-              </a:rPr>
-              <a:t>thì lỗi máy chấm không phải thứ đáng lo trong</a:t>
-            </a:r>
-          </a:p>
-          <a:p>
-            <a:pPr algn="l">
-              <a:lnSpc>
-                <a:spcPct val="135000"/>
-              </a:lnSpc>
-              <a:spcAft>
-                <a:spcPts val="600"/>
-              </a:spcAft>
-            </a:pPr>
-            <a:r>
-              <a:rPr sz="1200" b="0">
-                <a:solidFill>
-                  <a:srgbClr val="3F4149"/>
-                </a:solidFill>
-                <a:latin typeface="Helvetica Neue"/>
-              </a:rPr>
-              <a:t>self-training, cũng là một kết luận rõ ràng.</a:t>
-            </a:r>
-          </a:p>
-        </p:txBody>
-      </p:sp>
-      <p:sp>
-        <p:nvSpPr>
-          <p:cNvPr id="21" name="TextBox 20"/>
-          <p:cNvSpPr txBox="1"/>
-          <p:nvPr/>
-        </p:nvSpPr>
-        <p:spPr>
-          <a:xfrm>
-            <a:off x="800100" y="6300000"/>
-            <a:ext cx="10591495" cy="300000"/>
-          </a:xfrm>
-          <a:prstGeom prst="rect">
-            <a:avLst/>
-          </a:prstGeom>
-          <a:noFill/>
-        </p:spPr>
-        <p:txBody>
-          <a:bodyPr wrap="square" lIns="0" rIns="0" tIns="0" bIns="0">
-            <a:spAutoFit/>
-          </a:bodyPr>
-          <a:lstStyle/>
-          <a:p>
-            <a:pPr algn="l">
-              <a:spcAft>
-                <a:spcPts val="600"/>
-              </a:spcAft>
-            </a:pPr>
-            <a:r>
-              <a:rPr sz="1050" b="0">
-                <a:solidFill>
-                  <a:srgbClr val="8A8D96"/>
-                </a:solidFill>
-                <a:latin typeface="Helvetica Neue"/>
-              </a:rPr>
-              <a:t>Cờ --patch-verifier-boxed đã code + có test (tests/test_verify_adapter.py); toàn bộ vòng lặp và dữ liệu cũ dùng lại nguyên, chỉ còn thiếu lượt chạy GPU.</a:t>
+              <a:t>Đã xác nhận trực tiếp bằng math_verify.parse(), không phải suy đoán từ hành vi bên ngoài.</a:t>
             </a:r>
           </a:p>
         </p:txBody>
@@ -8019,7 +7654,7 @@
                 </a:solidFill>
                 <a:latin typeface="Helvetica Neue"/>
               </a:rPr>
-              <a:t>CÂU HỎI CHƯA TRẢ LỜI ĐƯỢC</a:t>
+              <a:t>ĐÃ VÁ, ĐÃ KIỂM TRA</a:t>
             </a:r>
           </a:p>
         </p:txBody>
@@ -8100,7 +7735,7 @@
                 </a:solidFill>
                 <a:latin typeface="Georgia"/>
               </a:rPr>
-              <a:t>Thí nghiệm kiểm chứng đang chạy</a:t>
+              <a:t>Chỉ còn thiếu lượt chạy GPU</a:t>
             </a:r>
           </a:p>
         </p:txBody>
@@ -8113,8 +7748,8 @@
         </p:nvSpPr>
         <p:spPr>
           <a:xfrm>
-            <a:off x="800100" y="1620000"/>
-            <a:ext cx="10591495" cy="700000"/>
+            <a:off x="800100" y="1580000"/>
+            <a:ext cx="10591495" cy="500000"/>
           </a:xfrm>
           <a:prstGeom prst="rect">
             <a:avLst/>
@@ -8136,13 +7771,13 @@
               </a:spcAft>
             </a:pPr>
             <a:r>
-              <a:rPr sz="1400" b="0">
-                <a:solidFill>
-                  <a:srgbClr val="16161A"/>
-                </a:solidFill>
-                <a:latin typeface="Helvetica Neue"/>
-              </a:rPr>
-              <a:t>Cả 7 lần chạy, điểm đều tụt khoảng 3 điểm ngay ở vòng 1 rồi đứng yên. Nhưng các công trình lớn</a:t>
+              <a:rPr sz="1250" b="0">
+                <a:solidFill>
+                  <a:srgbClr val="3F4149"/>
+                </a:solidFill>
+                <a:latin typeface="Helvetica Neue"/>
+              </a:rPr>
+              <a:t>Cách vá: nếu bài model có \boxed mà đáp án sách chưa tự đóng hộp, bọc đáp án sách vào \boxed trước</a:t>
             </a:r>
           </a:p>
           <a:p>
@@ -8155,27 +7790,105 @@
               </a:spcAft>
             </a:pPr>
             <a:r>
-              <a:rPr sz="1400" b="0">
-                <a:solidFill>
-                  <a:srgbClr val="16161A"/>
-                </a:solidFill>
-                <a:latin typeface="Helvetica Neue"/>
-              </a:rPr>
-              <a:t>về tự học đều báo cáo model KHÁ LÊN. Chưa giải thích được vì sao kết quả ở đây ngược lại.</a:t>
-            </a:r>
-          </a:p>
-        </p:txBody>
-      </p:sp>
-      <p:sp>
-        <p:nvSpPr>
-          <p:cNvPr id="6" name="Rounded Rectangle 5"/>
+              <a:rPr sz="1250" b="0">
+                <a:solidFill>
+                  <a:srgbClr val="3F4149"/>
+                </a:solidFill>
+                <a:latin typeface="Helvetica Neue"/>
+              </a:rPr>
+              <a:t>khi so — cho cả hai bên cùng một đường đọc. Chỉ kích hoạt khi model có \boxed, không đụng kiểu viết khác.</a:t>
+            </a:r>
+          </a:p>
+        </p:txBody>
+      </p:sp>
+      <p:sp>
+        <p:nvSpPr>
+          <p:cNvPr id="6" name="TextBox 5"/>
+          <p:cNvSpPr txBox="1"/>
+          <p:nvPr/>
+        </p:nvSpPr>
+        <p:spPr>
+          <a:xfrm>
+            <a:off x="800100" y="2280000"/>
+            <a:ext cx="6200000" cy="300000"/>
+          </a:xfrm>
+          <a:prstGeom prst="rect">
+            <a:avLst/>
+          </a:prstGeom>
+          <a:noFill/>
+        </p:spPr>
+        <p:txBody>
+          <a:bodyPr wrap="square" lIns="0" rIns="0" tIns="0" bIns="0">
+            <a:spAutoFit/>
+          </a:bodyPr>
+          <a:lstStyle/>
+          <a:p>
+            <a:pPr algn="l">
+              <a:spcAft>
+                <a:spcPts val="600"/>
+              </a:spcAft>
+            </a:pPr>
+            <a:r>
+              <a:rPr sz="1100" b="1">
+                <a:solidFill>
+                  <a:srgbClr val="8A8D96"/>
+                </a:solidFill>
+                <a:latin typeface="Helvetica Neue"/>
+              </a:rPr>
+              <a:t>SỐ ĐO</a:t>
+            </a:r>
+          </a:p>
+        </p:txBody>
+      </p:sp>
+      <p:sp>
+        <p:nvSpPr>
+          <p:cNvPr id="7" name="TextBox 6"/>
+          <p:cNvSpPr txBox="1"/>
+          <p:nvPr/>
+        </p:nvSpPr>
+        <p:spPr>
+          <a:xfrm>
+            <a:off x="7200100" y="2280000"/>
+            <a:ext cx="3000000" cy="300000"/>
+          </a:xfrm>
+          <a:prstGeom prst="rect">
+            <a:avLst/>
+          </a:prstGeom>
+          <a:noFill/>
+        </p:spPr>
+        <p:txBody>
+          <a:bodyPr wrap="square" lIns="0" rIns="0" tIns="0" bIns="0">
+            <a:spAutoFit/>
+          </a:bodyPr>
+          <a:lstStyle/>
+          <a:p>
+            <a:pPr algn="l">
+              <a:spcAft>
+                <a:spcPts val="600"/>
+              </a:spcAft>
+            </a:pPr>
+            <a:r>
+              <a:rPr sz="1100" b="1">
+                <a:solidFill>
+                  <a:srgbClr val="8A8D96"/>
+                </a:solidFill>
+                <a:latin typeface="Helvetica Neue"/>
+              </a:rPr>
+              <a:t>GIÁ TRỊ</a:t>
+            </a:r>
+          </a:p>
+        </p:txBody>
+      </p:sp>
+      <p:sp>
+        <p:nvSpPr>
+          <p:cNvPr id="8" name="Rounded Rectangle 7"/>
           <p:cNvSpPr/>
           <p:nvPr/>
         </p:nvSpPr>
         <p:spPr>
           <a:xfrm>
-            <a:off x="680100" y="2550000"/>
-            <a:ext cx="10831495" cy="900000"/>
+            <a:off x="680100" y="2660000"/>
+            <a:ext cx="10831495" cy="1480000"/>
           </a:xfrm>
           <a:prstGeom prst="roundRect">
             <a:avLst>
@@ -8214,14 +7927,431 @@
       </p:sp>
       <p:sp>
         <p:nvSpPr>
-          <p:cNvPr id="7" name="TextBox 6"/>
-          <p:cNvSpPr txBox="1"/>
-          <p:nvPr/>
-        </p:nvSpPr>
-        <p:spPr>
-          <a:xfrm>
-            <a:off x="920100" y="2720000"/>
-            <a:ext cx="10351495" cy="640000"/>
+          <p:cNvPr id="9" name="TextBox 8"/>
+          <p:cNvSpPr txBox="1"/>
+          <p:nvPr/>
+        </p:nvSpPr>
+        <p:spPr>
+          <a:xfrm>
+            <a:off x="800100" y="2775000"/>
+            <a:ext cx="6200000" cy="330000"/>
+          </a:xfrm>
+          <a:prstGeom prst="rect">
+            <a:avLst/>
+          </a:prstGeom>
+          <a:noFill/>
+        </p:spPr>
+        <p:txBody>
+          <a:bodyPr wrap="square" lIns="0" rIns="0" tIns="0" bIns="0">
+            <a:spAutoFit/>
+          </a:bodyPr>
+          <a:lstStyle/>
+          <a:p>
+            <a:pPr algn="l">
+              <a:spcAft>
+                <a:spcPts val="600"/>
+              </a:spcAft>
+            </a:pPr>
+            <a:r>
+              <a:rPr sz="1150" b="0">
+                <a:solidFill>
+                  <a:srgbClr val="3F4149"/>
+                </a:solidFill>
+                <a:latin typeface="Helvetica Neue"/>
+              </a:rPr>
+              <a:t>Mức nặng thật (đã loại nhiễu khỏi 20% ban đầu)</a:t>
+            </a:r>
+          </a:p>
+        </p:txBody>
+      </p:sp>
+      <p:sp>
+        <p:nvSpPr>
+          <p:cNvPr id="10" name="TextBox 9"/>
+          <p:cNvSpPr txBox="1"/>
+          <p:nvPr/>
+        </p:nvSpPr>
+        <p:spPr>
+          <a:xfrm>
+            <a:off x="7200100" y="2775000"/>
+            <a:ext cx="3000000" cy="330000"/>
+          </a:xfrm>
+          <a:prstGeom prst="rect">
+            <a:avLst/>
+          </a:prstGeom>
+          <a:noFill/>
+        </p:spPr>
+        <p:txBody>
+          <a:bodyPr wrap="square" lIns="0" rIns="0" tIns="0" bIns="0">
+            <a:spAutoFit/>
+          </a:bodyPr>
+          <a:lstStyle/>
+          <a:p>
+            <a:pPr algn="l">
+              <a:spcAft>
+                <a:spcPts val="600"/>
+              </a:spcAft>
+            </a:pPr>
+            <a:r>
+              <a:rPr sz="1150" b="0">
+                <a:solidFill>
+                  <a:srgbClr val="3F4149"/>
+                </a:solidFill>
+                <a:latin typeface="Helvetica Neue"/>
+              </a:rPr>
+              <a:t>8,5%</a:t>
+            </a:r>
+          </a:p>
+        </p:txBody>
+      </p:sp>
+      <p:cxnSp>
+        <p:nvCxnSpPr>
+          <p:cNvPr id="11" name="Connector 10"/>
+          <p:cNvCxnSpPr/>
+          <p:nvPr/>
+        </p:nvCxnSpPr>
+        <p:spPr>
+          <a:xfrm>
+            <a:off x="760100" y="3060000"/>
+            <a:ext cx="10671495" cy="0"/>
+          </a:xfrm>
+          <a:prstGeom prst="line">
+            <a:avLst/>
+          </a:prstGeom>
+          <a:ln w="9525">
+            <a:solidFill>
+              <a:srgbClr val="E9E9ED"/>
+            </a:solidFill>
+          </a:ln>
+        </p:spPr>
+        <p:style>
+          <a:lnRef idx="2">
+            <a:schemeClr val="accent1"/>
+          </a:lnRef>
+          <a:fillRef idx="0">
+            <a:schemeClr val="accent1"/>
+          </a:fillRef>
+          <a:effectRef idx="1">
+            <a:schemeClr val="accent1"/>
+          </a:effectRef>
+          <a:fontRef idx="minor">
+            <a:schemeClr val="tx1"/>
+          </a:fontRef>
+        </p:style>
+      </p:cxnSp>
+      <p:sp>
+        <p:nvSpPr>
+          <p:cNvPr id="12" name="TextBox 11"/>
+          <p:cNvSpPr txBox="1"/>
+          <p:nvPr/>
+        </p:nvSpPr>
+        <p:spPr>
+          <a:xfrm>
+            <a:off x="800100" y="3115000"/>
+            <a:ext cx="6200000" cy="330000"/>
+          </a:xfrm>
+          <a:prstGeom prst="rect">
+            <a:avLst/>
+          </a:prstGeom>
+          <a:noFill/>
+        </p:spPr>
+        <p:txBody>
+          <a:bodyPr wrap="square" lIns="0" rIns="0" tIns="0" bIns="0">
+            <a:spAutoFit/>
+          </a:bodyPr>
+          <a:lstStyle/>
+          <a:p>
+            <a:pPr algn="l">
+              <a:spcAft>
+                <a:spcPts val="600"/>
+              </a:spcAft>
+            </a:pPr>
+            <a:r>
+              <a:rPr sz="1150" b="0">
+                <a:solidFill>
+                  <a:srgbClr val="3F4149"/>
+                </a:solidFill>
+                <a:latin typeface="Helvetica Neue"/>
+              </a:rPr>
+              <a:t>Tần suất model dùng \boxed</a:t>
+            </a:r>
+          </a:p>
+        </p:txBody>
+      </p:sp>
+      <p:sp>
+        <p:nvSpPr>
+          <p:cNvPr id="13" name="TextBox 12"/>
+          <p:cNvSpPr txBox="1"/>
+          <p:nvPr/>
+        </p:nvSpPr>
+        <p:spPr>
+          <a:xfrm>
+            <a:off x="7200100" y="3115000"/>
+            <a:ext cx="3000000" cy="330000"/>
+          </a:xfrm>
+          <a:prstGeom prst="rect">
+            <a:avLst/>
+          </a:prstGeom>
+          <a:noFill/>
+        </p:spPr>
+        <p:txBody>
+          <a:bodyPr wrap="square" lIns="0" rIns="0" tIns="0" bIns="0">
+            <a:spAutoFit/>
+          </a:bodyPr>
+          <a:lstStyle/>
+          <a:p>
+            <a:pPr algn="l">
+              <a:spcAft>
+                <a:spcPts val="600"/>
+              </a:spcAft>
+            </a:pPr>
+            <a:r>
+              <a:rPr sz="1150" b="0">
+                <a:solidFill>
+                  <a:srgbClr val="3F4149"/>
+                </a:solidFill>
+                <a:latin typeface="Helvetica Neue"/>
+              </a:rPr>
+              <a:t>51,5%</a:t>
+            </a:r>
+          </a:p>
+        </p:txBody>
+      </p:sp>
+      <p:cxnSp>
+        <p:nvCxnSpPr>
+          <p:cNvPr id="14" name="Connector 13"/>
+          <p:cNvCxnSpPr/>
+          <p:nvPr/>
+        </p:nvCxnSpPr>
+        <p:spPr>
+          <a:xfrm>
+            <a:off x="760100" y="3400000"/>
+            <a:ext cx="10671495" cy="0"/>
+          </a:xfrm>
+          <a:prstGeom prst="line">
+            <a:avLst/>
+          </a:prstGeom>
+          <a:ln w="9525">
+            <a:solidFill>
+              <a:srgbClr val="E9E9ED"/>
+            </a:solidFill>
+          </a:ln>
+        </p:spPr>
+        <p:style>
+          <a:lnRef idx="2">
+            <a:schemeClr val="accent1"/>
+          </a:lnRef>
+          <a:fillRef idx="0">
+            <a:schemeClr val="accent1"/>
+          </a:fillRef>
+          <a:effectRef idx="1">
+            <a:schemeClr val="accent1"/>
+          </a:effectRef>
+          <a:fontRef idx="minor">
+            <a:schemeClr val="tx1"/>
+          </a:fontRef>
+        </p:style>
+      </p:cxnSp>
+      <p:sp>
+        <p:nvSpPr>
+          <p:cNvPr id="15" name="TextBox 14"/>
+          <p:cNvSpPr txBox="1"/>
+          <p:nvPr/>
+        </p:nvSpPr>
+        <p:spPr>
+          <a:xfrm>
+            <a:off x="800100" y="3455000"/>
+            <a:ext cx="6200000" cy="330000"/>
+          </a:xfrm>
+          <a:prstGeom prst="rect">
+            <a:avLst/>
+          </a:prstGeom>
+          <a:noFill/>
+        </p:spPr>
+        <p:txBody>
+          <a:bodyPr wrap="square" lIns="0" rIns="0" tIns="0" bIns="0">
+            <a:spAutoFit/>
+          </a:bodyPr>
+          <a:lstStyle/>
+          <a:p>
+            <a:pPr algn="l">
+              <a:spcAft>
+                <a:spcPts val="600"/>
+              </a:spcAft>
+            </a:pPr>
+            <a:r>
+              <a:rPr sz="1150" b="1">
+                <a:solidFill>
+                  <a:srgbClr val="16161A"/>
+                </a:solidFill>
+                <a:latin typeface="Helvetica Neue"/>
+              </a:rPr>
+              <a:t>Thiệt hại ước tính mỗi vòng</a:t>
+            </a:r>
+          </a:p>
+        </p:txBody>
+      </p:sp>
+      <p:sp>
+        <p:nvSpPr>
+          <p:cNvPr id="16" name="TextBox 15"/>
+          <p:cNvSpPr txBox="1"/>
+          <p:nvPr/>
+        </p:nvSpPr>
+        <p:spPr>
+          <a:xfrm>
+            <a:off x="7200100" y="3455000"/>
+            <a:ext cx="3000000" cy="330000"/>
+          </a:xfrm>
+          <a:prstGeom prst="rect">
+            <a:avLst/>
+          </a:prstGeom>
+          <a:noFill/>
+        </p:spPr>
+        <p:txBody>
+          <a:bodyPr wrap="square" lIns="0" rIns="0" tIns="0" bIns="0">
+            <a:spAutoFit/>
+          </a:bodyPr>
+          <a:lstStyle/>
+          <a:p>
+            <a:pPr algn="l">
+              <a:spcAft>
+                <a:spcPts val="600"/>
+              </a:spcAft>
+            </a:pPr>
+            <a:r>
+              <a:rPr sz="1150" b="1">
+                <a:solidFill>
+                  <a:srgbClr val="16161A"/>
+                </a:solidFill>
+                <a:latin typeface="Helvetica Neue"/>
+              </a:rPr>
+              <a:t>4,4%  (gấp ~8 lần \dfrac)</a:t>
+            </a:r>
+          </a:p>
+        </p:txBody>
+      </p:sp>
+      <p:cxnSp>
+        <p:nvCxnSpPr>
+          <p:cNvPr id="17" name="Connector 16"/>
+          <p:cNvCxnSpPr/>
+          <p:nvPr/>
+        </p:nvCxnSpPr>
+        <p:spPr>
+          <a:xfrm>
+            <a:off x="760100" y="3740000"/>
+            <a:ext cx="10671495" cy="0"/>
+          </a:xfrm>
+          <a:prstGeom prst="line">
+            <a:avLst/>
+          </a:prstGeom>
+          <a:ln w="9525">
+            <a:solidFill>
+              <a:srgbClr val="E9E9ED"/>
+            </a:solidFill>
+          </a:ln>
+        </p:spPr>
+        <p:style>
+          <a:lnRef idx="2">
+            <a:schemeClr val="accent1"/>
+          </a:lnRef>
+          <a:fillRef idx="0">
+            <a:schemeClr val="accent1"/>
+          </a:fillRef>
+          <a:effectRef idx="1">
+            <a:schemeClr val="accent1"/>
+          </a:effectRef>
+          <a:fontRef idx="minor">
+            <a:schemeClr val="tx1"/>
+          </a:fontRef>
+        </p:style>
+      </p:cxnSp>
+      <p:sp>
+        <p:nvSpPr>
+          <p:cNvPr id="18" name="TextBox 17"/>
+          <p:cNvSpPr txBox="1"/>
+          <p:nvPr/>
+        </p:nvSpPr>
+        <p:spPr>
+          <a:xfrm>
+            <a:off x="800100" y="3795000"/>
+            <a:ext cx="6200000" cy="330000"/>
+          </a:xfrm>
+          <a:prstGeom prst="rect">
+            <a:avLst/>
+          </a:prstGeom>
+          <a:noFill/>
+        </p:spPr>
+        <p:txBody>
+          <a:bodyPr wrap="square" lIns="0" rIns="0" tIns="0" bIns="0">
+            <a:spAutoFit/>
+          </a:bodyPr>
+          <a:lstStyle/>
+          <a:p>
+            <a:pPr algn="l">
+              <a:spcAft>
+                <a:spcPts val="600"/>
+              </a:spcAft>
+            </a:pPr>
+            <a:r>
+              <a:rPr sz="1150" b="0">
+                <a:solidFill>
+                  <a:srgbClr val="3F4149"/>
+                </a:solidFill>
+                <a:latin typeface="Helvetica Neue"/>
+              </a:rPr>
+              <a:t>Hồi quy 8 kiểu viết × 2 preset × 2 bộ đề</a:t>
+            </a:r>
+          </a:p>
+        </p:txBody>
+      </p:sp>
+      <p:sp>
+        <p:nvSpPr>
+          <p:cNvPr id="19" name="TextBox 18"/>
+          <p:cNvSpPr txBox="1"/>
+          <p:nvPr/>
+        </p:nvSpPr>
+        <p:spPr>
+          <a:xfrm>
+            <a:off x="7200100" y="3795000"/>
+            <a:ext cx="3000000" cy="330000"/>
+          </a:xfrm>
+          <a:prstGeom prst="rect">
+            <a:avLst/>
+          </a:prstGeom>
+          <a:noFill/>
+        </p:spPr>
+        <p:txBody>
+          <a:bodyPr wrap="square" lIns="0" rIns="0" tIns="0" bIns="0">
+            <a:spAutoFit/>
+          </a:bodyPr>
+          <a:lstStyle/>
+          <a:p>
+            <a:pPr algn="l">
+              <a:spcAft>
+                <a:spcPts val="600"/>
+              </a:spcAft>
+            </a:pPr>
+            <a:r>
+              <a:rPr sz="1150" b="0">
+                <a:solidFill>
+                  <a:srgbClr val="3F4149"/>
+                </a:solidFill>
+                <a:latin typeface="Helvetica Neue"/>
+              </a:rPr>
+              <a:t>27/27 test qua</a:t>
+            </a:r>
+          </a:p>
+        </p:txBody>
+      </p:sp>
+      <p:sp>
+        <p:nvSpPr>
+          <p:cNvPr id="20" name="TextBox 19"/>
+          <p:cNvSpPr txBox="1"/>
+          <p:nvPr/>
+        </p:nvSpPr>
+        <p:spPr>
+          <a:xfrm>
+            <a:off x="800100" y="4320000"/>
+            <a:ext cx="10591495" cy="380000"/>
           </a:xfrm>
           <a:prstGeom prst="rect">
             <a:avLst/>
@@ -8236,53 +8366,88 @@
           <a:p>
             <a:pPr algn="l">
               <a:lnSpc>
-                <a:spcPct val="145000"/>
+                <a:spcPct val="125000"/>
               </a:lnSpc>
               <a:spcAft>
                 <a:spcPts val="600"/>
               </a:spcAft>
             </a:pPr>
             <a:r>
-              <a:rPr sz="1250" b="0">
-                <a:solidFill>
-                  <a:srgbClr val="3F4149"/>
-                </a:solidFill>
-                <a:latin typeface="Helvetica Neue"/>
-              </a:rPr>
-              <a:t>Có một khả năng đơn giản chưa loại trừ được: model này vốn đã được tinh chỉnh rất kỹ. Dạy thêm</a:t>
+              <a:rPr sz="1100" b="0">
+                <a:solidFill>
+                  <a:srgbClr val="8A8D96"/>
+                </a:solidFill>
+                <a:latin typeface="Helvetica Neue"/>
+              </a:rPr>
+              <a:t>Còn dư 4/200 đề vẫn bị gạch sau khi vá — nhưng là lỗi khác đã biết từ trước (thiếu ngoặc trong</a:t>
             </a:r>
           </a:p>
           <a:p>
             <a:pPr algn="l">
               <a:lnSpc>
-                <a:spcPct val="145000"/>
+                <a:spcPct val="125000"/>
               </a:lnSpc>
               <a:spcAft>
                 <a:spcPts val="600"/>
               </a:spcAft>
             </a:pPr>
             <a:r>
-              <a:rPr sz="1250" b="0">
-                <a:solidFill>
-                  <a:srgbClr val="3F4149"/>
-                </a:solidFill>
-                <a:latin typeface="Helvetica Neue"/>
-              </a:rPr>
-              <a:t>một lượng nhỏ có thể chỉ làm nó lệch khỏi trạng thái tốt sẵn có, bất kể dạy bằng dữ liệu gì.</a:t>
-            </a:r>
-          </a:p>
-        </p:txBody>
-      </p:sp>
-      <p:sp>
-        <p:nvSpPr>
-          <p:cNvPr id="8" name="TextBox 7"/>
-          <p:cNvSpPr txBox="1"/>
-          <p:nvPr/>
-        </p:nvSpPr>
-        <p:spPr>
-          <a:xfrm>
-            <a:off x="800100" y="3720000"/>
-            <a:ext cx="10591495" cy="300000"/>
+              <a:rPr sz="1100" b="0">
+                <a:solidFill>
+                  <a:srgbClr val="8A8D96"/>
+                </a:solidFill>
+                <a:latin typeface="Helvetica Neue"/>
+              </a:rPr>
+              <a:t>\frac43), không thuộc phạm vi lần vá này.</a:t>
+            </a:r>
+          </a:p>
+        </p:txBody>
+      </p:sp>
+      <p:cxnSp>
+        <p:nvCxnSpPr>
+          <p:cNvPr id="21" name="Connector 20"/>
+          <p:cNvCxnSpPr/>
+          <p:nvPr/>
+        </p:nvCxnSpPr>
+        <p:spPr>
+          <a:xfrm>
+            <a:off x="800100" y="4800000"/>
+            <a:ext cx="10591495" cy="0"/>
+          </a:xfrm>
+          <a:prstGeom prst="line">
+            <a:avLst/>
+          </a:prstGeom>
+          <a:ln w="9525">
+            <a:solidFill>
+              <a:srgbClr val="E6E6EA"/>
+            </a:solidFill>
+          </a:ln>
+        </p:spPr>
+        <p:style>
+          <a:lnRef idx="2">
+            <a:schemeClr val="accent1"/>
+          </a:lnRef>
+          <a:fillRef idx="0">
+            <a:schemeClr val="accent1"/>
+          </a:fillRef>
+          <a:effectRef idx="1">
+            <a:schemeClr val="accent1"/>
+          </a:effectRef>
+          <a:fontRef idx="minor">
+            <a:schemeClr val="tx1"/>
+          </a:fontRef>
+        </p:style>
+      </p:cxnSp>
+      <p:sp>
+        <p:nvSpPr>
+          <p:cNvPr id="22" name="TextBox 21"/>
+          <p:cNvSpPr txBox="1"/>
+          <p:nvPr/>
+        </p:nvSpPr>
+        <p:spPr>
+          <a:xfrm>
+            <a:off x="800100" y="4900000"/>
+            <a:ext cx="10591495" cy="280000"/>
           </a:xfrm>
           <a:prstGeom prst="rect">
             <a:avLst/>
@@ -8307,21 +8472,138 @@
                 </a:solidFill>
                 <a:latin typeface="Helvetica Neue"/>
               </a:rPr>
-              <a:t>THÍ NGHIỆM PHÂN ĐỊNH: dạy bằng lời giải mẫu của sách, thay vì bài model tự làm</a:t>
-            </a:r>
-          </a:p>
-        </p:txBody>
-      </p:sp>
-      <p:sp>
-        <p:nvSpPr>
-          <p:cNvPr id="9" name="Rounded Rectangle 8"/>
+              <a:t>HÀNG ĐỢI GPU TIẾP THEO</a:t>
+            </a:r>
+          </a:p>
+        </p:txBody>
+      </p:sp>
+      <p:sp>
+        <p:nvSpPr>
+          <p:cNvPr id="23" name="TextBox 22"/>
+          <p:cNvSpPr txBox="1"/>
+          <p:nvPr/>
+        </p:nvSpPr>
+        <p:spPr>
+          <a:xfrm>
+            <a:off x="800100" y="5100000"/>
+            <a:ext cx="3600000" cy="300000"/>
+          </a:xfrm>
+          <a:prstGeom prst="rect">
+            <a:avLst/>
+          </a:prstGeom>
+          <a:noFill/>
+        </p:spPr>
+        <p:txBody>
+          <a:bodyPr wrap="square" lIns="0" rIns="0" tIns="0" bIns="0">
+            <a:spAutoFit/>
+          </a:bodyPr>
+          <a:lstStyle/>
+          <a:p>
+            <a:pPr algn="l">
+              <a:spcAft>
+                <a:spcPts val="600"/>
+              </a:spcAft>
+            </a:pPr>
+            <a:r>
+              <a:rPr sz="1000" b="1">
+                <a:solidFill>
+                  <a:srgbClr val="8A8D96"/>
+                </a:solidFill>
+                <a:latin typeface="Helvetica Neue"/>
+              </a:rPr>
+              <a:t>VIỆC</a:t>
+            </a:r>
+          </a:p>
+        </p:txBody>
+      </p:sp>
+      <p:sp>
+        <p:nvSpPr>
+          <p:cNvPr id="24" name="TextBox 23"/>
+          <p:cNvSpPr txBox="1"/>
+          <p:nvPr/>
+        </p:nvSpPr>
+        <p:spPr>
+          <a:xfrm>
+            <a:off x="4600100" y="5100000"/>
+            <a:ext cx="4200000" cy="300000"/>
+          </a:xfrm>
+          <a:prstGeom prst="rect">
+            <a:avLst/>
+          </a:prstGeom>
+          <a:noFill/>
+        </p:spPr>
+        <p:txBody>
+          <a:bodyPr wrap="square" lIns="0" rIns="0" tIns="0" bIns="0">
+            <a:spAutoFit/>
+          </a:bodyPr>
+          <a:lstStyle/>
+          <a:p>
+            <a:pPr algn="l">
+              <a:spcAft>
+                <a:spcPts val="600"/>
+              </a:spcAft>
+            </a:pPr>
+            <a:r>
+              <a:rPr sz="1000" b="1">
+                <a:solidFill>
+                  <a:srgbClr val="8A8D96"/>
+                </a:solidFill>
+                <a:latin typeface="Helvetica Neue"/>
+              </a:rPr>
+              <a:t>MỤC ĐÍCH</a:t>
+            </a:r>
+          </a:p>
+        </p:txBody>
+      </p:sp>
+      <p:sp>
+        <p:nvSpPr>
+          <p:cNvPr id="25" name="TextBox 24"/>
+          <p:cNvSpPr txBox="1"/>
+          <p:nvPr/>
+        </p:nvSpPr>
+        <p:spPr>
+          <a:xfrm>
+            <a:off x="8900100" y="5100000"/>
+            <a:ext cx="2400000" cy="300000"/>
+          </a:xfrm>
+          <a:prstGeom prst="rect">
+            <a:avLst/>
+          </a:prstGeom>
+          <a:noFill/>
+        </p:spPr>
+        <p:txBody>
+          <a:bodyPr wrap="square" lIns="0" rIns="0" tIns="0" bIns="0">
+            <a:spAutoFit/>
+          </a:bodyPr>
+          <a:lstStyle/>
+          <a:p>
+            <a:pPr algn="l">
+              <a:spcAft>
+                <a:spcPts val="600"/>
+              </a:spcAft>
+            </a:pPr>
+            <a:r>
+              <a:rPr sz="1000" b="1">
+                <a:solidFill>
+                  <a:srgbClr val="8A8D96"/>
+                </a:solidFill>
+                <a:latin typeface="Helvetica Neue"/>
+              </a:rPr>
+              <a:t>TRẠNG THÁI</a:t>
+            </a:r>
+          </a:p>
+        </p:txBody>
+      </p:sp>
+      <p:sp>
+        <p:nvSpPr>
+          <p:cNvPr id="26" name="Rounded Rectangle 25"/>
           <p:cNvSpPr/>
           <p:nvPr/>
         </p:nvSpPr>
         <p:spPr>
           <a:xfrm>
-            <a:off x="800100" y="4180000"/>
-            <a:ext cx="5190000" cy="1350000"/>
+            <a:off x="680100" y="5480000"/>
+            <a:ext cx="10831495" cy="1120000"/>
           </a:xfrm>
           <a:prstGeom prst="roundRect">
             <a:avLst>
@@ -8360,317 +8642,421 @@
       </p:sp>
       <p:sp>
         <p:nvSpPr>
-          <p:cNvPr id="10" name="Rounded Rectangle 9"/>
-          <p:cNvSpPr/>
-          <p:nvPr/>
-        </p:nvSpPr>
-        <p:spPr>
-          <a:xfrm>
-            <a:off x="1040100" y="4360000"/>
-            <a:ext cx="1500000" cy="310000"/>
-          </a:xfrm>
-          <a:prstGeom prst="roundRect">
-            <a:avLst>
-              <a:gd name="adj" fmla="val 50000"/>
-            </a:avLst>
-          </a:prstGeom>
-          <a:solidFill>
-            <a:srgbClr val="029E73"/>
-          </a:solidFill>
-          <a:ln>
-            <a:noFill/>
+          <p:cNvPr id="27" name="TextBox 26"/>
+          <p:cNvSpPr txBox="1"/>
+          <p:nvPr/>
+        </p:nvSpPr>
+        <p:spPr>
+          <a:xfrm>
+            <a:off x="800100" y="5585000"/>
+            <a:ext cx="3600000" cy="330000"/>
+          </a:xfrm>
+          <a:prstGeom prst="rect">
+            <a:avLst/>
+          </a:prstGeom>
+          <a:noFill/>
+        </p:spPr>
+        <p:txBody>
+          <a:bodyPr wrap="square" lIns="0" rIns="0" tIns="0" bIns="0">
+            <a:spAutoFit/>
+          </a:bodyPr>
+          <a:lstStyle/>
+          <a:p>
+            <a:pPr algn="l">
+              <a:spcAft>
+                <a:spcPts val="600"/>
+              </a:spcAft>
+            </a:pPr>
+            <a:r>
+              <a:rPr sz="1100" b="0">
+                <a:solidFill>
+                  <a:srgbClr val="3F4149"/>
+                </a:solidFill>
+                <a:latin typeface="Helvetica Neue"/>
+              </a:rPr>
+              <a:t>GSM8K, seed thứ hai</a:t>
+            </a:r>
+          </a:p>
+        </p:txBody>
+      </p:sp>
+      <p:sp>
+        <p:nvSpPr>
+          <p:cNvPr id="28" name="TextBox 27"/>
+          <p:cNvSpPr txBox="1"/>
+          <p:nvPr/>
+        </p:nvSpPr>
+        <p:spPr>
+          <a:xfrm>
+            <a:off x="4600100" y="5585000"/>
+            <a:ext cx="4200000" cy="330000"/>
+          </a:xfrm>
+          <a:prstGeom prst="rect">
+            <a:avLst/>
+          </a:prstGeom>
+          <a:noFill/>
+        </p:spPr>
+        <p:txBody>
+          <a:bodyPr wrap="square" lIns="0" rIns="0" tIns="0" bIns="0">
+            <a:spAutoFit/>
+          </a:bodyPr>
+          <a:lstStyle/>
+          <a:p>
+            <a:pPr algn="l">
+              <a:spcAft>
+                <a:spcPts val="600"/>
+              </a:spcAft>
+            </a:pPr>
+            <a:r>
+              <a:rPr sz="1100" b="0">
+                <a:solidFill>
+                  <a:srgbClr val="3F4149"/>
+                </a:solidFill>
+                <a:latin typeface="Helvetica Neue"/>
+              </a:rPr>
+              <a:t>Cú tụt 12,7 điểm ở seed đầu là thật hay nhiễu</a:t>
+            </a:r>
+          </a:p>
+        </p:txBody>
+      </p:sp>
+      <p:sp>
+        <p:nvSpPr>
+          <p:cNvPr id="29" name="TextBox 28"/>
+          <p:cNvSpPr txBox="1"/>
+          <p:nvPr/>
+        </p:nvSpPr>
+        <p:spPr>
+          <a:xfrm>
+            <a:off x="8900100" y="5585000"/>
+            <a:ext cx="2400000" cy="330000"/>
+          </a:xfrm>
+          <a:prstGeom prst="rect">
+            <a:avLst/>
+          </a:prstGeom>
+          <a:noFill/>
+        </p:spPr>
+        <p:txBody>
+          <a:bodyPr wrap="square" lIns="0" rIns="0" tIns="0" bIns="0">
+            <a:spAutoFit/>
+          </a:bodyPr>
+          <a:lstStyle/>
+          <a:p>
+            <a:pPr algn="l">
+              <a:spcAft>
+                <a:spcPts val="600"/>
+              </a:spcAft>
+            </a:pPr>
+            <a:r>
+              <a:rPr sz="1100" b="0">
+                <a:solidFill>
+                  <a:srgbClr val="3F4149"/>
+                </a:solidFill>
+                <a:latin typeface="Helvetica Neue"/>
+              </a:rPr>
+              <a:t>Ưu tiên cao nhất</a:t>
+            </a:r>
+          </a:p>
+        </p:txBody>
+      </p:sp>
+      <p:cxnSp>
+        <p:nvCxnSpPr>
+          <p:cNvPr id="30" name="Connector 29"/>
+          <p:cNvCxnSpPr/>
+          <p:nvPr/>
+        </p:nvCxnSpPr>
+        <p:spPr>
+          <a:xfrm>
+            <a:off x="760100" y="5870000"/>
+            <a:ext cx="10671495" cy="0"/>
+          </a:xfrm>
+          <a:prstGeom prst="line">
+            <a:avLst/>
+          </a:prstGeom>
+          <a:ln w="9525">
+            <a:solidFill>
+              <a:srgbClr val="E9E9ED"/>
+            </a:solidFill>
           </a:ln>
-          <a:effectLst/>
         </p:spPr>
         <p:style>
-          <a:lnRef idx="1">
+          <a:lnRef idx="2">
             <a:schemeClr val="accent1"/>
           </a:lnRef>
-          <a:fillRef idx="3">
+          <a:fillRef idx="0">
             <a:schemeClr val="accent1"/>
           </a:fillRef>
-          <a:effectRef idx="2">
+          <a:effectRef idx="1">
             <a:schemeClr val="accent1"/>
           </a:effectRef>
           <a:fontRef idx="minor">
-            <a:schemeClr val="lt1"/>
+            <a:schemeClr val="tx1"/>
           </a:fontRef>
         </p:style>
-        <p:txBody>
-          <a:bodyPr rtlCol="0" anchor="ctr" wrap="none" lIns="0" rIns="0"/>
-          <a:lstStyle/>
-          <a:p>
-            <a:pPr algn="ctr"/>
-            <a:r>
-              <a:rPr sz="1050" b="1">
-                <a:solidFill>
-                  <a:srgbClr val="FFFFFF"/>
-                </a:solidFill>
-                <a:latin typeface="Helvetica Neue"/>
-              </a:rPr>
-              <a:t>Nếu khá lên</a:t>
-            </a:r>
-          </a:p>
-        </p:txBody>
-      </p:sp>
-      <p:sp>
-        <p:nvSpPr>
-          <p:cNvPr id="11" name="TextBox 10"/>
-          <p:cNvSpPr txBox="1"/>
-          <p:nvPr/>
-        </p:nvSpPr>
-        <p:spPr>
-          <a:xfrm>
-            <a:off x="1040100" y="4830000"/>
-            <a:ext cx="4700000" cy="600000"/>
-          </a:xfrm>
-          <a:prstGeom prst="rect">
-            <a:avLst/>
-          </a:prstGeom>
-          <a:noFill/>
-        </p:spPr>
-        <p:txBody>
-          <a:bodyPr wrap="square" lIns="0" rIns="0" tIns="0" bIns="0">
-            <a:spAutoFit/>
-          </a:bodyPr>
-          <a:lstStyle/>
-          <a:p>
-            <a:pPr algn="l">
-              <a:lnSpc>
-                <a:spcPct val="135000"/>
-              </a:lnSpc>
-              <a:spcAft>
-                <a:spcPts val="600"/>
-              </a:spcAft>
-            </a:pPr>
-            <a:r>
-              <a:rPr sz="1200" b="0">
+      </p:cxnSp>
+      <p:sp>
+        <p:nvSpPr>
+          <p:cNvPr id="31" name="TextBox 30"/>
+          <p:cNvSpPr txBox="1"/>
+          <p:nvPr/>
+        </p:nvSpPr>
+        <p:spPr>
+          <a:xfrm>
+            <a:off x="800100" y="5925000"/>
+            <a:ext cx="3600000" cy="330000"/>
+          </a:xfrm>
+          <a:prstGeom prst="rect">
+            <a:avLst/>
+          </a:prstGeom>
+          <a:noFill/>
+        </p:spPr>
+        <p:txBody>
+          <a:bodyPr wrap="square" lIns="0" rIns="0" tIns="0" bIns="0">
+            <a:spAutoFit/>
+          </a:bodyPr>
+          <a:lstStyle/>
+          <a:p>
+            <a:pPr algn="l">
+              <a:spcAft>
+                <a:spcPts val="600"/>
+              </a:spcAft>
+            </a:pPr>
+            <a:r>
+              <a:rPr sz="1100" b="0">
                 <a:solidFill>
                   <a:srgbClr val="3F4149"/>
                 </a:solidFill>
                 <a:latin typeface="Helvetica Neue"/>
               </a:rPr>
-              <a:t>thì vòng lặp không sao, và cái hại đúng là</a:t>
-            </a:r>
-          </a:p>
-          <a:p>
-            <a:pPr algn="l">
-              <a:lnSpc>
-                <a:spcPct val="135000"/>
-              </a:lnSpc>
-              <a:spcAft>
-                <a:spcPts val="600"/>
-              </a:spcAft>
-            </a:pPr>
-            <a:r>
-              <a:rPr sz="1200" b="0">
+              <a:t>Ablation không lọc</a:t>
+            </a:r>
+          </a:p>
+        </p:txBody>
+      </p:sp>
+      <p:sp>
+        <p:nvSpPr>
+          <p:cNvPr id="32" name="TextBox 31"/>
+          <p:cNvSpPr txBox="1"/>
+          <p:nvPr/>
+        </p:nvSpPr>
+        <p:spPr>
+          <a:xfrm>
+            <a:off x="4600100" y="5925000"/>
+            <a:ext cx="4200000" cy="330000"/>
+          </a:xfrm>
+          <a:prstGeom prst="rect">
+            <a:avLst/>
+          </a:prstGeom>
+          <a:noFill/>
+        </p:spPr>
+        <p:txBody>
+          <a:bodyPr wrap="square" lIns="0" rIns="0" tIns="0" bIns="0">
+            <a:spAutoFit/>
+          </a:bodyPr>
+          <a:lstStyle/>
+          <a:p>
+            <a:pPr algn="l">
+              <a:spcAft>
+                <a:spcPts val="600"/>
+              </a:spcAft>
+            </a:pPr>
+            <a:r>
+              <a:rPr sz="1100" b="0">
                 <a:solidFill>
                   <a:srgbClr val="3F4149"/>
                 </a:solidFill>
                 <a:latin typeface="Helvetica Neue"/>
               </a:rPr>
-              <a:t>do model học từ bài của chính nó.</a:t>
-            </a:r>
-          </a:p>
-        </p:txBody>
-      </p:sp>
-      <p:sp>
-        <p:nvSpPr>
-          <p:cNvPr id="12" name="Rounded Rectangle 11"/>
-          <p:cNvSpPr/>
-          <p:nvPr/>
-        </p:nvSpPr>
-        <p:spPr>
-          <a:xfrm>
-            <a:off x="6200100" y="4180000"/>
-            <a:ext cx="5190000" cy="1350000"/>
-          </a:xfrm>
-          <a:prstGeom prst="roundRect">
-            <a:avLst>
-              <a:gd name="adj" fmla="val 4000"/>
-            </a:avLst>
-          </a:prstGeom>
-          <a:solidFill>
-            <a:srgbClr val="F5F5F7"/>
-          </a:solidFill>
-          <a:ln>
-            <a:noFill/>
+              <a:t>Tách khâu lọc verifier khỏi bản chất tự học</a:t>
+            </a:r>
+          </a:p>
+        </p:txBody>
+      </p:sp>
+      <p:sp>
+        <p:nvSpPr>
+          <p:cNvPr id="33" name="TextBox 32"/>
+          <p:cNvSpPr txBox="1"/>
+          <p:nvPr/>
+        </p:nvSpPr>
+        <p:spPr>
+          <a:xfrm>
+            <a:off x="8900100" y="5925000"/>
+            <a:ext cx="2400000" cy="330000"/>
+          </a:xfrm>
+          <a:prstGeom prst="rect">
+            <a:avLst/>
+          </a:prstGeom>
+          <a:noFill/>
+        </p:spPr>
+        <p:txBody>
+          <a:bodyPr wrap="square" lIns="0" rIns="0" tIns="0" bIns="0">
+            <a:spAutoFit/>
+          </a:bodyPr>
+          <a:lstStyle/>
+          <a:p>
+            <a:pPr algn="l">
+              <a:spcAft>
+                <a:spcPts val="600"/>
+              </a:spcAft>
+            </a:pPr>
+            <a:r>
+              <a:rPr sz="1100" b="0">
+                <a:solidFill>
+                  <a:srgbClr val="3F4149"/>
+                </a:solidFill>
+                <a:latin typeface="Helvetica Neue"/>
+              </a:rPr>
+              <a:t>Xếp sau</a:t>
+            </a:r>
+          </a:p>
+        </p:txBody>
+      </p:sp>
+      <p:cxnSp>
+        <p:nvCxnSpPr>
+          <p:cNvPr id="34" name="Connector 33"/>
+          <p:cNvCxnSpPr/>
+          <p:nvPr/>
+        </p:nvCxnSpPr>
+        <p:spPr>
+          <a:xfrm>
+            <a:off x="760100" y="6210000"/>
+            <a:ext cx="10671495" cy="0"/>
+          </a:xfrm>
+          <a:prstGeom prst="line">
+            <a:avLst/>
+          </a:prstGeom>
+          <a:ln w="9525">
+            <a:solidFill>
+              <a:srgbClr val="E9E9ED"/>
+            </a:solidFill>
           </a:ln>
-          <a:effectLst/>
         </p:spPr>
         <p:style>
-          <a:lnRef idx="1">
+          <a:lnRef idx="2">
             <a:schemeClr val="accent1"/>
           </a:lnRef>
-          <a:fillRef idx="3">
+          <a:fillRef idx="0">
             <a:schemeClr val="accent1"/>
           </a:fillRef>
-          <a:effectRef idx="2">
+          <a:effectRef idx="1">
             <a:schemeClr val="accent1"/>
           </a:effectRef>
           <a:fontRef idx="minor">
-            <a:schemeClr val="lt1"/>
+            <a:schemeClr val="tx1"/>
           </a:fontRef>
         </p:style>
-        <p:txBody>
-          <a:bodyPr rtlCol="0" anchor="ctr"/>
-          <a:lstStyle/>
-          <a:p>
-            <a:pPr algn="ctr"/>
-          </a:p>
-        </p:txBody>
-      </p:sp>
-      <p:sp>
-        <p:nvSpPr>
-          <p:cNvPr id="13" name="Rounded Rectangle 12"/>
-          <p:cNvSpPr/>
-          <p:nvPr/>
-        </p:nvSpPr>
-        <p:spPr>
-          <a:xfrm>
-            <a:off x="6440100" y="4360000"/>
-            <a:ext cx="1500000" cy="310000"/>
-          </a:xfrm>
-          <a:prstGeom prst="roundRect">
-            <a:avLst>
-              <a:gd name="adj" fmla="val 50000"/>
-            </a:avLst>
-          </a:prstGeom>
-          <a:solidFill>
-            <a:srgbClr val="B85C00"/>
-          </a:solidFill>
-          <a:ln>
-            <a:noFill/>
-          </a:ln>
-          <a:effectLst/>
-        </p:spPr>
-        <p:style>
-          <a:lnRef idx="1">
-            <a:schemeClr val="accent1"/>
-          </a:lnRef>
-          <a:fillRef idx="3">
-            <a:schemeClr val="accent1"/>
-          </a:fillRef>
-          <a:effectRef idx="2">
-            <a:schemeClr val="accent1"/>
-          </a:effectRef>
-          <a:fontRef idx="minor">
-            <a:schemeClr val="lt1"/>
-          </a:fontRef>
-        </p:style>
-        <p:txBody>
-          <a:bodyPr rtlCol="0" anchor="ctr" wrap="none" lIns="0" rIns="0"/>
-          <a:lstStyle/>
-          <a:p>
-            <a:pPr algn="ctr"/>
-            <a:r>
-              <a:rPr sz="1050" b="1">
-                <a:solidFill>
-                  <a:srgbClr val="FFFFFF"/>
-                </a:solidFill>
-                <a:latin typeface="Helvetica Neue"/>
-              </a:rPr>
-              <a:t>Nếu cũng tụt</a:t>
-            </a:r>
-          </a:p>
-        </p:txBody>
-      </p:sp>
-      <p:sp>
-        <p:nvSpPr>
-          <p:cNvPr id="14" name="TextBox 13"/>
-          <p:cNvSpPr txBox="1"/>
-          <p:nvPr/>
-        </p:nvSpPr>
-        <p:spPr>
-          <a:xfrm>
-            <a:off x="6440100" y="4830000"/>
-            <a:ext cx="4700000" cy="600000"/>
-          </a:xfrm>
-          <a:prstGeom prst="rect">
-            <a:avLst/>
-          </a:prstGeom>
-          <a:noFill/>
-        </p:spPr>
-        <p:txBody>
-          <a:bodyPr wrap="square" lIns="0" rIns="0" tIns="0" bIns="0">
-            <a:spAutoFit/>
-          </a:bodyPr>
-          <a:lstStyle/>
-          <a:p>
-            <a:pPr algn="l">
-              <a:lnSpc>
-                <a:spcPct val="135000"/>
-              </a:lnSpc>
-              <a:spcAft>
-                <a:spcPts val="600"/>
-              </a:spcAft>
-            </a:pPr>
-            <a:r>
-              <a:rPr sz="1200" b="0">
+      </p:cxnSp>
+      <p:sp>
+        <p:nvSpPr>
+          <p:cNvPr id="35" name="TextBox 34"/>
+          <p:cNvSpPr txBox="1"/>
+          <p:nvPr/>
+        </p:nvSpPr>
+        <p:spPr>
+          <a:xfrm>
+            <a:off x="800100" y="6265000"/>
+            <a:ext cx="3600000" cy="330000"/>
+          </a:xfrm>
+          <a:prstGeom prst="rect">
+            <a:avLst/>
+          </a:prstGeom>
+          <a:noFill/>
+        </p:spPr>
+        <p:txBody>
+          <a:bodyPr wrap="square" lIns="0" rIns="0" tIns="0" bIns="0">
+            <a:spAutoFit/>
+          </a:bodyPr>
+          <a:lstStyle/>
+          <a:p>
+            <a:pPr algn="l">
+              <a:spcAft>
+                <a:spcPts val="600"/>
+              </a:spcAft>
+            </a:pPr>
+            <a:r>
+              <a:rPr sz="1100" b="0">
                 <a:solidFill>
                   <a:srgbClr val="3F4149"/>
                 </a:solidFill>
                 <a:latin typeface="Helvetica Neue"/>
               </a:rPr>
-              <a:t>thì cú tụt là do việc dạy thêm, không liên</a:t>
-            </a:r>
-          </a:p>
-          <a:p>
-            <a:pPr algn="l">
-              <a:lnSpc>
-                <a:spcPct val="135000"/>
-              </a:lnSpc>
-              <a:spcAft>
-                <a:spcPts val="600"/>
-              </a:spcAft>
-            </a:pPr>
-            <a:r>
-              <a:rPr sz="1200" b="0">
+              <a:t>Run D — bug \boxed</a:t>
+            </a:r>
+          </a:p>
+        </p:txBody>
+      </p:sp>
+      <p:sp>
+        <p:nvSpPr>
+          <p:cNvPr id="36" name="TextBox 35"/>
+          <p:cNvSpPr txBox="1"/>
+          <p:nvPr/>
+        </p:nvSpPr>
+        <p:spPr>
+          <a:xfrm>
+            <a:off x="4600100" y="6265000"/>
+            <a:ext cx="4200000" cy="330000"/>
+          </a:xfrm>
+          <a:prstGeom prst="rect">
+            <a:avLst/>
+          </a:prstGeom>
+          <a:noFill/>
+        </p:spPr>
+        <p:txBody>
+          <a:bodyPr wrap="square" lIns="0" rIns="0" tIns="0" bIns="0">
+            <a:spAutoFit/>
+          </a:bodyPr>
+          <a:lstStyle/>
+          <a:p>
+            <a:pPr algn="l">
+              <a:spcAft>
+                <a:spcPts val="600"/>
+              </a:spcAft>
+            </a:pPr>
+            <a:r>
+              <a:rPr sz="1100" b="0">
                 <a:solidFill>
                   <a:srgbClr val="3F4149"/>
                 </a:solidFill>
                 <a:latin typeface="Helvetica Neue"/>
               </a:rPr>
-              <a:t>quan tự học. Kết luận phải sửa lần nữa.</a:t>
-            </a:r>
-          </a:p>
-        </p:txBody>
-      </p:sp>
-      <p:sp>
-        <p:nvSpPr>
-          <p:cNvPr id="15" name="TextBox 14"/>
-          <p:cNvSpPr txBox="1"/>
-          <p:nvPr/>
-        </p:nvSpPr>
-        <p:spPr>
-          <a:xfrm>
-            <a:off x="800100" y="5800000"/>
-            <a:ext cx="10591495" cy="300000"/>
-          </a:xfrm>
-          <a:prstGeom prst="rect">
-            <a:avLst/>
-          </a:prstGeom>
-          <a:noFill/>
-        </p:spPr>
-        <p:txBody>
-          <a:bodyPr wrap="square" lIns="0" rIns="0" tIns="0" bIns="0">
-            <a:spAutoFit/>
-          </a:bodyPr>
-          <a:lstStyle/>
-          <a:p>
-            <a:pPr algn="l">
-              <a:spcAft>
-                <a:spcPts val="600"/>
-              </a:spcAft>
-            </a:pPr>
-            <a:r>
-              <a:rPr sz="1050" b="0">
-                <a:solidFill>
-                  <a:srgbClr val="8A8D96"/>
-                </a:solidFill>
-                <a:latin typeface="Helvetica Neue"/>
-              </a:rPr>
-              <a:t>Phần code đã hoàn tất, đang chờ tới lượt GPU.</a:t>
+              <a:t>Kiểm quy luật lần 2, ở bug lớn hơn 8 lần</a:t>
+            </a:r>
+          </a:p>
+        </p:txBody>
+      </p:sp>
+      <p:sp>
+        <p:nvSpPr>
+          <p:cNvPr id="37" name="TextBox 36"/>
+          <p:cNvSpPr txBox="1"/>
+          <p:nvPr/>
+        </p:nvSpPr>
+        <p:spPr>
+          <a:xfrm>
+            <a:off x="8900100" y="6265000"/>
+            <a:ext cx="2400000" cy="330000"/>
+          </a:xfrm>
+          <a:prstGeom prst="rect">
+            <a:avLst/>
+          </a:prstGeom>
+          <a:noFill/>
+        </p:spPr>
+        <p:txBody>
+          <a:bodyPr wrap="square" lIns="0" rIns="0" tIns="0" bIns="0">
+            <a:spAutoFit/>
+          </a:bodyPr>
+          <a:lstStyle/>
+          <a:p>
+            <a:pPr algn="l">
+              <a:spcAft>
+                <a:spcPts val="600"/>
+              </a:spcAft>
+            </a:pPr>
+            <a:r>
+              <a:rPr sz="1100" b="0">
+                <a:solidFill>
+                  <a:srgbClr val="3F4149"/>
+                </a:solidFill>
+                <a:latin typeface="Helvetica Neue"/>
+              </a:rPr>
+              <a:t>Dùng lại Run A, +1 lượt chạy</a:t>
             </a:r>
           </a:p>
         </p:txBody>
@@ -8727,7 +9113,7 @@
                 </a:solidFill>
                 <a:latin typeface="Helvetica Neue"/>
               </a:rPr>
-              <a:t>HẠN CHẾ</a:t>
+              <a:t>ĐỌC KẾT QUẢ THẾ NÀO</a:t>
             </a:r>
           </a:p>
         </p:txBody>
@@ -8808,21 +9194,82 @@
                 </a:solidFill>
                 <a:latin typeface="Georgia"/>
               </a:rPr>
-              <a:t>Ba điểm cần lưu ý khi đọc kết quả</a:t>
-            </a:r>
-          </a:p>
-        </p:txBody>
-      </p:sp>
-      <p:sp>
-        <p:nvSpPr>
-          <p:cNvPr id="5" name="Rounded Rectangle 4"/>
+              <a:t>Run D so với Run A đã có sẵn</a:t>
+            </a:r>
+          </a:p>
+        </p:txBody>
+      </p:sp>
+      <p:sp>
+        <p:nvSpPr>
+          <p:cNvPr id="5" name="TextBox 4"/>
+          <p:cNvSpPr txBox="1"/>
+          <p:nvPr/>
+        </p:nvSpPr>
+        <p:spPr>
+          <a:xfrm>
+            <a:off x="800100" y="1580000"/>
+            <a:ext cx="10591495" cy="700000"/>
+          </a:xfrm>
+          <a:prstGeom prst="rect">
+            <a:avLst/>
+          </a:prstGeom>
+          <a:noFill/>
+        </p:spPr>
+        <p:txBody>
+          <a:bodyPr wrap="square" lIns="0" rIns="0" tIns="0" bIns="0">
+            <a:spAutoFit/>
+          </a:bodyPr>
+          <a:lstStyle/>
+          <a:p>
+            <a:pPr algn="l">
+              <a:lnSpc>
+                <a:spcPct val="140000"/>
+              </a:lnSpc>
+              <a:spcAft>
+                <a:spcPts val="600"/>
+              </a:spcAft>
+            </a:pPr>
+            <a:r>
+              <a:rPr sz="1300" b="0">
+                <a:solidFill>
+                  <a:srgbClr val="3F4149"/>
+                </a:solidFill>
+                <a:latin typeface="Helvetica Neue"/>
+              </a:rPr>
+              <a:t>Run D dùng đúng cấu hình của Run A — cùng bộ đề, cùng seed, cùng cách chia đề thi — chỉ khác một</a:t>
+            </a:r>
+          </a:p>
+          <a:p>
+            <a:pPr algn="l">
+              <a:lnSpc>
+                <a:spcPct val="140000"/>
+              </a:lnSpc>
+              <a:spcAft>
+                <a:spcPts val="600"/>
+              </a:spcAft>
+            </a:pPr>
+            <a:r>
+              <a:rPr sz="1300" b="0">
+                <a:solidFill>
+                  <a:srgbClr val="3F4149"/>
+                </a:solidFill>
+                <a:latin typeface="Helvetica Neue"/>
+              </a:rPr>
+              <a:t>chỗ: đáp án sách đã được vá. Không cần chạy thêm lần đối chứng nào khác; Run A đã có sẵn.</a:t>
+            </a:r>
+          </a:p>
+        </p:txBody>
+      </p:sp>
+      <p:sp>
+        <p:nvSpPr>
+          <p:cNvPr id="6" name="Rounded Rectangle 5"/>
           <p:cNvSpPr/>
           <p:nvPr/>
         </p:nvSpPr>
         <p:spPr>
           <a:xfrm>
-            <a:off x="680100" y="2000000"/>
-            <a:ext cx="10831495" cy="1150000"/>
+            <a:off x="800100" y="2700000"/>
+            <a:ext cx="5190000" cy="2000000"/>
           </a:xfrm>
           <a:prstGeom prst="roundRect">
             <a:avLst>
@@ -8861,78 +9308,55 @@
       </p:sp>
       <p:sp>
         <p:nvSpPr>
-          <p:cNvPr id="6" name="TextBox 5"/>
-          <p:cNvSpPr txBox="1"/>
-          <p:nvPr/>
-        </p:nvSpPr>
-        <p:spPr>
-          <a:xfrm>
-            <a:off x="920100" y="2200000"/>
-            <a:ext cx="400000" cy="300000"/>
-          </a:xfrm>
-          <a:prstGeom prst="rect">
-            <a:avLst/>
-          </a:prstGeom>
-          <a:noFill/>
-        </p:spPr>
-        <p:txBody>
-          <a:bodyPr wrap="square" lIns="0" rIns="0" tIns="0" bIns="0">
-            <a:spAutoFit/>
-          </a:bodyPr>
-          <a:lstStyle/>
-          <a:p>
-            <a:pPr algn="l">
-              <a:spcAft>
-                <a:spcPts val="600"/>
-              </a:spcAft>
-            </a:pPr>
-            <a:r>
-              <a:rPr sz="1300" b="1">
-                <a:solidFill>
-                  <a:srgbClr val="9E2B34"/>
-                </a:solidFill>
-                <a:latin typeface="Georgia"/>
-              </a:rPr>
-              <a:t>01</a:t>
-            </a:r>
-          </a:p>
-        </p:txBody>
-      </p:sp>
-      <p:sp>
-        <p:nvSpPr>
-          <p:cNvPr id="7" name="TextBox 6"/>
-          <p:cNvSpPr txBox="1"/>
-          <p:nvPr/>
-        </p:nvSpPr>
-        <p:spPr>
-          <a:xfrm>
-            <a:off x="1500100" y="2190000"/>
-            <a:ext cx="9500000" cy="300000"/>
-          </a:xfrm>
-          <a:prstGeom prst="rect">
-            <a:avLst/>
-          </a:prstGeom>
-          <a:noFill/>
-        </p:spPr>
-        <p:txBody>
-          <a:bodyPr wrap="square" lIns="0" rIns="0" tIns="0" bIns="0">
-            <a:spAutoFit/>
-          </a:bodyPr>
-          <a:lstStyle/>
-          <a:p>
-            <a:pPr algn="l">
-              <a:spcAft>
-                <a:spcPts val="600"/>
-              </a:spcAft>
-            </a:pPr>
-            <a:r>
-              <a:rPr sz="1400" b="1">
-                <a:solidFill>
-                  <a:srgbClr val="16161A"/>
-                </a:solidFill>
-                <a:latin typeface="Helvetica Neue"/>
-              </a:rPr>
-              <a:t>Đề thi chỉ có 150 đề</a:t>
+          <p:cNvPr id="7" name="Rounded Rectangle 6"/>
+          <p:cNvSpPr/>
+          <p:nvPr/>
+        </p:nvSpPr>
+        <p:spPr>
+          <a:xfrm>
+            <a:off x="1060100" y="2900000"/>
+            <a:ext cx="4600000" cy="560000"/>
+          </a:xfrm>
+          <a:prstGeom prst="roundRect">
+            <a:avLst>
+              <a:gd name="adj" fmla="val 50000"/>
+            </a:avLst>
+          </a:prstGeom>
+          <a:solidFill>
+            <a:srgbClr val="029E73"/>
+          </a:solidFill>
+          <a:ln>
+            <a:noFill/>
+          </a:ln>
+          <a:effectLst/>
+        </p:spPr>
+        <p:style>
+          <a:lnRef idx="1">
+            <a:schemeClr val="accent1"/>
+          </a:lnRef>
+          <a:fillRef idx="3">
+            <a:schemeClr val="accent1"/>
+          </a:fillRef>
+          <a:effectRef idx="2">
+            <a:schemeClr val="accent1"/>
+          </a:effectRef>
+          <a:fontRef idx="minor">
+            <a:schemeClr val="lt1"/>
+          </a:fontRef>
+        </p:style>
+        <p:txBody>
+          <a:bodyPr rtlCol="0" anchor="ctr" wrap="none" lIns="0" rIns="0"/>
+          <a:lstStyle/>
+          <a:p>
+            <a:pPr algn="ctr"/>
+            <a:r>
+              <a:rPr sz="1050" b="1">
+                <a:solidFill>
+                  <a:srgbClr val="FFFFFF"/>
+                </a:solidFill>
+                <a:latin typeface="Helvetica Neue"/>
+              </a:rPr>
+              <a:t>Nếu Run D tụt điểm rõ so với A</a:t>
             </a:r>
           </a:p>
         </p:txBody>
@@ -8945,8 +9369,8 @@
         </p:nvSpPr>
         <p:spPr>
           <a:xfrm>
-            <a:off x="1500100" y="2600000"/>
-            <a:ext cx="9500000" cy="450000"/>
+            <a:off x="1060100" y="3620000"/>
+            <a:ext cx="4700000" cy="1000000"/>
           </a:xfrm>
           <a:prstGeom prst="rect">
             <a:avLst/>
@@ -8961,7 +9385,7 @@
           <a:p>
             <a:pPr algn="l">
               <a:lnSpc>
-                <a:spcPct val="130000"/>
+                <a:spcPct val="135000"/>
               </a:lnSpc>
               <a:spcAft>
                 <a:spcPts val="600"/>
@@ -8974,7 +9398,45 @@
                 </a:solidFill>
                 <a:latin typeface="Helvetica Neue"/>
               </a:rPr>
-              <a:t>Mỗi đề đáng 0,67 điểm. Chỉ đổi cách bốc đề thi thôi là điểm vòng 0 đã lệch 4,7 điểm, lớn hơn cả hiệu ứng đang đo.</a:t>
+              <a:t>quy luật mức-nặng × tần-suất được xác nhận lần thứ</a:t>
+            </a:r>
+          </a:p>
+          <a:p>
+            <a:pPr algn="l">
+              <a:lnSpc>
+                <a:spcPct val="135000"/>
+              </a:lnSpc>
+              <a:spcAft>
+                <a:spcPts val="600"/>
+              </a:spcAft>
+            </a:pPr>
+            <a:r>
+              <a:rPr sz="1200" b="0">
+                <a:solidFill>
+                  <a:srgbClr val="3F4149"/>
+                </a:solidFill>
+                <a:latin typeface="Helvetica Neue"/>
+              </a:rPr>
+              <a:t>hai, độc lập với lần \dfrac. Biết được ngưỡng gây</a:t>
+            </a:r>
+          </a:p>
+          <a:p>
+            <a:pPr algn="l">
+              <a:lnSpc>
+                <a:spcPct val="135000"/>
+              </a:lnSpc>
+              <a:spcAft>
+                <a:spcPts val="600"/>
+              </a:spcAft>
+            </a:pPr>
+            <a:r>
+              <a:rPr sz="1200" b="0">
+                <a:solidFill>
+                  <a:srgbClr val="3F4149"/>
+                </a:solidFill>
+                <a:latin typeface="Helvetica Neue"/>
+              </a:rPr>
+              <a:t>hại nằm ở đâu đó dưới 4,4%.</a:t>
             </a:r>
           </a:p>
         </p:txBody>
@@ -8987,8 +9449,8 @@
         </p:nvSpPr>
         <p:spPr>
           <a:xfrm>
-            <a:off x="680100" y="3330000"/>
-            <a:ext cx="10831495" cy="1150000"/>
+            <a:off x="6200100" y="2700000"/>
+            <a:ext cx="5190000" cy="2000000"/>
           </a:xfrm>
           <a:prstGeom prst="roundRect">
             <a:avLst>
@@ -9027,142 +9489,22 @@
       </p:sp>
       <p:sp>
         <p:nvSpPr>
-          <p:cNvPr id="10" name="TextBox 9"/>
-          <p:cNvSpPr txBox="1"/>
-          <p:nvPr/>
-        </p:nvSpPr>
-        <p:spPr>
-          <a:xfrm>
-            <a:off x="920100" y="3530000"/>
-            <a:ext cx="400000" cy="300000"/>
-          </a:xfrm>
-          <a:prstGeom prst="rect">
-            <a:avLst/>
-          </a:prstGeom>
-          <a:noFill/>
-        </p:spPr>
-        <p:txBody>
-          <a:bodyPr wrap="square" lIns="0" rIns="0" tIns="0" bIns="0">
-            <a:spAutoFit/>
-          </a:bodyPr>
-          <a:lstStyle/>
-          <a:p>
-            <a:pPr algn="l">
-              <a:spcAft>
-                <a:spcPts val="600"/>
-              </a:spcAft>
-            </a:pPr>
-            <a:r>
-              <a:rPr sz="1300" b="1">
-                <a:solidFill>
-                  <a:srgbClr val="9E2B34"/>
-                </a:solidFill>
-                <a:latin typeface="Georgia"/>
-              </a:rPr>
-              <a:t>02</a:t>
-            </a:r>
-          </a:p>
-        </p:txBody>
-      </p:sp>
-      <p:sp>
-        <p:nvSpPr>
-          <p:cNvPr id="11" name="TextBox 10"/>
-          <p:cNvSpPr txBox="1"/>
-          <p:nvPr/>
-        </p:nvSpPr>
-        <p:spPr>
-          <a:xfrm>
-            <a:off x="1500100" y="3520000"/>
-            <a:ext cx="9500000" cy="300000"/>
-          </a:xfrm>
-          <a:prstGeom prst="rect">
-            <a:avLst/>
-          </a:prstGeom>
-          <a:noFill/>
-        </p:spPr>
-        <p:txBody>
-          <a:bodyPr wrap="square" lIns="0" rIns="0" tIns="0" bIns="0">
-            <a:spAutoFit/>
-          </a:bodyPr>
-          <a:lstStyle/>
-          <a:p>
-            <a:pPr algn="l">
-              <a:spcAft>
-                <a:spcPts val="600"/>
-              </a:spcAft>
-            </a:pPr>
-            <a:r>
-              <a:rPr sz="1400" b="1">
-                <a:solidFill>
-                  <a:srgbClr val="16161A"/>
-                </a:solidFill>
-                <a:latin typeface="Helvetica Neue"/>
-              </a:rPr>
-              <a:t>Mỗi cấu hình mới chạy 2 lần</a:t>
-            </a:r>
-          </a:p>
-        </p:txBody>
-      </p:sp>
-      <p:sp>
-        <p:nvSpPr>
-          <p:cNvPr id="12" name="TextBox 11"/>
-          <p:cNvSpPr txBox="1"/>
-          <p:nvPr/>
-        </p:nvSpPr>
-        <p:spPr>
-          <a:xfrm>
-            <a:off x="1500100" y="3930000"/>
-            <a:ext cx="9500000" cy="450000"/>
-          </a:xfrm>
-          <a:prstGeom prst="rect">
-            <a:avLst/>
-          </a:prstGeom>
-          <a:noFill/>
-        </p:spPr>
-        <p:txBody>
-          <a:bodyPr wrap="square" lIns="0" rIns="0" tIns="0" bIns="0">
-            <a:spAutoFit/>
-          </a:bodyPr>
-          <a:lstStyle/>
-          <a:p>
-            <a:pPr algn="l">
-              <a:lnSpc>
-                <a:spcPct val="130000"/>
-              </a:lnSpc>
-              <a:spcAft>
-                <a:spcPts val="600"/>
-              </a:spcAft>
-            </a:pPr>
-            <a:r>
-              <a:rPr sz="1200" b="0">
-                <a:solidFill>
-                  <a:srgbClr val="3F4149"/>
-                </a:solidFill>
-                <a:latin typeface="Helvetica Neue"/>
-              </a:rPr>
-              <a:t>Riêng lần chạy C và các lần chạy cũ mới có 1 lần. Chưa đủ cơ sở để khẳng định về cú tụt 12,7 điểm của GSM8K.</a:t>
-            </a:r>
-          </a:p>
-        </p:txBody>
-      </p:sp>
-      <p:sp>
-        <p:nvSpPr>
-          <p:cNvPr id="13" name="Rounded Rectangle 12"/>
+          <p:cNvPr id="10" name="Rounded Rectangle 9"/>
           <p:cNvSpPr/>
           <p:nvPr/>
         </p:nvSpPr>
         <p:spPr>
           <a:xfrm>
-            <a:off x="680100" y="4660000"/>
-            <a:ext cx="10831495" cy="1150000"/>
+            <a:off x="6460100" y="2900000"/>
+            <a:ext cx="4600000" cy="560000"/>
           </a:xfrm>
           <a:prstGeom prst="roundRect">
             <a:avLst>
-              <a:gd name="adj" fmla="val 4000"/>
+              <a:gd name="adj" fmla="val 50000"/>
             </a:avLst>
           </a:prstGeom>
           <a:solidFill>
-            <a:srgbClr val="F5F5F7"/>
+            <a:srgbClr val="B85C00"/>
           </a:solidFill>
           <a:ln>
             <a:noFill/>
@@ -9184,6 +9526,141 @@
           </a:fontRef>
         </p:style>
         <p:txBody>
+          <a:bodyPr rtlCol="0" anchor="ctr" wrap="none" lIns="0" rIns="0"/>
+          <a:lstStyle/>
+          <a:p>
+            <a:pPr algn="ctr"/>
+            <a:r>
+              <a:rPr sz="1050" b="1">
+                <a:solidFill>
+                  <a:srgbClr val="FFFFFF"/>
+                </a:solidFill>
+                <a:latin typeface="Helvetica Neue"/>
+              </a:rPr>
+              <a:t>Nếu Run D gần như trùng A</a:t>
+            </a:r>
+          </a:p>
+        </p:txBody>
+      </p:sp>
+      <p:sp>
+        <p:nvSpPr>
+          <p:cNvPr id="11" name="TextBox 10"/>
+          <p:cNvSpPr txBox="1"/>
+          <p:nvPr/>
+        </p:nvSpPr>
+        <p:spPr>
+          <a:xfrm>
+            <a:off x="6460100" y="3620000"/>
+            <a:ext cx="4700000" cy="1000000"/>
+          </a:xfrm>
+          <a:prstGeom prst="rect">
+            <a:avLst/>
+          </a:prstGeom>
+          <a:noFill/>
+        </p:spPr>
+        <p:txBody>
+          <a:bodyPr wrap="square" lIns="0" rIns="0" tIns="0" bIns="0">
+            <a:spAutoFit/>
+          </a:bodyPr>
+          <a:lstStyle/>
+          <a:p>
+            <a:pPr algn="l">
+              <a:lnSpc>
+                <a:spcPct val="135000"/>
+              </a:lnSpc>
+              <a:spcAft>
+                <a:spcPts val="600"/>
+              </a:spcAft>
+            </a:pPr>
+            <a:r>
+              <a:rPr sz="1200" b="0">
+                <a:solidFill>
+                  <a:srgbClr val="3F4149"/>
+                </a:solidFill>
+                <a:latin typeface="Helvetica Neue"/>
+              </a:rPr>
+              <a:t>củng cố thêm kết luận hiện tại: hai bug độc lập,</a:t>
+            </a:r>
+          </a:p>
+          <a:p>
+            <a:pPr algn="l">
+              <a:lnSpc>
+                <a:spcPct val="135000"/>
+              </a:lnSpc>
+              <a:spcAft>
+                <a:spcPts val="600"/>
+              </a:spcAft>
+            </a:pPr>
+            <a:r>
+              <a:rPr sz="1200" b="0">
+                <a:solidFill>
+                  <a:srgbClr val="3F4149"/>
+                </a:solidFill>
+                <a:latin typeface="Helvetica Neue"/>
+              </a:rPr>
+              <a:t>hai lần null. Ngưỡng gây hại còn cao hơn cả 4,4%,</a:t>
+            </a:r>
+          </a:p>
+          <a:p>
+            <a:pPr algn="l">
+              <a:lnSpc>
+                <a:spcPct val="135000"/>
+              </a:lnSpc>
+              <a:spcAft>
+                <a:spcPts val="600"/>
+              </a:spcAft>
+            </a:pPr>
+            <a:r>
+              <a:rPr sz="1200" b="0">
+                <a:solidFill>
+                  <a:srgbClr val="3F4149"/>
+                </a:solidFill>
+                <a:latin typeface="Helvetica Neue"/>
+              </a:rPr>
+              <a:t>và lỗi máy chấm càng khó là nguyên nhân chính.</a:t>
+            </a:r>
+          </a:p>
+        </p:txBody>
+      </p:sp>
+      <p:sp>
+        <p:nvSpPr>
+          <p:cNvPr id="12" name="Rounded Rectangle 11"/>
+          <p:cNvSpPr/>
+          <p:nvPr/>
+        </p:nvSpPr>
+        <p:spPr>
+          <a:xfrm>
+            <a:off x="680100" y="5050000"/>
+            <a:ext cx="10831495" cy="700000"/>
+          </a:xfrm>
+          <a:prstGeom prst="roundRect">
+            <a:avLst>
+              <a:gd name="adj" fmla="val 4000"/>
+            </a:avLst>
+          </a:prstGeom>
+          <a:solidFill>
+            <a:srgbClr val="F0F6FA"/>
+          </a:solidFill>
+          <a:ln>
+            <a:noFill/>
+          </a:ln>
+          <a:effectLst/>
+        </p:spPr>
+        <p:style>
+          <a:lnRef idx="1">
+            <a:schemeClr val="accent1"/>
+          </a:lnRef>
+          <a:fillRef idx="3">
+            <a:schemeClr val="accent1"/>
+          </a:fillRef>
+          <a:effectRef idx="2">
+            <a:schemeClr val="accent1"/>
+          </a:effectRef>
+          <a:fontRef idx="minor">
+            <a:schemeClr val="lt1"/>
+          </a:fontRef>
+        </p:style>
+        <p:txBody>
           <a:bodyPr rtlCol="0" anchor="ctr"/>
           <a:lstStyle/>
           <a:p>
@@ -9193,120 +9670,39 @@
       </p:sp>
       <p:sp>
         <p:nvSpPr>
-          <p:cNvPr id="14" name="TextBox 13"/>
-          <p:cNvSpPr txBox="1"/>
-          <p:nvPr/>
-        </p:nvSpPr>
-        <p:spPr>
-          <a:xfrm>
-            <a:off x="920100" y="4860000"/>
-            <a:ext cx="400000" cy="300000"/>
-          </a:xfrm>
-          <a:prstGeom prst="rect">
-            <a:avLst/>
-          </a:prstGeom>
-          <a:noFill/>
-        </p:spPr>
-        <p:txBody>
-          <a:bodyPr wrap="square" lIns="0" rIns="0" tIns="0" bIns="0">
-            <a:spAutoFit/>
-          </a:bodyPr>
-          <a:lstStyle/>
-          <a:p>
-            <a:pPr algn="l">
-              <a:spcAft>
-                <a:spcPts val="600"/>
-              </a:spcAft>
-            </a:pPr>
-            <a:r>
-              <a:rPr sz="1300" b="1">
-                <a:solidFill>
-                  <a:srgbClr val="9E2B34"/>
-                </a:solidFill>
-                <a:latin typeface="Georgia"/>
-              </a:rPr>
-              <a:t>03</a:t>
-            </a:r>
-          </a:p>
-        </p:txBody>
-      </p:sp>
-      <p:sp>
-        <p:nvSpPr>
-          <p:cNvPr id="15" name="TextBox 14"/>
-          <p:cNvSpPr txBox="1"/>
-          <p:nvPr/>
-        </p:nvSpPr>
-        <p:spPr>
-          <a:xfrm>
-            <a:off x="1500100" y="4850000"/>
-            <a:ext cx="9500000" cy="300000"/>
-          </a:xfrm>
-          <a:prstGeom prst="rect">
-            <a:avLst/>
-          </a:prstGeom>
-          <a:noFill/>
-        </p:spPr>
-        <p:txBody>
-          <a:bodyPr wrap="square" lIns="0" rIns="0" tIns="0" bIns="0">
-            <a:spAutoFit/>
-          </a:bodyPr>
-          <a:lstStyle/>
-          <a:p>
-            <a:pPr algn="l">
-              <a:spcAft>
-                <a:spcPts val="600"/>
-              </a:spcAft>
-            </a:pPr>
-            <a:r>
-              <a:rPr sz="1400" b="1">
-                <a:solidFill>
-                  <a:srgbClr val="16161A"/>
-                </a:solidFill>
-                <a:latin typeface="Helvetica Neue"/>
-              </a:rPr>
-              <a:t>Lần chạy mới khác lần cũ ba chỗ</a:t>
-            </a:r>
-          </a:p>
-        </p:txBody>
-      </p:sp>
-      <p:sp>
-        <p:nvSpPr>
-          <p:cNvPr id="16" name="TextBox 15"/>
-          <p:cNvSpPr txBox="1"/>
-          <p:nvPr/>
-        </p:nvSpPr>
-        <p:spPr>
-          <a:xfrm>
-            <a:off x="1500100" y="5260000"/>
-            <a:ext cx="9500000" cy="450000"/>
-          </a:xfrm>
-          <a:prstGeom prst="rect">
-            <a:avLst/>
-          </a:prstGeom>
-          <a:noFill/>
-        </p:spPr>
-        <p:txBody>
-          <a:bodyPr wrap="square" lIns="0" rIns="0" tIns="0" bIns="0">
-            <a:spAutoFit/>
-          </a:bodyPr>
-          <a:lstStyle/>
-          <a:p>
-            <a:pPr algn="l">
-              <a:lnSpc>
-                <a:spcPct val="130000"/>
-              </a:lnSpc>
-              <a:spcAft>
-                <a:spcPts val="600"/>
-              </a:spcAft>
-            </a:pPr>
-            <a:r>
-              <a:rPr sz="1200" b="0">
-                <a:solidFill>
-                  <a:srgbClr val="3F4149"/>
-                </a:solidFill>
-                <a:latin typeface="Helvetica Neue"/>
-              </a:rPr>
-              <a:t>Bỏ gộp bộ đề, thêm đề thi riêng, giảm số đề. Nên kết luận chỉ dựa trên so sánh A với B, vì hai lần chạy đó chỉ khác nhau đúng một biến.</a:t>
+          <p:cNvPr id="13" name="TextBox 12"/>
+          <p:cNvSpPr txBox="1"/>
+          <p:nvPr/>
+        </p:nvSpPr>
+        <p:spPr>
+          <a:xfrm>
+            <a:off x="920100" y="5230000"/>
+            <a:ext cx="10351495" cy="400000"/>
+          </a:xfrm>
+          <a:prstGeom prst="rect">
+            <a:avLst/>
+          </a:prstGeom>
+          <a:noFill/>
+        </p:spPr>
+        <p:txBody>
+          <a:bodyPr wrap="square" lIns="0" rIns="0" tIns="0" bIns="0">
+            <a:spAutoFit/>
+          </a:bodyPr>
+          <a:lstStyle/>
+          <a:p>
+            <a:pPr algn="l">
+              <a:spcAft>
+                <a:spcPts val="600"/>
+              </a:spcAft>
+            </a:pPr>
+            <a:r>
+              <a:rPr sz="1250" b="1">
+                <a:solidFill>
+                  <a:srgbClr val="0173B2"/>
+                </a:solidFill>
+                <a:latin typeface="Helvetica Neue"/>
+              </a:rPr>
+              <a:t>Ngã nào cũng ra kết luận dùng được — và lần này 4,4% là số đã đo, không phải ước lượng.</a:t>
             </a:r>
           </a:p>
         </p:txBody>
@@ -9363,7 +9759,7 @@
                 </a:solidFill>
                 <a:latin typeface="Helvetica Neue"/>
               </a:rPr>
-              <a:t>TÓM TẮT</a:t>
+              <a:t>CÂU HỎI CHƯA TRẢ LỜI ĐƯỢC</a:t>
             </a:r>
           </a:p>
         </p:txBody>
@@ -9444,21 +9840,82 @@
                 </a:solidFill>
                 <a:latin typeface="Georgia"/>
               </a:rPr>
-              <a:t>Kết quả ba tuần và hướng tiếp theo</a:t>
-            </a:r>
-          </a:p>
-        </p:txBody>
-      </p:sp>
-      <p:sp>
-        <p:nvSpPr>
-          <p:cNvPr id="5" name="Rounded Rectangle 4"/>
+              <a:t>Thí nghiệm kiểm chứng đang chạy</a:t>
+            </a:r>
+          </a:p>
+        </p:txBody>
+      </p:sp>
+      <p:sp>
+        <p:nvSpPr>
+          <p:cNvPr id="5" name="TextBox 4"/>
+          <p:cNvSpPr txBox="1"/>
+          <p:nvPr/>
+        </p:nvSpPr>
+        <p:spPr>
+          <a:xfrm>
+            <a:off x="800100" y="1620000"/>
+            <a:ext cx="10591495" cy="700000"/>
+          </a:xfrm>
+          <a:prstGeom prst="rect">
+            <a:avLst/>
+          </a:prstGeom>
+          <a:noFill/>
+        </p:spPr>
+        <p:txBody>
+          <a:bodyPr wrap="square" lIns="0" rIns="0" tIns="0" bIns="0">
+            <a:spAutoFit/>
+          </a:bodyPr>
+          <a:lstStyle/>
+          <a:p>
+            <a:pPr algn="l">
+              <a:lnSpc>
+                <a:spcPct val="140000"/>
+              </a:lnSpc>
+              <a:spcAft>
+                <a:spcPts val="600"/>
+              </a:spcAft>
+            </a:pPr>
+            <a:r>
+              <a:rPr sz="1400" b="0">
+                <a:solidFill>
+                  <a:srgbClr val="16161A"/>
+                </a:solidFill>
+                <a:latin typeface="Helvetica Neue"/>
+              </a:rPr>
+              <a:t>Cả 7 lần chạy, điểm đều tụt khoảng 3 điểm ngay ở vòng 1 rồi đứng yên. Nhưng các công trình lớn</a:t>
+            </a:r>
+          </a:p>
+          <a:p>
+            <a:pPr algn="l">
+              <a:lnSpc>
+                <a:spcPct val="140000"/>
+              </a:lnSpc>
+              <a:spcAft>
+                <a:spcPts val="600"/>
+              </a:spcAft>
+            </a:pPr>
+            <a:r>
+              <a:rPr sz="1400" b="0">
+                <a:solidFill>
+                  <a:srgbClr val="16161A"/>
+                </a:solidFill>
+                <a:latin typeface="Helvetica Neue"/>
+              </a:rPr>
+              <a:t>về tự học đều báo cáo model KHÁ LÊN. Chưa giải thích được vì sao kết quả ở đây ngược lại.</a:t>
+            </a:r>
+          </a:p>
+        </p:txBody>
+      </p:sp>
+      <p:sp>
+        <p:nvSpPr>
+          <p:cNvPr id="6" name="Rounded Rectangle 5"/>
           <p:cNvSpPr/>
           <p:nvPr/>
         </p:nvSpPr>
         <p:spPr>
           <a:xfrm>
-            <a:off x="680100" y="1900000"/>
-            <a:ext cx="10831495" cy="1460000"/>
+            <a:off x="680100" y="2550000"/>
+            <a:ext cx="10831495" cy="900000"/>
           </a:xfrm>
           <a:prstGeom prst="roundRect">
             <a:avLst>
@@ -9466,7 +9923,7 @@
             </a:avLst>
           </a:prstGeom>
           <a:solidFill>
-            <a:srgbClr val="F0F6FA"/>
+            <a:srgbClr val="F5F5F7"/>
           </a:solidFill>
           <a:ln>
             <a:noFill/>
@@ -9497,14 +9954,14 @@
       </p:sp>
       <p:sp>
         <p:nvSpPr>
-          <p:cNvPr id="6" name="TextBox 5"/>
-          <p:cNvSpPr txBox="1"/>
-          <p:nvPr/>
-        </p:nvSpPr>
-        <p:spPr>
-          <a:xfrm>
-            <a:off x="920100" y="2100000"/>
-            <a:ext cx="10351495" cy="1100000"/>
+          <p:cNvPr id="7" name="TextBox 6"/>
+          <p:cNvSpPr txBox="1"/>
+          <p:nvPr/>
+        </p:nvSpPr>
+        <p:spPr>
+          <a:xfrm>
+            <a:off x="920100" y="2720000"/>
+            <a:ext cx="10351495" cy="640000"/>
           </a:xfrm>
           <a:prstGeom prst="rect">
             <a:avLst/>
@@ -9519,72 +9976,53 @@
           <a:p>
             <a:pPr algn="l">
               <a:lnSpc>
-                <a:spcPct val="140000"/>
+                <a:spcPct val="145000"/>
               </a:lnSpc>
               <a:spcAft>
                 <a:spcPts val="600"/>
               </a:spcAft>
             </a:pPr>
             <a:r>
-              <a:rPr sz="1400" b="0">
-                <a:solidFill>
-                  <a:srgbClr val="16161A"/>
-                </a:solidFill>
-                <a:latin typeface="Georgia"/>
-              </a:rPr>
-              <a:t>Thí nghiệm đối chứng cho thấy giả thuyết ban đầu không đúng. Nguyên nhân đã xác định được:</a:t>
+              <a:rPr sz="1250" b="0">
+                <a:solidFill>
+                  <a:srgbClr val="3F4149"/>
+                </a:solidFill>
+                <a:latin typeface="Helvetica Neue"/>
+              </a:rPr>
+              <a:t>Có một khả năng đơn giản chưa loại trừ được: model này vốn đã được tinh chỉnh rất kỹ. Dạy thêm</a:t>
             </a:r>
           </a:p>
           <a:p>
             <a:pPr algn="l">
               <a:lnSpc>
-                <a:spcPct val="140000"/>
+                <a:spcPct val="145000"/>
               </a:lnSpc>
               <a:spcAft>
                 <a:spcPts val="600"/>
               </a:spcAft>
             </a:pPr>
             <a:r>
-              <a:rPr sz="1400" b="0">
-                <a:solidFill>
-                  <a:srgbClr val="16161A"/>
-                </a:solidFill>
-                <a:latin typeface="Georgia"/>
-              </a:rPr>
-              <a:t>lỗi của máy chấm tuy nặng nhưng chỉ xảy ra ở 0,55% số bài.</a:t>
-            </a:r>
-          </a:p>
-          <a:p>
-            <a:pPr algn="l">
-              <a:lnSpc>
-                <a:spcPct val="140000"/>
-              </a:lnSpc>
-              <a:spcAft>
-                <a:spcPts val="600"/>
-              </a:spcAft>
-            </a:pPr>
-            <a:r>
-              <a:rPr sz="1400" b="0">
-                <a:solidFill>
-                  <a:srgbClr val="16161A"/>
-                </a:solidFill>
-                <a:latin typeface="Georgia"/>
-              </a:rPr>
-              <a:t>Đề tài chuyển sang cảnh báo về thiết kế đo — hẹp hơn, nhưng có cơ sở vững.</a:t>
-            </a:r>
-          </a:p>
-        </p:txBody>
-      </p:sp>
-      <p:sp>
-        <p:nvSpPr>
-          <p:cNvPr id="7" name="TextBox 6"/>
-          <p:cNvSpPr txBox="1"/>
-          <p:nvPr/>
-        </p:nvSpPr>
-        <p:spPr>
-          <a:xfrm>
-            <a:off x="800100" y="3560000"/>
-            <a:ext cx="1700000" cy="300000"/>
+              <a:rPr sz="1250" b="0">
+                <a:solidFill>
+                  <a:srgbClr val="3F4149"/>
+                </a:solidFill>
+                <a:latin typeface="Helvetica Neue"/>
+              </a:rPr>
+              <a:t>một lượng nhỏ có thể chỉ làm nó lệch khỏi trạng thái tốt sẵn có, bất kể dạy bằng dữ liệu gì.</a:t>
+            </a:r>
+          </a:p>
+        </p:txBody>
+      </p:sp>
+      <p:sp>
+        <p:nvSpPr>
+          <p:cNvPr id="8" name="TextBox 7"/>
+          <p:cNvSpPr txBox="1"/>
+          <p:nvPr/>
+        </p:nvSpPr>
+        <p:spPr>
+          <a:xfrm>
+            <a:off x="800100" y="3720000"/>
+            <a:ext cx="10591495" cy="300000"/>
           </a:xfrm>
           <a:prstGeom prst="rect">
             <a:avLst/>
@@ -9605,323 +10043,972 @@
             <a:r>
               <a:rPr sz="1100" b="1">
                 <a:solidFill>
-                  <a:srgbClr val="9E2B34"/>
-                </a:solidFill>
-                <a:latin typeface="Helvetica Neue"/>
-              </a:rPr>
-              <a:t>ĐÃ LÀM</a:t>
-            </a:r>
-          </a:p>
-        </p:txBody>
-      </p:sp>
-      <p:sp>
-        <p:nvSpPr>
-          <p:cNvPr id="8" name="TextBox 7"/>
-          <p:cNvSpPr txBox="1"/>
-          <p:nvPr/>
-        </p:nvSpPr>
-        <p:spPr>
-          <a:xfrm>
-            <a:off x="2600100" y="3545000"/>
-            <a:ext cx="8700000" cy="330000"/>
-          </a:xfrm>
-          <a:prstGeom prst="rect">
-            <a:avLst/>
-          </a:prstGeom>
-          <a:noFill/>
-        </p:spPr>
-        <p:txBody>
-          <a:bodyPr wrap="square" lIns="0" rIns="0" tIns="0" bIns="0">
-            <a:spAutoFit/>
-          </a:bodyPr>
-          <a:lstStyle/>
-          <a:p>
-            <a:pPr algn="l">
-              <a:spcAft>
-                <a:spcPts val="600"/>
-              </a:spcAft>
-            </a:pPr>
-            <a:r>
-              <a:rPr sz="1250" b="0">
-                <a:solidFill>
-                  <a:srgbClr val="3F4149"/>
-                </a:solidFill>
-                <a:latin typeface="Helvetica Neue"/>
-              </a:rPr>
-              <a:t>7 lần chạy, khoảng 40 giờ GPU. Phát hiện lỗi trong thiết kế đo và sửa lại.</a:t>
-            </a:r>
-          </a:p>
-        </p:txBody>
-      </p:sp>
-      <p:sp>
-        <p:nvSpPr>
-          <p:cNvPr id="9" name="TextBox 8"/>
-          <p:cNvSpPr txBox="1"/>
-          <p:nvPr/>
-        </p:nvSpPr>
-        <p:spPr>
-          <a:xfrm>
-            <a:off x="800100" y="4130000"/>
-            <a:ext cx="1700000" cy="300000"/>
-          </a:xfrm>
-          <a:prstGeom prst="rect">
-            <a:avLst/>
-          </a:prstGeom>
-          <a:noFill/>
-        </p:spPr>
-        <p:txBody>
-          <a:bodyPr wrap="square" lIns="0" rIns="0" tIns="0" bIns="0">
-            <a:spAutoFit/>
-          </a:bodyPr>
-          <a:lstStyle/>
-          <a:p>
-            <a:pPr algn="l">
-              <a:spcAft>
-                <a:spcPts val="600"/>
-              </a:spcAft>
-            </a:pPr>
-            <a:r>
-              <a:rPr sz="1100" b="1">
-                <a:solidFill>
-                  <a:srgbClr val="9E2B34"/>
-                </a:solidFill>
-                <a:latin typeface="Helvetica Neue"/>
-              </a:rPr>
-              <a:t>KẾT QUẢ</a:t>
-            </a:r>
-          </a:p>
-        </p:txBody>
-      </p:sp>
-      <p:sp>
-        <p:nvSpPr>
-          <p:cNvPr id="10" name="TextBox 9"/>
-          <p:cNvSpPr txBox="1"/>
-          <p:nvPr/>
-        </p:nvSpPr>
-        <p:spPr>
-          <a:xfrm>
-            <a:off x="2600100" y="4115000"/>
-            <a:ext cx="8700000" cy="330000"/>
-          </a:xfrm>
-          <a:prstGeom prst="rect">
-            <a:avLst/>
-          </a:prstGeom>
-          <a:noFill/>
-        </p:spPr>
-        <p:txBody>
-          <a:bodyPr wrap="square" lIns="0" rIns="0" tIns="0" bIns="0">
-            <a:spAutoFit/>
-          </a:bodyPr>
-          <a:lstStyle/>
-          <a:p>
-            <a:pPr algn="l">
-              <a:spcAft>
-                <a:spcPts val="600"/>
-              </a:spcAft>
-            </a:pPr>
-            <a:r>
-              <a:rPr sz="1250" b="0">
-                <a:solidFill>
-                  <a:srgbClr val="3F4149"/>
-                </a:solidFill>
-                <a:latin typeface="Helvetica Neue"/>
-              </a:rPr>
-              <a:t>Giả thuyết ban đầu không đúng, và đo được nguyên nhân vì sao.</a:t>
-            </a:r>
-          </a:p>
-        </p:txBody>
-      </p:sp>
-      <p:sp>
-        <p:nvSpPr>
-          <p:cNvPr id="11" name="TextBox 10"/>
-          <p:cNvSpPr txBox="1"/>
-          <p:nvPr/>
-        </p:nvSpPr>
-        <p:spPr>
-          <a:xfrm>
-            <a:off x="800100" y="4700000"/>
-            <a:ext cx="1700000" cy="300000"/>
-          </a:xfrm>
-          <a:prstGeom prst="rect">
-            <a:avLst/>
-          </a:prstGeom>
-          <a:noFill/>
-        </p:spPr>
-        <p:txBody>
-          <a:bodyPr wrap="square" lIns="0" rIns="0" tIns="0" bIns="0">
-            <a:spAutoFit/>
-          </a:bodyPr>
-          <a:lstStyle/>
-          <a:p>
-            <a:pPr algn="l">
-              <a:spcAft>
-                <a:spcPts val="600"/>
-              </a:spcAft>
-            </a:pPr>
-            <a:r>
-              <a:rPr sz="1100" b="1">
-                <a:solidFill>
-                  <a:srgbClr val="9E2B34"/>
-                </a:solidFill>
-                <a:latin typeface="Helvetica Neue"/>
-              </a:rPr>
-              <a:t>ĐANG CHẠY</a:t>
-            </a:r>
-          </a:p>
-        </p:txBody>
-      </p:sp>
-      <p:sp>
-        <p:nvSpPr>
-          <p:cNvPr id="12" name="TextBox 11"/>
-          <p:cNvSpPr txBox="1"/>
-          <p:nvPr/>
-        </p:nvSpPr>
-        <p:spPr>
-          <a:xfrm>
-            <a:off x="2600100" y="4685000"/>
-            <a:ext cx="8700000" cy="330000"/>
-          </a:xfrm>
-          <a:prstGeom prst="rect">
-            <a:avLst/>
-          </a:prstGeom>
-          <a:noFill/>
-        </p:spPr>
-        <p:txBody>
-          <a:bodyPr wrap="square" lIns="0" rIns="0" tIns="0" bIns="0">
-            <a:spAutoFit/>
-          </a:bodyPr>
-          <a:lstStyle/>
-          <a:p>
-            <a:pPr algn="l">
-              <a:spcAft>
-                <a:spcPts val="600"/>
-              </a:spcAft>
-            </a:pPr>
-            <a:r>
-              <a:rPr sz="1250" b="0">
-                <a:solidFill>
-                  <a:srgbClr val="3F4149"/>
-                </a:solidFill>
-                <a:latin typeface="Helvetica Neue"/>
-              </a:rPr>
-              <a:t>Thí nghiệm để biết cú tụt là do tự học, hay chỉ do việc dạy thêm.</a:t>
-            </a:r>
-          </a:p>
-        </p:txBody>
-      </p:sp>
-      <p:sp>
-        <p:nvSpPr>
-          <p:cNvPr id="13" name="TextBox 12"/>
-          <p:cNvSpPr txBox="1"/>
-          <p:nvPr/>
-        </p:nvSpPr>
-        <p:spPr>
-          <a:xfrm>
-            <a:off x="800100" y="5270000"/>
-            <a:ext cx="1700000" cy="300000"/>
-          </a:xfrm>
-          <a:prstGeom prst="rect">
-            <a:avLst/>
-          </a:prstGeom>
-          <a:noFill/>
-        </p:spPr>
-        <p:txBody>
-          <a:bodyPr wrap="square" lIns="0" rIns="0" tIns="0" bIns="0">
-            <a:spAutoFit/>
-          </a:bodyPr>
-          <a:lstStyle/>
-          <a:p>
-            <a:pPr algn="l">
-              <a:spcAft>
-                <a:spcPts val="600"/>
-              </a:spcAft>
-            </a:pPr>
-            <a:r>
-              <a:rPr sz="1100" b="1">
-                <a:solidFill>
-                  <a:srgbClr val="9E2B34"/>
-                </a:solidFill>
-                <a:latin typeface="Helvetica Neue"/>
-              </a:rPr>
-              <a:t>SẮP TỚI</a:t>
-            </a:r>
-          </a:p>
-        </p:txBody>
-      </p:sp>
-      <p:sp>
-        <p:nvSpPr>
-          <p:cNvPr id="14" name="TextBox 13"/>
-          <p:cNvSpPr txBox="1"/>
-          <p:nvPr/>
-        </p:nvSpPr>
-        <p:spPr>
-          <a:xfrm>
-            <a:off x="2600100" y="5255000"/>
-            <a:ext cx="8700000" cy="330000"/>
-          </a:xfrm>
-          <a:prstGeom prst="rect">
-            <a:avLst/>
-          </a:prstGeom>
-          <a:noFill/>
-        </p:spPr>
-        <p:txBody>
-          <a:bodyPr wrap="square" lIns="0" rIns="0" tIns="0" bIns="0">
-            <a:spAutoFit/>
-          </a:bodyPr>
-          <a:lstStyle/>
-          <a:p>
-            <a:pPr algn="l">
-              <a:spcAft>
-                <a:spcPts val="600"/>
-              </a:spcAft>
-            </a:pPr>
-            <a:r>
-              <a:rPr sz="1250" b="0">
-                <a:solidFill>
-                  <a:srgbClr val="3F4149"/>
-                </a:solidFill>
-                <a:latin typeface="Helvetica Neue"/>
-              </a:rPr>
-              <a:t>Thí nghiệm điều khiển tần suất lỗi, để tìm ngưỡng gây hại.</a:t>
-            </a:r>
-          </a:p>
-        </p:txBody>
-      </p:sp>
-      <p:cxnSp>
-        <p:nvCxnSpPr>
-          <p:cNvPr id="15" name="Connector 14"/>
-          <p:cNvCxnSpPr/>
-          <p:nvPr/>
-        </p:nvCxnSpPr>
-        <p:spPr>
-          <a:xfrm>
-            <a:off x="800100" y="5900000"/>
-            <a:ext cx="10591495" cy="0"/>
-          </a:xfrm>
-          <a:prstGeom prst="line">
-            <a:avLst/>
-          </a:prstGeom>
-          <a:ln w="9525">
-            <a:solidFill>
-              <a:srgbClr val="E6E6EA"/>
-            </a:solidFill>
+                  <a:srgbClr val="8A8D96"/>
+                </a:solidFill>
+                <a:latin typeface="Helvetica Neue"/>
+              </a:rPr>
+              <a:t>THÍ NGHIỆM PHÂN ĐỊNH: dạy bằng lời giải mẫu của sách, thay vì bài model tự làm</a:t>
+            </a:r>
+          </a:p>
+        </p:txBody>
+      </p:sp>
+      <p:sp>
+        <p:nvSpPr>
+          <p:cNvPr id="9" name="Rounded Rectangle 8"/>
+          <p:cNvSpPr/>
+          <p:nvPr/>
+        </p:nvSpPr>
+        <p:spPr>
+          <a:xfrm>
+            <a:off x="800100" y="4180000"/>
+            <a:ext cx="5190000" cy="1350000"/>
+          </a:xfrm>
+          <a:prstGeom prst="roundRect">
+            <a:avLst>
+              <a:gd name="adj" fmla="val 4000"/>
+            </a:avLst>
+          </a:prstGeom>
+          <a:solidFill>
+            <a:srgbClr val="F5F5F7"/>
+          </a:solidFill>
+          <a:ln>
+            <a:noFill/>
           </a:ln>
+          <a:effectLst/>
         </p:spPr>
         <p:style>
-          <a:lnRef idx="2">
+          <a:lnRef idx="1">
             <a:schemeClr val="accent1"/>
           </a:lnRef>
-          <a:fillRef idx="0">
+          <a:fillRef idx="3">
             <a:schemeClr val="accent1"/>
           </a:fillRef>
-          <a:effectRef idx="1">
+          <a:effectRef idx="2">
             <a:schemeClr val="accent1"/>
           </a:effectRef>
           <a:fontRef idx="minor">
-            <a:schemeClr val="tx1"/>
+            <a:schemeClr val="lt1"/>
           </a:fontRef>
         </p:style>
-      </p:cxnSp>
+        <p:txBody>
+          <a:bodyPr rtlCol="0" anchor="ctr"/>
+          <a:lstStyle/>
+          <a:p>
+            <a:pPr algn="ctr"/>
+          </a:p>
+        </p:txBody>
+      </p:sp>
+      <p:sp>
+        <p:nvSpPr>
+          <p:cNvPr id="10" name="Rounded Rectangle 9"/>
+          <p:cNvSpPr/>
+          <p:nvPr/>
+        </p:nvSpPr>
+        <p:spPr>
+          <a:xfrm>
+            <a:off x="1040100" y="4360000"/>
+            <a:ext cx="1500000" cy="310000"/>
+          </a:xfrm>
+          <a:prstGeom prst="roundRect">
+            <a:avLst>
+              <a:gd name="adj" fmla="val 50000"/>
+            </a:avLst>
+          </a:prstGeom>
+          <a:solidFill>
+            <a:srgbClr val="029E73"/>
+          </a:solidFill>
+          <a:ln>
+            <a:noFill/>
+          </a:ln>
+          <a:effectLst/>
+        </p:spPr>
+        <p:style>
+          <a:lnRef idx="1">
+            <a:schemeClr val="accent1"/>
+          </a:lnRef>
+          <a:fillRef idx="3">
+            <a:schemeClr val="accent1"/>
+          </a:fillRef>
+          <a:effectRef idx="2">
+            <a:schemeClr val="accent1"/>
+          </a:effectRef>
+          <a:fontRef idx="minor">
+            <a:schemeClr val="lt1"/>
+          </a:fontRef>
+        </p:style>
+        <p:txBody>
+          <a:bodyPr rtlCol="0" anchor="ctr" wrap="none" lIns="0" rIns="0"/>
+          <a:lstStyle/>
+          <a:p>
+            <a:pPr algn="ctr"/>
+            <a:r>
+              <a:rPr sz="1050" b="1">
+                <a:solidFill>
+                  <a:srgbClr val="FFFFFF"/>
+                </a:solidFill>
+                <a:latin typeface="Helvetica Neue"/>
+              </a:rPr>
+              <a:t>Nếu khá lên</a:t>
+            </a:r>
+          </a:p>
+        </p:txBody>
+      </p:sp>
+      <p:sp>
+        <p:nvSpPr>
+          <p:cNvPr id="11" name="TextBox 10"/>
+          <p:cNvSpPr txBox="1"/>
+          <p:nvPr/>
+        </p:nvSpPr>
+        <p:spPr>
+          <a:xfrm>
+            <a:off x="1040100" y="4830000"/>
+            <a:ext cx="4700000" cy="600000"/>
+          </a:xfrm>
+          <a:prstGeom prst="rect">
+            <a:avLst/>
+          </a:prstGeom>
+          <a:noFill/>
+        </p:spPr>
+        <p:txBody>
+          <a:bodyPr wrap="square" lIns="0" rIns="0" tIns="0" bIns="0">
+            <a:spAutoFit/>
+          </a:bodyPr>
+          <a:lstStyle/>
+          <a:p>
+            <a:pPr algn="l">
+              <a:lnSpc>
+                <a:spcPct val="135000"/>
+              </a:lnSpc>
+              <a:spcAft>
+                <a:spcPts val="600"/>
+              </a:spcAft>
+            </a:pPr>
+            <a:r>
+              <a:rPr sz="1200" b="0">
+                <a:solidFill>
+                  <a:srgbClr val="3F4149"/>
+                </a:solidFill>
+                <a:latin typeface="Helvetica Neue"/>
+              </a:rPr>
+              <a:t>thì vòng lặp không sao, và cái hại đúng là</a:t>
+            </a:r>
+          </a:p>
+          <a:p>
+            <a:pPr algn="l">
+              <a:lnSpc>
+                <a:spcPct val="135000"/>
+              </a:lnSpc>
+              <a:spcAft>
+                <a:spcPts val="600"/>
+              </a:spcAft>
+            </a:pPr>
+            <a:r>
+              <a:rPr sz="1200" b="0">
+                <a:solidFill>
+                  <a:srgbClr val="3F4149"/>
+                </a:solidFill>
+                <a:latin typeface="Helvetica Neue"/>
+              </a:rPr>
+              <a:t>do model học từ bài của chính nó.</a:t>
+            </a:r>
+          </a:p>
+        </p:txBody>
+      </p:sp>
+      <p:sp>
+        <p:nvSpPr>
+          <p:cNvPr id="12" name="Rounded Rectangle 11"/>
+          <p:cNvSpPr/>
+          <p:nvPr/>
+        </p:nvSpPr>
+        <p:spPr>
+          <a:xfrm>
+            <a:off x="6200100" y="4180000"/>
+            <a:ext cx="5190000" cy="1350000"/>
+          </a:xfrm>
+          <a:prstGeom prst="roundRect">
+            <a:avLst>
+              <a:gd name="adj" fmla="val 4000"/>
+            </a:avLst>
+          </a:prstGeom>
+          <a:solidFill>
+            <a:srgbClr val="F5F5F7"/>
+          </a:solidFill>
+          <a:ln>
+            <a:noFill/>
+          </a:ln>
+          <a:effectLst/>
+        </p:spPr>
+        <p:style>
+          <a:lnRef idx="1">
+            <a:schemeClr val="accent1"/>
+          </a:lnRef>
+          <a:fillRef idx="3">
+            <a:schemeClr val="accent1"/>
+          </a:fillRef>
+          <a:effectRef idx="2">
+            <a:schemeClr val="accent1"/>
+          </a:effectRef>
+          <a:fontRef idx="minor">
+            <a:schemeClr val="lt1"/>
+          </a:fontRef>
+        </p:style>
+        <p:txBody>
+          <a:bodyPr rtlCol="0" anchor="ctr"/>
+          <a:lstStyle/>
+          <a:p>
+            <a:pPr algn="ctr"/>
+          </a:p>
+        </p:txBody>
+      </p:sp>
+      <p:sp>
+        <p:nvSpPr>
+          <p:cNvPr id="13" name="Rounded Rectangle 12"/>
+          <p:cNvSpPr/>
+          <p:nvPr/>
+        </p:nvSpPr>
+        <p:spPr>
+          <a:xfrm>
+            <a:off x="6440100" y="4360000"/>
+            <a:ext cx="1500000" cy="310000"/>
+          </a:xfrm>
+          <a:prstGeom prst="roundRect">
+            <a:avLst>
+              <a:gd name="adj" fmla="val 50000"/>
+            </a:avLst>
+          </a:prstGeom>
+          <a:solidFill>
+            <a:srgbClr val="B85C00"/>
+          </a:solidFill>
+          <a:ln>
+            <a:noFill/>
+          </a:ln>
+          <a:effectLst/>
+        </p:spPr>
+        <p:style>
+          <a:lnRef idx="1">
+            <a:schemeClr val="accent1"/>
+          </a:lnRef>
+          <a:fillRef idx="3">
+            <a:schemeClr val="accent1"/>
+          </a:fillRef>
+          <a:effectRef idx="2">
+            <a:schemeClr val="accent1"/>
+          </a:effectRef>
+          <a:fontRef idx="minor">
+            <a:schemeClr val="lt1"/>
+          </a:fontRef>
+        </p:style>
+        <p:txBody>
+          <a:bodyPr rtlCol="0" anchor="ctr" wrap="none" lIns="0" rIns="0"/>
+          <a:lstStyle/>
+          <a:p>
+            <a:pPr algn="ctr"/>
+            <a:r>
+              <a:rPr sz="1050" b="1">
+                <a:solidFill>
+                  <a:srgbClr val="FFFFFF"/>
+                </a:solidFill>
+                <a:latin typeface="Helvetica Neue"/>
+              </a:rPr>
+              <a:t>Nếu cũng tụt</a:t>
+            </a:r>
+          </a:p>
+        </p:txBody>
+      </p:sp>
+      <p:sp>
+        <p:nvSpPr>
+          <p:cNvPr id="14" name="TextBox 13"/>
+          <p:cNvSpPr txBox="1"/>
+          <p:nvPr/>
+        </p:nvSpPr>
+        <p:spPr>
+          <a:xfrm>
+            <a:off x="6440100" y="4830000"/>
+            <a:ext cx="4700000" cy="600000"/>
+          </a:xfrm>
+          <a:prstGeom prst="rect">
+            <a:avLst/>
+          </a:prstGeom>
+          <a:noFill/>
+        </p:spPr>
+        <p:txBody>
+          <a:bodyPr wrap="square" lIns="0" rIns="0" tIns="0" bIns="0">
+            <a:spAutoFit/>
+          </a:bodyPr>
+          <a:lstStyle/>
+          <a:p>
+            <a:pPr algn="l">
+              <a:lnSpc>
+                <a:spcPct val="135000"/>
+              </a:lnSpc>
+              <a:spcAft>
+                <a:spcPts val="600"/>
+              </a:spcAft>
+            </a:pPr>
+            <a:r>
+              <a:rPr sz="1200" b="0">
+                <a:solidFill>
+                  <a:srgbClr val="3F4149"/>
+                </a:solidFill>
+                <a:latin typeface="Helvetica Neue"/>
+              </a:rPr>
+              <a:t>thì cú tụt là do việc dạy thêm, không liên</a:t>
+            </a:r>
+          </a:p>
+          <a:p>
+            <a:pPr algn="l">
+              <a:lnSpc>
+                <a:spcPct val="135000"/>
+              </a:lnSpc>
+              <a:spcAft>
+                <a:spcPts val="600"/>
+              </a:spcAft>
+            </a:pPr>
+            <a:r>
+              <a:rPr sz="1200" b="0">
+                <a:solidFill>
+                  <a:srgbClr val="3F4149"/>
+                </a:solidFill>
+                <a:latin typeface="Helvetica Neue"/>
+              </a:rPr>
+              <a:t>quan tự học. Kết luận phải sửa lần nữa.</a:t>
+            </a:r>
+          </a:p>
+        </p:txBody>
+      </p:sp>
+      <p:sp>
+        <p:nvSpPr>
+          <p:cNvPr id="15" name="TextBox 14"/>
+          <p:cNvSpPr txBox="1"/>
+          <p:nvPr/>
+        </p:nvSpPr>
+        <p:spPr>
+          <a:xfrm>
+            <a:off x="800100" y="5800000"/>
+            <a:ext cx="10591495" cy="300000"/>
+          </a:xfrm>
+          <a:prstGeom prst="rect">
+            <a:avLst/>
+          </a:prstGeom>
+          <a:noFill/>
+        </p:spPr>
+        <p:txBody>
+          <a:bodyPr wrap="square" lIns="0" rIns="0" tIns="0" bIns="0">
+            <a:spAutoFit/>
+          </a:bodyPr>
+          <a:lstStyle/>
+          <a:p>
+            <a:pPr algn="l">
+              <a:spcAft>
+                <a:spcPts val="600"/>
+              </a:spcAft>
+            </a:pPr>
+            <a:r>
+              <a:rPr sz="1050" b="0">
+                <a:solidFill>
+                  <a:srgbClr val="8A8D96"/>
+                </a:solidFill>
+                <a:latin typeface="Helvetica Neue"/>
+              </a:rPr>
+              <a:t>Phần code đã hoàn tất, đang chờ tới lượt GPU.</a:t>
+            </a:r>
+          </a:p>
+        </p:txBody>
+      </p:sp>
+    </p:spTree>
+  </p:cSld>
+  <p:clrMapOvr>
+    <a:masterClrMapping/>
+  </p:clrMapOvr>
+</p:sld>
+</file>
+
+<file path=ppt/slides/slide19.xml><?xml version="1.0" encoding="utf-8"?>
+<p:sld xmlns:a="http://schemas.openxmlformats.org/drawingml/2006/main" xmlns:p="http://schemas.openxmlformats.org/presentationml/2006/main" xmlns:r="http://schemas.openxmlformats.org/officeDocument/2006/relationships">
+  <p:cSld>
+    <p:spTree>
+      <p:nvGrpSpPr>
+        <p:cNvPr id="1" name=""/>
+        <p:cNvGrpSpPr/>
+        <p:nvPr/>
+      </p:nvGrpSpPr>
+      <p:grpSpPr/>
+      <p:sp>
+        <p:nvSpPr>
+          <p:cNvPr id="2" name="TextBox 1"/>
+          <p:cNvSpPr txBox="1"/>
+          <p:nvPr/>
+        </p:nvSpPr>
+        <p:spPr>
+          <a:xfrm>
+            <a:off x="800100" y="430000"/>
+            <a:ext cx="7000000" cy="250000"/>
+          </a:xfrm>
+          <a:prstGeom prst="rect">
+            <a:avLst/>
+          </a:prstGeom>
+          <a:noFill/>
+        </p:spPr>
+        <p:txBody>
+          <a:bodyPr wrap="square" lIns="0" rIns="0" tIns="0" bIns="0">
+            <a:spAutoFit/>
+          </a:bodyPr>
+          <a:lstStyle/>
+          <a:p>
+            <a:pPr algn="l">
+              <a:spcAft>
+                <a:spcPts val="600"/>
+              </a:spcAft>
+            </a:pPr>
+            <a:r>
+              <a:rPr sz="1050" b="1">
+                <a:solidFill>
+                  <a:srgbClr val="9E2B34"/>
+                </a:solidFill>
+                <a:latin typeface="Helvetica Neue"/>
+              </a:rPr>
+              <a:t>HẠN CHẾ</a:t>
+            </a:r>
+          </a:p>
+        </p:txBody>
+      </p:sp>
+      <p:sp>
+        <p:nvSpPr>
+          <p:cNvPr id="3" name="TextBox 2"/>
+          <p:cNvSpPr txBox="1"/>
+          <p:nvPr/>
+        </p:nvSpPr>
+        <p:spPr>
+          <a:xfrm>
+            <a:off x="10491595" y="400000"/>
+            <a:ext cx="900000" cy="400000"/>
+          </a:xfrm>
+          <a:prstGeom prst="rect">
+            <a:avLst/>
+          </a:prstGeom>
+          <a:noFill/>
+        </p:spPr>
+        <p:txBody>
+          <a:bodyPr wrap="square" lIns="0" rIns="0" tIns="0" bIns="0">
+            <a:spAutoFit/>
+          </a:bodyPr>
+          <a:lstStyle/>
+          <a:p>
+            <a:pPr algn="r">
+              <a:spcAft>
+                <a:spcPts val="600"/>
+              </a:spcAft>
+            </a:pPr>
+            <a:r>
+              <a:rPr sz="1500" b="1">
+                <a:solidFill>
+                  <a:srgbClr val="E6E6EA"/>
+                </a:solidFill>
+                <a:latin typeface="Georgia"/>
+              </a:rPr>
+              <a:t>17</a:t>
+            </a:r>
+          </a:p>
+        </p:txBody>
+      </p:sp>
+      <p:sp>
+        <p:nvSpPr>
+          <p:cNvPr id="4" name="TextBox 3"/>
+          <p:cNvSpPr txBox="1"/>
+          <p:nvPr/>
+        </p:nvSpPr>
+        <p:spPr>
+          <a:xfrm>
+            <a:off x="800100" y="790000"/>
+            <a:ext cx="10591495" cy="620000"/>
+          </a:xfrm>
+          <a:prstGeom prst="rect">
+            <a:avLst/>
+          </a:prstGeom>
+          <a:noFill/>
+        </p:spPr>
+        <p:txBody>
+          <a:bodyPr wrap="square" lIns="0" rIns="0" tIns="0" bIns="0">
+            <a:spAutoFit/>
+          </a:bodyPr>
+          <a:lstStyle/>
+          <a:p>
+            <a:pPr algn="l">
+              <a:lnSpc>
+                <a:spcPct val="105000"/>
+              </a:lnSpc>
+              <a:spcAft>
+                <a:spcPts val="600"/>
+              </a:spcAft>
+            </a:pPr>
+            <a:r>
+              <a:rPr sz="2900" b="1">
+                <a:solidFill>
+                  <a:srgbClr val="16161A"/>
+                </a:solidFill>
+                <a:latin typeface="Georgia"/>
+              </a:rPr>
+              <a:t>Ba điểm cần lưu ý khi đọc kết quả</a:t>
+            </a:r>
+          </a:p>
+        </p:txBody>
+      </p:sp>
+      <p:sp>
+        <p:nvSpPr>
+          <p:cNvPr id="5" name="Rounded Rectangle 4"/>
+          <p:cNvSpPr/>
+          <p:nvPr/>
+        </p:nvSpPr>
+        <p:spPr>
+          <a:xfrm>
+            <a:off x="680100" y="2000000"/>
+            <a:ext cx="10831495" cy="1150000"/>
+          </a:xfrm>
+          <a:prstGeom prst="roundRect">
+            <a:avLst>
+              <a:gd name="adj" fmla="val 4000"/>
+            </a:avLst>
+          </a:prstGeom>
+          <a:solidFill>
+            <a:srgbClr val="F5F5F7"/>
+          </a:solidFill>
+          <a:ln>
+            <a:noFill/>
+          </a:ln>
+          <a:effectLst/>
+        </p:spPr>
+        <p:style>
+          <a:lnRef idx="1">
+            <a:schemeClr val="accent1"/>
+          </a:lnRef>
+          <a:fillRef idx="3">
+            <a:schemeClr val="accent1"/>
+          </a:fillRef>
+          <a:effectRef idx="2">
+            <a:schemeClr val="accent1"/>
+          </a:effectRef>
+          <a:fontRef idx="minor">
+            <a:schemeClr val="lt1"/>
+          </a:fontRef>
+        </p:style>
+        <p:txBody>
+          <a:bodyPr rtlCol="0" anchor="ctr"/>
+          <a:lstStyle/>
+          <a:p>
+            <a:pPr algn="ctr"/>
+          </a:p>
+        </p:txBody>
+      </p:sp>
+      <p:sp>
+        <p:nvSpPr>
+          <p:cNvPr id="6" name="TextBox 5"/>
+          <p:cNvSpPr txBox="1"/>
+          <p:nvPr/>
+        </p:nvSpPr>
+        <p:spPr>
+          <a:xfrm>
+            <a:off x="920100" y="2200000"/>
+            <a:ext cx="400000" cy="300000"/>
+          </a:xfrm>
+          <a:prstGeom prst="rect">
+            <a:avLst/>
+          </a:prstGeom>
+          <a:noFill/>
+        </p:spPr>
+        <p:txBody>
+          <a:bodyPr wrap="square" lIns="0" rIns="0" tIns="0" bIns="0">
+            <a:spAutoFit/>
+          </a:bodyPr>
+          <a:lstStyle/>
+          <a:p>
+            <a:pPr algn="l">
+              <a:spcAft>
+                <a:spcPts val="600"/>
+              </a:spcAft>
+            </a:pPr>
+            <a:r>
+              <a:rPr sz="1300" b="1">
+                <a:solidFill>
+                  <a:srgbClr val="9E2B34"/>
+                </a:solidFill>
+                <a:latin typeface="Georgia"/>
+              </a:rPr>
+              <a:t>01</a:t>
+            </a:r>
+          </a:p>
+        </p:txBody>
+      </p:sp>
+      <p:sp>
+        <p:nvSpPr>
+          <p:cNvPr id="7" name="TextBox 6"/>
+          <p:cNvSpPr txBox="1"/>
+          <p:nvPr/>
+        </p:nvSpPr>
+        <p:spPr>
+          <a:xfrm>
+            <a:off x="1500100" y="2190000"/>
+            <a:ext cx="9500000" cy="300000"/>
+          </a:xfrm>
+          <a:prstGeom prst="rect">
+            <a:avLst/>
+          </a:prstGeom>
+          <a:noFill/>
+        </p:spPr>
+        <p:txBody>
+          <a:bodyPr wrap="square" lIns="0" rIns="0" tIns="0" bIns="0">
+            <a:spAutoFit/>
+          </a:bodyPr>
+          <a:lstStyle/>
+          <a:p>
+            <a:pPr algn="l">
+              <a:spcAft>
+                <a:spcPts val="600"/>
+              </a:spcAft>
+            </a:pPr>
+            <a:r>
+              <a:rPr sz="1400" b="1">
+                <a:solidFill>
+                  <a:srgbClr val="16161A"/>
+                </a:solidFill>
+                <a:latin typeface="Helvetica Neue"/>
+              </a:rPr>
+              <a:t>Đề thi chỉ có 150 đề</a:t>
+            </a:r>
+          </a:p>
+        </p:txBody>
+      </p:sp>
+      <p:sp>
+        <p:nvSpPr>
+          <p:cNvPr id="8" name="TextBox 7"/>
+          <p:cNvSpPr txBox="1"/>
+          <p:nvPr/>
+        </p:nvSpPr>
+        <p:spPr>
+          <a:xfrm>
+            <a:off x="1500100" y="2600000"/>
+            <a:ext cx="9500000" cy="450000"/>
+          </a:xfrm>
+          <a:prstGeom prst="rect">
+            <a:avLst/>
+          </a:prstGeom>
+          <a:noFill/>
+        </p:spPr>
+        <p:txBody>
+          <a:bodyPr wrap="square" lIns="0" rIns="0" tIns="0" bIns="0">
+            <a:spAutoFit/>
+          </a:bodyPr>
+          <a:lstStyle/>
+          <a:p>
+            <a:pPr algn="l">
+              <a:lnSpc>
+                <a:spcPct val="130000"/>
+              </a:lnSpc>
+              <a:spcAft>
+                <a:spcPts val="600"/>
+              </a:spcAft>
+            </a:pPr>
+            <a:r>
+              <a:rPr sz="1200" b="0">
+                <a:solidFill>
+                  <a:srgbClr val="3F4149"/>
+                </a:solidFill>
+                <a:latin typeface="Helvetica Neue"/>
+              </a:rPr>
+              <a:t>Mỗi đề đáng 0,67 điểm. Chỉ đổi cách bốc đề thi thôi là điểm vòng 0 đã lệch 4,7 điểm, lớn hơn cả hiệu ứng đang đo.</a:t>
+            </a:r>
+          </a:p>
+        </p:txBody>
+      </p:sp>
+      <p:sp>
+        <p:nvSpPr>
+          <p:cNvPr id="9" name="Rounded Rectangle 8"/>
+          <p:cNvSpPr/>
+          <p:nvPr/>
+        </p:nvSpPr>
+        <p:spPr>
+          <a:xfrm>
+            <a:off x="680100" y="3330000"/>
+            <a:ext cx="10831495" cy="1150000"/>
+          </a:xfrm>
+          <a:prstGeom prst="roundRect">
+            <a:avLst>
+              <a:gd name="adj" fmla="val 4000"/>
+            </a:avLst>
+          </a:prstGeom>
+          <a:solidFill>
+            <a:srgbClr val="F5F5F7"/>
+          </a:solidFill>
+          <a:ln>
+            <a:noFill/>
+          </a:ln>
+          <a:effectLst/>
+        </p:spPr>
+        <p:style>
+          <a:lnRef idx="1">
+            <a:schemeClr val="accent1"/>
+          </a:lnRef>
+          <a:fillRef idx="3">
+            <a:schemeClr val="accent1"/>
+          </a:fillRef>
+          <a:effectRef idx="2">
+            <a:schemeClr val="accent1"/>
+          </a:effectRef>
+          <a:fontRef idx="minor">
+            <a:schemeClr val="lt1"/>
+          </a:fontRef>
+        </p:style>
+        <p:txBody>
+          <a:bodyPr rtlCol="0" anchor="ctr"/>
+          <a:lstStyle/>
+          <a:p>
+            <a:pPr algn="ctr"/>
+          </a:p>
+        </p:txBody>
+      </p:sp>
+      <p:sp>
+        <p:nvSpPr>
+          <p:cNvPr id="10" name="TextBox 9"/>
+          <p:cNvSpPr txBox="1"/>
+          <p:nvPr/>
+        </p:nvSpPr>
+        <p:spPr>
+          <a:xfrm>
+            <a:off x="920100" y="3530000"/>
+            <a:ext cx="400000" cy="300000"/>
+          </a:xfrm>
+          <a:prstGeom prst="rect">
+            <a:avLst/>
+          </a:prstGeom>
+          <a:noFill/>
+        </p:spPr>
+        <p:txBody>
+          <a:bodyPr wrap="square" lIns="0" rIns="0" tIns="0" bIns="0">
+            <a:spAutoFit/>
+          </a:bodyPr>
+          <a:lstStyle/>
+          <a:p>
+            <a:pPr algn="l">
+              <a:spcAft>
+                <a:spcPts val="600"/>
+              </a:spcAft>
+            </a:pPr>
+            <a:r>
+              <a:rPr sz="1300" b="1">
+                <a:solidFill>
+                  <a:srgbClr val="9E2B34"/>
+                </a:solidFill>
+                <a:latin typeface="Georgia"/>
+              </a:rPr>
+              <a:t>02</a:t>
+            </a:r>
+          </a:p>
+        </p:txBody>
+      </p:sp>
+      <p:sp>
+        <p:nvSpPr>
+          <p:cNvPr id="11" name="TextBox 10"/>
+          <p:cNvSpPr txBox="1"/>
+          <p:nvPr/>
+        </p:nvSpPr>
+        <p:spPr>
+          <a:xfrm>
+            <a:off x="1500100" y="3520000"/>
+            <a:ext cx="9500000" cy="300000"/>
+          </a:xfrm>
+          <a:prstGeom prst="rect">
+            <a:avLst/>
+          </a:prstGeom>
+          <a:noFill/>
+        </p:spPr>
+        <p:txBody>
+          <a:bodyPr wrap="square" lIns="0" rIns="0" tIns="0" bIns="0">
+            <a:spAutoFit/>
+          </a:bodyPr>
+          <a:lstStyle/>
+          <a:p>
+            <a:pPr algn="l">
+              <a:spcAft>
+                <a:spcPts val="600"/>
+              </a:spcAft>
+            </a:pPr>
+            <a:r>
+              <a:rPr sz="1400" b="1">
+                <a:solidFill>
+                  <a:srgbClr val="16161A"/>
+                </a:solidFill>
+                <a:latin typeface="Helvetica Neue"/>
+              </a:rPr>
+              <a:t>Mỗi cấu hình mới chạy 2 lần</a:t>
+            </a:r>
+          </a:p>
+        </p:txBody>
+      </p:sp>
+      <p:sp>
+        <p:nvSpPr>
+          <p:cNvPr id="12" name="TextBox 11"/>
+          <p:cNvSpPr txBox="1"/>
+          <p:nvPr/>
+        </p:nvSpPr>
+        <p:spPr>
+          <a:xfrm>
+            <a:off x="1500100" y="3930000"/>
+            <a:ext cx="9500000" cy="450000"/>
+          </a:xfrm>
+          <a:prstGeom prst="rect">
+            <a:avLst/>
+          </a:prstGeom>
+          <a:noFill/>
+        </p:spPr>
+        <p:txBody>
+          <a:bodyPr wrap="square" lIns="0" rIns="0" tIns="0" bIns="0">
+            <a:spAutoFit/>
+          </a:bodyPr>
+          <a:lstStyle/>
+          <a:p>
+            <a:pPr algn="l">
+              <a:lnSpc>
+                <a:spcPct val="130000"/>
+              </a:lnSpc>
+              <a:spcAft>
+                <a:spcPts val="600"/>
+              </a:spcAft>
+            </a:pPr>
+            <a:r>
+              <a:rPr sz="1200" b="0">
+                <a:solidFill>
+                  <a:srgbClr val="3F4149"/>
+                </a:solidFill>
+                <a:latin typeface="Helvetica Neue"/>
+              </a:rPr>
+              <a:t>Riêng lần chạy C và các lần chạy cũ mới có 1 lần. Chưa đủ cơ sở để khẳng định về cú tụt 12,7 điểm của GSM8K.</a:t>
+            </a:r>
+          </a:p>
+        </p:txBody>
+      </p:sp>
+      <p:sp>
+        <p:nvSpPr>
+          <p:cNvPr id="13" name="Rounded Rectangle 12"/>
+          <p:cNvSpPr/>
+          <p:nvPr/>
+        </p:nvSpPr>
+        <p:spPr>
+          <a:xfrm>
+            <a:off x="680100" y="4660000"/>
+            <a:ext cx="10831495" cy="1150000"/>
+          </a:xfrm>
+          <a:prstGeom prst="roundRect">
+            <a:avLst>
+              <a:gd name="adj" fmla="val 4000"/>
+            </a:avLst>
+          </a:prstGeom>
+          <a:solidFill>
+            <a:srgbClr val="F5F5F7"/>
+          </a:solidFill>
+          <a:ln>
+            <a:noFill/>
+          </a:ln>
+          <a:effectLst/>
+        </p:spPr>
+        <p:style>
+          <a:lnRef idx="1">
+            <a:schemeClr val="accent1"/>
+          </a:lnRef>
+          <a:fillRef idx="3">
+            <a:schemeClr val="accent1"/>
+          </a:fillRef>
+          <a:effectRef idx="2">
+            <a:schemeClr val="accent1"/>
+          </a:effectRef>
+          <a:fontRef idx="minor">
+            <a:schemeClr val="lt1"/>
+          </a:fontRef>
+        </p:style>
+        <p:txBody>
+          <a:bodyPr rtlCol="0" anchor="ctr"/>
+          <a:lstStyle/>
+          <a:p>
+            <a:pPr algn="ctr"/>
+          </a:p>
+        </p:txBody>
+      </p:sp>
+      <p:sp>
+        <p:nvSpPr>
+          <p:cNvPr id="14" name="TextBox 13"/>
+          <p:cNvSpPr txBox="1"/>
+          <p:nvPr/>
+        </p:nvSpPr>
+        <p:spPr>
+          <a:xfrm>
+            <a:off x="920100" y="4860000"/>
+            <a:ext cx="400000" cy="300000"/>
+          </a:xfrm>
+          <a:prstGeom prst="rect">
+            <a:avLst/>
+          </a:prstGeom>
+          <a:noFill/>
+        </p:spPr>
+        <p:txBody>
+          <a:bodyPr wrap="square" lIns="0" rIns="0" tIns="0" bIns="0">
+            <a:spAutoFit/>
+          </a:bodyPr>
+          <a:lstStyle/>
+          <a:p>
+            <a:pPr algn="l">
+              <a:spcAft>
+                <a:spcPts val="600"/>
+              </a:spcAft>
+            </a:pPr>
+            <a:r>
+              <a:rPr sz="1300" b="1">
+                <a:solidFill>
+                  <a:srgbClr val="9E2B34"/>
+                </a:solidFill>
+                <a:latin typeface="Georgia"/>
+              </a:rPr>
+              <a:t>03</a:t>
+            </a:r>
+          </a:p>
+        </p:txBody>
+      </p:sp>
+      <p:sp>
+        <p:nvSpPr>
+          <p:cNvPr id="15" name="TextBox 14"/>
+          <p:cNvSpPr txBox="1"/>
+          <p:nvPr/>
+        </p:nvSpPr>
+        <p:spPr>
+          <a:xfrm>
+            <a:off x="1500100" y="4850000"/>
+            <a:ext cx="9500000" cy="300000"/>
+          </a:xfrm>
+          <a:prstGeom prst="rect">
+            <a:avLst/>
+          </a:prstGeom>
+          <a:noFill/>
+        </p:spPr>
+        <p:txBody>
+          <a:bodyPr wrap="square" lIns="0" rIns="0" tIns="0" bIns="0">
+            <a:spAutoFit/>
+          </a:bodyPr>
+          <a:lstStyle/>
+          <a:p>
+            <a:pPr algn="l">
+              <a:spcAft>
+                <a:spcPts val="600"/>
+              </a:spcAft>
+            </a:pPr>
+            <a:r>
+              <a:rPr sz="1400" b="1">
+                <a:solidFill>
+                  <a:srgbClr val="16161A"/>
+                </a:solidFill>
+                <a:latin typeface="Helvetica Neue"/>
+              </a:rPr>
+              <a:t>Lần chạy mới khác lần cũ ba chỗ</a:t>
+            </a:r>
+          </a:p>
+        </p:txBody>
+      </p:sp>
       <p:sp>
         <p:nvSpPr>
           <p:cNvPr id="16" name="TextBox 15"/>
@@ -9930,33 +11017,36 @@
         </p:nvSpPr>
         <p:spPr>
           <a:xfrm>
-            <a:off x="800100" y="6100000"/>
-            <a:ext cx="10591495" cy="300000"/>
-          </a:xfrm>
-          <a:prstGeom prst="rect">
-            <a:avLst/>
-          </a:prstGeom>
-          <a:noFill/>
-        </p:spPr>
-        <p:txBody>
-          <a:bodyPr wrap="square" lIns="0" rIns="0" tIns="0" bIns="0">
-            <a:spAutoFit/>
-          </a:bodyPr>
-          <a:lstStyle/>
-          <a:p>
-            <a:pPr algn="l">
-              <a:spcAft>
-                <a:spcPts val="600"/>
-              </a:spcAft>
-            </a:pPr>
-            <a:r>
-              <a:rPr sz="1250" b="0">
-                <a:solidFill>
-                  <a:srgbClr val="8A8D96"/>
-                </a:solidFill>
-                <a:latin typeface="Helvetica Neue"/>
-              </a:rPr>
-              <a:t>Cảm ơn đã theo dõi. Rất mong nhận được góp ý.</a:t>
+            <a:off x="1500100" y="5260000"/>
+            <a:ext cx="9500000" cy="450000"/>
+          </a:xfrm>
+          <a:prstGeom prst="rect">
+            <a:avLst/>
+          </a:prstGeom>
+          <a:noFill/>
+        </p:spPr>
+        <p:txBody>
+          <a:bodyPr wrap="square" lIns="0" rIns="0" tIns="0" bIns="0">
+            <a:spAutoFit/>
+          </a:bodyPr>
+          <a:lstStyle/>
+          <a:p>
+            <a:pPr algn="l">
+              <a:lnSpc>
+                <a:spcPct val="130000"/>
+              </a:lnSpc>
+              <a:spcAft>
+                <a:spcPts val="600"/>
+              </a:spcAft>
+            </a:pPr>
+            <a:r>
+              <a:rPr sz="1200" b="0">
+                <a:solidFill>
+                  <a:srgbClr val="3F4149"/>
+                </a:solidFill>
+                <a:latin typeface="Helvetica Neue"/>
+              </a:rPr>
+              <a:t>Bỏ gộp bộ đề, thêm đề thi riêng, giảm số đề. Nên kết luận chỉ dựa trên so sánh A với B, vì hai lần chạy đó chỉ khác nhau đúng một biến.</a:t>
             </a:r>
           </a:p>
         </p:txBody>
@@ -10972,6 +12062,656 @@
                 <a:latin typeface="Helvetica Neue"/>
               </a:rPr>
               <a:t>hướng nghiên cứu sau khi điều chỉnh</a:t>
+            </a:r>
+          </a:p>
+        </p:txBody>
+      </p:sp>
+    </p:spTree>
+  </p:cSld>
+  <p:clrMapOvr>
+    <a:masterClrMapping/>
+  </p:clrMapOvr>
+</p:sld>
+</file>
+
+<file path=ppt/slides/slide20.xml><?xml version="1.0" encoding="utf-8"?>
+<p:sld xmlns:a="http://schemas.openxmlformats.org/drawingml/2006/main" xmlns:p="http://schemas.openxmlformats.org/presentationml/2006/main" xmlns:r="http://schemas.openxmlformats.org/officeDocument/2006/relationships">
+  <p:cSld>
+    <p:spTree>
+      <p:nvGrpSpPr>
+        <p:cNvPr id="1" name=""/>
+        <p:cNvGrpSpPr/>
+        <p:nvPr/>
+      </p:nvGrpSpPr>
+      <p:grpSpPr/>
+      <p:sp>
+        <p:nvSpPr>
+          <p:cNvPr id="2" name="TextBox 1"/>
+          <p:cNvSpPr txBox="1"/>
+          <p:nvPr/>
+        </p:nvSpPr>
+        <p:spPr>
+          <a:xfrm>
+            <a:off x="800100" y="430000"/>
+            <a:ext cx="7000000" cy="250000"/>
+          </a:xfrm>
+          <a:prstGeom prst="rect">
+            <a:avLst/>
+          </a:prstGeom>
+          <a:noFill/>
+        </p:spPr>
+        <p:txBody>
+          <a:bodyPr wrap="square" lIns="0" rIns="0" tIns="0" bIns="0">
+            <a:spAutoFit/>
+          </a:bodyPr>
+          <a:lstStyle/>
+          <a:p>
+            <a:pPr algn="l">
+              <a:spcAft>
+                <a:spcPts val="600"/>
+              </a:spcAft>
+            </a:pPr>
+            <a:r>
+              <a:rPr sz="1050" b="1">
+                <a:solidFill>
+                  <a:srgbClr val="9E2B34"/>
+                </a:solidFill>
+                <a:latin typeface="Helvetica Neue"/>
+              </a:rPr>
+              <a:t>TÓM TẮT</a:t>
+            </a:r>
+          </a:p>
+        </p:txBody>
+      </p:sp>
+      <p:sp>
+        <p:nvSpPr>
+          <p:cNvPr id="3" name="TextBox 2"/>
+          <p:cNvSpPr txBox="1"/>
+          <p:nvPr/>
+        </p:nvSpPr>
+        <p:spPr>
+          <a:xfrm>
+            <a:off x="10491595" y="400000"/>
+            <a:ext cx="900000" cy="400000"/>
+          </a:xfrm>
+          <a:prstGeom prst="rect">
+            <a:avLst/>
+          </a:prstGeom>
+          <a:noFill/>
+        </p:spPr>
+        <p:txBody>
+          <a:bodyPr wrap="square" lIns="0" rIns="0" tIns="0" bIns="0">
+            <a:spAutoFit/>
+          </a:bodyPr>
+          <a:lstStyle/>
+          <a:p>
+            <a:pPr algn="r">
+              <a:spcAft>
+                <a:spcPts val="600"/>
+              </a:spcAft>
+            </a:pPr>
+            <a:r>
+              <a:rPr sz="1500" b="1">
+                <a:solidFill>
+                  <a:srgbClr val="E6E6EA"/>
+                </a:solidFill>
+                <a:latin typeface="Georgia"/>
+              </a:rPr>
+              <a:t>18</a:t>
+            </a:r>
+          </a:p>
+        </p:txBody>
+      </p:sp>
+      <p:sp>
+        <p:nvSpPr>
+          <p:cNvPr id="4" name="TextBox 3"/>
+          <p:cNvSpPr txBox="1"/>
+          <p:nvPr/>
+        </p:nvSpPr>
+        <p:spPr>
+          <a:xfrm>
+            <a:off x="800100" y="790000"/>
+            <a:ext cx="10591495" cy="620000"/>
+          </a:xfrm>
+          <a:prstGeom prst="rect">
+            <a:avLst/>
+          </a:prstGeom>
+          <a:noFill/>
+        </p:spPr>
+        <p:txBody>
+          <a:bodyPr wrap="square" lIns="0" rIns="0" tIns="0" bIns="0">
+            <a:spAutoFit/>
+          </a:bodyPr>
+          <a:lstStyle/>
+          <a:p>
+            <a:pPr algn="l">
+              <a:lnSpc>
+                <a:spcPct val="105000"/>
+              </a:lnSpc>
+              <a:spcAft>
+                <a:spcPts val="600"/>
+              </a:spcAft>
+            </a:pPr>
+            <a:r>
+              <a:rPr sz="2900" b="1">
+                <a:solidFill>
+                  <a:srgbClr val="16161A"/>
+                </a:solidFill>
+                <a:latin typeface="Georgia"/>
+              </a:rPr>
+              <a:t>Kết quả ba tuần và hướng tiếp theo</a:t>
+            </a:r>
+          </a:p>
+        </p:txBody>
+      </p:sp>
+      <p:sp>
+        <p:nvSpPr>
+          <p:cNvPr id="5" name="Rounded Rectangle 4"/>
+          <p:cNvSpPr/>
+          <p:nvPr/>
+        </p:nvSpPr>
+        <p:spPr>
+          <a:xfrm>
+            <a:off x="680100" y="1900000"/>
+            <a:ext cx="10831495" cy="1460000"/>
+          </a:xfrm>
+          <a:prstGeom prst="roundRect">
+            <a:avLst>
+              <a:gd name="adj" fmla="val 4000"/>
+            </a:avLst>
+          </a:prstGeom>
+          <a:solidFill>
+            <a:srgbClr val="F0F6FA"/>
+          </a:solidFill>
+          <a:ln>
+            <a:noFill/>
+          </a:ln>
+          <a:effectLst/>
+        </p:spPr>
+        <p:style>
+          <a:lnRef idx="1">
+            <a:schemeClr val="accent1"/>
+          </a:lnRef>
+          <a:fillRef idx="3">
+            <a:schemeClr val="accent1"/>
+          </a:fillRef>
+          <a:effectRef idx="2">
+            <a:schemeClr val="accent1"/>
+          </a:effectRef>
+          <a:fontRef idx="minor">
+            <a:schemeClr val="lt1"/>
+          </a:fontRef>
+        </p:style>
+        <p:txBody>
+          <a:bodyPr rtlCol="0" anchor="ctr"/>
+          <a:lstStyle/>
+          <a:p>
+            <a:pPr algn="ctr"/>
+          </a:p>
+        </p:txBody>
+      </p:sp>
+      <p:sp>
+        <p:nvSpPr>
+          <p:cNvPr id="6" name="TextBox 5"/>
+          <p:cNvSpPr txBox="1"/>
+          <p:nvPr/>
+        </p:nvSpPr>
+        <p:spPr>
+          <a:xfrm>
+            <a:off x="920100" y="2100000"/>
+            <a:ext cx="10351495" cy="1100000"/>
+          </a:xfrm>
+          <a:prstGeom prst="rect">
+            <a:avLst/>
+          </a:prstGeom>
+          <a:noFill/>
+        </p:spPr>
+        <p:txBody>
+          <a:bodyPr wrap="square" lIns="0" rIns="0" tIns="0" bIns="0">
+            <a:spAutoFit/>
+          </a:bodyPr>
+          <a:lstStyle/>
+          <a:p>
+            <a:pPr algn="l">
+              <a:lnSpc>
+                <a:spcPct val="140000"/>
+              </a:lnSpc>
+              <a:spcAft>
+                <a:spcPts val="600"/>
+              </a:spcAft>
+            </a:pPr>
+            <a:r>
+              <a:rPr sz="1400" b="0">
+                <a:solidFill>
+                  <a:srgbClr val="16161A"/>
+                </a:solidFill>
+                <a:latin typeface="Georgia"/>
+              </a:rPr>
+              <a:t>Thí nghiệm đối chứng cho thấy giả thuyết ban đầu không đúng. Nguyên nhân đã xác định được:</a:t>
+            </a:r>
+          </a:p>
+          <a:p>
+            <a:pPr algn="l">
+              <a:lnSpc>
+                <a:spcPct val="140000"/>
+              </a:lnSpc>
+              <a:spcAft>
+                <a:spcPts val="600"/>
+              </a:spcAft>
+            </a:pPr>
+            <a:r>
+              <a:rPr sz="1400" b="0">
+                <a:solidFill>
+                  <a:srgbClr val="16161A"/>
+                </a:solidFill>
+                <a:latin typeface="Georgia"/>
+              </a:rPr>
+              <a:t>lỗi của máy chấm tuy nặng nhưng chỉ xảy ra ở 0,55% số bài.</a:t>
+            </a:r>
+          </a:p>
+          <a:p>
+            <a:pPr algn="l">
+              <a:lnSpc>
+                <a:spcPct val="140000"/>
+              </a:lnSpc>
+              <a:spcAft>
+                <a:spcPts val="600"/>
+              </a:spcAft>
+            </a:pPr>
+            <a:r>
+              <a:rPr sz="1400" b="0">
+                <a:solidFill>
+                  <a:srgbClr val="16161A"/>
+                </a:solidFill>
+                <a:latin typeface="Georgia"/>
+              </a:rPr>
+              <a:t>Đề tài chuyển sang cảnh báo về thiết kế đo — hẹp hơn, nhưng có cơ sở vững.</a:t>
+            </a:r>
+          </a:p>
+        </p:txBody>
+      </p:sp>
+      <p:sp>
+        <p:nvSpPr>
+          <p:cNvPr id="7" name="TextBox 6"/>
+          <p:cNvSpPr txBox="1"/>
+          <p:nvPr/>
+        </p:nvSpPr>
+        <p:spPr>
+          <a:xfrm>
+            <a:off x="800100" y="3560000"/>
+            <a:ext cx="1700000" cy="300000"/>
+          </a:xfrm>
+          <a:prstGeom prst="rect">
+            <a:avLst/>
+          </a:prstGeom>
+          <a:noFill/>
+        </p:spPr>
+        <p:txBody>
+          <a:bodyPr wrap="square" lIns="0" rIns="0" tIns="0" bIns="0">
+            <a:spAutoFit/>
+          </a:bodyPr>
+          <a:lstStyle/>
+          <a:p>
+            <a:pPr algn="l">
+              <a:spcAft>
+                <a:spcPts val="600"/>
+              </a:spcAft>
+            </a:pPr>
+            <a:r>
+              <a:rPr sz="1100" b="1">
+                <a:solidFill>
+                  <a:srgbClr val="9E2B34"/>
+                </a:solidFill>
+                <a:latin typeface="Helvetica Neue"/>
+              </a:rPr>
+              <a:t>ĐÃ LÀM</a:t>
+            </a:r>
+          </a:p>
+        </p:txBody>
+      </p:sp>
+      <p:sp>
+        <p:nvSpPr>
+          <p:cNvPr id="8" name="TextBox 7"/>
+          <p:cNvSpPr txBox="1"/>
+          <p:nvPr/>
+        </p:nvSpPr>
+        <p:spPr>
+          <a:xfrm>
+            <a:off x="2600100" y="3545000"/>
+            <a:ext cx="8700000" cy="330000"/>
+          </a:xfrm>
+          <a:prstGeom prst="rect">
+            <a:avLst/>
+          </a:prstGeom>
+          <a:noFill/>
+        </p:spPr>
+        <p:txBody>
+          <a:bodyPr wrap="square" lIns="0" rIns="0" tIns="0" bIns="0">
+            <a:spAutoFit/>
+          </a:bodyPr>
+          <a:lstStyle/>
+          <a:p>
+            <a:pPr algn="l">
+              <a:spcAft>
+                <a:spcPts val="600"/>
+              </a:spcAft>
+            </a:pPr>
+            <a:r>
+              <a:rPr sz="1250" b="0">
+                <a:solidFill>
+                  <a:srgbClr val="3F4149"/>
+                </a:solidFill>
+                <a:latin typeface="Helvetica Neue"/>
+              </a:rPr>
+              <a:t>7 lần chạy, khoảng 40 giờ GPU. Phát hiện 2 lỗi độc lập trong máy chấm, cả hai đã vá và có test.</a:t>
+            </a:r>
+          </a:p>
+        </p:txBody>
+      </p:sp>
+      <p:sp>
+        <p:nvSpPr>
+          <p:cNvPr id="9" name="TextBox 8"/>
+          <p:cNvSpPr txBox="1"/>
+          <p:nvPr/>
+        </p:nvSpPr>
+        <p:spPr>
+          <a:xfrm>
+            <a:off x="800100" y="4130000"/>
+            <a:ext cx="1700000" cy="300000"/>
+          </a:xfrm>
+          <a:prstGeom prst="rect">
+            <a:avLst/>
+          </a:prstGeom>
+          <a:noFill/>
+        </p:spPr>
+        <p:txBody>
+          <a:bodyPr wrap="square" lIns="0" rIns="0" tIns="0" bIns="0">
+            <a:spAutoFit/>
+          </a:bodyPr>
+          <a:lstStyle/>
+          <a:p>
+            <a:pPr algn="l">
+              <a:spcAft>
+                <a:spcPts val="600"/>
+              </a:spcAft>
+            </a:pPr>
+            <a:r>
+              <a:rPr sz="1100" b="1">
+                <a:solidFill>
+                  <a:srgbClr val="9E2B34"/>
+                </a:solidFill>
+                <a:latin typeface="Helvetica Neue"/>
+              </a:rPr>
+              <a:t>KẾT QUẢ</a:t>
+            </a:r>
+          </a:p>
+        </p:txBody>
+      </p:sp>
+      <p:sp>
+        <p:nvSpPr>
+          <p:cNvPr id="10" name="TextBox 9"/>
+          <p:cNvSpPr txBox="1"/>
+          <p:nvPr/>
+        </p:nvSpPr>
+        <p:spPr>
+          <a:xfrm>
+            <a:off x="2600100" y="4115000"/>
+            <a:ext cx="8700000" cy="330000"/>
+          </a:xfrm>
+          <a:prstGeom prst="rect">
+            <a:avLst/>
+          </a:prstGeom>
+          <a:noFill/>
+        </p:spPr>
+        <p:txBody>
+          <a:bodyPr wrap="square" lIns="0" rIns="0" tIns="0" bIns="0">
+            <a:spAutoFit/>
+          </a:bodyPr>
+          <a:lstStyle/>
+          <a:p>
+            <a:pPr algn="l">
+              <a:spcAft>
+                <a:spcPts val="600"/>
+              </a:spcAft>
+            </a:pPr>
+            <a:r>
+              <a:rPr sz="1250" b="0">
+                <a:solidFill>
+                  <a:srgbClr val="3F4149"/>
+                </a:solidFill>
+                <a:latin typeface="Helvetica Neue"/>
+              </a:rPr>
+              <a:t>Giả thuyết ban đầu không đúng, và đo được nguyên nhân vì sao.</a:t>
+            </a:r>
+          </a:p>
+        </p:txBody>
+      </p:sp>
+      <p:sp>
+        <p:nvSpPr>
+          <p:cNvPr id="11" name="TextBox 10"/>
+          <p:cNvSpPr txBox="1"/>
+          <p:nvPr/>
+        </p:nvSpPr>
+        <p:spPr>
+          <a:xfrm>
+            <a:off x="800100" y="4700000"/>
+            <a:ext cx="1700000" cy="300000"/>
+          </a:xfrm>
+          <a:prstGeom prst="rect">
+            <a:avLst/>
+          </a:prstGeom>
+          <a:noFill/>
+        </p:spPr>
+        <p:txBody>
+          <a:bodyPr wrap="square" lIns="0" rIns="0" tIns="0" bIns="0">
+            <a:spAutoFit/>
+          </a:bodyPr>
+          <a:lstStyle/>
+          <a:p>
+            <a:pPr algn="l">
+              <a:spcAft>
+                <a:spcPts val="600"/>
+              </a:spcAft>
+            </a:pPr>
+            <a:r>
+              <a:rPr sz="1100" b="1">
+                <a:solidFill>
+                  <a:srgbClr val="9E2B34"/>
+                </a:solidFill>
+                <a:latin typeface="Helvetica Neue"/>
+              </a:rPr>
+              <a:t>CHỜ GPU</a:t>
+            </a:r>
+          </a:p>
+        </p:txBody>
+      </p:sp>
+      <p:sp>
+        <p:nvSpPr>
+          <p:cNvPr id="12" name="TextBox 11"/>
+          <p:cNvSpPr txBox="1"/>
+          <p:nvPr/>
+        </p:nvSpPr>
+        <p:spPr>
+          <a:xfrm>
+            <a:off x="2600100" y="4685000"/>
+            <a:ext cx="8700000" cy="330000"/>
+          </a:xfrm>
+          <a:prstGeom prst="rect">
+            <a:avLst/>
+          </a:prstGeom>
+          <a:noFill/>
+        </p:spPr>
+        <p:txBody>
+          <a:bodyPr wrap="square" lIns="0" rIns="0" tIns="0" bIns="0">
+            <a:spAutoFit/>
+          </a:bodyPr>
+          <a:lstStyle/>
+          <a:p>
+            <a:pPr algn="l">
+              <a:spcAft>
+                <a:spcPts val="600"/>
+              </a:spcAft>
+            </a:pPr>
+            <a:r>
+              <a:rPr sz="1250" b="0">
+                <a:solidFill>
+                  <a:srgbClr val="3F4149"/>
+                </a:solidFill>
+                <a:latin typeface="Helvetica Neue"/>
+              </a:rPr>
+              <a:t>3 lượt đang xếp hàng: seed thứ hai GSM8K, ablation không lọc, Run D cho bug \boxed.</a:t>
+            </a:r>
+          </a:p>
+        </p:txBody>
+      </p:sp>
+      <p:sp>
+        <p:nvSpPr>
+          <p:cNvPr id="13" name="TextBox 12"/>
+          <p:cNvSpPr txBox="1"/>
+          <p:nvPr/>
+        </p:nvSpPr>
+        <p:spPr>
+          <a:xfrm>
+            <a:off x="800100" y="5270000"/>
+            <a:ext cx="1700000" cy="300000"/>
+          </a:xfrm>
+          <a:prstGeom prst="rect">
+            <a:avLst/>
+          </a:prstGeom>
+          <a:noFill/>
+        </p:spPr>
+        <p:txBody>
+          <a:bodyPr wrap="square" lIns="0" rIns="0" tIns="0" bIns="0">
+            <a:spAutoFit/>
+          </a:bodyPr>
+          <a:lstStyle/>
+          <a:p>
+            <a:pPr algn="l">
+              <a:spcAft>
+                <a:spcPts val="600"/>
+              </a:spcAft>
+            </a:pPr>
+            <a:r>
+              <a:rPr sz="1100" b="1">
+                <a:solidFill>
+                  <a:srgbClr val="9E2B34"/>
+                </a:solidFill>
+                <a:latin typeface="Helvetica Neue"/>
+              </a:rPr>
+              <a:t>SẮP TỚI</a:t>
+            </a:r>
+          </a:p>
+        </p:txBody>
+      </p:sp>
+      <p:sp>
+        <p:nvSpPr>
+          <p:cNvPr id="14" name="TextBox 13"/>
+          <p:cNvSpPr txBox="1"/>
+          <p:nvPr/>
+        </p:nvSpPr>
+        <p:spPr>
+          <a:xfrm>
+            <a:off x="2600100" y="5255000"/>
+            <a:ext cx="8700000" cy="330000"/>
+          </a:xfrm>
+          <a:prstGeom prst="rect">
+            <a:avLst/>
+          </a:prstGeom>
+          <a:noFill/>
+        </p:spPr>
+        <p:txBody>
+          <a:bodyPr wrap="square" lIns="0" rIns="0" tIns="0" bIns="0">
+            <a:spAutoFit/>
+          </a:bodyPr>
+          <a:lstStyle/>
+          <a:p>
+            <a:pPr algn="l">
+              <a:spcAft>
+                <a:spcPts val="600"/>
+              </a:spcAft>
+            </a:pPr>
+            <a:r>
+              <a:rPr sz="1250" b="0">
+                <a:solidFill>
+                  <a:srgbClr val="3F4149"/>
+                </a:solidFill>
+                <a:latin typeface="Helvetica Neue"/>
+              </a:rPr>
+              <a:t>Có đủ số liệu Run D thì viết lại bài báo theo kết luận mới.</a:t>
+            </a:r>
+          </a:p>
+        </p:txBody>
+      </p:sp>
+      <p:cxnSp>
+        <p:nvCxnSpPr>
+          <p:cNvPr id="15" name="Connector 14"/>
+          <p:cNvCxnSpPr/>
+          <p:nvPr/>
+        </p:nvCxnSpPr>
+        <p:spPr>
+          <a:xfrm>
+            <a:off x="800100" y="5900000"/>
+            <a:ext cx="10591495" cy="0"/>
+          </a:xfrm>
+          <a:prstGeom prst="line">
+            <a:avLst/>
+          </a:prstGeom>
+          <a:ln w="9525">
+            <a:solidFill>
+              <a:srgbClr val="E6E6EA"/>
+            </a:solidFill>
+          </a:ln>
+        </p:spPr>
+        <p:style>
+          <a:lnRef idx="2">
+            <a:schemeClr val="accent1"/>
+          </a:lnRef>
+          <a:fillRef idx="0">
+            <a:schemeClr val="accent1"/>
+          </a:fillRef>
+          <a:effectRef idx="1">
+            <a:schemeClr val="accent1"/>
+          </a:effectRef>
+          <a:fontRef idx="minor">
+            <a:schemeClr val="tx1"/>
+          </a:fontRef>
+        </p:style>
+      </p:cxnSp>
+      <p:sp>
+        <p:nvSpPr>
+          <p:cNvPr id="16" name="TextBox 15"/>
+          <p:cNvSpPr txBox="1"/>
+          <p:nvPr/>
+        </p:nvSpPr>
+        <p:spPr>
+          <a:xfrm>
+            <a:off x="800100" y="6100000"/>
+            <a:ext cx="10591495" cy="300000"/>
+          </a:xfrm>
+          <a:prstGeom prst="rect">
+            <a:avLst/>
+          </a:prstGeom>
+          <a:noFill/>
+        </p:spPr>
+        <p:txBody>
+          <a:bodyPr wrap="square" lIns="0" rIns="0" tIns="0" bIns="0">
+            <a:spAutoFit/>
+          </a:bodyPr>
+          <a:lstStyle/>
+          <a:p>
+            <a:pPr algn="l">
+              <a:spcAft>
+                <a:spcPts val="600"/>
+              </a:spcAft>
+            </a:pPr>
+            <a:r>
+              <a:rPr sz="1250" b="0">
+                <a:solidFill>
+                  <a:srgbClr val="8A8D96"/>
+                </a:solidFill>
+                <a:latin typeface="Helvetica Neue"/>
+              </a:rPr>
+              <a:t>Cảm ơn đã theo dõi. Rất mong nhận được góp ý.</a:t>
             </a:r>
           </a:p>
         </p:txBody>

--- a/BaoCaoTienDo_Tuan1-3_52300057_52300006.pptx
+++ b/BaoCaoTienDo_Tuan1-3_52300057_52300006.pptx
@@ -3422,7 +3422,7 @@
                 </a:solidFill>
                 <a:latin typeface="Helvetica Neue"/>
               </a:rPr>
-              <a:t>12 tháng 9, 2026</a:t>
+              <a:t>13 tháng 9, 2026</a:t>
             </a:r>
           </a:p>
         </p:txBody>

--- a/BaoCaoTienDo_Tuan1-3_52300057_52300006.pptx
+++ b/BaoCaoTienDo_Tuan1-3_52300057_52300006.pptx
@@ -24,7 +24,6 @@
     <p:sldId id="272" r:id="rId23"/>
     <p:sldId id="273" r:id="rId24"/>
     <p:sldId id="274" r:id="rId25"/>
-    <p:sldId id="275" r:id="rId26"/>
   </p:sldIdLst>
   <p:sldSz cx="12191695" cy="6858000" type="screen4x3"/>
   <p:notesSz cx="6858000" cy="9144000"/>
@@ -5319,7 +5318,7 @@
                 </a:solidFill>
                 <a:latin typeface="Helvetica Neue"/>
               </a:rPr>
-              <a:t>BÀI HỌC RÚT RA</a:t>
+              <a:t>HƯỚNG TIẾP THEO</a:t>
             </a:r>
           </a:p>
         </p:txBody>
@@ -5400,7 +5399,7 @@
                 </a:solidFill>
                 <a:latin typeface="Georgia"/>
               </a:rPr>
-              <a:t>Lần vừa rồi chọn nhầm chỗ để tìm hiệu ứng</a:t>
+              <a:t>Lỗi phải xảy ra nhiều tới mức nào mới gây hại?</a:t>
             </a:r>
           </a:p>
         </p:txBody>
@@ -5414,202 +5413,68 @@
         <p:spPr>
           <a:xfrm>
             <a:off x="800100" y="1600000"/>
-            <a:ext cx="10591495" cy="330000"/>
-          </a:xfrm>
-          <a:prstGeom prst="rect">
-            <a:avLst/>
-          </a:prstGeom>
-          <a:noFill/>
-        </p:spPr>
-        <p:txBody>
-          <a:bodyPr wrap="square" lIns="0" rIns="0" tIns="0" bIns="0">
-            <a:spAutoFit/>
-          </a:bodyPr>
-          <a:lstStyle/>
-          <a:p>
-            <a:pPr algn="l">
-              <a:spcAft>
-                <a:spcPts val="600"/>
-              </a:spcAft>
-            </a:pPr>
-            <a:r>
-              <a:rPr sz="1250" b="0">
+            <a:ext cx="10591495" cy="500000"/>
+          </a:xfrm>
+          <a:prstGeom prst="rect">
+            <a:avLst/>
+          </a:prstGeom>
+          <a:noFill/>
+        </p:spPr>
+        <p:txBody>
+          <a:bodyPr wrap="square" lIns="0" rIns="0" tIns="0" bIns="0">
+            <a:spAutoFit/>
+          </a:bodyPr>
+          <a:lstStyle/>
+          <a:p>
+            <a:pPr algn="l">
+              <a:lnSpc>
+                <a:spcPct val="145000"/>
+              </a:lnSpc>
+              <a:spcAft>
+                <a:spcPts val="600"/>
+              </a:spcAft>
+            </a:pPr>
+            <a:r>
+              <a:rPr sz="1350" b="0">
                 <a:solidFill>
                   <a:srgbClr val="3F4149"/>
                 </a:solidFill>
                 <a:latin typeface="Helvetica Neue"/>
               </a:rPr>
-              <a:t>Cả hai con số dưới đây đều là số đã đo của đề tài, không phải ước lượng.</a:t>
-            </a:r>
-          </a:p>
-        </p:txBody>
-      </p:sp>
-      <p:sp>
-        <p:nvSpPr>
-          <p:cNvPr id="6" name="TextBox 5"/>
-          <p:cNvSpPr txBox="1"/>
-          <p:nvPr/>
-        </p:nvSpPr>
-        <p:spPr>
-          <a:xfrm>
-            <a:off x="800100" y="2050000"/>
-            <a:ext cx="3000000" cy="300000"/>
-          </a:xfrm>
-          <a:prstGeom prst="rect">
-            <a:avLst/>
-          </a:prstGeom>
-          <a:noFill/>
-        </p:spPr>
-        <p:txBody>
-          <a:bodyPr wrap="square" lIns="0" rIns="0" tIns="0" bIns="0">
-            <a:spAutoFit/>
-          </a:bodyPr>
-          <a:lstStyle/>
-          <a:p>
-            <a:pPr algn="l">
-              <a:spcAft>
-                <a:spcPts val="600"/>
-              </a:spcAft>
-            </a:pPr>
-            <a:r>
-              <a:rPr sz="1100" b="1">
-                <a:solidFill>
-                  <a:srgbClr val="8A8D96"/>
-                </a:solidFill>
-                <a:latin typeface="Helvetica Neue"/>
-              </a:rPr>
-              <a:t>CÁCH VIẾT ĐÁP ÁN</a:t>
-            </a:r>
-          </a:p>
-        </p:txBody>
-      </p:sp>
-      <p:sp>
-        <p:nvSpPr>
-          <p:cNvPr id="7" name="TextBox 6"/>
-          <p:cNvSpPr txBox="1"/>
-          <p:nvPr/>
-        </p:nvSpPr>
-        <p:spPr>
-          <a:xfrm>
-            <a:off x="4000100" y="2050000"/>
-            <a:ext cx="2500000" cy="300000"/>
-          </a:xfrm>
-          <a:prstGeom prst="rect">
-            <a:avLst/>
-          </a:prstGeom>
-          <a:noFill/>
-        </p:spPr>
-        <p:txBody>
-          <a:bodyPr wrap="square" lIns="0" rIns="0" tIns="0" bIns="0">
-            <a:spAutoFit/>
-          </a:bodyPr>
-          <a:lstStyle/>
-          <a:p>
-            <a:pPr algn="l">
-              <a:spcAft>
-                <a:spcPts val="600"/>
-              </a:spcAft>
-            </a:pPr>
-            <a:r>
-              <a:rPr sz="1100" b="1">
-                <a:solidFill>
-                  <a:srgbClr val="8A8D96"/>
-                </a:solidFill>
-                <a:latin typeface="Helvetica Neue"/>
-              </a:rPr>
-              <a:t>MODEL DÙNG BAO NHIÊU</a:t>
-            </a:r>
-          </a:p>
-        </p:txBody>
-      </p:sp>
-      <p:sp>
-        <p:nvSpPr>
-          <p:cNvPr id="8" name="TextBox 7"/>
-          <p:cNvSpPr txBox="1"/>
-          <p:nvPr/>
-        </p:nvSpPr>
-        <p:spPr>
-          <a:xfrm>
-            <a:off x="6500100" y="2050000"/>
-            <a:ext cx="2400000" cy="300000"/>
-          </a:xfrm>
-          <a:prstGeom prst="rect">
-            <a:avLst/>
-          </a:prstGeom>
-          <a:noFill/>
-        </p:spPr>
-        <p:txBody>
-          <a:bodyPr wrap="square" lIns="0" rIns="0" tIns="0" bIns="0">
-            <a:spAutoFit/>
-          </a:bodyPr>
-          <a:lstStyle/>
-          <a:p>
-            <a:pPr algn="l">
-              <a:spcAft>
-                <a:spcPts val="600"/>
-              </a:spcAft>
-            </a:pPr>
-            <a:r>
-              <a:rPr sz="1100" b="1">
-                <a:solidFill>
-                  <a:srgbClr val="8A8D96"/>
-                </a:solidFill>
-                <a:latin typeface="Helvetica Neue"/>
-              </a:rPr>
-              <a:t>MÁY CHẤM GẠCH</a:t>
-            </a:r>
-          </a:p>
-        </p:txBody>
-      </p:sp>
-      <p:sp>
-        <p:nvSpPr>
-          <p:cNvPr id="9" name="TextBox 8"/>
-          <p:cNvSpPr txBox="1"/>
-          <p:nvPr/>
-        </p:nvSpPr>
-        <p:spPr>
-          <a:xfrm>
-            <a:off x="8900100" y="2050000"/>
-            <a:ext cx="2400000" cy="300000"/>
-          </a:xfrm>
-          <a:prstGeom prst="rect">
-            <a:avLst/>
-          </a:prstGeom>
-          <a:noFill/>
-        </p:spPr>
-        <p:txBody>
-          <a:bodyPr wrap="square" lIns="0" rIns="0" tIns="0" bIns="0">
-            <a:spAutoFit/>
-          </a:bodyPr>
-          <a:lstStyle/>
-          <a:p>
-            <a:pPr algn="l">
-              <a:spcAft>
-                <a:spcPts val="600"/>
-              </a:spcAft>
-            </a:pPr>
-            <a:r>
-              <a:rPr sz="1100" b="1">
-                <a:solidFill>
-                  <a:srgbClr val="8A8D96"/>
-                </a:solidFill>
-                <a:latin typeface="Helvetica Neue"/>
-              </a:rPr>
-              <a:t>THIỆT HẠI THỰC TẾ</a:t>
-            </a:r>
-          </a:p>
-        </p:txBody>
-      </p:sp>
-      <p:sp>
-        <p:nvSpPr>
-          <p:cNvPr id="10" name="Rounded Rectangle 9"/>
+              <a:t>Bài học từ ba tuần: một lỗi máy chấm nặng tới đâu cũng chỉ hại đúng bằng số lần nó xảy ra.</a:t>
+            </a:r>
+          </a:p>
+          <a:p>
+            <a:pPr algn="l">
+              <a:lnSpc>
+                <a:spcPct val="145000"/>
+              </a:lnSpc>
+              <a:spcAft>
+                <a:spcPts val="600"/>
+              </a:spcAft>
+            </a:pPr>
+            <a:r>
+              <a:rPr sz="1350" b="0">
+                <a:solidFill>
+                  <a:srgbClr val="3F4149"/>
+                </a:solidFill>
+                <a:latin typeface="Helvetica Neue"/>
+              </a:rPr>
+              <a:t>Mới thử một lỗi rất hiếm. Bước tiếp theo là thử một lỗi phổ biến hơn nhiều.</a:t>
+            </a:r>
+          </a:p>
+        </p:txBody>
+      </p:sp>
+      <p:sp>
+        <p:nvSpPr>
+          <p:cNvPr id="6" name="Rounded Rectangle 5"/>
           <p:cNvSpPr/>
           <p:nvPr/>
         </p:nvSpPr>
         <p:spPr>
           <a:xfrm>
-            <a:off x="680100" y="2430000"/>
-            <a:ext cx="10831495" cy="2510000"/>
+            <a:off x="800100" y="2650000"/>
+            <a:ext cx="5190000" cy="2500000"/>
           </a:xfrm>
           <a:prstGeom prst="roundRect">
             <a:avLst>
@@ -5648,1186 +5513,208 @@
       </p:sp>
       <p:sp>
         <p:nvSpPr>
-          <p:cNvPr id="11" name="TextBox 10"/>
-          <p:cNvSpPr txBox="1"/>
-          <p:nvPr/>
-        </p:nvSpPr>
-        <p:spPr>
-          <a:xfrm>
-            <a:off x="800100" y="2570000"/>
-            <a:ext cx="3000000" cy="330000"/>
-          </a:xfrm>
-          <a:prstGeom prst="rect">
-            <a:avLst/>
-          </a:prstGeom>
-          <a:noFill/>
-        </p:spPr>
-        <p:txBody>
-          <a:bodyPr wrap="square" lIns="0" rIns="0" tIns="0" bIns="0">
-            <a:spAutoFit/>
-          </a:bodyPr>
-          <a:lstStyle/>
-          <a:p>
-            <a:pPr algn="l">
-              <a:spcAft>
-                <a:spcPts val="600"/>
-              </a:spcAft>
-            </a:pPr>
-            <a:r>
-              <a:rPr sz="1150" b="0">
-                <a:solidFill>
-                  <a:srgbClr val="3F4149"/>
-                </a:solidFill>
-                <a:latin typeface="Helvetica Neue"/>
-              </a:rPr>
-              <a:t>\frac</a:t>
-            </a:r>
-          </a:p>
-        </p:txBody>
-      </p:sp>
-      <p:sp>
-        <p:nvSpPr>
-          <p:cNvPr id="12" name="TextBox 11"/>
-          <p:cNvSpPr txBox="1"/>
-          <p:nvPr/>
-        </p:nvSpPr>
-        <p:spPr>
-          <a:xfrm>
-            <a:off x="4000100" y="2570000"/>
-            <a:ext cx="2500000" cy="330000"/>
-          </a:xfrm>
-          <a:prstGeom prst="rect">
-            <a:avLst/>
-          </a:prstGeom>
-          <a:noFill/>
-        </p:spPr>
-        <p:txBody>
-          <a:bodyPr wrap="square" lIns="0" rIns="0" tIns="0" bIns="0">
-            <a:spAutoFit/>
-          </a:bodyPr>
-          <a:lstStyle/>
-          <a:p>
-            <a:pPr algn="l">
-              <a:spcAft>
-                <a:spcPts val="600"/>
-              </a:spcAft>
-            </a:pPr>
-            <a:r>
-              <a:rPr sz="1150" b="0">
-                <a:solidFill>
-                  <a:srgbClr val="3F4149"/>
-                </a:solidFill>
-                <a:latin typeface="Helvetica Neue"/>
-              </a:rPr>
-              <a:t>55,8%</a:t>
-            </a:r>
-          </a:p>
-        </p:txBody>
-      </p:sp>
-      <p:sp>
-        <p:nvSpPr>
-          <p:cNvPr id="13" name="TextBox 12"/>
-          <p:cNvSpPr txBox="1"/>
-          <p:nvPr/>
-        </p:nvSpPr>
-        <p:spPr>
-          <a:xfrm>
-            <a:off x="6500100" y="2570000"/>
-            <a:ext cx="2400000" cy="330000"/>
-          </a:xfrm>
-          <a:prstGeom prst="rect">
-            <a:avLst/>
-          </a:prstGeom>
-          <a:noFill/>
-        </p:spPr>
-        <p:txBody>
-          <a:bodyPr wrap="square" lIns="0" rIns="0" tIns="0" bIns="0">
-            <a:spAutoFit/>
-          </a:bodyPr>
-          <a:lstStyle/>
-          <a:p>
-            <a:pPr algn="l">
-              <a:spcAft>
-                <a:spcPts val="600"/>
-              </a:spcAft>
-            </a:pPr>
-            <a:r>
-              <a:rPr sz="1150" b="0">
-                <a:solidFill>
-                  <a:srgbClr val="3F4149"/>
-                </a:solidFill>
-                <a:latin typeface="Helvetica Neue"/>
-              </a:rPr>
-              <a:t>0%</a:t>
-            </a:r>
-          </a:p>
-        </p:txBody>
-      </p:sp>
-      <p:sp>
-        <p:nvSpPr>
-          <p:cNvPr id="14" name="TextBox 13"/>
-          <p:cNvSpPr txBox="1"/>
-          <p:nvPr/>
-        </p:nvSpPr>
-        <p:spPr>
-          <a:xfrm>
-            <a:off x="8900100" y="2570000"/>
-            <a:ext cx="2400000" cy="330000"/>
-          </a:xfrm>
-          <a:prstGeom prst="rect">
-            <a:avLst/>
-          </a:prstGeom>
-          <a:noFill/>
-        </p:spPr>
-        <p:txBody>
-          <a:bodyPr wrap="square" lIns="0" rIns="0" tIns="0" bIns="0">
-            <a:spAutoFit/>
-          </a:bodyPr>
-          <a:lstStyle/>
-          <a:p>
-            <a:pPr algn="l">
-              <a:spcAft>
-                <a:spcPts val="600"/>
-              </a:spcAft>
-            </a:pPr>
-            <a:r>
-              <a:rPr sz="1150" b="0">
-                <a:solidFill>
-                  <a:srgbClr val="3F4149"/>
-                </a:solidFill>
-                <a:latin typeface="Helvetica Neue"/>
-              </a:rPr>
-              <a:t>0%</a:t>
-            </a:r>
-          </a:p>
-        </p:txBody>
-      </p:sp>
-      <p:cxnSp>
-        <p:nvCxnSpPr>
-          <p:cNvPr id="15" name="Connector 14"/>
-          <p:cNvCxnSpPr/>
-          <p:nvPr/>
-        </p:nvCxnSpPr>
-        <p:spPr>
-          <a:xfrm>
-            <a:off x="760100" y="2905000"/>
-            <a:ext cx="10671495" cy="0"/>
-          </a:xfrm>
-          <a:prstGeom prst="line">
-            <a:avLst/>
-          </a:prstGeom>
-          <a:ln w="9525">
-            <a:solidFill>
-              <a:srgbClr val="E9E9ED"/>
-            </a:solidFill>
+          <p:cNvPr id="7" name="Rounded Rectangle 6"/>
+          <p:cNvSpPr/>
+          <p:nvPr/>
+        </p:nvSpPr>
+        <p:spPr>
+          <a:xfrm>
+            <a:off x="1080100" y="2850000"/>
+            <a:ext cx="1300000" cy="300000"/>
+          </a:xfrm>
+          <a:prstGeom prst="roundRect">
+            <a:avLst>
+              <a:gd name="adj" fmla="val 50000"/>
+            </a:avLst>
+          </a:prstGeom>
+          <a:solidFill>
+            <a:srgbClr val="8A8D96"/>
+          </a:solidFill>
+          <a:ln>
+            <a:noFill/>
           </a:ln>
+          <a:effectLst/>
         </p:spPr>
         <p:style>
-          <a:lnRef idx="2">
+          <a:lnRef idx="1">
             <a:schemeClr val="accent1"/>
           </a:lnRef>
-          <a:fillRef idx="0">
+          <a:fillRef idx="3">
             <a:schemeClr val="accent1"/>
           </a:fillRef>
-          <a:effectRef idx="1">
+          <a:effectRef idx="2">
             <a:schemeClr val="accent1"/>
           </a:effectRef>
           <a:fontRef idx="minor">
-            <a:schemeClr val="tx1"/>
+            <a:schemeClr val="lt1"/>
           </a:fontRef>
         </p:style>
-      </p:cxnSp>
-      <p:sp>
-        <p:nvSpPr>
-          <p:cNvPr id="16" name="TextBox 15"/>
-          <p:cNvSpPr txBox="1"/>
-          <p:nvPr/>
-        </p:nvSpPr>
-        <p:spPr>
-          <a:xfrm>
-            <a:off x="800100" y="2960000"/>
-            <a:ext cx="3000000" cy="330000"/>
-          </a:xfrm>
-          <a:prstGeom prst="rect">
-            <a:avLst/>
-          </a:prstGeom>
-          <a:noFill/>
-        </p:spPr>
-        <p:txBody>
-          <a:bodyPr wrap="square" lIns="0" rIns="0" tIns="0" bIns="0">
-            <a:spAutoFit/>
-          </a:bodyPr>
-          <a:lstStyle/>
-          <a:p>
-            <a:pPr algn="l">
-              <a:spcAft>
-                <a:spcPts val="600"/>
-              </a:spcAft>
-            </a:pPr>
-            <a:r>
-              <a:rPr sz="1150" b="0">
+        <p:txBody>
+          <a:bodyPr rtlCol="0" anchor="ctr" wrap="none" lIns="0" rIns="0"/>
+          <a:lstStyle/>
+          <a:p>
+            <a:pPr algn="ctr"/>
+            <a:r>
+              <a:rPr sz="1050" b="1">
+                <a:solidFill>
+                  <a:srgbClr val="FFFFFF"/>
+                </a:solidFill>
+                <a:latin typeface="Helvetica Neue"/>
+              </a:rPr>
+              <a:t>ĐÃ THỬ</a:t>
+            </a:r>
+          </a:p>
+        </p:txBody>
+      </p:sp>
+      <p:sp>
+        <p:nvSpPr>
+          <p:cNvPr id="8" name="TextBox 7"/>
+          <p:cNvSpPr txBox="1"/>
+          <p:nvPr/>
+        </p:nvSpPr>
+        <p:spPr>
+          <a:xfrm>
+            <a:off x="1080100" y="3330000"/>
+            <a:ext cx="4600000" cy="400000"/>
+          </a:xfrm>
+          <a:prstGeom prst="rect">
+            <a:avLst/>
+          </a:prstGeom>
+          <a:noFill/>
+        </p:spPr>
+        <p:txBody>
+          <a:bodyPr wrap="square" lIns="0" rIns="0" tIns="0" bIns="0">
+            <a:spAutoFit/>
+          </a:bodyPr>
+          <a:lstStyle/>
+          <a:p>
+            <a:pPr algn="l">
+              <a:spcAft>
+                <a:spcPts val="600"/>
+              </a:spcAft>
+            </a:pPr>
+            <a:r>
+              <a:rPr sz="1700" b="1">
+                <a:solidFill>
+                  <a:srgbClr val="16161A"/>
+                </a:solidFill>
+                <a:latin typeface="Helvetica Neue"/>
+              </a:rPr>
+              <a:t>Lỗi \dfrac</a:t>
+            </a:r>
+          </a:p>
+        </p:txBody>
+      </p:sp>
+      <p:sp>
+        <p:nvSpPr>
+          <p:cNvPr id="9" name="TextBox 8"/>
+          <p:cNvSpPr txBox="1"/>
+          <p:nvPr/>
+        </p:nvSpPr>
+        <p:spPr>
+          <a:xfrm>
+            <a:off x="1080100" y="3800000"/>
+            <a:ext cx="4600000" cy="700000"/>
+          </a:xfrm>
+          <a:prstGeom prst="rect">
+            <a:avLst/>
+          </a:prstGeom>
+          <a:noFill/>
+        </p:spPr>
+        <p:txBody>
+          <a:bodyPr wrap="square" lIns="0" rIns="0" tIns="0" bIns="0">
+            <a:spAutoFit/>
+          </a:bodyPr>
+          <a:lstStyle/>
+          <a:p>
+            <a:pPr algn="l">
+              <a:spcAft>
+                <a:spcPts val="600"/>
+              </a:spcAft>
+            </a:pPr>
+            <a:r>
+              <a:rPr sz="4400" b="1">
+                <a:solidFill>
+                  <a:srgbClr val="8A8D96"/>
+                </a:solidFill>
+                <a:latin typeface="Georgia"/>
+              </a:rPr>
+              <a:t>0,55%</a:t>
+            </a:r>
+          </a:p>
+        </p:txBody>
+      </p:sp>
+      <p:sp>
+        <p:nvSpPr>
+          <p:cNvPr id="10" name="TextBox 9"/>
+          <p:cNvSpPr txBox="1"/>
+          <p:nvPr/>
+        </p:nvSpPr>
+        <p:spPr>
+          <a:xfrm>
+            <a:off x="1080100" y="4550000"/>
+            <a:ext cx="4600000" cy="550000"/>
+          </a:xfrm>
+          <a:prstGeom prst="rect">
+            <a:avLst/>
+          </a:prstGeom>
+          <a:noFill/>
+        </p:spPr>
+        <p:txBody>
+          <a:bodyPr wrap="square" lIns="0" rIns="0" tIns="0" bIns="0">
+            <a:spAutoFit/>
+          </a:bodyPr>
+          <a:lstStyle/>
+          <a:p>
+            <a:pPr algn="l">
+              <a:lnSpc>
+                <a:spcPct val="135000"/>
+              </a:lnSpc>
+              <a:spcAft>
+                <a:spcPts val="600"/>
+              </a:spcAft>
+            </a:pPr>
+            <a:r>
+              <a:rPr sz="1250" b="0">
                 <a:solidFill>
                   <a:srgbClr val="3F4149"/>
                 </a:solidFill>
                 <a:latin typeface="Helvetica Neue"/>
               </a:rPr>
-              <a:t>\boxed</a:t>
-            </a:r>
-          </a:p>
-        </p:txBody>
-      </p:sp>
-      <p:sp>
-        <p:nvSpPr>
-          <p:cNvPr id="17" name="TextBox 16"/>
-          <p:cNvSpPr txBox="1"/>
-          <p:nvPr/>
-        </p:nvSpPr>
-        <p:spPr>
-          <a:xfrm>
-            <a:off x="4000100" y="2960000"/>
-            <a:ext cx="2500000" cy="330000"/>
-          </a:xfrm>
-          <a:prstGeom prst="rect">
-            <a:avLst/>
-          </a:prstGeom>
-          <a:noFill/>
-        </p:spPr>
-        <p:txBody>
-          <a:bodyPr wrap="square" lIns="0" rIns="0" tIns="0" bIns="0">
-            <a:spAutoFit/>
-          </a:bodyPr>
-          <a:lstStyle/>
-          <a:p>
-            <a:pPr algn="l">
-              <a:spcAft>
-                <a:spcPts val="600"/>
-              </a:spcAft>
-            </a:pPr>
-            <a:r>
-              <a:rPr sz="1150" b="0">
+              <a:t>số bài bị gạch oan mỗi vòng</a:t>
+            </a:r>
+          </a:p>
+          <a:p>
+            <a:pPr algn="l">
+              <a:lnSpc>
+                <a:spcPct val="135000"/>
+              </a:lnSpc>
+              <a:spcAft>
+                <a:spcPts val="600"/>
+              </a:spcAft>
+            </a:pPr>
+            <a:r>
+              <a:rPr sz="1250" b="0">
                 <a:solidFill>
                   <a:srgbClr val="3F4149"/>
                 </a:solidFill>
                 <a:latin typeface="Helvetica Neue"/>
               </a:rPr>
-              <a:t>51,5%</a:t>
-            </a:r>
-          </a:p>
-        </p:txBody>
-      </p:sp>
-      <p:sp>
-        <p:nvSpPr>
-          <p:cNvPr id="18" name="TextBox 17"/>
-          <p:cNvSpPr txBox="1"/>
-          <p:nvPr/>
-        </p:nvSpPr>
-        <p:spPr>
-          <a:xfrm>
-            <a:off x="6500100" y="2960000"/>
-            <a:ext cx="2400000" cy="330000"/>
-          </a:xfrm>
-          <a:prstGeom prst="rect">
-            <a:avLst/>
-          </a:prstGeom>
-          <a:noFill/>
-        </p:spPr>
-        <p:txBody>
-          <a:bodyPr wrap="square" lIns="0" rIns="0" tIns="0" bIns="0">
-            <a:spAutoFit/>
-          </a:bodyPr>
-          <a:lstStyle/>
-          <a:p>
-            <a:pPr algn="l">
-              <a:spcAft>
-                <a:spcPts val="600"/>
-              </a:spcAft>
-            </a:pPr>
-            <a:r>
-              <a:rPr sz="1150" b="0">
-                <a:solidFill>
-                  <a:srgbClr val="3F4149"/>
-                </a:solidFill>
-                <a:latin typeface="Helvetica Neue"/>
-              </a:rPr>
-              <a:t>8,5%</a:t>
-            </a:r>
-          </a:p>
-        </p:txBody>
-      </p:sp>
-      <p:sp>
-        <p:nvSpPr>
-          <p:cNvPr id="19" name="TextBox 18"/>
-          <p:cNvSpPr txBox="1"/>
-          <p:nvPr/>
-        </p:nvSpPr>
-        <p:spPr>
-          <a:xfrm>
-            <a:off x="8900100" y="2960000"/>
-            <a:ext cx="2400000" cy="330000"/>
-          </a:xfrm>
-          <a:prstGeom prst="rect">
-            <a:avLst/>
-          </a:prstGeom>
-          <a:noFill/>
-        </p:spPr>
-        <p:txBody>
-          <a:bodyPr wrap="square" lIns="0" rIns="0" tIns="0" bIns="0">
-            <a:spAutoFit/>
-          </a:bodyPr>
-          <a:lstStyle/>
-          <a:p>
-            <a:pPr algn="l">
-              <a:spcAft>
-                <a:spcPts val="600"/>
-              </a:spcAft>
-            </a:pPr>
-            <a:r>
-              <a:rPr sz="1150" b="0">
-                <a:solidFill>
-                  <a:srgbClr val="3F4149"/>
-                </a:solidFill>
-                <a:latin typeface="Helvetica Neue"/>
-              </a:rPr>
-              <a:t>4,4%</a:t>
-            </a:r>
-          </a:p>
-        </p:txBody>
-      </p:sp>
-      <p:cxnSp>
-        <p:nvCxnSpPr>
-          <p:cNvPr id="20" name="Connector 19"/>
-          <p:cNvCxnSpPr/>
-          <p:nvPr/>
-        </p:nvCxnSpPr>
-        <p:spPr>
-          <a:xfrm>
-            <a:off x="760100" y="3295000"/>
-            <a:ext cx="10671495" cy="0"/>
-          </a:xfrm>
-          <a:prstGeom prst="line">
-            <a:avLst/>
-          </a:prstGeom>
-          <a:ln w="9525">
-            <a:solidFill>
-              <a:srgbClr val="E9E9ED"/>
-            </a:solidFill>
-          </a:ln>
-        </p:spPr>
-        <p:style>
-          <a:lnRef idx="2">
-            <a:schemeClr val="accent1"/>
-          </a:lnRef>
-          <a:fillRef idx="0">
-            <a:schemeClr val="accent1"/>
-          </a:fillRef>
-          <a:effectRef idx="1">
-            <a:schemeClr val="accent1"/>
-          </a:effectRef>
-          <a:fontRef idx="minor">
-            <a:schemeClr val="tx1"/>
-          </a:fontRef>
-        </p:style>
-      </p:cxnSp>
-      <p:sp>
-        <p:nvSpPr>
-          <p:cNvPr id="21" name="TextBox 20"/>
-          <p:cNvSpPr txBox="1"/>
-          <p:nvPr/>
-        </p:nvSpPr>
-        <p:spPr>
-          <a:xfrm>
-            <a:off x="800100" y="3350000"/>
-            <a:ext cx="3000000" cy="330000"/>
-          </a:xfrm>
-          <a:prstGeom prst="rect">
-            <a:avLst/>
-          </a:prstGeom>
-          <a:noFill/>
-        </p:spPr>
-        <p:txBody>
-          <a:bodyPr wrap="square" lIns="0" rIns="0" tIns="0" bIns="0">
-            <a:spAutoFit/>
-          </a:bodyPr>
-          <a:lstStyle/>
-          <a:p>
-            <a:pPr algn="l">
-              <a:spcAft>
-                <a:spcPts val="600"/>
-              </a:spcAft>
-            </a:pPr>
-            <a:r>
-              <a:rPr sz="1150" b="0">
-                <a:solidFill>
-                  <a:srgbClr val="3F4149"/>
-                </a:solidFill>
-                <a:latin typeface="Helvetica Neue"/>
-              </a:rPr>
-              <a:t>số thập phân</a:t>
-            </a:r>
-          </a:p>
-        </p:txBody>
-      </p:sp>
-      <p:sp>
-        <p:nvSpPr>
-          <p:cNvPr id="22" name="TextBox 21"/>
-          <p:cNvSpPr txBox="1"/>
-          <p:nvPr/>
-        </p:nvSpPr>
-        <p:spPr>
-          <a:xfrm>
-            <a:off x="4000100" y="3350000"/>
-            <a:ext cx="2500000" cy="330000"/>
-          </a:xfrm>
-          <a:prstGeom prst="rect">
-            <a:avLst/>
-          </a:prstGeom>
-          <a:noFill/>
-        </p:spPr>
-        <p:txBody>
-          <a:bodyPr wrap="square" lIns="0" rIns="0" tIns="0" bIns="0">
-            <a:spAutoFit/>
-          </a:bodyPr>
-          <a:lstStyle/>
-          <a:p>
-            <a:pPr algn="l">
-              <a:spcAft>
-                <a:spcPts val="600"/>
-              </a:spcAft>
-            </a:pPr>
-            <a:r>
-              <a:rPr sz="1150" b="0">
-                <a:solidFill>
-                  <a:srgbClr val="3F4149"/>
-                </a:solidFill>
-                <a:latin typeface="Helvetica Neue"/>
-              </a:rPr>
-              <a:t>11,6%</a:t>
-            </a:r>
-          </a:p>
-        </p:txBody>
-      </p:sp>
-      <p:sp>
-        <p:nvSpPr>
-          <p:cNvPr id="23" name="TextBox 22"/>
-          <p:cNvSpPr txBox="1"/>
-          <p:nvPr/>
-        </p:nvSpPr>
-        <p:spPr>
-          <a:xfrm>
-            <a:off x="6500100" y="3350000"/>
-            <a:ext cx="2400000" cy="330000"/>
-          </a:xfrm>
-          <a:prstGeom prst="rect">
-            <a:avLst/>
-          </a:prstGeom>
-          <a:noFill/>
-        </p:spPr>
-        <p:txBody>
-          <a:bodyPr wrap="square" lIns="0" rIns="0" tIns="0" bIns="0">
-            <a:spAutoFit/>
-          </a:bodyPr>
-          <a:lstStyle/>
-          <a:p>
-            <a:pPr algn="l">
-              <a:spcAft>
-                <a:spcPts val="600"/>
-              </a:spcAft>
-            </a:pPr>
-            <a:r>
-              <a:rPr sz="1150" b="0">
-                <a:solidFill>
-                  <a:srgbClr val="3F4149"/>
-                </a:solidFill>
-                <a:latin typeface="Helvetica Neue"/>
-              </a:rPr>
-              <a:t>thấp</a:t>
-            </a:r>
-          </a:p>
-        </p:txBody>
-      </p:sp>
-      <p:sp>
-        <p:nvSpPr>
-          <p:cNvPr id="24" name="TextBox 23"/>
-          <p:cNvSpPr txBox="1"/>
-          <p:nvPr/>
-        </p:nvSpPr>
-        <p:spPr>
-          <a:xfrm>
-            <a:off x="8900100" y="3350000"/>
-            <a:ext cx="2400000" cy="330000"/>
-          </a:xfrm>
-          <a:prstGeom prst="rect">
-            <a:avLst/>
-          </a:prstGeom>
-          <a:noFill/>
-        </p:spPr>
-        <p:txBody>
-          <a:bodyPr wrap="square" lIns="0" rIns="0" tIns="0" bIns="0">
-            <a:spAutoFit/>
-          </a:bodyPr>
-          <a:lstStyle/>
-          <a:p>
-            <a:pPr algn="l">
-              <a:spcAft>
-                <a:spcPts val="600"/>
-              </a:spcAft>
-            </a:pPr>
-            <a:r>
-              <a:rPr sz="1150" b="0">
-                <a:solidFill>
-                  <a:srgbClr val="3F4149"/>
-                </a:solidFill>
-                <a:latin typeface="Helvetica Neue"/>
-              </a:rPr>
-              <a:t>thấp</a:t>
-            </a:r>
-          </a:p>
-        </p:txBody>
-      </p:sp>
-      <p:cxnSp>
-        <p:nvCxnSpPr>
-          <p:cNvPr id="25" name="Connector 24"/>
-          <p:cNvCxnSpPr/>
-          <p:nvPr/>
-        </p:nvCxnSpPr>
-        <p:spPr>
-          <a:xfrm>
-            <a:off x="760100" y="3685000"/>
-            <a:ext cx="10671495" cy="0"/>
-          </a:xfrm>
-          <a:prstGeom prst="line">
-            <a:avLst/>
-          </a:prstGeom>
-          <a:ln w="9525">
-            <a:solidFill>
-              <a:srgbClr val="E9E9ED"/>
-            </a:solidFill>
-          </a:ln>
-        </p:spPr>
-        <p:style>
-          <a:lnRef idx="2">
-            <a:schemeClr val="accent1"/>
-          </a:lnRef>
-          <a:fillRef idx="0">
-            <a:schemeClr val="accent1"/>
-          </a:fillRef>
-          <a:effectRef idx="1">
-            <a:schemeClr val="accent1"/>
-          </a:effectRef>
-          <a:fontRef idx="minor">
-            <a:schemeClr val="tx1"/>
-          </a:fontRef>
-        </p:style>
-      </p:cxnSp>
-      <p:sp>
-        <p:nvSpPr>
-          <p:cNvPr id="26" name="TextBox 25"/>
-          <p:cNvSpPr txBox="1"/>
-          <p:nvPr/>
-        </p:nvSpPr>
-        <p:spPr>
-          <a:xfrm>
-            <a:off x="800100" y="3740000"/>
-            <a:ext cx="3000000" cy="330000"/>
-          </a:xfrm>
-          <a:prstGeom prst="rect">
-            <a:avLst/>
-          </a:prstGeom>
-          <a:noFill/>
-        </p:spPr>
-        <p:txBody>
-          <a:bodyPr wrap="square" lIns="0" rIns="0" tIns="0" bIns="0">
-            <a:spAutoFit/>
-          </a:bodyPr>
-          <a:lstStyle/>
-          <a:p>
-            <a:pPr algn="l">
-              <a:spcAft>
-                <a:spcPts val="600"/>
-              </a:spcAft>
-            </a:pPr>
-            <a:r>
-              <a:rPr sz="1150" b="0">
-                <a:solidFill>
-                  <a:srgbClr val="3F4149"/>
-                </a:solidFill>
-                <a:latin typeface="Helvetica Neue"/>
-              </a:rPr>
-              <a:t>0,50  (thừa số 0)</a:t>
-            </a:r>
-          </a:p>
-        </p:txBody>
-      </p:sp>
-      <p:sp>
-        <p:nvSpPr>
-          <p:cNvPr id="27" name="TextBox 26"/>
-          <p:cNvSpPr txBox="1"/>
-          <p:nvPr/>
-        </p:nvSpPr>
-        <p:spPr>
-          <a:xfrm>
-            <a:off x="4000100" y="3740000"/>
-            <a:ext cx="2500000" cy="330000"/>
-          </a:xfrm>
-          <a:prstGeom prst="rect">
-            <a:avLst/>
-          </a:prstGeom>
-          <a:noFill/>
-        </p:spPr>
-        <p:txBody>
-          <a:bodyPr wrap="square" lIns="0" rIns="0" tIns="0" bIns="0">
-            <a:spAutoFit/>
-          </a:bodyPr>
-          <a:lstStyle/>
-          <a:p>
-            <a:pPr algn="l">
-              <a:spcAft>
-                <a:spcPts val="600"/>
-              </a:spcAft>
-            </a:pPr>
-            <a:r>
-              <a:rPr sz="1150" b="0">
-                <a:solidFill>
-                  <a:srgbClr val="3F4149"/>
-                </a:solidFill>
-                <a:latin typeface="Helvetica Neue"/>
-              </a:rPr>
-              <a:t>1,2%</a:t>
-            </a:r>
-          </a:p>
-        </p:txBody>
-      </p:sp>
-      <p:sp>
-        <p:nvSpPr>
-          <p:cNvPr id="28" name="TextBox 27"/>
-          <p:cNvSpPr txBox="1"/>
-          <p:nvPr/>
-        </p:nvSpPr>
-        <p:spPr>
-          <a:xfrm>
-            <a:off x="6500100" y="3740000"/>
-            <a:ext cx="2400000" cy="330000"/>
-          </a:xfrm>
-          <a:prstGeom prst="rect">
-            <a:avLst/>
-          </a:prstGeom>
-          <a:noFill/>
-        </p:spPr>
-        <p:txBody>
-          <a:bodyPr wrap="square" lIns="0" rIns="0" tIns="0" bIns="0">
-            <a:spAutoFit/>
-          </a:bodyPr>
-          <a:lstStyle/>
-          <a:p>
-            <a:pPr algn="l">
-              <a:spcAft>
-                <a:spcPts val="600"/>
-              </a:spcAft>
-            </a:pPr>
-            <a:r>
-              <a:rPr sz="1150" b="0">
-                <a:solidFill>
-                  <a:srgbClr val="3F4149"/>
-                </a:solidFill>
-                <a:latin typeface="Helvetica Neue"/>
-              </a:rPr>
-              <a:t>59%</a:t>
-            </a:r>
-          </a:p>
-        </p:txBody>
-      </p:sp>
-      <p:sp>
-        <p:nvSpPr>
-          <p:cNvPr id="29" name="TextBox 28"/>
-          <p:cNvSpPr txBox="1"/>
-          <p:nvPr/>
-        </p:nvSpPr>
-        <p:spPr>
-          <a:xfrm>
-            <a:off x="8900100" y="3740000"/>
-            <a:ext cx="2400000" cy="330000"/>
-          </a:xfrm>
-          <a:prstGeom prst="rect">
-            <a:avLst/>
-          </a:prstGeom>
-          <a:noFill/>
-        </p:spPr>
-        <p:txBody>
-          <a:bodyPr wrap="square" lIns="0" rIns="0" tIns="0" bIns="0">
-            <a:spAutoFit/>
-          </a:bodyPr>
-          <a:lstStyle/>
-          <a:p>
-            <a:pPr algn="l">
-              <a:spcAft>
-                <a:spcPts val="600"/>
-              </a:spcAft>
-            </a:pPr>
-            <a:r>
-              <a:rPr sz="1150" b="0">
-                <a:solidFill>
-                  <a:srgbClr val="3F4149"/>
-                </a:solidFill>
-                <a:latin typeface="Helvetica Neue"/>
-              </a:rPr>
-              <a:t>0,7%</a:t>
-            </a:r>
-          </a:p>
-        </p:txBody>
-      </p:sp>
-      <p:cxnSp>
-        <p:nvCxnSpPr>
-          <p:cNvPr id="30" name="Connector 29"/>
-          <p:cNvCxnSpPr/>
-          <p:nvPr/>
-        </p:nvCxnSpPr>
-        <p:spPr>
-          <a:xfrm>
-            <a:off x="760100" y="4075000"/>
-            <a:ext cx="10671495" cy="0"/>
-          </a:xfrm>
-          <a:prstGeom prst="line">
-            <a:avLst/>
-          </a:prstGeom>
-          <a:ln w="9525">
-            <a:solidFill>
-              <a:srgbClr val="E9E9ED"/>
-            </a:solidFill>
-          </a:ln>
-        </p:spPr>
-        <p:style>
-          <a:lnRef idx="2">
-            <a:schemeClr val="accent1"/>
-          </a:lnRef>
-          <a:fillRef idx="0">
-            <a:schemeClr val="accent1"/>
-          </a:fillRef>
-          <a:effectRef idx="1">
-            <a:schemeClr val="accent1"/>
-          </a:effectRef>
-          <a:fontRef idx="minor">
-            <a:schemeClr val="tx1"/>
-          </a:fontRef>
-        </p:style>
-      </p:cxnSp>
-      <p:sp>
-        <p:nvSpPr>
-          <p:cNvPr id="31" name="TextBox 30"/>
-          <p:cNvSpPr txBox="1"/>
-          <p:nvPr/>
-        </p:nvSpPr>
-        <p:spPr>
-          <a:xfrm>
-            <a:off x="800100" y="4130000"/>
-            <a:ext cx="3000000" cy="330000"/>
-          </a:xfrm>
-          <a:prstGeom prst="rect">
-            <a:avLst/>
-          </a:prstGeom>
-          <a:noFill/>
-        </p:spPr>
-        <p:txBody>
-          <a:bodyPr wrap="square" lIns="0" rIns="0" tIns="0" bIns="0">
-            <a:spAutoFit/>
-          </a:bodyPr>
-          <a:lstStyle/>
-          <a:p>
-            <a:pPr algn="l">
-              <a:spcAft>
-                <a:spcPts val="600"/>
-              </a:spcAft>
-            </a:pPr>
-            <a:r>
-              <a:rPr sz="1150" b="1">
-                <a:solidFill>
-                  <a:srgbClr val="16161A"/>
-                </a:solidFill>
-                <a:latin typeface="Helvetica Neue"/>
-              </a:rPr>
-              <a:t>\dfrac</a:t>
-            </a:r>
-          </a:p>
-        </p:txBody>
-      </p:sp>
-      <p:sp>
-        <p:nvSpPr>
-          <p:cNvPr id="32" name="TextBox 31"/>
-          <p:cNvSpPr txBox="1"/>
-          <p:nvPr/>
-        </p:nvSpPr>
-        <p:spPr>
-          <a:xfrm>
-            <a:off x="4000100" y="4130000"/>
-            <a:ext cx="2500000" cy="330000"/>
-          </a:xfrm>
-          <a:prstGeom prst="rect">
-            <a:avLst/>
-          </a:prstGeom>
-          <a:noFill/>
-        </p:spPr>
-        <p:txBody>
-          <a:bodyPr wrap="square" lIns="0" rIns="0" tIns="0" bIns="0">
-            <a:spAutoFit/>
-          </a:bodyPr>
-          <a:lstStyle/>
-          <a:p>
-            <a:pPr algn="l">
-              <a:spcAft>
-                <a:spcPts val="600"/>
-              </a:spcAft>
-            </a:pPr>
-            <a:r>
-              <a:rPr sz="1150" b="1">
-                <a:solidFill>
-                  <a:srgbClr val="16161A"/>
-                </a:solidFill>
-                <a:latin typeface="Helvetica Neue"/>
-              </a:rPr>
-              <a:t>0,55%</a:t>
-            </a:r>
-          </a:p>
-        </p:txBody>
-      </p:sp>
-      <p:sp>
-        <p:nvSpPr>
-          <p:cNvPr id="33" name="TextBox 32"/>
-          <p:cNvSpPr txBox="1"/>
-          <p:nvPr/>
-        </p:nvSpPr>
-        <p:spPr>
-          <a:xfrm>
-            <a:off x="6500100" y="4130000"/>
-            <a:ext cx="2400000" cy="330000"/>
-          </a:xfrm>
-          <a:prstGeom prst="rect">
-            <a:avLst/>
-          </a:prstGeom>
-          <a:noFill/>
-        </p:spPr>
-        <p:txBody>
-          <a:bodyPr wrap="square" lIns="0" rIns="0" tIns="0" bIns="0">
-            <a:spAutoFit/>
-          </a:bodyPr>
-          <a:lstStyle/>
-          <a:p>
-            <a:pPr algn="l">
-              <a:spcAft>
-                <a:spcPts val="600"/>
-              </a:spcAft>
-            </a:pPr>
-            <a:r>
-              <a:rPr sz="1150" b="1">
-                <a:solidFill>
-                  <a:srgbClr val="16161A"/>
-                </a:solidFill>
-                <a:latin typeface="Helvetica Neue"/>
-              </a:rPr>
-              <a:t>100%</a:t>
-            </a:r>
-          </a:p>
-        </p:txBody>
-      </p:sp>
-      <p:sp>
-        <p:nvSpPr>
-          <p:cNvPr id="34" name="TextBox 33"/>
-          <p:cNvSpPr txBox="1"/>
-          <p:nvPr/>
-        </p:nvSpPr>
-        <p:spPr>
-          <a:xfrm>
-            <a:off x="8900100" y="4130000"/>
-            <a:ext cx="2400000" cy="330000"/>
-          </a:xfrm>
-          <a:prstGeom prst="rect">
-            <a:avLst/>
-          </a:prstGeom>
-          <a:noFill/>
-        </p:spPr>
-        <p:txBody>
-          <a:bodyPr wrap="square" lIns="0" rIns="0" tIns="0" bIns="0">
-            <a:spAutoFit/>
-          </a:bodyPr>
-          <a:lstStyle/>
-          <a:p>
-            <a:pPr algn="l">
-              <a:spcAft>
-                <a:spcPts val="600"/>
-              </a:spcAft>
-            </a:pPr>
-            <a:r>
-              <a:rPr sz="1150" b="1">
-                <a:solidFill>
-                  <a:srgbClr val="16161A"/>
-                </a:solidFill>
-                <a:latin typeface="Helvetica Neue"/>
-              </a:rPr>
-              <a:t>0,55%</a:t>
-            </a:r>
-          </a:p>
-        </p:txBody>
-      </p:sp>
-      <p:cxnSp>
-        <p:nvCxnSpPr>
-          <p:cNvPr id="35" name="Connector 34"/>
-          <p:cNvCxnSpPr/>
-          <p:nvPr/>
-        </p:nvCxnSpPr>
-        <p:spPr>
-          <a:xfrm>
-            <a:off x="760100" y="4465000"/>
-            <a:ext cx="10671495" cy="0"/>
-          </a:xfrm>
-          <a:prstGeom prst="line">
-            <a:avLst/>
-          </a:prstGeom>
-          <a:ln w="9525">
-            <a:solidFill>
-              <a:srgbClr val="E9E9ED"/>
-            </a:solidFill>
-          </a:ln>
-        </p:spPr>
-        <p:style>
-          <a:lnRef idx="2">
-            <a:schemeClr val="accent1"/>
-          </a:lnRef>
-          <a:fillRef idx="0">
-            <a:schemeClr val="accent1"/>
-          </a:fillRef>
-          <a:effectRef idx="1">
-            <a:schemeClr val="accent1"/>
-          </a:effectRef>
-          <a:fontRef idx="minor">
-            <a:schemeClr val="tx1"/>
-          </a:fontRef>
-        </p:style>
-      </p:cxnSp>
-      <p:sp>
-        <p:nvSpPr>
-          <p:cNvPr id="36" name="TextBox 35"/>
-          <p:cNvSpPr txBox="1"/>
-          <p:nvPr/>
-        </p:nvSpPr>
-        <p:spPr>
-          <a:xfrm>
-            <a:off x="800100" y="4520000"/>
-            <a:ext cx="3000000" cy="330000"/>
-          </a:xfrm>
-          <a:prstGeom prst="rect">
-            <a:avLst/>
-          </a:prstGeom>
-          <a:noFill/>
-        </p:spPr>
-        <p:txBody>
-          <a:bodyPr wrap="square" lIns="0" rIns="0" tIns="0" bIns="0">
-            <a:spAutoFit/>
-          </a:bodyPr>
-          <a:lstStyle/>
-          <a:p>
-            <a:pPr algn="l">
-              <a:spcAft>
-                <a:spcPts val="600"/>
-              </a:spcAft>
-            </a:pPr>
-            <a:r>
-              <a:rPr sz="1150" b="0">
-                <a:solidFill>
-                  <a:srgbClr val="3F4149"/>
-                </a:solidFill>
-                <a:latin typeface="Helvetica Neue"/>
-              </a:rPr>
-              <a:t>\tfrac</a:t>
-            </a:r>
-          </a:p>
-        </p:txBody>
-      </p:sp>
-      <p:sp>
-        <p:nvSpPr>
-          <p:cNvPr id="37" name="TextBox 36"/>
-          <p:cNvSpPr txBox="1"/>
-          <p:nvPr/>
-        </p:nvSpPr>
-        <p:spPr>
-          <a:xfrm>
-            <a:off x="4000100" y="4520000"/>
-            <a:ext cx="2500000" cy="330000"/>
-          </a:xfrm>
-          <a:prstGeom prst="rect">
-            <a:avLst/>
-          </a:prstGeom>
-          <a:noFill/>
-        </p:spPr>
-        <p:txBody>
-          <a:bodyPr wrap="square" lIns="0" rIns="0" tIns="0" bIns="0">
-            <a:spAutoFit/>
-          </a:bodyPr>
-          <a:lstStyle/>
-          <a:p>
-            <a:pPr algn="l">
-              <a:spcAft>
-                <a:spcPts val="600"/>
-              </a:spcAft>
-            </a:pPr>
-            <a:r>
-              <a:rPr sz="1150" b="0">
-                <a:solidFill>
-                  <a:srgbClr val="3F4149"/>
-                </a:solidFill>
-                <a:latin typeface="Helvetica Neue"/>
-              </a:rPr>
-              <a:t>0%</a:t>
-            </a:r>
-          </a:p>
-        </p:txBody>
-      </p:sp>
-      <p:sp>
-        <p:nvSpPr>
-          <p:cNvPr id="38" name="TextBox 37"/>
-          <p:cNvSpPr txBox="1"/>
-          <p:nvPr/>
-        </p:nvSpPr>
-        <p:spPr>
-          <a:xfrm>
-            <a:off x="6500100" y="4520000"/>
-            <a:ext cx="2400000" cy="330000"/>
-          </a:xfrm>
-          <a:prstGeom prst="rect">
-            <a:avLst/>
-          </a:prstGeom>
-          <a:noFill/>
-        </p:spPr>
-        <p:txBody>
-          <a:bodyPr wrap="square" lIns="0" rIns="0" tIns="0" bIns="0">
-            <a:spAutoFit/>
-          </a:bodyPr>
-          <a:lstStyle/>
-          <a:p>
-            <a:pPr algn="l">
-              <a:spcAft>
-                <a:spcPts val="600"/>
-              </a:spcAft>
-            </a:pPr>
-            <a:r>
-              <a:rPr sz="1150" b="0">
-                <a:solidFill>
-                  <a:srgbClr val="3F4149"/>
-                </a:solidFill>
-                <a:latin typeface="Helvetica Neue"/>
-              </a:rPr>
-              <a:t>100%</a:t>
-            </a:r>
-          </a:p>
-        </p:txBody>
-      </p:sp>
-      <p:sp>
-        <p:nvSpPr>
-          <p:cNvPr id="39" name="TextBox 38"/>
-          <p:cNvSpPr txBox="1"/>
-          <p:nvPr/>
-        </p:nvSpPr>
-        <p:spPr>
-          <a:xfrm>
-            <a:off x="8900100" y="4520000"/>
-            <a:ext cx="2400000" cy="330000"/>
-          </a:xfrm>
-          <a:prstGeom prst="rect">
-            <a:avLst/>
-          </a:prstGeom>
-          <a:noFill/>
-        </p:spPr>
-        <p:txBody>
-          <a:bodyPr wrap="square" lIns="0" rIns="0" tIns="0" bIns="0">
-            <a:spAutoFit/>
-          </a:bodyPr>
-          <a:lstStyle/>
-          <a:p>
-            <a:pPr algn="l">
-              <a:spcAft>
-                <a:spcPts val="600"/>
-              </a:spcAft>
-            </a:pPr>
-            <a:r>
-              <a:rPr sz="1150" b="0">
-                <a:solidFill>
-                  <a:srgbClr val="3F4149"/>
-                </a:solidFill>
-                <a:latin typeface="Helvetica Neue"/>
-              </a:rPr>
-              <a:t>0%</a:t>
-            </a:r>
-          </a:p>
-        </p:txBody>
-      </p:sp>
-      <p:sp>
-        <p:nvSpPr>
-          <p:cNvPr id="40" name="TextBox 39"/>
-          <p:cNvSpPr txBox="1"/>
-          <p:nvPr/>
-        </p:nvSpPr>
-        <p:spPr>
-          <a:xfrm>
-            <a:off x="800100" y="5200000"/>
-            <a:ext cx="10591495" cy="700000"/>
-          </a:xfrm>
-          <a:prstGeom prst="rect">
-            <a:avLst/>
-          </a:prstGeom>
-          <a:noFill/>
-        </p:spPr>
-        <p:txBody>
-          <a:bodyPr wrap="square" lIns="0" rIns="0" tIns="0" bIns="0">
-            <a:spAutoFit/>
-          </a:bodyPr>
-          <a:lstStyle/>
-          <a:p>
-            <a:pPr algn="l">
-              <a:lnSpc>
-                <a:spcPct val="140000"/>
-              </a:lnSpc>
-              <a:spcAft>
-                <a:spcPts val="600"/>
-              </a:spcAft>
-            </a:pPr>
-            <a:r>
-              <a:rPr sz="1250" b="0">
-                <a:solidFill>
-                  <a:srgbClr val="3F4149"/>
-                </a:solidFill>
-                <a:latin typeface="Helvetica Neue"/>
-              </a:rPr>
-              <a:t>Thiệt hại thực tế bằng tỉ lệ gạch nhân tần suất. Cách viết đã đem ra thử là \dfrac — gạch nặng nhất,</a:t>
-            </a:r>
-          </a:p>
-          <a:p>
-            <a:pPr algn="l">
-              <a:lnSpc>
-                <a:spcPct val="140000"/>
-              </a:lnSpc>
-              <a:spcAft>
-                <a:spcPts val="600"/>
-              </a:spcAft>
-            </a:pPr>
-            <a:r>
-              <a:rPr sz="1250" b="0">
-                <a:solidFill>
-                  <a:srgbClr val="3F4149"/>
-                </a:solidFill>
-                <a:latin typeface="Helvetica Neue"/>
-              </a:rPr>
-              <a:t>nhưng cũng hiếm nhất. Đó là ô cho hiệu ứng nhỏ nhất trong cả bảng.</a:t>
-            </a:r>
-          </a:p>
-        </p:txBody>
-      </p:sp>
-      <p:sp>
-        <p:nvSpPr>
-          <p:cNvPr id="41" name="Rounded Rectangle 40"/>
+              <a:t>→ không thấy ảnh hưởng gì</a:t>
+            </a:r>
+          </a:p>
+        </p:txBody>
+      </p:sp>
+      <p:sp>
+        <p:nvSpPr>
+          <p:cNvPr id="11" name="Rounded Rectangle 10"/>
           <p:cNvSpPr/>
           <p:nvPr/>
         </p:nvSpPr>
         <p:spPr>
           <a:xfrm>
-            <a:off x="680100" y="5870000"/>
-            <a:ext cx="10831495" cy="560000"/>
+            <a:off x="6200100" y="2650000"/>
+            <a:ext cx="5190000" cy="2500000"/>
           </a:xfrm>
           <a:prstGeom prst="roundRect">
             <a:avLst>
@@ -6866,27 +5753,224 @@
       </p:sp>
       <p:sp>
         <p:nvSpPr>
-          <p:cNvPr id="42" name="TextBox 41"/>
-          <p:cNvSpPr txBox="1"/>
-          <p:nvPr/>
-        </p:nvSpPr>
-        <p:spPr>
-          <a:xfrm>
-            <a:off x="920100" y="5985000"/>
-            <a:ext cx="10351495" cy="330000"/>
-          </a:xfrm>
-          <a:prstGeom prst="rect">
-            <a:avLst/>
-          </a:prstGeom>
-          <a:noFill/>
-        </p:spPr>
-        <p:txBody>
-          <a:bodyPr wrap="square" lIns="0" rIns="0" tIns="0" bIns="0">
-            <a:spAutoFit/>
-          </a:bodyPr>
-          <a:lstStyle/>
-          <a:p>
-            <a:pPr algn="l">
+          <p:cNvPr id="12" name="Rounded Rectangle 11"/>
+          <p:cNvSpPr/>
+          <p:nvPr/>
+        </p:nvSpPr>
+        <p:spPr>
+          <a:xfrm>
+            <a:off x="6480100" y="2850000"/>
+            <a:ext cx="1300000" cy="300000"/>
+          </a:xfrm>
+          <a:prstGeom prst="roundRect">
+            <a:avLst>
+              <a:gd name="adj" fmla="val 50000"/>
+            </a:avLst>
+          </a:prstGeom>
+          <a:solidFill>
+            <a:srgbClr val="0173B2"/>
+          </a:solidFill>
+          <a:ln>
+            <a:noFill/>
+          </a:ln>
+          <a:effectLst/>
+        </p:spPr>
+        <p:style>
+          <a:lnRef idx="1">
+            <a:schemeClr val="accent1"/>
+          </a:lnRef>
+          <a:fillRef idx="3">
+            <a:schemeClr val="accent1"/>
+          </a:fillRef>
+          <a:effectRef idx="2">
+            <a:schemeClr val="accent1"/>
+          </a:effectRef>
+          <a:fontRef idx="minor">
+            <a:schemeClr val="lt1"/>
+          </a:fontRef>
+        </p:style>
+        <p:txBody>
+          <a:bodyPr rtlCol="0" anchor="ctr" wrap="none" lIns="0" rIns="0"/>
+          <a:lstStyle/>
+          <a:p>
+            <a:pPr algn="ctr"/>
+            <a:r>
+              <a:rPr sz="1050" b="1">
+                <a:solidFill>
+                  <a:srgbClr val="FFFFFF"/>
+                </a:solidFill>
+                <a:latin typeface="Helvetica Neue"/>
+              </a:rPr>
+              <a:t>SẮP THỬ</a:t>
+            </a:r>
+          </a:p>
+        </p:txBody>
+      </p:sp>
+      <p:sp>
+        <p:nvSpPr>
+          <p:cNvPr id="13" name="TextBox 12"/>
+          <p:cNvSpPr txBox="1"/>
+          <p:nvPr/>
+        </p:nvSpPr>
+        <p:spPr>
+          <a:xfrm>
+            <a:off x="6480100" y="3330000"/>
+            <a:ext cx="4600000" cy="400000"/>
+          </a:xfrm>
+          <a:prstGeom prst="rect">
+            <a:avLst/>
+          </a:prstGeom>
+          <a:noFill/>
+        </p:spPr>
+        <p:txBody>
+          <a:bodyPr wrap="square" lIns="0" rIns="0" tIns="0" bIns="0">
+            <a:spAutoFit/>
+          </a:bodyPr>
+          <a:lstStyle/>
+          <a:p>
+            <a:pPr algn="l">
+              <a:spcAft>
+                <a:spcPts val="600"/>
+              </a:spcAft>
+            </a:pPr>
+            <a:r>
+              <a:rPr sz="1700" b="1">
+                <a:solidFill>
+                  <a:srgbClr val="16161A"/>
+                </a:solidFill>
+                <a:latin typeface="Helvetica Neue"/>
+              </a:rPr>
+              <a:t>Lỗi \boxed</a:t>
+            </a:r>
+          </a:p>
+        </p:txBody>
+      </p:sp>
+      <p:sp>
+        <p:nvSpPr>
+          <p:cNvPr id="14" name="TextBox 13"/>
+          <p:cNvSpPr txBox="1"/>
+          <p:nvPr/>
+        </p:nvSpPr>
+        <p:spPr>
+          <a:xfrm>
+            <a:off x="6480100" y="3800000"/>
+            <a:ext cx="4600000" cy="700000"/>
+          </a:xfrm>
+          <a:prstGeom prst="rect">
+            <a:avLst/>
+          </a:prstGeom>
+          <a:noFill/>
+        </p:spPr>
+        <p:txBody>
+          <a:bodyPr wrap="square" lIns="0" rIns="0" tIns="0" bIns="0">
+            <a:spAutoFit/>
+          </a:bodyPr>
+          <a:lstStyle/>
+          <a:p>
+            <a:pPr algn="l">
+              <a:spcAft>
+                <a:spcPts val="600"/>
+              </a:spcAft>
+            </a:pPr>
+            <a:r>
+              <a:rPr sz="4400" b="1">
+                <a:solidFill>
+                  <a:srgbClr val="0173B2"/>
+                </a:solidFill>
+                <a:latin typeface="Georgia"/>
+              </a:rPr>
+              <a:t>4,4%</a:t>
+            </a:r>
+          </a:p>
+        </p:txBody>
+      </p:sp>
+      <p:sp>
+        <p:nvSpPr>
+          <p:cNvPr id="15" name="TextBox 14"/>
+          <p:cNvSpPr txBox="1"/>
+          <p:nvPr/>
+        </p:nvSpPr>
+        <p:spPr>
+          <a:xfrm>
+            <a:off x="6480100" y="4550000"/>
+            <a:ext cx="4600000" cy="550000"/>
+          </a:xfrm>
+          <a:prstGeom prst="rect">
+            <a:avLst/>
+          </a:prstGeom>
+          <a:noFill/>
+        </p:spPr>
+        <p:txBody>
+          <a:bodyPr wrap="square" lIns="0" rIns="0" tIns="0" bIns="0">
+            <a:spAutoFit/>
+          </a:bodyPr>
+          <a:lstStyle/>
+          <a:p>
+            <a:pPr algn="l">
+              <a:lnSpc>
+                <a:spcPct val="135000"/>
+              </a:lnSpc>
+              <a:spcAft>
+                <a:spcPts val="600"/>
+              </a:spcAft>
+            </a:pPr>
+            <a:r>
+              <a:rPr sz="1250" b="0">
+                <a:solidFill>
+                  <a:srgbClr val="3F4149"/>
+                </a:solidFill>
+                <a:latin typeface="Helvetica Neue"/>
+              </a:rPr>
+              <a:t>số bài bị gạch oan mỗi vòng</a:t>
+            </a:r>
+          </a:p>
+          <a:p>
+            <a:pPr algn="l">
+              <a:lnSpc>
+                <a:spcPct val="135000"/>
+              </a:lnSpc>
+              <a:spcAft>
+                <a:spcPts val="600"/>
+              </a:spcAft>
+            </a:pPr>
+            <a:r>
+              <a:rPr sz="1250" b="0">
+                <a:solidFill>
+                  <a:srgbClr val="3F4149"/>
+                </a:solidFill>
+                <a:latin typeface="Helvetica Neue"/>
+              </a:rPr>
+              <a:t>→ nhiều gấp 8 lần, liệu có hại?</a:t>
+            </a:r>
+          </a:p>
+        </p:txBody>
+      </p:sp>
+      <p:sp>
+        <p:nvSpPr>
+          <p:cNvPr id="16" name="TextBox 15"/>
+          <p:cNvSpPr txBox="1"/>
+          <p:nvPr/>
+        </p:nvSpPr>
+        <p:spPr>
+          <a:xfrm>
+            <a:off x="800100" y="5500000"/>
+            <a:ext cx="10591495" cy="500000"/>
+          </a:xfrm>
+          <a:prstGeom prst="rect">
+            <a:avLst/>
+          </a:prstGeom>
+          <a:noFill/>
+        </p:spPr>
+        <p:txBody>
+          <a:bodyPr wrap="square" lIns="0" rIns="0" tIns="0" bIns="0">
+            <a:spAutoFit/>
+          </a:bodyPr>
+          <a:lstStyle/>
+          <a:p>
+            <a:pPr algn="l">
+              <a:lnSpc>
+                <a:spcPct val="140000"/>
+              </a:lnSpc>
               <a:spcAft>
                 <a:spcPts val="600"/>
               </a:spcAft>
@@ -6894,50 +5978,30 @@
             <a:r>
               <a:rPr sz="1250" b="1">
                 <a:solidFill>
-                  <a:srgbClr val="0173B2"/>
-                </a:solidFill>
-                <a:latin typeface="Helvetica Neue"/>
-              </a:rPr>
-              <a:t>Vùng đáng quan tâm — cách viết vừa phổ biến vừa bị gạch — đã tìm ra nguyên nhân và vá xong.</a:t>
-            </a:r>
-          </a:p>
-        </p:txBody>
-      </p:sp>
-      <p:sp>
-        <p:nvSpPr>
-          <p:cNvPr id="43" name="TextBox 42"/>
-          <p:cNvSpPr txBox="1"/>
-          <p:nvPr/>
-        </p:nvSpPr>
-        <p:spPr>
-          <a:xfrm>
-            <a:off x="800100" y="6560000"/>
-            <a:ext cx="10591495" cy="260000"/>
-          </a:xfrm>
-          <a:prstGeom prst="rect">
-            <a:avLst/>
-          </a:prstGeom>
-          <a:noFill/>
-        </p:spPr>
-        <p:txBody>
-          <a:bodyPr wrap="square" lIns="0" rIns="0" tIns="0" bIns="0">
-            <a:spAutoFit/>
-          </a:bodyPr>
-          <a:lstStyle/>
-          <a:p>
-            <a:pPr algn="l">
-              <a:spcAft>
-                <a:spcPts val="600"/>
-              </a:spcAft>
-            </a:pPr>
-            <a:r>
-              <a:rPr sz="950" b="0">
-                <a:solidFill>
-                  <a:srgbClr val="8A8D96"/>
-                </a:solidFill>
-                <a:latin typeface="Helvetica Neue"/>
-              </a:rPr>
-              <a:t>Cột \boxed đã sửa: 8,5%/4,4% là phần lỗi thật do boxed gây ra (17/200), tách khỏi 24/200 đề gốc vốn đã không đọc được kể cả không đóng hộp (lỗi khác, đã biết từ trước).</a:t>
+                  <a:srgbClr val="16161A"/>
+                </a:solidFill>
+                <a:latin typeface="Helvetica Neue"/>
+              </a:rPr>
+              <a:t>Nếu lỗi phổ biến gây hại còn lỗi hiếm thì không, sẽ biết được ngưỡng: lỗi máy chấm xảy ra</a:t>
+            </a:r>
+          </a:p>
+          <a:p>
+            <a:pPr algn="l">
+              <a:lnSpc>
+                <a:spcPct val="140000"/>
+              </a:lnSpc>
+              <a:spcAft>
+                <a:spcPts val="600"/>
+              </a:spcAft>
+            </a:pPr>
+            <a:r>
+              <a:rPr sz="1250" b="1">
+                <a:solidFill>
+                  <a:srgbClr val="16161A"/>
+                </a:solidFill>
+                <a:latin typeface="Helvetica Neue"/>
+              </a:rPr>
+              <a:t>bao nhiêu thì bắt đầu đáng lo. Đây là con số người làm tự học có thể dùng ngay.</a:t>
             </a:r>
           </a:p>
         </p:txBody>
@@ -6994,7 +6058,7 @@
                 </a:solidFill>
                 <a:latin typeface="Helvetica Neue"/>
               </a:rPr>
-              <a:t>PHÁT HIỆN THỨ HAI</a:t>
+              <a:t>LỖI THỨ HAI</a:t>
             </a:r>
           </a:p>
         </p:txBody>
@@ -7075,7 +6139,7 @@
                 </a:solidFill>
                 <a:latin typeface="Georgia"/>
               </a:rPr>
-              <a:t>Một lỗi đọc khác — không liên quan \dfrac</a:t>
+              <a:t>Máy chấm đọc đáp án trong sách bị thiếu</a:t>
             </a:r>
           </a:p>
         </p:txBody>
@@ -7088,36 +6152,33 @@
         </p:nvSpPr>
         <p:spPr>
           <a:xfrm>
-            <a:off x="800100" y="1580000"/>
-            <a:ext cx="10591495" cy="500000"/>
-          </a:xfrm>
-          <a:prstGeom prst="rect">
-            <a:avLst/>
-          </a:prstGeom>
-          <a:noFill/>
-        </p:spPr>
-        <p:txBody>
-          <a:bodyPr wrap="square" lIns="0" rIns="0" tIns="0" bIns="0">
-            <a:spAutoFit/>
-          </a:bodyPr>
-          <a:lstStyle/>
-          <a:p>
-            <a:pPr algn="l">
-              <a:lnSpc>
-                <a:spcPct val="140000"/>
-              </a:lnSpc>
-              <a:spcAft>
-                <a:spcPts val="600"/>
-              </a:spcAft>
-            </a:pPr>
-            <a:r>
-              <a:rPr sz="1300" b="0">
+            <a:off x="800100" y="1600000"/>
+            <a:ext cx="10591495" cy="400000"/>
+          </a:xfrm>
+          <a:prstGeom prst="rect">
+            <a:avLst/>
+          </a:prstGeom>
+          <a:noFill/>
+        </p:spPr>
+        <p:txBody>
+          <a:bodyPr wrap="square" lIns="0" rIns="0" tIns="0" bIns="0">
+            <a:spAutoFit/>
+          </a:bodyPr>
+          <a:lstStyle/>
+          <a:p>
+            <a:pPr algn="l">
+              <a:spcAft>
+                <a:spcPts val="600"/>
+              </a:spcAft>
+            </a:pPr>
+            <a:r>
+              <a:rPr sz="1350" b="0">
                 <a:solidFill>
                   <a:srgbClr val="3F4149"/>
                 </a:solidFill>
                 <a:latin typeface="Helvetica Neue"/>
               </a:rPr>
-              <a:t>Đi tìm ứng viên cho vùng \boxed thì lộ ra một lỗi đọc độc lập, cũng làm máy chấm gạch oan bài đúng.</a:t>
+              <a:t>Ví dụ một bài có đáp án là 3√13. Model làm đúng, nhưng vẫn bị gạch:</a:t>
             </a:r>
           </a:p>
         </p:txBody>
@@ -7130,7 +6191,7 @@
         </p:nvSpPr>
         <p:spPr>
           <a:xfrm>
-            <a:off x="680100" y="2200000"/>
+            <a:off x="680100" y="2150000"/>
             <a:ext cx="10831495" cy="1150000"/>
           </a:xfrm>
           <a:prstGeom prst="roundRect">
@@ -7176,7 +6237,7 @@
         </p:nvSpPr>
         <p:spPr>
           <a:xfrm>
-            <a:off x="920100" y="2340000"/>
+            <a:off x="920100" y="2300000"/>
             <a:ext cx="10351495" cy="300000"/>
           </a:xfrm>
           <a:prstGeom prst="rect">
@@ -7202,7 +6263,7 @@
                 </a:solidFill>
                 <a:latin typeface="Helvetica Neue"/>
               </a:rPr>
-              <a:t>ĐÁP ÁN TRONG SÁCH — lưu trần, không dấu ngoặc bao</a:t>
+              <a:t>ĐÁP ÁN TRONG SÁCH (lưu dạng trần)</a:t>
             </a:r>
           </a:p>
         </p:txBody>
@@ -7215,7 +6276,7 @@
         </p:nvSpPr>
         <p:spPr>
           <a:xfrm>
-            <a:off x="920100" y="2680000"/>
+            <a:off x="920100" y="2650000"/>
             <a:ext cx="4600000" cy="500000"/>
           </a:xfrm>
           <a:prstGeom prst="rect">
@@ -7254,7 +6315,7 @@
         </p:nvSpPr>
         <p:spPr>
           <a:xfrm>
-            <a:off x="5900100" y="2680000"/>
+            <a:off x="5900100" y="2650000"/>
             <a:ext cx="5200000" cy="500000"/>
           </a:xfrm>
           <a:prstGeom prst="rect">
@@ -7274,13 +6335,13 @@
               </a:spcAft>
             </a:pPr>
             <a:r>
-              <a:rPr sz="1500" b="1">
+              <a:rPr sz="1700" b="1">
                 <a:solidFill>
                   <a:srgbClr val="B85C00"/>
                 </a:solidFill>
                 <a:latin typeface="Helvetica Neue"/>
               </a:rPr>
-              <a:t>máy chỉ đọc được:  3</a:t>
+              <a:t>máy đọc được:  3</a:t>
             </a:r>
           </a:p>
         </p:txBody>
@@ -7293,7 +6354,7 @@
         </p:nvSpPr>
         <p:spPr>
           <a:xfrm>
-            <a:off x="680100" y="3500000"/>
+            <a:off x="680100" y="3450000"/>
             <a:ext cx="10831495" cy="1150000"/>
           </a:xfrm>
           <a:prstGeom prst="roundRect">
@@ -7339,7 +6400,7 @@
         </p:nvSpPr>
         <p:spPr>
           <a:xfrm>
-            <a:off x="920100" y="3640000"/>
+            <a:off x="920100" y="3600000"/>
             <a:ext cx="10351495" cy="300000"/>
           </a:xfrm>
           <a:prstGeom prst="rect">
@@ -7365,7 +6426,7 @@
                 </a:solidFill>
                 <a:latin typeface="Helvetica Neue"/>
               </a:rPr>
-              <a:t>MODEL VIẾT — đề bài luôn yêu cầu đóng \boxed</a:t>
+              <a:t>BÀI MODEL LÀM (có \boxed theo yêu cầu đề)</a:t>
             </a:r>
           </a:p>
         </p:txBody>
@@ -7378,7 +6439,7 @@
         </p:nvSpPr>
         <p:spPr>
           <a:xfrm>
-            <a:off x="920100" y="3980000"/>
+            <a:off x="920100" y="3950000"/>
             <a:ext cx="4600000" cy="500000"/>
           </a:xfrm>
           <a:prstGeom prst="rect">
@@ -7417,7 +6478,7 @@
         </p:nvSpPr>
         <p:spPr>
           <a:xfrm>
-            <a:off x="5900100" y="3980000"/>
+            <a:off x="5900100" y="3950000"/>
             <a:ext cx="5200000" cy="500000"/>
           </a:xfrm>
           <a:prstGeom prst="rect">
@@ -7437,129 +6498,121 @@
               </a:spcAft>
             </a:pPr>
             <a:r>
-              <a:rPr sz="1500" b="1">
+              <a:rPr sz="1700" b="1">
                 <a:solidFill>
                   <a:srgbClr val="029E73"/>
                 </a:solidFill>
                 <a:latin typeface="Helvetica Neue"/>
               </a:rPr>
-              <a:t>máy đọc đầy đủ:  3\sqrt{13}</a:t>
-            </a:r>
-          </a:p>
-        </p:txBody>
-      </p:sp>
-      <p:cxnSp>
-        <p:nvCxnSpPr>
-          <p:cNvPr id="14" name="Connector 13"/>
-          <p:cNvCxnSpPr/>
-          <p:nvPr/>
-        </p:nvCxnSpPr>
-        <p:spPr>
-          <a:xfrm>
-            <a:off x="800100" y="4950000"/>
-            <a:ext cx="10591495" cy="0"/>
-          </a:xfrm>
-          <a:prstGeom prst="line">
-            <a:avLst/>
-          </a:prstGeom>
-          <a:ln w="9525">
-            <a:solidFill>
-              <a:srgbClr val="E6E6EA"/>
-            </a:solidFill>
+              <a:t>máy đọc được:  3√13</a:t>
+            </a:r>
+          </a:p>
+        </p:txBody>
+      </p:sp>
+      <p:sp>
+        <p:nvSpPr>
+          <p:cNvPr id="14" name="TextBox 13"/>
+          <p:cNvSpPr txBox="1"/>
+          <p:nvPr/>
+        </p:nvSpPr>
+        <p:spPr>
+          <a:xfrm>
+            <a:off x="800100" y="4900000"/>
+            <a:ext cx="10591495" cy="700000"/>
+          </a:xfrm>
+          <a:prstGeom prst="rect">
+            <a:avLst/>
+          </a:prstGeom>
+          <a:noFill/>
+        </p:spPr>
+        <p:txBody>
+          <a:bodyPr wrap="square" lIns="0" rIns="0" tIns="0" bIns="0">
+            <a:spAutoFit/>
+          </a:bodyPr>
+          <a:lstStyle/>
+          <a:p>
+            <a:pPr algn="l">
+              <a:lnSpc>
+                <a:spcPct val="145000"/>
+              </a:lnSpc>
+              <a:spcAft>
+                <a:spcPts val="600"/>
+              </a:spcAft>
+            </a:pPr>
+            <a:r>
+              <a:rPr sz="1300" b="0">
+                <a:solidFill>
+                  <a:srgbClr val="3F4149"/>
+                </a:solidFill>
+                <a:latin typeface="Helvetica Neue"/>
+              </a:rPr>
+              <a:t>Máy chấm chỉ đọc đầy đủ khi đáp án nằm trong \boxed. Đáp án trong sách không có \boxed nên bị</a:t>
+            </a:r>
+          </a:p>
+          <a:p>
+            <a:pPr algn="l">
+              <a:lnSpc>
+                <a:spcPct val="145000"/>
+              </a:lnSpc>
+              <a:spcAft>
+                <a:spcPts val="600"/>
+              </a:spcAft>
+            </a:pPr>
+            <a:r>
+              <a:rPr sz="1300" b="0">
+                <a:solidFill>
+                  <a:srgbClr val="3F4149"/>
+                </a:solidFill>
+                <a:latin typeface="Helvetica Neue"/>
+              </a:rPr>
+              <a:t>đọc thiếu, thành ra "3" khác "3√13". Lỗi này gặp ở 8,5% số đề MATH-500.</a:t>
+            </a:r>
+          </a:p>
+        </p:txBody>
+      </p:sp>
+      <p:sp>
+        <p:nvSpPr>
+          <p:cNvPr id="15" name="Rounded Rectangle 14"/>
+          <p:cNvSpPr/>
+          <p:nvPr/>
+        </p:nvSpPr>
+        <p:spPr>
+          <a:xfrm>
+            <a:off x="680100" y="5850000"/>
+            <a:ext cx="10831495" cy="520000"/>
+          </a:xfrm>
+          <a:prstGeom prst="roundRect">
+            <a:avLst>
+              <a:gd name="adj" fmla="val 4000"/>
+            </a:avLst>
+          </a:prstGeom>
+          <a:solidFill>
+            <a:srgbClr val="F0F6FA"/>
+          </a:solidFill>
+          <a:ln>
+            <a:noFill/>
           </a:ln>
+          <a:effectLst/>
         </p:spPr>
         <p:style>
-          <a:lnRef idx="2">
+          <a:lnRef idx="1">
             <a:schemeClr val="accent1"/>
           </a:lnRef>
-          <a:fillRef idx="0">
+          <a:fillRef idx="3">
             <a:schemeClr val="accent1"/>
           </a:fillRef>
-          <a:effectRef idx="1">
+          <a:effectRef idx="2">
             <a:schemeClr val="accent1"/>
           </a:effectRef>
           <a:fontRef idx="minor">
-            <a:schemeClr val="tx1"/>
+            <a:schemeClr val="lt1"/>
           </a:fontRef>
         </p:style>
-      </p:cxnSp>
-      <p:sp>
-        <p:nvSpPr>
-          <p:cNvPr id="15" name="TextBox 14"/>
-          <p:cNvSpPr txBox="1"/>
-          <p:nvPr/>
-        </p:nvSpPr>
-        <p:spPr>
-          <a:xfrm>
-            <a:off x="800100" y="5120000"/>
-            <a:ext cx="10591495" cy="700000"/>
-          </a:xfrm>
-          <a:prstGeom prst="rect">
-            <a:avLst/>
-          </a:prstGeom>
-          <a:noFill/>
-        </p:spPr>
-        <p:txBody>
-          <a:bodyPr wrap="square" lIns="0" rIns="0" tIns="0" bIns="0">
-            <a:spAutoFit/>
-          </a:bodyPr>
-          <a:lstStyle/>
-          <a:p>
-            <a:pPr algn="l">
-              <a:lnSpc>
-                <a:spcPct val="140000"/>
-              </a:lnSpc>
-              <a:spcAft>
-                <a:spcPts val="600"/>
-              </a:spcAft>
-            </a:pPr>
-            <a:r>
-              <a:rPr sz="1250" b="0">
-                <a:solidFill>
-                  <a:srgbClr val="3F4149"/>
-                </a:solidFill>
-                <a:latin typeface="Helvetica Neue"/>
-              </a:rPr>
-              <a:t>math-verify chỉ bật chế độ đọc đầy đủ (căn thức, số phức, cặp số...) khi công thức nằm trong một dấu</a:t>
-            </a:r>
-          </a:p>
-          <a:p>
-            <a:pPr algn="l">
-              <a:lnSpc>
-                <a:spcPct val="140000"/>
-              </a:lnSpc>
-              <a:spcAft>
-                <a:spcPts val="600"/>
-              </a:spcAft>
-            </a:pPr>
-            <a:r>
-              <a:rPr sz="1250" b="0">
-                <a:solidFill>
-                  <a:srgbClr val="3F4149"/>
-                </a:solidFill>
-                <a:latin typeface="Helvetica Neue"/>
-              </a:rPr>
-              <a:t>ngoặc bao nhận diện được — \boxed hoặc $...$. Đề bài lưu trần nên luôn rơi vào chế độ rút gọn, còn</a:t>
-            </a:r>
-          </a:p>
-          <a:p>
-            <a:pPr algn="l">
-              <a:lnSpc>
-                <a:spcPct val="140000"/>
-              </a:lnSpc>
-              <a:spcAft>
-                <a:spcPts val="600"/>
-              </a:spcAft>
-            </a:pPr>
-            <a:r>
-              <a:rPr sz="1250" b="0">
-                <a:solidFill>
-                  <a:srgbClr val="3F4149"/>
-                </a:solidFill>
-                <a:latin typeface="Helvetica Neue"/>
-              </a:rPr>
-              <a:t>bài model luôn có \boxed nên đọc đủ. Cùng một giá trị nhưng bị đọc thành hai kiểu khác nhau.</a:t>
-            </a:r>
+        <p:txBody>
+          <a:bodyPr rtlCol="0" anchor="ctr"/>
+          <a:lstStyle/>
+          <a:p>
+            <a:pPr algn="ctr"/>
           </a:p>
         </p:txBody>
       </p:sp>
@@ -7571,33 +6624,33 @@
         </p:nvSpPr>
         <p:spPr>
           <a:xfrm>
-            <a:off x="800100" y="6220000"/>
-            <a:ext cx="10591495" cy="300000"/>
-          </a:xfrm>
-          <a:prstGeom prst="rect">
-            <a:avLst/>
-          </a:prstGeom>
-          <a:noFill/>
-        </p:spPr>
-        <p:txBody>
-          <a:bodyPr wrap="square" lIns="0" rIns="0" tIns="0" bIns="0">
-            <a:spAutoFit/>
-          </a:bodyPr>
-          <a:lstStyle/>
-          <a:p>
-            <a:pPr algn="l">
-              <a:spcAft>
-                <a:spcPts val="600"/>
-              </a:spcAft>
-            </a:pPr>
-            <a:r>
-              <a:rPr sz="1000" b="0">
-                <a:solidFill>
-                  <a:srgbClr val="8A8D96"/>
-                </a:solidFill>
-                <a:latin typeface="Helvetica Neue"/>
-              </a:rPr>
-              <a:t>Đã xác nhận trực tiếp bằng math_verify.parse(), không phải suy đoán từ hành vi bên ngoài.</a:t>
+            <a:off x="920100" y="5980000"/>
+            <a:ext cx="10351495" cy="300000"/>
+          </a:xfrm>
+          <a:prstGeom prst="rect">
+            <a:avLst/>
+          </a:prstGeom>
+          <a:noFill/>
+        </p:spPr>
+        <p:txBody>
+          <a:bodyPr wrap="square" lIns="0" rIns="0" tIns="0" bIns="0">
+            <a:spAutoFit/>
+          </a:bodyPr>
+          <a:lstStyle/>
+          <a:p>
+            <a:pPr algn="l">
+              <a:spcAft>
+                <a:spcPts val="600"/>
+              </a:spcAft>
+            </a:pPr>
+            <a:r>
+              <a:rPr sz="1200" b="1">
+                <a:solidFill>
+                  <a:srgbClr val="0173B2"/>
+                </a:solidFill>
+                <a:latin typeface="Helvetica Neue"/>
+              </a:rPr>
+              <a:t>Đã sửa: bọc đáp án trong sách vào \boxed trước khi chấm. Đã kiểm tra, không làm hỏng chỗ khác.</a:t>
             </a:r>
           </a:p>
         </p:txBody>
@@ -7654,7 +6707,7 @@
                 </a:solidFill>
                 <a:latin typeface="Helvetica Neue"/>
               </a:rPr>
-              <a:t>ĐÃ VÁ, ĐÃ KIỂM TRA</a:t>
+              <a:t>KẾ HOẠCH</a:t>
             </a:r>
           </a:p>
         </p:txBody>
@@ -7735,160 +6788,21 @@
                 </a:solidFill>
                 <a:latin typeface="Georgia"/>
               </a:rPr>
-              <a:t>Chỉ còn thiếu lượt chạy GPU</a:t>
-            </a:r>
-          </a:p>
-        </p:txBody>
-      </p:sp>
-      <p:sp>
-        <p:nvSpPr>
-          <p:cNvPr id="5" name="TextBox 4"/>
-          <p:cNvSpPr txBox="1"/>
-          <p:nvPr/>
-        </p:nvSpPr>
-        <p:spPr>
-          <a:xfrm>
-            <a:off x="800100" y="1580000"/>
-            <a:ext cx="10591495" cy="500000"/>
-          </a:xfrm>
-          <a:prstGeom prst="rect">
-            <a:avLst/>
-          </a:prstGeom>
-          <a:noFill/>
-        </p:spPr>
-        <p:txBody>
-          <a:bodyPr wrap="square" lIns="0" rIns="0" tIns="0" bIns="0">
-            <a:spAutoFit/>
-          </a:bodyPr>
-          <a:lstStyle/>
-          <a:p>
-            <a:pPr algn="l">
-              <a:lnSpc>
-                <a:spcPct val="140000"/>
-              </a:lnSpc>
-              <a:spcAft>
-                <a:spcPts val="600"/>
-              </a:spcAft>
-            </a:pPr>
-            <a:r>
-              <a:rPr sz="1250" b="0">
-                <a:solidFill>
-                  <a:srgbClr val="3F4149"/>
-                </a:solidFill>
-                <a:latin typeface="Helvetica Neue"/>
-              </a:rPr>
-              <a:t>Cách vá: nếu bài model có \boxed mà đáp án sách chưa tự đóng hộp, bọc đáp án sách vào \boxed trước</a:t>
-            </a:r>
-          </a:p>
-          <a:p>
-            <a:pPr algn="l">
-              <a:lnSpc>
-                <a:spcPct val="140000"/>
-              </a:lnSpc>
-              <a:spcAft>
-                <a:spcPts val="600"/>
-              </a:spcAft>
-            </a:pPr>
-            <a:r>
-              <a:rPr sz="1250" b="0">
-                <a:solidFill>
-                  <a:srgbClr val="3F4149"/>
-                </a:solidFill>
-                <a:latin typeface="Helvetica Neue"/>
-              </a:rPr>
-              <a:t>khi so — cho cả hai bên cùng một đường đọc. Chỉ kích hoạt khi model có \boxed, không đụng kiểu viết khác.</a:t>
-            </a:r>
-          </a:p>
-        </p:txBody>
-      </p:sp>
-      <p:sp>
-        <p:nvSpPr>
-          <p:cNvPr id="6" name="TextBox 5"/>
-          <p:cNvSpPr txBox="1"/>
-          <p:nvPr/>
-        </p:nvSpPr>
-        <p:spPr>
-          <a:xfrm>
-            <a:off x="800100" y="2280000"/>
-            <a:ext cx="6200000" cy="300000"/>
-          </a:xfrm>
-          <a:prstGeom prst="rect">
-            <a:avLst/>
-          </a:prstGeom>
-          <a:noFill/>
-        </p:spPr>
-        <p:txBody>
-          <a:bodyPr wrap="square" lIns="0" rIns="0" tIns="0" bIns="0">
-            <a:spAutoFit/>
-          </a:bodyPr>
-          <a:lstStyle/>
-          <a:p>
-            <a:pPr algn="l">
-              <a:spcAft>
-                <a:spcPts val="600"/>
-              </a:spcAft>
-            </a:pPr>
-            <a:r>
-              <a:rPr sz="1100" b="1">
-                <a:solidFill>
-                  <a:srgbClr val="8A8D96"/>
-                </a:solidFill>
-                <a:latin typeface="Helvetica Neue"/>
-              </a:rPr>
-              <a:t>SỐ ĐO</a:t>
-            </a:r>
-          </a:p>
-        </p:txBody>
-      </p:sp>
-      <p:sp>
-        <p:nvSpPr>
-          <p:cNvPr id="7" name="TextBox 6"/>
-          <p:cNvSpPr txBox="1"/>
-          <p:nvPr/>
-        </p:nvSpPr>
-        <p:spPr>
-          <a:xfrm>
-            <a:off x="7200100" y="2280000"/>
-            <a:ext cx="3000000" cy="300000"/>
-          </a:xfrm>
-          <a:prstGeom prst="rect">
-            <a:avLst/>
-          </a:prstGeom>
-          <a:noFill/>
-        </p:spPr>
-        <p:txBody>
-          <a:bodyPr wrap="square" lIns="0" rIns="0" tIns="0" bIns="0">
-            <a:spAutoFit/>
-          </a:bodyPr>
-          <a:lstStyle/>
-          <a:p>
-            <a:pPr algn="l">
-              <a:spcAft>
-                <a:spcPts val="600"/>
-              </a:spcAft>
-            </a:pPr>
-            <a:r>
-              <a:rPr sz="1100" b="1">
-                <a:solidFill>
-                  <a:srgbClr val="8A8D96"/>
-                </a:solidFill>
-                <a:latin typeface="Helvetica Neue"/>
-              </a:rPr>
-              <a:t>GIÁ TRỊ</a:t>
-            </a:r>
-          </a:p>
-        </p:txBody>
-      </p:sp>
-      <p:sp>
-        <p:nvSpPr>
-          <p:cNvPr id="8" name="Rounded Rectangle 7"/>
+              <a:t>Một lần chạy, so với kết quả đã có</a:t>
+            </a:r>
+          </a:p>
+        </p:txBody>
+      </p:sp>
+      <p:sp>
+        <p:nvSpPr>
+          <p:cNvPr id="5" name="Rounded Rectangle 4"/>
           <p:cNvSpPr/>
           <p:nvPr/>
         </p:nvSpPr>
         <p:spPr>
           <a:xfrm>
-            <a:off x="680100" y="2660000"/>
-            <a:ext cx="10831495" cy="1480000"/>
+            <a:off x="800100" y="1650000"/>
+            <a:ext cx="3300000" cy="1500000"/>
           </a:xfrm>
           <a:prstGeom prst="roundRect">
             <a:avLst>
@@ -7927,683 +6841,153 @@
       </p:sp>
       <p:sp>
         <p:nvSpPr>
-          <p:cNvPr id="9" name="TextBox 8"/>
-          <p:cNvSpPr txBox="1"/>
-          <p:nvPr/>
-        </p:nvSpPr>
-        <p:spPr>
-          <a:xfrm>
-            <a:off x="800100" y="2775000"/>
-            <a:ext cx="6200000" cy="330000"/>
-          </a:xfrm>
-          <a:prstGeom prst="rect">
-            <a:avLst/>
-          </a:prstGeom>
-          <a:noFill/>
-        </p:spPr>
-        <p:txBody>
-          <a:bodyPr wrap="square" lIns="0" rIns="0" tIns="0" bIns="0">
-            <a:spAutoFit/>
-          </a:bodyPr>
-          <a:lstStyle/>
-          <a:p>
-            <a:pPr algn="l">
-              <a:spcAft>
-                <a:spcPts val="600"/>
-              </a:spcAft>
-            </a:pPr>
-            <a:r>
-              <a:rPr sz="1150" b="0">
+          <p:cNvPr id="6" name="TextBox 5"/>
+          <p:cNvSpPr txBox="1"/>
+          <p:nvPr/>
+        </p:nvSpPr>
+        <p:spPr>
+          <a:xfrm>
+            <a:off x="1040100" y="1800000"/>
+            <a:ext cx="400000" cy="330000"/>
+          </a:xfrm>
+          <a:prstGeom prst="rect">
+            <a:avLst/>
+          </a:prstGeom>
+          <a:noFill/>
+        </p:spPr>
+        <p:txBody>
+          <a:bodyPr wrap="square" lIns="0" rIns="0" tIns="0" bIns="0">
+            <a:spAutoFit/>
+          </a:bodyPr>
+          <a:lstStyle/>
+          <a:p>
+            <a:pPr algn="l">
+              <a:spcAft>
+                <a:spcPts val="600"/>
+              </a:spcAft>
+            </a:pPr>
+            <a:r>
+              <a:rPr sz="1700" b="1">
+                <a:solidFill>
+                  <a:srgbClr val="9E2B34"/>
+                </a:solidFill>
+                <a:latin typeface="Georgia"/>
+              </a:rPr>
+              <a:t>1</a:t>
+            </a:r>
+          </a:p>
+        </p:txBody>
+      </p:sp>
+      <p:sp>
+        <p:nvSpPr>
+          <p:cNvPr id="7" name="TextBox 6"/>
+          <p:cNvSpPr txBox="1"/>
+          <p:nvPr/>
+        </p:nvSpPr>
+        <p:spPr>
+          <a:xfrm>
+            <a:off x="1040100" y="2200000"/>
+            <a:ext cx="2900000" cy="330000"/>
+          </a:xfrm>
+          <a:prstGeom prst="rect">
+            <a:avLst/>
+          </a:prstGeom>
+          <a:noFill/>
+        </p:spPr>
+        <p:txBody>
+          <a:bodyPr wrap="square" lIns="0" rIns="0" tIns="0" bIns="0">
+            <a:spAutoFit/>
+          </a:bodyPr>
+          <a:lstStyle/>
+          <a:p>
+            <a:pPr algn="l">
+              <a:spcAft>
+                <a:spcPts val="600"/>
+              </a:spcAft>
+            </a:pPr>
+            <a:r>
+              <a:rPr sz="1450" b="1">
+                <a:solidFill>
+                  <a:srgbClr val="16161A"/>
+                </a:solidFill>
+                <a:latin typeface="Helvetica Neue"/>
+              </a:rPr>
+              <a:t>Giữ nguyên mọi thứ</a:t>
+            </a:r>
+          </a:p>
+        </p:txBody>
+      </p:sp>
+      <p:sp>
+        <p:nvSpPr>
+          <p:cNvPr id="8" name="TextBox 7"/>
+          <p:cNvSpPr txBox="1"/>
+          <p:nvPr/>
+        </p:nvSpPr>
+        <p:spPr>
+          <a:xfrm>
+            <a:off x="1040100" y="2580000"/>
+            <a:ext cx="2900000" cy="550000"/>
+          </a:xfrm>
+          <a:prstGeom prst="rect">
+            <a:avLst/>
+          </a:prstGeom>
+          <a:noFill/>
+        </p:spPr>
+        <p:txBody>
+          <a:bodyPr wrap="square" lIns="0" rIns="0" tIns="0" bIns="0">
+            <a:spAutoFit/>
+          </a:bodyPr>
+          <a:lstStyle/>
+          <a:p>
+            <a:pPr algn="l">
+              <a:lnSpc>
+                <a:spcPct val="130000"/>
+              </a:lnSpc>
+              <a:spcAft>
+                <a:spcPts val="600"/>
+              </a:spcAft>
+            </a:pPr>
+            <a:r>
+              <a:rPr sz="1200" b="0">
                 <a:solidFill>
                   <a:srgbClr val="3F4149"/>
                 </a:solidFill>
                 <a:latin typeface="Helvetica Neue"/>
               </a:rPr>
-              <a:t>Mức nặng thật (đã loại nhiễu khỏi 20% ban đầu)</a:t>
-            </a:r>
-          </a:p>
-        </p:txBody>
-      </p:sp>
-      <p:sp>
-        <p:nvSpPr>
-          <p:cNvPr id="10" name="TextBox 9"/>
-          <p:cNvSpPr txBox="1"/>
-          <p:nvPr/>
-        </p:nvSpPr>
-        <p:spPr>
-          <a:xfrm>
-            <a:off x="7200100" y="2775000"/>
-            <a:ext cx="3000000" cy="330000"/>
-          </a:xfrm>
-          <a:prstGeom prst="rect">
-            <a:avLst/>
-          </a:prstGeom>
-          <a:noFill/>
-        </p:spPr>
-        <p:txBody>
-          <a:bodyPr wrap="square" lIns="0" rIns="0" tIns="0" bIns="0">
-            <a:spAutoFit/>
-          </a:bodyPr>
-          <a:lstStyle/>
-          <a:p>
-            <a:pPr algn="l">
-              <a:spcAft>
-                <a:spcPts val="600"/>
-              </a:spcAft>
-            </a:pPr>
-            <a:r>
-              <a:rPr sz="1150" b="0">
+              <a:t>Cùng model, cùng bộ đề, cùng</a:t>
+            </a:r>
+          </a:p>
+          <a:p>
+            <a:pPr algn="l">
+              <a:lnSpc>
+                <a:spcPct val="130000"/>
+              </a:lnSpc>
+              <a:spcAft>
+                <a:spcPts val="600"/>
+              </a:spcAft>
+            </a:pPr>
+            <a:r>
+              <a:rPr sz="1200" b="0">
                 <a:solidFill>
                   <a:srgbClr val="3F4149"/>
                 </a:solidFill>
                 <a:latin typeface="Helvetica Neue"/>
               </a:rPr>
-              <a:t>8,5%</a:t>
-            </a:r>
-          </a:p>
-        </p:txBody>
-      </p:sp>
-      <p:cxnSp>
-        <p:nvCxnSpPr>
-          <p:cNvPr id="11" name="Connector 10"/>
-          <p:cNvCxnSpPr/>
-          <p:nvPr/>
-        </p:nvCxnSpPr>
-        <p:spPr>
-          <a:xfrm>
-            <a:off x="760100" y="3060000"/>
-            <a:ext cx="10671495" cy="0"/>
-          </a:xfrm>
-          <a:prstGeom prst="line">
-            <a:avLst/>
-          </a:prstGeom>
-          <a:ln w="9525">
-            <a:solidFill>
-              <a:srgbClr val="E9E9ED"/>
-            </a:solidFill>
-          </a:ln>
-        </p:spPr>
-        <p:style>
-          <a:lnRef idx="2">
-            <a:schemeClr val="accent1"/>
-          </a:lnRef>
-          <a:fillRef idx="0">
-            <a:schemeClr val="accent1"/>
-          </a:fillRef>
-          <a:effectRef idx="1">
-            <a:schemeClr val="accent1"/>
-          </a:effectRef>
-          <a:fontRef idx="minor">
-            <a:schemeClr val="tx1"/>
-          </a:fontRef>
-        </p:style>
-      </p:cxnSp>
-      <p:sp>
-        <p:nvSpPr>
-          <p:cNvPr id="12" name="TextBox 11"/>
-          <p:cNvSpPr txBox="1"/>
-          <p:nvPr/>
-        </p:nvSpPr>
-        <p:spPr>
-          <a:xfrm>
-            <a:off x="800100" y="3115000"/>
-            <a:ext cx="6200000" cy="330000"/>
-          </a:xfrm>
-          <a:prstGeom prst="rect">
-            <a:avLst/>
-          </a:prstGeom>
-          <a:noFill/>
-        </p:spPr>
-        <p:txBody>
-          <a:bodyPr wrap="square" lIns="0" rIns="0" tIns="0" bIns="0">
-            <a:spAutoFit/>
-          </a:bodyPr>
-          <a:lstStyle/>
-          <a:p>
-            <a:pPr algn="l">
-              <a:spcAft>
-                <a:spcPts val="600"/>
-              </a:spcAft>
-            </a:pPr>
-            <a:r>
-              <a:rPr sz="1150" b="0">
-                <a:solidFill>
-                  <a:srgbClr val="3F4149"/>
-                </a:solidFill>
-                <a:latin typeface="Helvetica Neue"/>
-              </a:rPr>
-              <a:t>Tần suất model dùng \boxed</a:t>
-            </a:r>
-          </a:p>
-        </p:txBody>
-      </p:sp>
-      <p:sp>
-        <p:nvSpPr>
-          <p:cNvPr id="13" name="TextBox 12"/>
-          <p:cNvSpPr txBox="1"/>
-          <p:nvPr/>
-        </p:nvSpPr>
-        <p:spPr>
-          <a:xfrm>
-            <a:off x="7200100" y="3115000"/>
-            <a:ext cx="3000000" cy="330000"/>
-          </a:xfrm>
-          <a:prstGeom prst="rect">
-            <a:avLst/>
-          </a:prstGeom>
-          <a:noFill/>
-        </p:spPr>
-        <p:txBody>
-          <a:bodyPr wrap="square" lIns="0" rIns="0" tIns="0" bIns="0">
-            <a:spAutoFit/>
-          </a:bodyPr>
-          <a:lstStyle/>
-          <a:p>
-            <a:pPr algn="l">
-              <a:spcAft>
-                <a:spcPts val="600"/>
-              </a:spcAft>
-            </a:pPr>
-            <a:r>
-              <a:rPr sz="1150" b="0">
-                <a:solidFill>
-                  <a:srgbClr val="3F4149"/>
-                </a:solidFill>
-                <a:latin typeface="Helvetica Neue"/>
-              </a:rPr>
-              <a:t>51,5%</a:t>
-            </a:r>
-          </a:p>
-        </p:txBody>
-      </p:sp>
-      <p:cxnSp>
-        <p:nvCxnSpPr>
-          <p:cNvPr id="14" name="Connector 13"/>
-          <p:cNvCxnSpPr/>
-          <p:nvPr/>
-        </p:nvCxnSpPr>
-        <p:spPr>
-          <a:xfrm>
-            <a:off x="760100" y="3400000"/>
-            <a:ext cx="10671495" cy="0"/>
-          </a:xfrm>
-          <a:prstGeom prst="line">
-            <a:avLst/>
-          </a:prstGeom>
-          <a:ln w="9525">
-            <a:solidFill>
-              <a:srgbClr val="E9E9ED"/>
-            </a:solidFill>
-          </a:ln>
-        </p:spPr>
-        <p:style>
-          <a:lnRef idx="2">
-            <a:schemeClr val="accent1"/>
-          </a:lnRef>
-          <a:fillRef idx="0">
-            <a:schemeClr val="accent1"/>
-          </a:fillRef>
-          <a:effectRef idx="1">
-            <a:schemeClr val="accent1"/>
-          </a:effectRef>
-          <a:fontRef idx="minor">
-            <a:schemeClr val="tx1"/>
-          </a:fontRef>
-        </p:style>
-      </p:cxnSp>
-      <p:sp>
-        <p:nvSpPr>
-          <p:cNvPr id="15" name="TextBox 14"/>
-          <p:cNvSpPr txBox="1"/>
-          <p:nvPr/>
-        </p:nvSpPr>
-        <p:spPr>
-          <a:xfrm>
-            <a:off x="800100" y="3455000"/>
-            <a:ext cx="6200000" cy="330000"/>
-          </a:xfrm>
-          <a:prstGeom prst="rect">
-            <a:avLst/>
-          </a:prstGeom>
-          <a:noFill/>
-        </p:spPr>
-        <p:txBody>
-          <a:bodyPr wrap="square" lIns="0" rIns="0" tIns="0" bIns="0">
-            <a:spAutoFit/>
-          </a:bodyPr>
-          <a:lstStyle/>
-          <a:p>
-            <a:pPr algn="l">
-              <a:spcAft>
-                <a:spcPts val="600"/>
-              </a:spcAft>
-            </a:pPr>
-            <a:r>
-              <a:rPr sz="1150" b="1">
-                <a:solidFill>
-                  <a:srgbClr val="16161A"/>
-                </a:solidFill>
-                <a:latin typeface="Helvetica Neue"/>
-              </a:rPr>
-              <a:t>Thiệt hại ước tính mỗi vòng</a:t>
-            </a:r>
-          </a:p>
-        </p:txBody>
-      </p:sp>
-      <p:sp>
-        <p:nvSpPr>
-          <p:cNvPr id="16" name="TextBox 15"/>
-          <p:cNvSpPr txBox="1"/>
-          <p:nvPr/>
-        </p:nvSpPr>
-        <p:spPr>
-          <a:xfrm>
-            <a:off x="7200100" y="3455000"/>
-            <a:ext cx="3000000" cy="330000"/>
-          </a:xfrm>
-          <a:prstGeom prst="rect">
-            <a:avLst/>
-          </a:prstGeom>
-          <a:noFill/>
-        </p:spPr>
-        <p:txBody>
-          <a:bodyPr wrap="square" lIns="0" rIns="0" tIns="0" bIns="0">
-            <a:spAutoFit/>
-          </a:bodyPr>
-          <a:lstStyle/>
-          <a:p>
-            <a:pPr algn="l">
-              <a:spcAft>
-                <a:spcPts val="600"/>
-              </a:spcAft>
-            </a:pPr>
-            <a:r>
-              <a:rPr sz="1150" b="1">
-                <a:solidFill>
-                  <a:srgbClr val="16161A"/>
-                </a:solidFill>
-                <a:latin typeface="Helvetica Neue"/>
-              </a:rPr>
-              <a:t>4,4%  (gấp ~8 lần \dfrac)</a:t>
-            </a:r>
-          </a:p>
-        </p:txBody>
-      </p:sp>
-      <p:cxnSp>
-        <p:nvCxnSpPr>
-          <p:cNvPr id="17" name="Connector 16"/>
-          <p:cNvCxnSpPr/>
-          <p:nvPr/>
-        </p:nvCxnSpPr>
-        <p:spPr>
-          <a:xfrm>
-            <a:off x="760100" y="3740000"/>
-            <a:ext cx="10671495" cy="0"/>
-          </a:xfrm>
-          <a:prstGeom prst="line">
-            <a:avLst/>
-          </a:prstGeom>
-          <a:ln w="9525">
-            <a:solidFill>
-              <a:srgbClr val="E9E9ED"/>
-            </a:solidFill>
-          </a:ln>
-        </p:spPr>
-        <p:style>
-          <a:lnRef idx="2">
-            <a:schemeClr val="accent1"/>
-          </a:lnRef>
-          <a:fillRef idx="0">
-            <a:schemeClr val="accent1"/>
-          </a:fillRef>
-          <a:effectRef idx="1">
-            <a:schemeClr val="accent1"/>
-          </a:effectRef>
-          <a:fontRef idx="minor">
-            <a:schemeClr val="tx1"/>
-          </a:fontRef>
-        </p:style>
-      </p:cxnSp>
-      <p:sp>
-        <p:nvSpPr>
-          <p:cNvPr id="18" name="TextBox 17"/>
-          <p:cNvSpPr txBox="1"/>
-          <p:nvPr/>
-        </p:nvSpPr>
-        <p:spPr>
-          <a:xfrm>
-            <a:off x="800100" y="3795000"/>
-            <a:ext cx="6200000" cy="330000"/>
-          </a:xfrm>
-          <a:prstGeom prst="rect">
-            <a:avLst/>
-          </a:prstGeom>
-          <a:noFill/>
-        </p:spPr>
-        <p:txBody>
-          <a:bodyPr wrap="square" lIns="0" rIns="0" tIns="0" bIns="0">
-            <a:spAutoFit/>
-          </a:bodyPr>
-          <a:lstStyle/>
-          <a:p>
-            <a:pPr algn="l">
-              <a:spcAft>
-                <a:spcPts val="600"/>
-              </a:spcAft>
-            </a:pPr>
-            <a:r>
-              <a:rPr sz="1150" b="0">
-                <a:solidFill>
-                  <a:srgbClr val="3F4149"/>
-                </a:solidFill>
-                <a:latin typeface="Helvetica Neue"/>
-              </a:rPr>
-              <a:t>Hồi quy 8 kiểu viết × 2 preset × 2 bộ đề</a:t>
-            </a:r>
-          </a:p>
-        </p:txBody>
-      </p:sp>
-      <p:sp>
-        <p:nvSpPr>
-          <p:cNvPr id="19" name="TextBox 18"/>
-          <p:cNvSpPr txBox="1"/>
-          <p:nvPr/>
-        </p:nvSpPr>
-        <p:spPr>
-          <a:xfrm>
-            <a:off x="7200100" y="3795000"/>
-            <a:ext cx="3000000" cy="330000"/>
-          </a:xfrm>
-          <a:prstGeom prst="rect">
-            <a:avLst/>
-          </a:prstGeom>
-          <a:noFill/>
-        </p:spPr>
-        <p:txBody>
-          <a:bodyPr wrap="square" lIns="0" rIns="0" tIns="0" bIns="0">
-            <a:spAutoFit/>
-          </a:bodyPr>
-          <a:lstStyle/>
-          <a:p>
-            <a:pPr algn="l">
-              <a:spcAft>
-                <a:spcPts val="600"/>
-              </a:spcAft>
-            </a:pPr>
-            <a:r>
-              <a:rPr sz="1150" b="0">
-                <a:solidFill>
-                  <a:srgbClr val="3F4149"/>
-                </a:solidFill>
-                <a:latin typeface="Helvetica Neue"/>
-              </a:rPr>
-              <a:t>27/27 test qua</a:t>
-            </a:r>
-          </a:p>
-        </p:txBody>
-      </p:sp>
-      <p:sp>
-        <p:nvSpPr>
-          <p:cNvPr id="20" name="TextBox 19"/>
-          <p:cNvSpPr txBox="1"/>
-          <p:nvPr/>
-        </p:nvSpPr>
-        <p:spPr>
-          <a:xfrm>
-            <a:off x="800100" y="4320000"/>
-            <a:ext cx="10591495" cy="380000"/>
-          </a:xfrm>
-          <a:prstGeom prst="rect">
-            <a:avLst/>
-          </a:prstGeom>
-          <a:noFill/>
-        </p:spPr>
-        <p:txBody>
-          <a:bodyPr wrap="square" lIns="0" rIns="0" tIns="0" bIns="0">
-            <a:spAutoFit/>
-          </a:bodyPr>
-          <a:lstStyle/>
-          <a:p>
-            <a:pPr algn="l">
-              <a:lnSpc>
-                <a:spcPct val="125000"/>
-              </a:lnSpc>
-              <a:spcAft>
-                <a:spcPts val="600"/>
-              </a:spcAft>
-            </a:pPr>
-            <a:r>
-              <a:rPr sz="1100" b="0">
-                <a:solidFill>
-                  <a:srgbClr val="8A8D96"/>
-                </a:solidFill>
-                <a:latin typeface="Helvetica Neue"/>
-              </a:rPr>
-              <a:t>Còn dư 4/200 đề vẫn bị gạch sau khi vá — nhưng là lỗi khác đã biết từ trước (thiếu ngoặc trong</a:t>
-            </a:r>
-          </a:p>
-          <a:p>
-            <a:pPr algn="l">
-              <a:lnSpc>
-                <a:spcPct val="125000"/>
-              </a:lnSpc>
-              <a:spcAft>
-                <a:spcPts val="600"/>
-              </a:spcAft>
-            </a:pPr>
-            <a:r>
-              <a:rPr sz="1100" b="0">
-                <a:solidFill>
-                  <a:srgbClr val="8A8D96"/>
-                </a:solidFill>
-                <a:latin typeface="Helvetica Neue"/>
-              </a:rPr>
-              <a:t>\frac43), không thuộc phạm vi lần vá này.</a:t>
-            </a:r>
-          </a:p>
-        </p:txBody>
-      </p:sp>
-      <p:cxnSp>
-        <p:nvCxnSpPr>
-          <p:cNvPr id="21" name="Connector 20"/>
-          <p:cNvCxnSpPr/>
-          <p:nvPr/>
-        </p:nvCxnSpPr>
-        <p:spPr>
-          <a:xfrm>
-            <a:off x="800100" y="4800000"/>
-            <a:ext cx="10591495" cy="0"/>
-          </a:xfrm>
-          <a:prstGeom prst="line">
-            <a:avLst/>
-          </a:prstGeom>
-          <a:ln w="9525">
-            <a:solidFill>
-              <a:srgbClr val="E6E6EA"/>
-            </a:solidFill>
-          </a:ln>
-        </p:spPr>
-        <p:style>
-          <a:lnRef idx="2">
-            <a:schemeClr val="accent1"/>
-          </a:lnRef>
-          <a:fillRef idx="0">
-            <a:schemeClr val="accent1"/>
-          </a:fillRef>
-          <a:effectRef idx="1">
-            <a:schemeClr val="accent1"/>
-          </a:effectRef>
-          <a:fontRef idx="minor">
-            <a:schemeClr val="tx1"/>
-          </a:fontRef>
-        </p:style>
-      </p:cxnSp>
-      <p:sp>
-        <p:nvSpPr>
-          <p:cNvPr id="22" name="TextBox 21"/>
-          <p:cNvSpPr txBox="1"/>
-          <p:nvPr/>
-        </p:nvSpPr>
-        <p:spPr>
-          <a:xfrm>
-            <a:off x="800100" y="4900000"/>
-            <a:ext cx="10591495" cy="280000"/>
-          </a:xfrm>
-          <a:prstGeom prst="rect">
-            <a:avLst/>
-          </a:prstGeom>
-          <a:noFill/>
-        </p:spPr>
-        <p:txBody>
-          <a:bodyPr wrap="square" lIns="0" rIns="0" tIns="0" bIns="0">
-            <a:spAutoFit/>
-          </a:bodyPr>
-          <a:lstStyle/>
-          <a:p>
-            <a:pPr algn="l">
-              <a:spcAft>
-                <a:spcPts val="600"/>
-              </a:spcAft>
-            </a:pPr>
-            <a:r>
-              <a:rPr sz="1100" b="1">
-                <a:solidFill>
-                  <a:srgbClr val="8A8D96"/>
-                </a:solidFill>
-                <a:latin typeface="Helvetica Neue"/>
-              </a:rPr>
-              <a:t>HÀNG ĐỢI GPU TIẾP THEO</a:t>
-            </a:r>
-          </a:p>
-        </p:txBody>
-      </p:sp>
-      <p:sp>
-        <p:nvSpPr>
-          <p:cNvPr id="23" name="TextBox 22"/>
-          <p:cNvSpPr txBox="1"/>
-          <p:nvPr/>
-        </p:nvSpPr>
-        <p:spPr>
-          <a:xfrm>
-            <a:off x="800100" y="5100000"/>
-            <a:ext cx="3600000" cy="300000"/>
-          </a:xfrm>
-          <a:prstGeom prst="rect">
-            <a:avLst/>
-          </a:prstGeom>
-          <a:noFill/>
-        </p:spPr>
-        <p:txBody>
-          <a:bodyPr wrap="square" lIns="0" rIns="0" tIns="0" bIns="0">
-            <a:spAutoFit/>
-          </a:bodyPr>
-          <a:lstStyle/>
-          <a:p>
-            <a:pPr algn="l">
-              <a:spcAft>
-                <a:spcPts val="600"/>
-              </a:spcAft>
-            </a:pPr>
-            <a:r>
-              <a:rPr sz="1000" b="1">
-                <a:solidFill>
-                  <a:srgbClr val="8A8D96"/>
-                </a:solidFill>
-                <a:latin typeface="Helvetica Neue"/>
-              </a:rPr>
-              <a:t>VIỆC</a:t>
-            </a:r>
-          </a:p>
-        </p:txBody>
-      </p:sp>
-      <p:sp>
-        <p:nvSpPr>
-          <p:cNvPr id="24" name="TextBox 23"/>
-          <p:cNvSpPr txBox="1"/>
-          <p:nvPr/>
-        </p:nvSpPr>
-        <p:spPr>
-          <a:xfrm>
-            <a:off x="4600100" y="5100000"/>
-            <a:ext cx="4200000" cy="300000"/>
-          </a:xfrm>
-          <a:prstGeom prst="rect">
-            <a:avLst/>
-          </a:prstGeom>
-          <a:noFill/>
-        </p:spPr>
-        <p:txBody>
-          <a:bodyPr wrap="square" lIns="0" rIns="0" tIns="0" bIns="0">
-            <a:spAutoFit/>
-          </a:bodyPr>
-          <a:lstStyle/>
-          <a:p>
-            <a:pPr algn="l">
-              <a:spcAft>
-                <a:spcPts val="600"/>
-              </a:spcAft>
-            </a:pPr>
-            <a:r>
-              <a:rPr sz="1000" b="1">
-                <a:solidFill>
-                  <a:srgbClr val="8A8D96"/>
-                </a:solidFill>
-                <a:latin typeface="Helvetica Neue"/>
-              </a:rPr>
-              <a:t>MỤC ĐÍCH</a:t>
-            </a:r>
-          </a:p>
-        </p:txBody>
-      </p:sp>
-      <p:sp>
-        <p:nvSpPr>
-          <p:cNvPr id="25" name="TextBox 24"/>
-          <p:cNvSpPr txBox="1"/>
-          <p:nvPr/>
-        </p:nvSpPr>
-        <p:spPr>
-          <a:xfrm>
-            <a:off x="8900100" y="5100000"/>
-            <a:ext cx="2400000" cy="300000"/>
-          </a:xfrm>
-          <a:prstGeom prst="rect">
-            <a:avLst/>
-          </a:prstGeom>
-          <a:noFill/>
-        </p:spPr>
-        <p:txBody>
-          <a:bodyPr wrap="square" lIns="0" rIns="0" tIns="0" bIns="0">
-            <a:spAutoFit/>
-          </a:bodyPr>
-          <a:lstStyle/>
-          <a:p>
-            <a:pPr algn="l">
-              <a:spcAft>
-                <a:spcPts val="600"/>
-              </a:spcAft>
-            </a:pPr>
-            <a:r>
-              <a:rPr sz="1000" b="1">
-                <a:solidFill>
-                  <a:srgbClr val="8A8D96"/>
-                </a:solidFill>
-                <a:latin typeface="Helvetica Neue"/>
-              </a:rPr>
-              <a:t>TRẠNG THÁI</a:t>
-            </a:r>
-          </a:p>
-        </p:txBody>
-      </p:sp>
-      <p:sp>
-        <p:nvSpPr>
-          <p:cNvPr id="26" name="Rounded Rectangle 25"/>
+              <a:t>cách chia đề thi như lần chạy A.</a:t>
+            </a:r>
+          </a:p>
+        </p:txBody>
+      </p:sp>
+      <p:sp>
+        <p:nvSpPr>
+          <p:cNvPr id="9" name="Rounded Rectangle 8"/>
           <p:cNvSpPr/>
           <p:nvPr/>
         </p:nvSpPr>
         <p:spPr>
           <a:xfrm>
-            <a:off x="680100" y="5480000"/>
-            <a:ext cx="10831495" cy="1120000"/>
+            <a:off x="4360100" y="1650000"/>
+            <a:ext cx="3300000" cy="1500000"/>
           </a:xfrm>
           <a:prstGeom prst="roundRect">
             <a:avLst>
@@ -8642,421 +7026,726 @@
       </p:sp>
       <p:sp>
         <p:nvSpPr>
-          <p:cNvPr id="27" name="TextBox 26"/>
-          <p:cNvSpPr txBox="1"/>
-          <p:nvPr/>
-        </p:nvSpPr>
-        <p:spPr>
-          <a:xfrm>
-            <a:off x="800100" y="5585000"/>
-            <a:ext cx="3600000" cy="330000"/>
-          </a:xfrm>
-          <a:prstGeom prst="rect">
-            <a:avLst/>
-          </a:prstGeom>
-          <a:noFill/>
-        </p:spPr>
-        <p:txBody>
-          <a:bodyPr wrap="square" lIns="0" rIns="0" tIns="0" bIns="0">
-            <a:spAutoFit/>
-          </a:bodyPr>
-          <a:lstStyle/>
-          <a:p>
-            <a:pPr algn="l">
-              <a:spcAft>
-                <a:spcPts val="600"/>
-              </a:spcAft>
-            </a:pPr>
-            <a:r>
-              <a:rPr sz="1100" b="0">
+          <p:cNvPr id="10" name="TextBox 9"/>
+          <p:cNvSpPr txBox="1"/>
+          <p:nvPr/>
+        </p:nvSpPr>
+        <p:spPr>
+          <a:xfrm>
+            <a:off x="4600100" y="1800000"/>
+            <a:ext cx="400000" cy="330000"/>
+          </a:xfrm>
+          <a:prstGeom prst="rect">
+            <a:avLst/>
+          </a:prstGeom>
+          <a:noFill/>
+        </p:spPr>
+        <p:txBody>
+          <a:bodyPr wrap="square" lIns="0" rIns="0" tIns="0" bIns="0">
+            <a:spAutoFit/>
+          </a:bodyPr>
+          <a:lstStyle/>
+          <a:p>
+            <a:pPr algn="l">
+              <a:spcAft>
+                <a:spcPts val="600"/>
+              </a:spcAft>
+            </a:pPr>
+            <a:r>
+              <a:rPr sz="1700" b="1">
+                <a:solidFill>
+                  <a:srgbClr val="9E2B34"/>
+                </a:solidFill>
+                <a:latin typeface="Georgia"/>
+              </a:rPr>
+              <a:t>2</a:t>
+            </a:r>
+          </a:p>
+        </p:txBody>
+      </p:sp>
+      <p:sp>
+        <p:nvSpPr>
+          <p:cNvPr id="11" name="TextBox 10"/>
+          <p:cNvSpPr txBox="1"/>
+          <p:nvPr/>
+        </p:nvSpPr>
+        <p:spPr>
+          <a:xfrm>
+            <a:off x="4600100" y="2200000"/>
+            <a:ext cx="2900000" cy="330000"/>
+          </a:xfrm>
+          <a:prstGeom prst="rect">
+            <a:avLst/>
+          </a:prstGeom>
+          <a:noFill/>
+        </p:spPr>
+        <p:txBody>
+          <a:bodyPr wrap="square" lIns="0" rIns="0" tIns="0" bIns="0">
+            <a:spAutoFit/>
+          </a:bodyPr>
+          <a:lstStyle/>
+          <a:p>
+            <a:pPr algn="l">
+              <a:spcAft>
+                <a:spcPts val="600"/>
+              </a:spcAft>
+            </a:pPr>
+            <a:r>
+              <a:rPr sz="1450" b="1">
+                <a:solidFill>
+                  <a:srgbClr val="16161A"/>
+                </a:solidFill>
+                <a:latin typeface="Helvetica Neue"/>
+              </a:rPr>
+              <a:t>Chỉ đổi một chỗ</a:t>
+            </a:r>
+          </a:p>
+        </p:txBody>
+      </p:sp>
+      <p:sp>
+        <p:nvSpPr>
+          <p:cNvPr id="12" name="TextBox 11"/>
+          <p:cNvSpPr txBox="1"/>
+          <p:nvPr/>
+        </p:nvSpPr>
+        <p:spPr>
+          <a:xfrm>
+            <a:off x="4600100" y="2580000"/>
+            <a:ext cx="2900000" cy="550000"/>
+          </a:xfrm>
+          <a:prstGeom prst="rect">
+            <a:avLst/>
+          </a:prstGeom>
+          <a:noFill/>
+        </p:spPr>
+        <p:txBody>
+          <a:bodyPr wrap="square" lIns="0" rIns="0" tIns="0" bIns="0">
+            <a:spAutoFit/>
+          </a:bodyPr>
+          <a:lstStyle/>
+          <a:p>
+            <a:pPr algn="l">
+              <a:lnSpc>
+                <a:spcPct val="130000"/>
+              </a:lnSpc>
+              <a:spcAft>
+                <a:spcPts val="600"/>
+              </a:spcAft>
+            </a:pPr>
+            <a:r>
+              <a:rPr sz="1200" b="0">
                 <a:solidFill>
                   <a:srgbClr val="3F4149"/>
                 </a:solidFill>
                 <a:latin typeface="Helvetica Neue"/>
               </a:rPr>
-              <a:t>GSM8K, seed thứ hai</a:t>
-            </a:r>
-          </a:p>
-        </p:txBody>
-      </p:sp>
-      <p:sp>
-        <p:nvSpPr>
-          <p:cNvPr id="28" name="TextBox 27"/>
-          <p:cNvSpPr txBox="1"/>
-          <p:nvPr/>
-        </p:nvSpPr>
-        <p:spPr>
-          <a:xfrm>
-            <a:off x="4600100" y="5585000"/>
-            <a:ext cx="4200000" cy="330000"/>
-          </a:xfrm>
-          <a:prstGeom prst="rect">
-            <a:avLst/>
-          </a:prstGeom>
-          <a:noFill/>
-        </p:spPr>
-        <p:txBody>
-          <a:bodyPr wrap="square" lIns="0" rIns="0" tIns="0" bIns="0">
-            <a:spAutoFit/>
-          </a:bodyPr>
-          <a:lstStyle/>
-          <a:p>
-            <a:pPr algn="l">
-              <a:spcAft>
-                <a:spcPts val="600"/>
-              </a:spcAft>
-            </a:pPr>
-            <a:r>
-              <a:rPr sz="1100" b="0">
+              <a:t>Bật bản sửa lỗi \boxed.</a:t>
+            </a:r>
+          </a:p>
+          <a:p>
+            <a:pPr algn="l">
+              <a:lnSpc>
+                <a:spcPct val="130000"/>
+              </a:lnSpc>
+              <a:spcAft>
+                <a:spcPts val="600"/>
+              </a:spcAft>
+            </a:pPr>
+            <a:r>
+              <a:rPr sz="1200" b="0">
                 <a:solidFill>
                   <a:srgbClr val="3F4149"/>
                 </a:solidFill>
                 <a:latin typeface="Helvetica Neue"/>
               </a:rPr>
-              <a:t>Cú tụt 12,7 điểm ở seed đầu là thật hay nhiễu</a:t>
-            </a:r>
-          </a:p>
-        </p:txBody>
-      </p:sp>
-      <p:sp>
-        <p:nvSpPr>
-          <p:cNvPr id="29" name="TextBox 28"/>
-          <p:cNvSpPr txBox="1"/>
-          <p:nvPr/>
-        </p:nvSpPr>
-        <p:spPr>
-          <a:xfrm>
-            <a:off x="8900100" y="5585000"/>
-            <a:ext cx="2400000" cy="330000"/>
-          </a:xfrm>
-          <a:prstGeom prst="rect">
-            <a:avLst/>
-          </a:prstGeom>
-          <a:noFill/>
-        </p:spPr>
-        <p:txBody>
-          <a:bodyPr wrap="square" lIns="0" rIns="0" tIns="0" bIns="0">
-            <a:spAutoFit/>
-          </a:bodyPr>
-          <a:lstStyle/>
-          <a:p>
-            <a:pPr algn="l">
-              <a:spcAft>
-                <a:spcPts val="600"/>
-              </a:spcAft>
-            </a:pPr>
-            <a:r>
-              <a:rPr sz="1100" b="0">
-                <a:solidFill>
-                  <a:srgbClr val="3F4149"/>
-                </a:solidFill>
-                <a:latin typeface="Helvetica Neue"/>
-              </a:rPr>
-              <a:t>Ưu tiên cao nhất</a:t>
-            </a:r>
-          </a:p>
-        </p:txBody>
-      </p:sp>
-      <p:cxnSp>
-        <p:nvCxnSpPr>
-          <p:cNvPr id="30" name="Connector 29"/>
-          <p:cNvCxnSpPr/>
-          <p:nvPr/>
-        </p:nvCxnSpPr>
-        <p:spPr>
-          <a:xfrm>
-            <a:off x="760100" y="5870000"/>
-            <a:ext cx="10671495" cy="0"/>
-          </a:xfrm>
-          <a:prstGeom prst="line">
-            <a:avLst/>
-          </a:prstGeom>
-          <a:ln w="9525">
-            <a:solidFill>
-              <a:srgbClr val="E9E9ED"/>
-            </a:solidFill>
+              <a:t>Khoảng 5 giờ GPU.</a:t>
+            </a:r>
+          </a:p>
+        </p:txBody>
+      </p:sp>
+      <p:sp>
+        <p:nvSpPr>
+          <p:cNvPr id="13" name="Rounded Rectangle 12"/>
+          <p:cNvSpPr/>
+          <p:nvPr/>
+        </p:nvSpPr>
+        <p:spPr>
+          <a:xfrm>
+            <a:off x="7920100" y="1650000"/>
+            <a:ext cx="3300000" cy="1500000"/>
+          </a:xfrm>
+          <a:prstGeom prst="roundRect">
+            <a:avLst>
+              <a:gd name="adj" fmla="val 4000"/>
+            </a:avLst>
+          </a:prstGeom>
+          <a:solidFill>
+            <a:srgbClr val="F5F5F7"/>
+          </a:solidFill>
+          <a:ln>
+            <a:noFill/>
           </a:ln>
+          <a:effectLst/>
         </p:spPr>
         <p:style>
-          <a:lnRef idx="2">
+          <a:lnRef idx="1">
             <a:schemeClr val="accent1"/>
           </a:lnRef>
-          <a:fillRef idx="0">
+          <a:fillRef idx="3">
             <a:schemeClr val="accent1"/>
           </a:fillRef>
-          <a:effectRef idx="1">
+          <a:effectRef idx="2">
             <a:schemeClr val="accent1"/>
           </a:effectRef>
           <a:fontRef idx="minor">
-            <a:schemeClr val="tx1"/>
+            <a:schemeClr val="lt1"/>
           </a:fontRef>
         </p:style>
-      </p:cxnSp>
-      <p:sp>
-        <p:nvSpPr>
-          <p:cNvPr id="31" name="TextBox 30"/>
-          <p:cNvSpPr txBox="1"/>
-          <p:nvPr/>
-        </p:nvSpPr>
-        <p:spPr>
-          <a:xfrm>
-            <a:off x="800100" y="5925000"/>
-            <a:ext cx="3600000" cy="330000"/>
-          </a:xfrm>
-          <a:prstGeom prst="rect">
-            <a:avLst/>
-          </a:prstGeom>
-          <a:noFill/>
-        </p:spPr>
-        <p:txBody>
-          <a:bodyPr wrap="square" lIns="0" rIns="0" tIns="0" bIns="0">
-            <a:spAutoFit/>
-          </a:bodyPr>
-          <a:lstStyle/>
-          <a:p>
-            <a:pPr algn="l">
-              <a:spcAft>
-                <a:spcPts val="600"/>
-              </a:spcAft>
-            </a:pPr>
-            <a:r>
-              <a:rPr sz="1100" b="0">
+        <p:txBody>
+          <a:bodyPr rtlCol="0" anchor="ctr"/>
+          <a:lstStyle/>
+          <a:p>
+            <a:pPr algn="ctr"/>
+          </a:p>
+        </p:txBody>
+      </p:sp>
+      <p:sp>
+        <p:nvSpPr>
+          <p:cNvPr id="14" name="TextBox 13"/>
+          <p:cNvSpPr txBox="1"/>
+          <p:nvPr/>
+        </p:nvSpPr>
+        <p:spPr>
+          <a:xfrm>
+            <a:off x="8160100" y="1800000"/>
+            <a:ext cx="400000" cy="330000"/>
+          </a:xfrm>
+          <a:prstGeom prst="rect">
+            <a:avLst/>
+          </a:prstGeom>
+          <a:noFill/>
+        </p:spPr>
+        <p:txBody>
+          <a:bodyPr wrap="square" lIns="0" rIns="0" tIns="0" bIns="0">
+            <a:spAutoFit/>
+          </a:bodyPr>
+          <a:lstStyle/>
+          <a:p>
+            <a:pPr algn="l">
+              <a:spcAft>
+                <a:spcPts val="600"/>
+              </a:spcAft>
+            </a:pPr>
+            <a:r>
+              <a:rPr sz="1700" b="1">
+                <a:solidFill>
+                  <a:srgbClr val="9E2B34"/>
+                </a:solidFill>
+                <a:latin typeface="Georgia"/>
+              </a:rPr>
+              <a:t>3</a:t>
+            </a:r>
+          </a:p>
+        </p:txBody>
+      </p:sp>
+      <p:sp>
+        <p:nvSpPr>
+          <p:cNvPr id="15" name="TextBox 14"/>
+          <p:cNvSpPr txBox="1"/>
+          <p:nvPr/>
+        </p:nvSpPr>
+        <p:spPr>
+          <a:xfrm>
+            <a:off x="8160100" y="2200000"/>
+            <a:ext cx="2900000" cy="330000"/>
+          </a:xfrm>
+          <a:prstGeom prst="rect">
+            <a:avLst/>
+          </a:prstGeom>
+          <a:noFill/>
+        </p:spPr>
+        <p:txBody>
+          <a:bodyPr wrap="square" lIns="0" rIns="0" tIns="0" bIns="0">
+            <a:spAutoFit/>
+          </a:bodyPr>
+          <a:lstStyle/>
+          <a:p>
+            <a:pPr algn="l">
+              <a:spcAft>
+                <a:spcPts val="600"/>
+              </a:spcAft>
+            </a:pPr>
+            <a:r>
+              <a:rPr sz="1450" b="1">
+                <a:solidFill>
+                  <a:srgbClr val="16161A"/>
+                </a:solidFill>
+                <a:latin typeface="Helvetica Neue"/>
+              </a:rPr>
+              <a:t>So với lần chạy A</a:t>
+            </a:r>
+          </a:p>
+        </p:txBody>
+      </p:sp>
+      <p:sp>
+        <p:nvSpPr>
+          <p:cNvPr id="16" name="TextBox 15"/>
+          <p:cNvSpPr txBox="1"/>
+          <p:nvPr/>
+        </p:nvSpPr>
+        <p:spPr>
+          <a:xfrm>
+            <a:off x="8160100" y="2580000"/>
+            <a:ext cx="2900000" cy="550000"/>
+          </a:xfrm>
+          <a:prstGeom prst="rect">
+            <a:avLst/>
+          </a:prstGeom>
+          <a:noFill/>
+        </p:spPr>
+        <p:txBody>
+          <a:bodyPr wrap="square" lIns="0" rIns="0" tIns="0" bIns="0">
+            <a:spAutoFit/>
+          </a:bodyPr>
+          <a:lstStyle/>
+          <a:p>
+            <a:pPr algn="l">
+              <a:lnSpc>
+                <a:spcPct val="130000"/>
+              </a:lnSpc>
+              <a:spcAft>
+                <a:spcPts val="600"/>
+              </a:spcAft>
+            </a:pPr>
+            <a:r>
+              <a:rPr sz="1200" b="0">
                 <a:solidFill>
                   <a:srgbClr val="3F4149"/>
                 </a:solidFill>
                 <a:latin typeface="Helvetica Neue"/>
               </a:rPr>
-              <a:t>Ablation không lọc</a:t>
-            </a:r>
-          </a:p>
-        </p:txBody>
-      </p:sp>
-      <p:sp>
-        <p:nvSpPr>
-          <p:cNvPr id="32" name="TextBox 31"/>
-          <p:cNvSpPr txBox="1"/>
-          <p:nvPr/>
-        </p:nvSpPr>
-        <p:spPr>
-          <a:xfrm>
-            <a:off x="4600100" y="5925000"/>
-            <a:ext cx="4200000" cy="330000"/>
-          </a:xfrm>
-          <a:prstGeom prst="rect">
-            <a:avLst/>
-          </a:prstGeom>
-          <a:noFill/>
-        </p:spPr>
-        <p:txBody>
-          <a:bodyPr wrap="square" lIns="0" rIns="0" tIns="0" bIns="0">
-            <a:spAutoFit/>
-          </a:bodyPr>
-          <a:lstStyle/>
-          <a:p>
-            <a:pPr algn="l">
-              <a:spcAft>
-                <a:spcPts val="600"/>
-              </a:spcAft>
-            </a:pPr>
-            <a:r>
-              <a:rPr sz="1100" b="0">
+              <a:t>Lần A đã có sẵn số liệu,</a:t>
+            </a:r>
+          </a:p>
+          <a:p>
+            <a:pPr algn="l">
+              <a:lnSpc>
+                <a:spcPct val="130000"/>
+              </a:lnSpc>
+              <a:spcAft>
+                <a:spcPts val="600"/>
+              </a:spcAft>
+            </a:pPr>
+            <a:r>
+              <a:rPr sz="1200" b="0">
                 <a:solidFill>
                   <a:srgbClr val="3F4149"/>
                 </a:solidFill>
                 <a:latin typeface="Helvetica Neue"/>
               </a:rPr>
-              <a:t>Tách khâu lọc verifier khỏi bản chất tự học</a:t>
-            </a:r>
-          </a:p>
-        </p:txBody>
-      </p:sp>
-      <p:sp>
-        <p:nvSpPr>
-          <p:cNvPr id="33" name="TextBox 32"/>
-          <p:cNvSpPr txBox="1"/>
-          <p:nvPr/>
-        </p:nvSpPr>
-        <p:spPr>
-          <a:xfrm>
-            <a:off x="8900100" y="5925000"/>
-            <a:ext cx="2400000" cy="330000"/>
-          </a:xfrm>
-          <a:prstGeom prst="rect">
-            <a:avLst/>
-          </a:prstGeom>
-          <a:noFill/>
-        </p:spPr>
-        <p:txBody>
-          <a:bodyPr wrap="square" lIns="0" rIns="0" tIns="0" bIns="0">
-            <a:spAutoFit/>
-          </a:bodyPr>
-          <a:lstStyle/>
-          <a:p>
-            <a:pPr algn="l">
-              <a:spcAft>
-                <a:spcPts val="600"/>
-              </a:spcAft>
-            </a:pPr>
-            <a:r>
-              <a:rPr sz="1100" b="0">
-                <a:solidFill>
-                  <a:srgbClr val="3F4149"/>
-                </a:solidFill>
-                <a:latin typeface="Helvetica Neue"/>
-              </a:rPr>
-              <a:t>Xếp sau</a:t>
-            </a:r>
-          </a:p>
-        </p:txBody>
-      </p:sp>
-      <p:cxnSp>
-        <p:nvCxnSpPr>
-          <p:cNvPr id="34" name="Connector 33"/>
-          <p:cNvCxnSpPr/>
-          <p:nvPr/>
-        </p:nvCxnSpPr>
-        <p:spPr>
-          <a:xfrm>
-            <a:off x="760100" y="6210000"/>
-            <a:ext cx="10671495" cy="0"/>
-          </a:xfrm>
-          <a:prstGeom prst="line">
-            <a:avLst/>
-          </a:prstGeom>
-          <a:ln w="9525">
-            <a:solidFill>
-              <a:srgbClr val="E9E9ED"/>
-            </a:solidFill>
+              <a:t>không cần chạy lại.</a:t>
+            </a:r>
+          </a:p>
+        </p:txBody>
+      </p:sp>
+      <p:sp>
+        <p:nvSpPr>
+          <p:cNvPr id="17" name="TextBox 16"/>
+          <p:cNvSpPr txBox="1"/>
+          <p:nvPr/>
+        </p:nvSpPr>
+        <p:spPr>
+          <a:xfrm>
+            <a:off x="800100" y="3450000"/>
+            <a:ext cx="10591495" cy="300000"/>
+          </a:xfrm>
+          <a:prstGeom prst="rect">
+            <a:avLst/>
+          </a:prstGeom>
+          <a:noFill/>
+        </p:spPr>
+        <p:txBody>
+          <a:bodyPr wrap="square" lIns="0" rIns="0" tIns="0" bIns="0">
+            <a:spAutoFit/>
+          </a:bodyPr>
+          <a:lstStyle/>
+          <a:p>
+            <a:pPr algn="l">
+              <a:spcAft>
+                <a:spcPts val="600"/>
+              </a:spcAft>
+            </a:pPr>
+            <a:r>
+              <a:rPr sz="1100" b="1">
+                <a:solidFill>
+                  <a:srgbClr val="8A8D96"/>
+                </a:solidFill>
+                <a:latin typeface="Helvetica Neue"/>
+              </a:rPr>
+              <a:t>HAI KẾT QUẢ CÓ THỂ XẢY RA</a:t>
+            </a:r>
+          </a:p>
+        </p:txBody>
+      </p:sp>
+      <p:sp>
+        <p:nvSpPr>
+          <p:cNvPr id="18" name="Rounded Rectangle 17"/>
+          <p:cNvSpPr/>
+          <p:nvPr/>
+        </p:nvSpPr>
+        <p:spPr>
+          <a:xfrm>
+            <a:off x="800100" y="3850000"/>
+            <a:ext cx="5190000" cy="1650000"/>
+          </a:xfrm>
+          <a:prstGeom prst="roundRect">
+            <a:avLst>
+              <a:gd name="adj" fmla="val 4000"/>
+            </a:avLst>
+          </a:prstGeom>
+          <a:solidFill>
+            <a:srgbClr val="F5F5F7"/>
+          </a:solidFill>
+          <a:ln>
+            <a:noFill/>
           </a:ln>
+          <a:effectLst/>
         </p:spPr>
         <p:style>
-          <a:lnRef idx="2">
+          <a:lnRef idx="1">
             <a:schemeClr val="accent1"/>
           </a:lnRef>
-          <a:fillRef idx="0">
+          <a:fillRef idx="3">
             <a:schemeClr val="accent1"/>
           </a:fillRef>
-          <a:effectRef idx="1">
+          <a:effectRef idx="2">
             <a:schemeClr val="accent1"/>
           </a:effectRef>
           <a:fontRef idx="minor">
-            <a:schemeClr val="tx1"/>
+            <a:schemeClr val="lt1"/>
           </a:fontRef>
         </p:style>
-      </p:cxnSp>
-      <p:sp>
-        <p:nvSpPr>
-          <p:cNvPr id="35" name="TextBox 34"/>
-          <p:cNvSpPr txBox="1"/>
-          <p:nvPr/>
-        </p:nvSpPr>
-        <p:spPr>
-          <a:xfrm>
-            <a:off x="800100" y="6265000"/>
-            <a:ext cx="3600000" cy="330000"/>
-          </a:xfrm>
-          <a:prstGeom prst="rect">
-            <a:avLst/>
-          </a:prstGeom>
-          <a:noFill/>
-        </p:spPr>
-        <p:txBody>
-          <a:bodyPr wrap="square" lIns="0" rIns="0" tIns="0" bIns="0">
-            <a:spAutoFit/>
-          </a:bodyPr>
-          <a:lstStyle/>
-          <a:p>
-            <a:pPr algn="l">
-              <a:spcAft>
-                <a:spcPts val="600"/>
-              </a:spcAft>
-            </a:pPr>
-            <a:r>
-              <a:rPr sz="1100" b="0">
+        <p:txBody>
+          <a:bodyPr rtlCol="0" anchor="ctr"/>
+          <a:lstStyle/>
+          <a:p>
+            <a:pPr algn="ctr"/>
+          </a:p>
+        </p:txBody>
+      </p:sp>
+      <p:sp>
+        <p:nvSpPr>
+          <p:cNvPr id="19" name="Rounded Rectangle 18"/>
+          <p:cNvSpPr/>
+          <p:nvPr/>
+        </p:nvSpPr>
+        <p:spPr>
+          <a:xfrm>
+            <a:off x="1060100" y="4030000"/>
+            <a:ext cx="2600000" cy="320000"/>
+          </a:xfrm>
+          <a:prstGeom prst="roundRect">
+            <a:avLst>
+              <a:gd name="adj" fmla="val 50000"/>
+            </a:avLst>
+          </a:prstGeom>
+          <a:solidFill>
+            <a:srgbClr val="029E73"/>
+          </a:solidFill>
+          <a:ln>
+            <a:noFill/>
+          </a:ln>
+          <a:effectLst/>
+        </p:spPr>
+        <p:style>
+          <a:lnRef idx="1">
+            <a:schemeClr val="accent1"/>
+          </a:lnRef>
+          <a:fillRef idx="3">
+            <a:schemeClr val="accent1"/>
+          </a:fillRef>
+          <a:effectRef idx="2">
+            <a:schemeClr val="accent1"/>
+          </a:effectRef>
+          <a:fontRef idx="minor">
+            <a:schemeClr val="lt1"/>
+          </a:fontRef>
+        </p:style>
+        <p:txBody>
+          <a:bodyPr rtlCol="0" anchor="ctr" wrap="none" lIns="0" rIns="0"/>
+          <a:lstStyle/>
+          <a:p>
+            <a:pPr algn="ctr"/>
+            <a:r>
+              <a:rPr sz="1050" b="1">
+                <a:solidFill>
+                  <a:srgbClr val="FFFFFF"/>
+                </a:solidFill>
+                <a:latin typeface="Helvetica Neue"/>
+              </a:rPr>
+              <a:t>Điểm khác lần A rõ rệt</a:t>
+            </a:r>
+          </a:p>
+        </p:txBody>
+      </p:sp>
+      <p:sp>
+        <p:nvSpPr>
+          <p:cNvPr id="20" name="TextBox 19"/>
+          <p:cNvSpPr txBox="1"/>
+          <p:nvPr/>
+        </p:nvSpPr>
+        <p:spPr>
+          <a:xfrm>
+            <a:off x="1060100" y="4530000"/>
+            <a:ext cx="4700000" cy="800000"/>
+          </a:xfrm>
+          <a:prstGeom prst="rect">
+            <a:avLst/>
+          </a:prstGeom>
+          <a:noFill/>
+        </p:spPr>
+        <p:txBody>
+          <a:bodyPr wrap="square" lIns="0" rIns="0" tIns="0" bIns="0">
+            <a:spAutoFit/>
+          </a:bodyPr>
+          <a:lstStyle/>
+          <a:p>
+            <a:pPr algn="l">
+              <a:lnSpc>
+                <a:spcPct val="135000"/>
+              </a:lnSpc>
+              <a:spcAft>
+                <a:spcPts val="600"/>
+              </a:spcAft>
+            </a:pPr>
+            <a:r>
+              <a:rPr sz="1250" b="0">
                 <a:solidFill>
                   <a:srgbClr val="3F4149"/>
                 </a:solidFill>
                 <a:latin typeface="Helvetica Neue"/>
               </a:rPr>
-              <a:t>Run D — bug \boxed</a:t>
-            </a:r>
-          </a:p>
-        </p:txBody>
-      </p:sp>
-      <p:sp>
-        <p:nvSpPr>
-          <p:cNvPr id="36" name="TextBox 35"/>
-          <p:cNvSpPr txBox="1"/>
-          <p:nvPr/>
-        </p:nvSpPr>
-        <p:spPr>
-          <a:xfrm>
-            <a:off x="4600100" y="6265000"/>
-            <a:ext cx="4200000" cy="330000"/>
-          </a:xfrm>
-          <a:prstGeom prst="rect">
-            <a:avLst/>
-          </a:prstGeom>
-          <a:noFill/>
-        </p:spPr>
-        <p:txBody>
-          <a:bodyPr wrap="square" lIns="0" rIns="0" tIns="0" bIns="0">
-            <a:spAutoFit/>
-          </a:bodyPr>
-          <a:lstStyle/>
-          <a:p>
-            <a:pPr algn="l">
-              <a:spcAft>
-                <a:spcPts val="600"/>
-              </a:spcAft>
-            </a:pPr>
-            <a:r>
-              <a:rPr sz="1100" b="0">
+              <a:t>Lỗi phổ biến có gây hại. Ngưỡng bắt đầu</a:t>
+            </a:r>
+          </a:p>
+          <a:p>
+            <a:pPr algn="l">
+              <a:lnSpc>
+                <a:spcPct val="135000"/>
+              </a:lnSpc>
+              <a:spcAft>
+                <a:spcPts val="600"/>
+              </a:spcAft>
+            </a:pPr>
+            <a:r>
+              <a:rPr sz="1250" b="0">
                 <a:solidFill>
                   <a:srgbClr val="3F4149"/>
                 </a:solidFill>
                 <a:latin typeface="Helvetica Neue"/>
               </a:rPr>
-              <a:t>Kiểm quy luật lần 2, ở bug lớn hơn 8 lần</a:t>
-            </a:r>
-          </a:p>
-        </p:txBody>
-      </p:sp>
-      <p:sp>
-        <p:nvSpPr>
-          <p:cNvPr id="37" name="TextBox 36"/>
-          <p:cNvSpPr txBox="1"/>
-          <p:nvPr/>
-        </p:nvSpPr>
-        <p:spPr>
-          <a:xfrm>
-            <a:off x="8900100" y="6265000"/>
-            <a:ext cx="2400000" cy="330000"/>
-          </a:xfrm>
-          <a:prstGeom prst="rect">
-            <a:avLst/>
-          </a:prstGeom>
-          <a:noFill/>
-        </p:spPr>
-        <p:txBody>
-          <a:bodyPr wrap="square" lIns="0" rIns="0" tIns="0" bIns="0">
-            <a:spAutoFit/>
-          </a:bodyPr>
-          <a:lstStyle/>
-          <a:p>
-            <a:pPr algn="l">
-              <a:spcAft>
-                <a:spcPts val="600"/>
-              </a:spcAft>
-            </a:pPr>
-            <a:r>
-              <a:rPr sz="1100" b="0">
+              <a:t>gây hại nằm đâu đó giữa 0,55% và 4,4%.</a:t>
+            </a:r>
+          </a:p>
+        </p:txBody>
+      </p:sp>
+      <p:sp>
+        <p:nvSpPr>
+          <p:cNvPr id="21" name="Rounded Rectangle 20"/>
+          <p:cNvSpPr/>
+          <p:nvPr/>
+        </p:nvSpPr>
+        <p:spPr>
+          <a:xfrm>
+            <a:off x="6200100" y="3850000"/>
+            <a:ext cx="5190000" cy="1650000"/>
+          </a:xfrm>
+          <a:prstGeom prst="roundRect">
+            <a:avLst>
+              <a:gd name="adj" fmla="val 4000"/>
+            </a:avLst>
+          </a:prstGeom>
+          <a:solidFill>
+            <a:srgbClr val="F5F5F7"/>
+          </a:solidFill>
+          <a:ln>
+            <a:noFill/>
+          </a:ln>
+          <a:effectLst/>
+        </p:spPr>
+        <p:style>
+          <a:lnRef idx="1">
+            <a:schemeClr val="accent1"/>
+          </a:lnRef>
+          <a:fillRef idx="3">
+            <a:schemeClr val="accent1"/>
+          </a:fillRef>
+          <a:effectRef idx="2">
+            <a:schemeClr val="accent1"/>
+          </a:effectRef>
+          <a:fontRef idx="minor">
+            <a:schemeClr val="lt1"/>
+          </a:fontRef>
+        </p:style>
+        <p:txBody>
+          <a:bodyPr rtlCol="0" anchor="ctr"/>
+          <a:lstStyle/>
+          <a:p>
+            <a:pPr algn="ctr"/>
+          </a:p>
+        </p:txBody>
+      </p:sp>
+      <p:sp>
+        <p:nvSpPr>
+          <p:cNvPr id="22" name="Rounded Rectangle 21"/>
+          <p:cNvSpPr/>
+          <p:nvPr/>
+        </p:nvSpPr>
+        <p:spPr>
+          <a:xfrm>
+            <a:off x="6460100" y="4030000"/>
+            <a:ext cx="2600000" cy="320000"/>
+          </a:xfrm>
+          <a:prstGeom prst="roundRect">
+            <a:avLst>
+              <a:gd name="adj" fmla="val 50000"/>
+            </a:avLst>
+          </a:prstGeom>
+          <a:solidFill>
+            <a:srgbClr val="B85C00"/>
+          </a:solidFill>
+          <a:ln>
+            <a:noFill/>
+          </a:ln>
+          <a:effectLst/>
+        </p:spPr>
+        <p:style>
+          <a:lnRef idx="1">
+            <a:schemeClr val="accent1"/>
+          </a:lnRef>
+          <a:fillRef idx="3">
+            <a:schemeClr val="accent1"/>
+          </a:fillRef>
+          <a:effectRef idx="2">
+            <a:schemeClr val="accent1"/>
+          </a:effectRef>
+          <a:fontRef idx="minor">
+            <a:schemeClr val="lt1"/>
+          </a:fontRef>
+        </p:style>
+        <p:txBody>
+          <a:bodyPr rtlCol="0" anchor="ctr" wrap="none" lIns="0" rIns="0"/>
+          <a:lstStyle/>
+          <a:p>
+            <a:pPr algn="ctr"/>
+            <a:r>
+              <a:rPr sz="1050" b="1">
+                <a:solidFill>
+                  <a:srgbClr val="FFFFFF"/>
+                </a:solidFill>
+                <a:latin typeface="Helvetica Neue"/>
+              </a:rPr>
+              <a:t>Điểm gần như lần A</a:t>
+            </a:r>
+          </a:p>
+        </p:txBody>
+      </p:sp>
+      <p:sp>
+        <p:nvSpPr>
+          <p:cNvPr id="23" name="TextBox 22"/>
+          <p:cNvSpPr txBox="1"/>
+          <p:nvPr/>
+        </p:nvSpPr>
+        <p:spPr>
+          <a:xfrm>
+            <a:off x="6460100" y="4530000"/>
+            <a:ext cx="4700000" cy="800000"/>
+          </a:xfrm>
+          <a:prstGeom prst="rect">
+            <a:avLst/>
+          </a:prstGeom>
+          <a:noFill/>
+        </p:spPr>
+        <p:txBody>
+          <a:bodyPr wrap="square" lIns="0" rIns="0" tIns="0" bIns="0">
+            <a:spAutoFit/>
+          </a:bodyPr>
+          <a:lstStyle/>
+          <a:p>
+            <a:pPr algn="l">
+              <a:lnSpc>
+                <a:spcPct val="135000"/>
+              </a:lnSpc>
+              <a:spcAft>
+                <a:spcPts val="600"/>
+              </a:spcAft>
+            </a:pPr>
+            <a:r>
+              <a:rPr sz="1250" b="0">
                 <a:solidFill>
                   <a:srgbClr val="3F4149"/>
                 </a:solidFill>
                 <a:latin typeface="Helvetica Neue"/>
               </a:rPr>
-              <a:t>Dùng lại Run A, +1 lượt chạy</a:t>
+              <a:t>Kể cả lỗi gấp 8 lần cũng vô hại. Kết luận</a:t>
+            </a:r>
+          </a:p>
+          <a:p>
+            <a:pPr algn="l">
+              <a:lnSpc>
+                <a:spcPct val="135000"/>
+              </a:lnSpc>
+              <a:spcAft>
+                <a:spcPts val="600"/>
+              </a:spcAft>
+            </a:pPr>
+            <a:r>
+              <a:rPr sz="1250" b="0">
+                <a:solidFill>
+                  <a:srgbClr val="3F4149"/>
+                </a:solidFill>
+                <a:latin typeface="Helvetica Neue"/>
+              </a:rPr>
+              <a:t>"lỗi máy chấm không phải thủ phạm" càng chắc.</a:t>
+            </a:r>
+          </a:p>
+        </p:txBody>
+      </p:sp>
+      <p:sp>
+        <p:nvSpPr>
+          <p:cNvPr id="24" name="TextBox 23"/>
+          <p:cNvSpPr txBox="1"/>
+          <p:nvPr/>
+        </p:nvSpPr>
+        <p:spPr>
+          <a:xfrm>
+            <a:off x="800100" y="5800000"/>
+            <a:ext cx="10591495" cy="400000"/>
+          </a:xfrm>
+          <a:prstGeom prst="rect">
+            <a:avLst/>
+          </a:prstGeom>
+          <a:noFill/>
+        </p:spPr>
+        <p:txBody>
+          <a:bodyPr wrap="square" lIns="0" rIns="0" tIns="0" bIns="0">
+            <a:spAutoFit/>
+          </a:bodyPr>
+          <a:lstStyle/>
+          <a:p>
+            <a:pPr algn="l">
+              <a:spcAft>
+                <a:spcPts val="600"/>
+              </a:spcAft>
+            </a:pPr>
+            <a:r>
+              <a:rPr sz="1150" b="0">
+                <a:solidFill>
+                  <a:srgbClr val="8A8D96"/>
+                </a:solidFill>
+                <a:latin typeface="Helvetica Neue"/>
+              </a:rPr>
+              <a:t>Kết quả nào cũng viết được vào bài báo. Hàng đợi GPU: seed thứ hai cho GSM8K, ablation, rồi lần chạy này.</a:t>
             </a:r>
           </a:p>
         </p:txBody>
@@ -9113,7 +7802,7 @@
                 </a:solidFill>
                 <a:latin typeface="Helvetica Neue"/>
               </a:rPr>
-              <a:t>ĐỌC KẾT QUẢ THẾ NÀO</a:t>
+              <a:t>CÂU HỎI CHƯA TRẢ LỜI ĐƯỢC</a:t>
             </a:r>
           </a:p>
         </p:txBody>
@@ -9194,7 +7883,7 @@
                 </a:solidFill>
                 <a:latin typeface="Georgia"/>
               </a:rPr>
-              <a:t>Run D so với Run A đã có sẵn</a:t>
+              <a:t>Thí nghiệm kiểm chứng đang chạy</a:t>
             </a:r>
           </a:p>
         </p:txBody>
@@ -9207,7 +7896,7 @@
         </p:nvSpPr>
         <p:spPr>
           <a:xfrm>
-            <a:off x="800100" y="1580000"/>
+            <a:off x="800100" y="1620000"/>
             <a:ext cx="10591495" cy="700000"/>
           </a:xfrm>
           <a:prstGeom prst="rect">
@@ -9230,13 +7919,13 @@
               </a:spcAft>
             </a:pPr>
             <a:r>
-              <a:rPr sz="1300" b="0">
-                <a:solidFill>
-                  <a:srgbClr val="3F4149"/>
-                </a:solidFill>
-                <a:latin typeface="Helvetica Neue"/>
-              </a:rPr>
-              <a:t>Run D dùng đúng cấu hình của Run A — cùng bộ đề, cùng seed, cùng cách chia đề thi — chỉ khác một</a:t>
+              <a:rPr sz="1400" b="0">
+                <a:solidFill>
+                  <a:srgbClr val="16161A"/>
+                </a:solidFill>
+                <a:latin typeface="Helvetica Neue"/>
+              </a:rPr>
+              <a:t>Cả 7 lần chạy, điểm đều tụt khoảng 3 điểm ngay ở vòng 1 rồi đứng yên. Nhưng các công trình lớn</a:t>
             </a:r>
           </a:p>
           <a:p>
@@ -9249,13 +7938,13 @@
               </a:spcAft>
             </a:pPr>
             <a:r>
-              <a:rPr sz="1300" b="0">
-                <a:solidFill>
-                  <a:srgbClr val="3F4149"/>
-                </a:solidFill>
-                <a:latin typeface="Helvetica Neue"/>
-              </a:rPr>
-              <a:t>chỗ: đáp án sách đã được vá. Không cần chạy thêm lần đối chứng nào khác; Run A đã có sẵn.</a:t>
+              <a:rPr sz="1400" b="0">
+                <a:solidFill>
+                  <a:srgbClr val="16161A"/>
+                </a:solidFill>
+                <a:latin typeface="Helvetica Neue"/>
+              </a:rPr>
+              <a:t>về tự học đều báo cáo model KHÁ LÊN. Chưa giải thích được vì sao kết quả ở đây ngược lại.</a:t>
             </a:r>
           </a:p>
         </p:txBody>
@@ -9268,8 +7957,8 @@
         </p:nvSpPr>
         <p:spPr>
           <a:xfrm>
-            <a:off x="800100" y="2700000"/>
-            <a:ext cx="5190000" cy="2000000"/>
+            <a:off x="680100" y="2550000"/>
+            <a:ext cx="10831495" cy="900000"/>
           </a:xfrm>
           <a:prstGeom prst="roundRect">
             <a:avLst>
@@ -9308,14 +7997,160 @@
       </p:sp>
       <p:sp>
         <p:nvSpPr>
-          <p:cNvPr id="7" name="Rounded Rectangle 6"/>
+          <p:cNvPr id="7" name="TextBox 6"/>
+          <p:cNvSpPr txBox="1"/>
+          <p:nvPr/>
+        </p:nvSpPr>
+        <p:spPr>
+          <a:xfrm>
+            <a:off x="920100" y="2720000"/>
+            <a:ext cx="10351495" cy="640000"/>
+          </a:xfrm>
+          <a:prstGeom prst="rect">
+            <a:avLst/>
+          </a:prstGeom>
+          <a:noFill/>
+        </p:spPr>
+        <p:txBody>
+          <a:bodyPr wrap="square" lIns="0" rIns="0" tIns="0" bIns="0">
+            <a:spAutoFit/>
+          </a:bodyPr>
+          <a:lstStyle/>
+          <a:p>
+            <a:pPr algn="l">
+              <a:lnSpc>
+                <a:spcPct val="145000"/>
+              </a:lnSpc>
+              <a:spcAft>
+                <a:spcPts val="600"/>
+              </a:spcAft>
+            </a:pPr>
+            <a:r>
+              <a:rPr sz="1250" b="0">
+                <a:solidFill>
+                  <a:srgbClr val="3F4149"/>
+                </a:solidFill>
+                <a:latin typeface="Helvetica Neue"/>
+              </a:rPr>
+              <a:t>Có một khả năng đơn giản chưa loại trừ được: model này vốn đã được tinh chỉnh rất kỹ. Dạy thêm</a:t>
+            </a:r>
+          </a:p>
+          <a:p>
+            <a:pPr algn="l">
+              <a:lnSpc>
+                <a:spcPct val="145000"/>
+              </a:lnSpc>
+              <a:spcAft>
+                <a:spcPts val="600"/>
+              </a:spcAft>
+            </a:pPr>
+            <a:r>
+              <a:rPr sz="1250" b="0">
+                <a:solidFill>
+                  <a:srgbClr val="3F4149"/>
+                </a:solidFill>
+                <a:latin typeface="Helvetica Neue"/>
+              </a:rPr>
+              <a:t>một lượng nhỏ có thể chỉ làm nó lệch khỏi trạng thái tốt sẵn có, bất kể dạy bằng dữ liệu gì.</a:t>
+            </a:r>
+          </a:p>
+        </p:txBody>
+      </p:sp>
+      <p:sp>
+        <p:nvSpPr>
+          <p:cNvPr id="8" name="TextBox 7"/>
+          <p:cNvSpPr txBox="1"/>
+          <p:nvPr/>
+        </p:nvSpPr>
+        <p:spPr>
+          <a:xfrm>
+            <a:off x="800100" y="3720000"/>
+            <a:ext cx="10591495" cy="300000"/>
+          </a:xfrm>
+          <a:prstGeom prst="rect">
+            <a:avLst/>
+          </a:prstGeom>
+          <a:noFill/>
+        </p:spPr>
+        <p:txBody>
+          <a:bodyPr wrap="square" lIns="0" rIns="0" tIns="0" bIns="0">
+            <a:spAutoFit/>
+          </a:bodyPr>
+          <a:lstStyle/>
+          <a:p>
+            <a:pPr algn="l">
+              <a:spcAft>
+                <a:spcPts val="600"/>
+              </a:spcAft>
+            </a:pPr>
+            <a:r>
+              <a:rPr sz="1100" b="1">
+                <a:solidFill>
+                  <a:srgbClr val="8A8D96"/>
+                </a:solidFill>
+                <a:latin typeface="Helvetica Neue"/>
+              </a:rPr>
+              <a:t>THÍ NGHIỆM PHÂN ĐỊNH: dạy bằng lời giải mẫu của sách, thay vì bài model tự làm</a:t>
+            </a:r>
+          </a:p>
+        </p:txBody>
+      </p:sp>
+      <p:sp>
+        <p:nvSpPr>
+          <p:cNvPr id="9" name="Rounded Rectangle 8"/>
           <p:cNvSpPr/>
           <p:nvPr/>
         </p:nvSpPr>
         <p:spPr>
           <a:xfrm>
-            <a:off x="1060100" y="2900000"/>
-            <a:ext cx="4600000" cy="560000"/>
+            <a:off x="800100" y="4180000"/>
+            <a:ext cx="5190000" cy="1350000"/>
+          </a:xfrm>
+          <a:prstGeom prst="roundRect">
+            <a:avLst>
+              <a:gd name="adj" fmla="val 4000"/>
+            </a:avLst>
+          </a:prstGeom>
+          <a:solidFill>
+            <a:srgbClr val="F5F5F7"/>
+          </a:solidFill>
+          <a:ln>
+            <a:noFill/>
+          </a:ln>
+          <a:effectLst/>
+        </p:spPr>
+        <p:style>
+          <a:lnRef idx="1">
+            <a:schemeClr val="accent1"/>
+          </a:lnRef>
+          <a:fillRef idx="3">
+            <a:schemeClr val="accent1"/>
+          </a:fillRef>
+          <a:effectRef idx="2">
+            <a:schemeClr val="accent1"/>
+          </a:effectRef>
+          <a:fontRef idx="minor">
+            <a:schemeClr val="lt1"/>
+          </a:fontRef>
+        </p:style>
+        <p:txBody>
+          <a:bodyPr rtlCol="0" anchor="ctr"/>
+          <a:lstStyle/>
+          <a:p>
+            <a:pPr algn="ctr"/>
+          </a:p>
+        </p:txBody>
+      </p:sp>
+      <p:sp>
+        <p:nvSpPr>
+          <p:cNvPr id="10" name="Rounded Rectangle 9"/>
+          <p:cNvSpPr/>
+          <p:nvPr/>
+        </p:nvSpPr>
+        <p:spPr>
+          <a:xfrm>
+            <a:off x="1040100" y="4360000"/>
+            <a:ext cx="1500000" cy="310000"/>
           </a:xfrm>
           <a:prstGeom prst="roundRect">
             <a:avLst>
@@ -9356,21 +8191,21 @@
                 </a:solidFill>
                 <a:latin typeface="Helvetica Neue"/>
               </a:rPr>
-              <a:t>Nếu Run D tụt điểm rõ so với A</a:t>
-            </a:r>
-          </a:p>
-        </p:txBody>
-      </p:sp>
-      <p:sp>
-        <p:nvSpPr>
-          <p:cNvPr id="8" name="TextBox 7"/>
-          <p:cNvSpPr txBox="1"/>
-          <p:nvPr/>
-        </p:nvSpPr>
-        <p:spPr>
-          <a:xfrm>
-            <a:off x="1060100" y="3620000"/>
-            <a:ext cx="4700000" cy="1000000"/>
+              <a:t>Nếu khá lên</a:t>
+            </a:r>
+          </a:p>
+        </p:txBody>
+      </p:sp>
+      <p:sp>
+        <p:nvSpPr>
+          <p:cNvPr id="11" name="TextBox 10"/>
+          <p:cNvSpPr txBox="1"/>
+          <p:nvPr/>
+        </p:nvSpPr>
+        <p:spPr>
+          <a:xfrm>
+            <a:off x="1040100" y="4830000"/>
+            <a:ext cx="4700000" cy="600000"/>
           </a:xfrm>
           <a:prstGeom prst="rect">
             <a:avLst/>
@@ -9398,7 +8233,7 @@
                 </a:solidFill>
                 <a:latin typeface="Helvetica Neue"/>
               </a:rPr>
-              <a:t>quy luật mức-nặng × tần-suất được xác nhận lần thứ</a:t>
+              <a:t>thì vòng lặp không sao, và cái hại đúng là</a:t>
             </a:r>
           </a:p>
           <a:p>
@@ -9417,40 +8252,21 @@
                 </a:solidFill>
                 <a:latin typeface="Helvetica Neue"/>
               </a:rPr>
-              <a:t>hai, độc lập với lần \dfrac. Biết được ngưỡng gây</a:t>
-            </a:r>
-          </a:p>
-          <a:p>
-            <a:pPr algn="l">
-              <a:lnSpc>
-                <a:spcPct val="135000"/>
-              </a:lnSpc>
-              <a:spcAft>
-                <a:spcPts val="600"/>
-              </a:spcAft>
-            </a:pPr>
-            <a:r>
-              <a:rPr sz="1200" b="0">
-                <a:solidFill>
-                  <a:srgbClr val="3F4149"/>
-                </a:solidFill>
-                <a:latin typeface="Helvetica Neue"/>
-              </a:rPr>
-              <a:t>hại nằm ở đâu đó dưới 4,4%.</a:t>
-            </a:r>
-          </a:p>
-        </p:txBody>
-      </p:sp>
-      <p:sp>
-        <p:nvSpPr>
-          <p:cNvPr id="9" name="Rounded Rectangle 8"/>
+              <a:t>do model học từ bài của chính nó.</a:t>
+            </a:r>
+          </a:p>
+        </p:txBody>
+      </p:sp>
+      <p:sp>
+        <p:nvSpPr>
+          <p:cNvPr id="12" name="Rounded Rectangle 11"/>
           <p:cNvSpPr/>
           <p:nvPr/>
         </p:nvSpPr>
         <p:spPr>
           <a:xfrm>
-            <a:off x="6200100" y="2700000"/>
-            <a:ext cx="5190000" cy="2000000"/>
+            <a:off x="6200100" y="4180000"/>
+            <a:ext cx="5190000" cy="1350000"/>
           </a:xfrm>
           <a:prstGeom prst="roundRect">
             <a:avLst>
@@ -9489,14 +8305,14 @@
       </p:sp>
       <p:sp>
         <p:nvSpPr>
-          <p:cNvPr id="10" name="Rounded Rectangle 9"/>
+          <p:cNvPr id="13" name="Rounded Rectangle 12"/>
           <p:cNvSpPr/>
           <p:nvPr/>
         </p:nvSpPr>
         <p:spPr>
           <a:xfrm>
-            <a:off x="6460100" y="2900000"/>
-            <a:ext cx="4600000" cy="560000"/>
+            <a:off x="6440100" y="4360000"/>
+            <a:ext cx="1500000" cy="310000"/>
           </a:xfrm>
           <a:prstGeom prst="roundRect">
             <a:avLst>
@@ -9537,21 +8353,21 @@
                 </a:solidFill>
                 <a:latin typeface="Helvetica Neue"/>
               </a:rPr>
-              <a:t>Nếu Run D gần như trùng A</a:t>
-            </a:r>
-          </a:p>
-        </p:txBody>
-      </p:sp>
-      <p:sp>
-        <p:nvSpPr>
-          <p:cNvPr id="11" name="TextBox 10"/>
-          <p:cNvSpPr txBox="1"/>
-          <p:nvPr/>
-        </p:nvSpPr>
-        <p:spPr>
-          <a:xfrm>
-            <a:off x="6460100" y="3620000"/>
-            <a:ext cx="4700000" cy="1000000"/>
+              <a:t>Nếu cũng tụt</a:t>
+            </a:r>
+          </a:p>
+        </p:txBody>
+      </p:sp>
+      <p:sp>
+        <p:nvSpPr>
+          <p:cNvPr id="14" name="TextBox 13"/>
+          <p:cNvSpPr txBox="1"/>
+          <p:nvPr/>
+        </p:nvSpPr>
+        <p:spPr>
+          <a:xfrm>
+            <a:off x="6440100" y="4830000"/>
+            <a:ext cx="4700000" cy="600000"/>
           </a:xfrm>
           <a:prstGeom prst="rect">
             <a:avLst/>
@@ -9579,7 +8395,7 @@
                 </a:solidFill>
                 <a:latin typeface="Helvetica Neue"/>
               </a:rPr>
-              <a:t>củng cố thêm kết luận hiện tại: hai bug độc lập,</a:t>
+              <a:t>thì cú tụt là do việc dạy thêm, không liên</a:t>
             </a:r>
           </a:p>
           <a:p>
@@ -9598,111 +8414,46 @@
                 </a:solidFill>
                 <a:latin typeface="Helvetica Neue"/>
               </a:rPr>
-              <a:t>hai lần null. Ngưỡng gây hại còn cao hơn cả 4,4%,</a:t>
-            </a:r>
-          </a:p>
-          <a:p>
-            <a:pPr algn="l">
-              <a:lnSpc>
-                <a:spcPct val="135000"/>
-              </a:lnSpc>
-              <a:spcAft>
-                <a:spcPts val="600"/>
-              </a:spcAft>
-            </a:pPr>
-            <a:r>
-              <a:rPr sz="1200" b="0">
-                <a:solidFill>
-                  <a:srgbClr val="3F4149"/>
-                </a:solidFill>
-                <a:latin typeface="Helvetica Neue"/>
-              </a:rPr>
-              <a:t>và lỗi máy chấm càng khó là nguyên nhân chính.</a:t>
-            </a:r>
-          </a:p>
-        </p:txBody>
-      </p:sp>
-      <p:sp>
-        <p:nvSpPr>
-          <p:cNvPr id="12" name="Rounded Rectangle 11"/>
-          <p:cNvSpPr/>
-          <p:nvPr/>
-        </p:nvSpPr>
-        <p:spPr>
-          <a:xfrm>
-            <a:off x="680100" y="5050000"/>
-            <a:ext cx="10831495" cy="700000"/>
-          </a:xfrm>
-          <a:prstGeom prst="roundRect">
-            <a:avLst>
-              <a:gd name="adj" fmla="val 4000"/>
-            </a:avLst>
-          </a:prstGeom>
-          <a:solidFill>
-            <a:srgbClr val="F0F6FA"/>
-          </a:solidFill>
-          <a:ln>
-            <a:noFill/>
-          </a:ln>
-          <a:effectLst/>
-        </p:spPr>
-        <p:style>
-          <a:lnRef idx="1">
-            <a:schemeClr val="accent1"/>
-          </a:lnRef>
-          <a:fillRef idx="3">
-            <a:schemeClr val="accent1"/>
-          </a:fillRef>
-          <a:effectRef idx="2">
-            <a:schemeClr val="accent1"/>
-          </a:effectRef>
-          <a:fontRef idx="minor">
-            <a:schemeClr val="lt1"/>
-          </a:fontRef>
-        </p:style>
-        <p:txBody>
-          <a:bodyPr rtlCol="0" anchor="ctr"/>
-          <a:lstStyle/>
-          <a:p>
-            <a:pPr algn="ctr"/>
-          </a:p>
-        </p:txBody>
-      </p:sp>
-      <p:sp>
-        <p:nvSpPr>
-          <p:cNvPr id="13" name="TextBox 12"/>
-          <p:cNvSpPr txBox="1"/>
-          <p:nvPr/>
-        </p:nvSpPr>
-        <p:spPr>
-          <a:xfrm>
-            <a:off x="920100" y="5230000"/>
-            <a:ext cx="10351495" cy="400000"/>
-          </a:xfrm>
-          <a:prstGeom prst="rect">
-            <a:avLst/>
-          </a:prstGeom>
-          <a:noFill/>
-        </p:spPr>
-        <p:txBody>
-          <a:bodyPr wrap="square" lIns="0" rIns="0" tIns="0" bIns="0">
-            <a:spAutoFit/>
-          </a:bodyPr>
-          <a:lstStyle/>
-          <a:p>
-            <a:pPr algn="l">
-              <a:spcAft>
-                <a:spcPts val="600"/>
-              </a:spcAft>
-            </a:pPr>
-            <a:r>
-              <a:rPr sz="1250" b="1">
-                <a:solidFill>
-                  <a:srgbClr val="0173B2"/>
-                </a:solidFill>
-                <a:latin typeface="Helvetica Neue"/>
-              </a:rPr>
-              <a:t>Ngã nào cũng ra kết luận dùng được — và lần này 4,4% là số đã đo, không phải ước lượng.</a:t>
+              <a:t>quan tự học. Kết luận phải sửa lần nữa.</a:t>
+            </a:r>
+          </a:p>
+        </p:txBody>
+      </p:sp>
+      <p:sp>
+        <p:nvSpPr>
+          <p:cNvPr id="15" name="TextBox 14"/>
+          <p:cNvSpPr txBox="1"/>
+          <p:nvPr/>
+        </p:nvSpPr>
+        <p:spPr>
+          <a:xfrm>
+            <a:off x="800100" y="5800000"/>
+            <a:ext cx="10591495" cy="300000"/>
+          </a:xfrm>
+          <a:prstGeom prst="rect">
+            <a:avLst/>
+          </a:prstGeom>
+          <a:noFill/>
+        </p:spPr>
+        <p:txBody>
+          <a:bodyPr wrap="square" lIns="0" rIns="0" tIns="0" bIns="0">
+            <a:spAutoFit/>
+          </a:bodyPr>
+          <a:lstStyle/>
+          <a:p>
+            <a:pPr algn="l">
+              <a:spcAft>
+                <a:spcPts val="600"/>
+              </a:spcAft>
+            </a:pPr>
+            <a:r>
+              <a:rPr sz="1050" b="0">
+                <a:solidFill>
+                  <a:srgbClr val="8A8D96"/>
+                </a:solidFill>
+                <a:latin typeface="Helvetica Neue"/>
+              </a:rPr>
+              <a:t>Phần code đã hoàn tất, đang chờ tới lượt GPU.</a:t>
             </a:r>
           </a:p>
         </p:txBody>
@@ -9759,7 +8510,7 @@
                 </a:solidFill>
                 <a:latin typeface="Helvetica Neue"/>
               </a:rPr>
-              <a:t>CÂU HỎI CHƯA TRẢ LỜI ĐƯỢC</a:t>
+              <a:t>HẠN CHẾ</a:t>
             </a:r>
           </a:p>
         </p:txBody>
@@ -9840,82 +8591,21 @@
                 </a:solidFill>
                 <a:latin typeface="Georgia"/>
               </a:rPr>
-              <a:t>Thí nghiệm kiểm chứng đang chạy</a:t>
-            </a:r>
-          </a:p>
-        </p:txBody>
-      </p:sp>
-      <p:sp>
-        <p:nvSpPr>
-          <p:cNvPr id="5" name="TextBox 4"/>
-          <p:cNvSpPr txBox="1"/>
-          <p:nvPr/>
-        </p:nvSpPr>
-        <p:spPr>
-          <a:xfrm>
-            <a:off x="800100" y="1620000"/>
-            <a:ext cx="10591495" cy="700000"/>
-          </a:xfrm>
-          <a:prstGeom prst="rect">
-            <a:avLst/>
-          </a:prstGeom>
-          <a:noFill/>
-        </p:spPr>
-        <p:txBody>
-          <a:bodyPr wrap="square" lIns="0" rIns="0" tIns="0" bIns="0">
-            <a:spAutoFit/>
-          </a:bodyPr>
-          <a:lstStyle/>
-          <a:p>
-            <a:pPr algn="l">
-              <a:lnSpc>
-                <a:spcPct val="140000"/>
-              </a:lnSpc>
-              <a:spcAft>
-                <a:spcPts val="600"/>
-              </a:spcAft>
-            </a:pPr>
-            <a:r>
-              <a:rPr sz="1400" b="0">
-                <a:solidFill>
-                  <a:srgbClr val="16161A"/>
-                </a:solidFill>
-                <a:latin typeface="Helvetica Neue"/>
-              </a:rPr>
-              <a:t>Cả 7 lần chạy, điểm đều tụt khoảng 3 điểm ngay ở vòng 1 rồi đứng yên. Nhưng các công trình lớn</a:t>
-            </a:r>
-          </a:p>
-          <a:p>
-            <a:pPr algn="l">
-              <a:lnSpc>
-                <a:spcPct val="140000"/>
-              </a:lnSpc>
-              <a:spcAft>
-                <a:spcPts val="600"/>
-              </a:spcAft>
-            </a:pPr>
-            <a:r>
-              <a:rPr sz="1400" b="0">
-                <a:solidFill>
-                  <a:srgbClr val="16161A"/>
-                </a:solidFill>
-                <a:latin typeface="Helvetica Neue"/>
-              </a:rPr>
-              <a:t>về tự học đều báo cáo model KHÁ LÊN. Chưa giải thích được vì sao kết quả ở đây ngược lại.</a:t>
-            </a:r>
-          </a:p>
-        </p:txBody>
-      </p:sp>
-      <p:sp>
-        <p:nvSpPr>
-          <p:cNvPr id="6" name="Rounded Rectangle 5"/>
+              <a:t>Ba điểm cần lưu ý khi đọc kết quả</a:t>
+            </a:r>
+          </a:p>
+        </p:txBody>
+      </p:sp>
+      <p:sp>
+        <p:nvSpPr>
+          <p:cNvPr id="5" name="Rounded Rectangle 4"/>
           <p:cNvSpPr/>
           <p:nvPr/>
         </p:nvSpPr>
         <p:spPr>
           <a:xfrm>
-            <a:off x="680100" y="2550000"/>
-            <a:ext cx="10831495" cy="900000"/>
+            <a:off x="680100" y="2000000"/>
+            <a:ext cx="10831495" cy="1150000"/>
           </a:xfrm>
           <a:prstGeom prst="roundRect">
             <a:avLst>
@@ -9954,14 +8644,92 @@
       </p:sp>
       <p:sp>
         <p:nvSpPr>
+          <p:cNvPr id="6" name="TextBox 5"/>
+          <p:cNvSpPr txBox="1"/>
+          <p:nvPr/>
+        </p:nvSpPr>
+        <p:spPr>
+          <a:xfrm>
+            <a:off x="920100" y="2200000"/>
+            <a:ext cx="400000" cy="300000"/>
+          </a:xfrm>
+          <a:prstGeom prst="rect">
+            <a:avLst/>
+          </a:prstGeom>
+          <a:noFill/>
+        </p:spPr>
+        <p:txBody>
+          <a:bodyPr wrap="square" lIns="0" rIns="0" tIns="0" bIns="0">
+            <a:spAutoFit/>
+          </a:bodyPr>
+          <a:lstStyle/>
+          <a:p>
+            <a:pPr algn="l">
+              <a:spcAft>
+                <a:spcPts val="600"/>
+              </a:spcAft>
+            </a:pPr>
+            <a:r>
+              <a:rPr sz="1300" b="1">
+                <a:solidFill>
+                  <a:srgbClr val="9E2B34"/>
+                </a:solidFill>
+                <a:latin typeface="Georgia"/>
+              </a:rPr>
+              <a:t>01</a:t>
+            </a:r>
+          </a:p>
+        </p:txBody>
+      </p:sp>
+      <p:sp>
+        <p:nvSpPr>
           <p:cNvPr id="7" name="TextBox 6"/>
           <p:cNvSpPr txBox="1"/>
           <p:nvPr/>
         </p:nvSpPr>
         <p:spPr>
           <a:xfrm>
-            <a:off x="920100" y="2720000"/>
-            <a:ext cx="10351495" cy="640000"/>
+            <a:off x="1500100" y="2190000"/>
+            <a:ext cx="9500000" cy="300000"/>
+          </a:xfrm>
+          <a:prstGeom prst="rect">
+            <a:avLst/>
+          </a:prstGeom>
+          <a:noFill/>
+        </p:spPr>
+        <p:txBody>
+          <a:bodyPr wrap="square" lIns="0" rIns="0" tIns="0" bIns="0">
+            <a:spAutoFit/>
+          </a:bodyPr>
+          <a:lstStyle/>
+          <a:p>
+            <a:pPr algn="l">
+              <a:spcAft>
+                <a:spcPts val="600"/>
+              </a:spcAft>
+            </a:pPr>
+            <a:r>
+              <a:rPr sz="1400" b="1">
+                <a:solidFill>
+                  <a:srgbClr val="16161A"/>
+                </a:solidFill>
+                <a:latin typeface="Helvetica Neue"/>
+              </a:rPr>
+              <a:t>Đề thi chỉ có 150 đề</a:t>
+            </a:r>
+          </a:p>
+        </p:txBody>
+      </p:sp>
+      <p:sp>
+        <p:nvSpPr>
+          <p:cNvPr id="8" name="TextBox 7"/>
+          <p:cNvSpPr txBox="1"/>
+          <p:nvPr/>
+        </p:nvSpPr>
+        <p:spPr>
+          <a:xfrm>
+            <a:off x="1500100" y="2600000"/>
+            <a:ext cx="9500000" cy="450000"/>
           </a:xfrm>
           <a:prstGeom prst="rect">
             <a:avLst/>
@@ -9976,78 +8744,20 @@
           <a:p>
             <a:pPr algn="l">
               <a:lnSpc>
-                <a:spcPct val="145000"/>
+                <a:spcPct val="130000"/>
               </a:lnSpc>
               <a:spcAft>
                 <a:spcPts val="600"/>
               </a:spcAft>
             </a:pPr>
             <a:r>
-              <a:rPr sz="1250" b="0">
+              <a:rPr sz="1200" b="0">
                 <a:solidFill>
                   <a:srgbClr val="3F4149"/>
                 </a:solidFill>
                 <a:latin typeface="Helvetica Neue"/>
               </a:rPr>
-              <a:t>Có một khả năng đơn giản chưa loại trừ được: model này vốn đã được tinh chỉnh rất kỹ. Dạy thêm</a:t>
-            </a:r>
-          </a:p>
-          <a:p>
-            <a:pPr algn="l">
-              <a:lnSpc>
-                <a:spcPct val="145000"/>
-              </a:lnSpc>
-              <a:spcAft>
-                <a:spcPts val="600"/>
-              </a:spcAft>
-            </a:pPr>
-            <a:r>
-              <a:rPr sz="1250" b="0">
-                <a:solidFill>
-                  <a:srgbClr val="3F4149"/>
-                </a:solidFill>
-                <a:latin typeface="Helvetica Neue"/>
-              </a:rPr>
-              <a:t>một lượng nhỏ có thể chỉ làm nó lệch khỏi trạng thái tốt sẵn có, bất kể dạy bằng dữ liệu gì.</a:t>
-            </a:r>
-          </a:p>
-        </p:txBody>
-      </p:sp>
-      <p:sp>
-        <p:nvSpPr>
-          <p:cNvPr id="8" name="TextBox 7"/>
-          <p:cNvSpPr txBox="1"/>
-          <p:nvPr/>
-        </p:nvSpPr>
-        <p:spPr>
-          <a:xfrm>
-            <a:off x="800100" y="3720000"/>
-            <a:ext cx="10591495" cy="300000"/>
-          </a:xfrm>
-          <a:prstGeom prst="rect">
-            <a:avLst/>
-          </a:prstGeom>
-          <a:noFill/>
-        </p:spPr>
-        <p:txBody>
-          <a:bodyPr wrap="square" lIns="0" rIns="0" tIns="0" bIns="0">
-            <a:spAutoFit/>
-          </a:bodyPr>
-          <a:lstStyle/>
-          <a:p>
-            <a:pPr algn="l">
-              <a:spcAft>
-                <a:spcPts val="600"/>
-              </a:spcAft>
-            </a:pPr>
-            <a:r>
-              <a:rPr sz="1100" b="1">
-                <a:solidFill>
-                  <a:srgbClr val="8A8D96"/>
-                </a:solidFill>
-                <a:latin typeface="Helvetica Neue"/>
-              </a:rPr>
-              <a:t>THÍ NGHIỆM PHÂN ĐỊNH: dạy bằng lời giải mẫu của sách, thay vì bài model tự làm</a:t>
+              <a:t>Mỗi đề đáng 0,67 điểm. Chỉ đổi cách bốc đề thi thôi là điểm vòng 0 đã lệch 4,7 điểm, lớn hơn cả hiệu ứng đang đo.</a:t>
             </a:r>
           </a:p>
         </p:txBody>
@@ -10060,8 +8770,8 @@
         </p:nvSpPr>
         <p:spPr>
           <a:xfrm>
-            <a:off x="800100" y="4180000"/>
-            <a:ext cx="5190000" cy="1350000"/>
+            <a:off x="680100" y="3330000"/>
+            <a:ext cx="10831495" cy="1150000"/>
           </a:xfrm>
           <a:prstGeom prst="roundRect">
             <a:avLst>
@@ -10100,130 +8810,134 @@
       </p:sp>
       <p:sp>
         <p:nvSpPr>
-          <p:cNvPr id="10" name="Rounded Rectangle 9"/>
+          <p:cNvPr id="10" name="TextBox 9"/>
+          <p:cNvSpPr txBox="1"/>
+          <p:nvPr/>
+        </p:nvSpPr>
+        <p:spPr>
+          <a:xfrm>
+            <a:off x="920100" y="3530000"/>
+            <a:ext cx="400000" cy="300000"/>
+          </a:xfrm>
+          <a:prstGeom prst="rect">
+            <a:avLst/>
+          </a:prstGeom>
+          <a:noFill/>
+        </p:spPr>
+        <p:txBody>
+          <a:bodyPr wrap="square" lIns="0" rIns="0" tIns="0" bIns="0">
+            <a:spAutoFit/>
+          </a:bodyPr>
+          <a:lstStyle/>
+          <a:p>
+            <a:pPr algn="l">
+              <a:spcAft>
+                <a:spcPts val="600"/>
+              </a:spcAft>
+            </a:pPr>
+            <a:r>
+              <a:rPr sz="1300" b="1">
+                <a:solidFill>
+                  <a:srgbClr val="9E2B34"/>
+                </a:solidFill>
+                <a:latin typeface="Georgia"/>
+              </a:rPr>
+              <a:t>02</a:t>
+            </a:r>
+          </a:p>
+        </p:txBody>
+      </p:sp>
+      <p:sp>
+        <p:nvSpPr>
+          <p:cNvPr id="11" name="TextBox 10"/>
+          <p:cNvSpPr txBox="1"/>
+          <p:nvPr/>
+        </p:nvSpPr>
+        <p:spPr>
+          <a:xfrm>
+            <a:off x="1500100" y="3520000"/>
+            <a:ext cx="9500000" cy="300000"/>
+          </a:xfrm>
+          <a:prstGeom prst="rect">
+            <a:avLst/>
+          </a:prstGeom>
+          <a:noFill/>
+        </p:spPr>
+        <p:txBody>
+          <a:bodyPr wrap="square" lIns="0" rIns="0" tIns="0" bIns="0">
+            <a:spAutoFit/>
+          </a:bodyPr>
+          <a:lstStyle/>
+          <a:p>
+            <a:pPr algn="l">
+              <a:spcAft>
+                <a:spcPts val="600"/>
+              </a:spcAft>
+            </a:pPr>
+            <a:r>
+              <a:rPr sz="1400" b="1">
+                <a:solidFill>
+                  <a:srgbClr val="16161A"/>
+                </a:solidFill>
+                <a:latin typeface="Helvetica Neue"/>
+              </a:rPr>
+              <a:t>Mỗi cấu hình mới chạy 2 lần</a:t>
+            </a:r>
+          </a:p>
+        </p:txBody>
+      </p:sp>
+      <p:sp>
+        <p:nvSpPr>
+          <p:cNvPr id="12" name="TextBox 11"/>
+          <p:cNvSpPr txBox="1"/>
+          <p:nvPr/>
+        </p:nvSpPr>
+        <p:spPr>
+          <a:xfrm>
+            <a:off x="1500100" y="3930000"/>
+            <a:ext cx="9500000" cy="450000"/>
+          </a:xfrm>
+          <a:prstGeom prst="rect">
+            <a:avLst/>
+          </a:prstGeom>
+          <a:noFill/>
+        </p:spPr>
+        <p:txBody>
+          <a:bodyPr wrap="square" lIns="0" rIns="0" tIns="0" bIns="0">
+            <a:spAutoFit/>
+          </a:bodyPr>
+          <a:lstStyle/>
+          <a:p>
+            <a:pPr algn="l">
+              <a:lnSpc>
+                <a:spcPct val="130000"/>
+              </a:lnSpc>
+              <a:spcAft>
+                <a:spcPts val="600"/>
+              </a:spcAft>
+            </a:pPr>
+            <a:r>
+              <a:rPr sz="1200" b="0">
+                <a:solidFill>
+                  <a:srgbClr val="3F4149"/>
+                </a:solidFill>
+                <a:latin typeface="Helvetica Neue"/>
+              </a:rPr>
+              <a:t>Riêng lần chạy C và các lần chạy cũ mới có 1 lần. Chưa đủ cơ sở để khẳng định về cú tụt 12,7 điểm của GSM8K.</a:t>
+            </a:r>
+          </a:p>
+        </p:txBody>
+      </p:sp>
+      <p:sp>
+        <p:nvSpPr>
+          <p:cNvPr id="13" name="Rounded Rectangle 12"/>
           <p:cNvSpPr/>
           <p:nvPr/>
         </p:nvSpPr>
         <p:spPr>
           <a:xfrm>
-            <a:off x="1040100" y="4360000"/>
-            <a:ext cx="1500000" cy="310000"/>
-          </a:xfrm>
-          <a:prstGeom prst="roundRect">
-            <a:avLst>
-              <a:gd name="adj" fmla="val 50000"/>
-            </a:avLst>
-          </a:prstGeom>
-          <a:solidFill>
-            <a:srgbClr val="029E73"/>
-          </a:solidFill>
-          <a:ln>
-            <a:noFill/>
-          </a:ln>
-          <a:effectLst/>
-        </p:spPr>
-        <p:style>
-          <a:lnRef idx="1">
-            <a:schemeClr val="accent1"/>
-          </a:lnRef>
-          <a:fillRef idx="3">
-            <a:schemeClr val="accent1"/>
-          </a:fillRef>
-          <a:effectRef idx="2">
-            <a:schemeClr val="accent1"/>
-          </a:effectRef>
-          <a:fontRef idx="minor">
-            <a:schemeClr val="lt1"/>
-          </a:fontRef>
-        </p:style>
-        <p:txBody>
-          <a:bodyPr rtlCol="0" anchor="ctr" wrap="none" lIns="0" rIns="0"/>
-          <a:lstStyle/>
-          <a:p>
-            <a:pPr algn="ctr"/>
-            <a:r>
-              <a:rPr sz="1050" b="1">
-                <a:solidFill>
-                  <a:srgbClr val="FFFFFF"/>
-                </a:solidFill>
-                <a:latin typeface="Helvetica Neue"/>
-              </a:rPr>
-              <a:t>Nếu khá lên</a:t>
-            </a:r>
-          </a:p>
-        </p:txBody>
-      </p:sp>
-      <p:sp>
-        <p:nvSpPr>
-          <p:cNvPr id="11" name="TextBox 10"/>
-          <p:cNvSpPr txBox="1"/>
-          <p:nvPr/>
-        </p:nvSpPr>
-        <p:spPr>
-          <a:xfrm>
-            <a:off x="1040100" y="4830000"/>
-            <a:ext cx="4700000" cy="600000"/>
-          </a:xfrm>
-          <a:prstGeom prst="rect">
-            <a:avLst/>
-          </a:prstGeom>
-          <a:noFill/>
-        </p:spPr>
-        <p:txBody>
-          <a:bodyPr wrap="square" lIns="0" rIns="0" tIns="0" bIns="0">
-            <a:spAutoFit/>
-          </a:bodyPr>
-          <a:lstStyle/>
-          <a:p>
-            <a:pPr algn="l">
-              <a:lnSpc>
-                <a:spcPct val="135000"/>
-              </a:lnSpc>
-              <a:spcAft>
-                <a:spcPts val="600"/>
-              </a:spcAft>
-            </a:pPr>
-            <a:r>
-              <a:rPr sz="1200" b="0">
-                <a:solidFill>
-                  <a:srgbClr val="3F4149"/>
-                </a:solidFill>
-                <a:latin typeface="Helvetica Neue"/>
-              </a:rPr>
-              <a:t>thì vòng lặp không sao, và cái hại đúng là</a:t>
-            </a:r>
-          </a:p>
-          <a:p>
-            <a:pPr algn="l">
-              <a:lnSpc>
-                <a:spcPct val="135000"/>
-              </a:lnSpc>
-              <a:spcAft>
-                <a:spcPts val="600"/>
-              </a:spcAft>
-            </a:pPr>
-            <a:r>
-              <a:rPr sz="1200" b="0">
-                <a:solidFill>
-                  <a:srgbClr val="3F4149"/>
-                </a:solidFill>
-                <a:latin typeface="Helvetica Neue"/>
-              </a:rPr>
-              <a:t>do model học từ bài của chính nó.</a:t>
-            </a:r>
-          </a:p>
-        </p:txBody>
-      </p:sp>
-      <p:sp>
-        <p:nvSpPr>
-          <p:cNvPr id="12" name="Rounded Rectangle 11"/>
-          <p:cNvSpPr/>
-          <p:nvPr/>
-        </p:nvSpPr>
-        <p:spPr>
-          <a:xfrm>
-            <a:off x="6200100" y="4180000"/>
-            <a:ext cx="5190000" cy="1350000"/>
+            <a:off x="680100" y="4660000"/>
+            <a:ext cx="10831495" cy="1150000"/>
           </a:xfrm>
           <a:prstGeom prst="roundRect">
             <a:avLst>
@@ -10262,69 +8976,92 @@
       </p:sp>
       <p:sp>
         <p:nvSpPr>
-          <p:cNvPr id="13" name="Rounded Rectangle 12"/>
-          <p:cNvSpPr/>
-          <p:nvPr/>
-        </p:nvSpPr>
-        <p:spPr>
-          <a:xfrm>
-            <a:off x="6440100" y="4360000"/>
-            <a:ext cx="1500000" cy="310000"/>
-          </a:xfrm>
-          <a:prstGeom prst="roundRect">
-            <a:avLst>
-              <a:gd name="adj" fmla="val 50000"/>
-            </a:avLst>
-          </a:prstGeom>
-          <a:solidFill>
-            <a:srgbClr val="B85C00"/>
-          </a:solidFill>
-          <a:ln>
-            <a:noFill/>
-          </a:ln>
-          <a:effectLst/>
-        </p:spPr>
-        <p:style>
-          <a:lnRef idx="1">
-            <a:schemeClr val="accent1"/>
-          </a:lnRef>
-          <a:fillRef idx="3">
-            <a:schemeClr val="accent1"/>
-          </a:fillRef>
-          <a:effectRef idx="2">
-            <a:schemeClr val="accent1"/>
-          </a:effectRef>
-          <a:fontRef idx="minor">
-            <a:schemeClr val="lt1"/>
-          </a:fontRef>
-        </p:style>
-        <p:txBody>
-          <a:bodyPr rtlCol="0" anchor="ctr" wrap="none" lIns="0" rIns="0"/>
-          <a:lstStyle/>
-          <a:p>
-            <a:pPr algn="ctr"/>
-            <a:r>
-              <a:rPr sz="1050" b="1">
-                <a:solidFill>
-                  <a:srgbClr val="FFFFFF"/>
-                </a:solidFill>
-                <a:latin typeface="Helvetica Neue"/>
-              </a:rPr>
-              <a:t>Nếu cũng tụt</a:t>
-            </a:r>
-          </a:p>
-        </p:txBody>
-      </p:sp>
-      <p:sp>
-        <p:nvSpPr>
           <p:cNvPr id="14" name="TextBox 13"/>
           <p:cNvSpPr txBox="1"/>
           <p:nvPr/>
         </p:nvSpPr>
         <p:spPr>
           <a:xfrm>
-            <a:off x="6440100" y="4830000"/>
-            <a:ext cx="4700000" cy="600000"/>
+            <a:off x="920100" y="4860000"/>
+            <a:ext cx="400000" cy="300000"/>
+          </a:xfrm>
+          <a:prstGeom prst="rect">
+            <a:avLst/>
+          </a:prstGeom>
+          <a:noFill/>
+        </p:spPr>
+        <p:txBody>
+          <a:bodyPr wrap="square" lIns="0" rIns="0" tIns="0" bIns="0">
+            <a:spAutoFit/>
+          </a:bodyPr>
+          <a:lstStyle/>
+          <a:p>
+            <a:pPr algn="l">
+              <a:spcAft>
+                <a:spcPts val="600"/>
+              </a:spcAft>
+            </a:pPr>
+            <a:r>
+              <a:rPr sz="1300" b="1">
+                <a:solidFill>
+                  <a:srgbClr val="9E2B34"/>
+                </a:solidFill>
+                <a:latin typeface="Georgia"/>
+              </a:rPr>
+              <a:t>03</a:t>
+            </a:r>
+          </a:p>
+        </p:txBody>
+      </p:sp>
+      <p:sp>
+        <p:nvSpPr>
+          <p:cNvPr id="15" name="TextBox 14"/>
+          <p:cNvSpPr txBox="1"/>
+          <p:nvPr/>
+        </p:nvSpPr>
+        <p:spPr>
+          <a:xfrm>
+            <a:off x="1500100" y="4850000"/>
+            <a:ext cx="9500000" cy="300000"/>
+          </a:xfrm>
+          <a:prstGeom prst="rect">
+            <a:avLst/>
+          </a:prstGeom>
+          <a:noFill/>
+        </p:spPr>
+        <p:txBody>
+          <a:bodyPr wrap="square" lIns="0" rIns="0" tIns="0" bIns="0">
+            <a:spAutoFit/>
+          </a:bodyPr>
+          <a:lstStyle/>
+          <a:p>
+            <a:pPr algn="l">
+              <a:spcAft>
+                <a:spcPts val="600"/>
+              </a:spcAft>
+            </a:pPr>
+            <a:r>
+              <a:rPr sz="1400" b="1">
+                <a:solidFill>
+                  <a:srgbClr val="16161A"/>
+                </a:solidFill>
+                <a:latin typeface="Helvetica Neue"/>
+              </a:rPr>
+              <a:t>Lần chạy mới khác lần cũ ba chỗ</a:t>
+            </a:r>
+          </a:p>
+        </p:txBody>
+      </p:sp>
+      <p:sp>
+        <p:nvSpPr>
+          <p:cNvPr id="16" name="TextBox 15"/>
+          <p:cNvSpPr txBox="1"/>
+          <p:nvPr/>
+        </p:nvSpPr>
+        <p:spPr>
+          <a:xfrm>
+            <a:off x="1500100" y="5260000"/>
+            <a:ext cx="9500000" cy="450000"/>
           </a:xfrm>
           <a:prstGeom prst="rect">
             <a:avLst/>
@@ -10339,7 +9076,7 @@
           <a:p>
             <a:pPr algn="l">
               <a:lnSpc>
-                <a:spcPct val="135000"/>
+                <a:spcPct val="130000"/>
               </a:lnSpc>
               <a:spcAft>
                 <a:spcPts val="600"/>
@@ -10352,65 +9089,7 @@
                 </a:solidFill>
                 <a:latin typeface="Helvetica Neue"/>
               </a:rPr>
-              <a:t>thì cú tụt là do việc dạy thêm, không liên</a:t>
-            </a:r>
-          </a:p>
-          <a:p>
-            <a:pPr algn="l">
-              <a:lnSpc>
-                <a:spcPct val="135000"/>
-              </a:lnSpc>
-              <a:spcAft>
-                <a:spcPts val="600"/>
-              </a:spcAft>
-            </a:pPr>
-            <a:r>
-              <a:rPr sz="1200" b="0">
-                <a:solidFill>
-                  <a:srgbClr val="3F4149"/>
-                </a:solidFill>
-                <a:latin typeface="Helvetica Neue"/>
-              </a:rPr>
-              <a:t>quan tự học. Kết luận phải sửa lần nữa.</a:t>
-            </a:r>
-          </a:p>
-        </p:txBody>
-      </p:sp>
-      <p:sp>
-        <p:nvSpPr>
-          <p:cNvPr id="15" name="TextBox 14"/>
-          <p:cNvSpPr txBox="1"/>
-          <p:nvPr/>
-        </p:nvSpPr>
-        <p:spPr>
-          <a:xfrm>
-            <a:off x="800100" y="5800000"/>
-            <a:ext cx="10591495" cy="300000"/>
-          </a:xfrm>
-          <a:prstGeom prst="rect">
-            <a:avLst/>
-          </a:prstGeom>
-          <a:noFill/>
-        </p:spPr>
-        <p:txBody>
-          <a:bodyPr wrap="square" lIns="0" rIns="0" tIns="0" bIns="0">
-            <a:spAutoFit/>
-          </a:bodyPr>
-          <a:lstStyle/>
-          <a:p>
-            <a:pPr algn="l">
-              <a:spcAft>
-                <a:spcPts val="600"/>
-              </a:spcAft>
-            </a:pPr>
-            <a:r>
-              <a:rPr sz="1050" b="0">
-                <a:solidFill>
-                  <a:srgbClr val="8A8D96"/>
-                </a:solidFill>
-                <a:latin typeface="Helvetica Neue"/>
-              </a:rPr>
-              <a:t>Phần code đã hoàn tất, đang chờ tới lượt GPU.</a:t>
+              <a:t>Bỏ gộp bộ đề, thêm đề thi riêng, giảm số đề. Nên kết luận chỉ dựa trên so sánh A với B, vì hai lần chạy đó chỉ khác nhau đúng một biến.</a:t>
             </a:r>
           </a:p>
         </p:txBody>
@@ -10467,7 +9146,7 @@
                 </a:solidFill>
                 <a:latin typeface="Helvetica Neue"/>
               </a:rPr>
-              <a:t>HẠN CHẾ</a:t>
+              <a:t>TÓM TẮT</a:t>
             </a:r>
           </a:p>
         </p:txBody>
@@ -10548,7 +9227,7 @@
                 </a:solidFill>
                 <a:latin typeface="Georgia"/>
               </a:rPr>
-              <a:t>Ba điểm cần lưu ý khi đọc kết quả</a:t>
+              <a:t>Kết quả ba tuần và hướng tiếp theo</a:t>
             </a:r>
           </a:p>
         </p:txBody>
@@ -10561,8 +9240,8 @@
         </p:nvSpPr>
         <p:spPr>
           <a:xfrm>
-            <a:off x="680100" y="2000000"/>
-            <a:ext cx="10831495" cy="1150000"/>
+            <a:off x="680100" y="1900000"/>
+            <a:ext cx="10831495" cy="1460000"/>
           </a:xfrm>
           <a:prstGeom prst="roundRect">
             <a:avLst>
@@ -10570,7 +9249,7 @@
             </a:avLst>
           </a:prstGeom>
           <a:solidFill>
-            <a:srgbClr val="F5F5F7"/>
+            <a:srgbClr val="F0F6FA"/>
           </a:solidFill>
           <a:ln>
             <a:noFill/>
@@ -10607,72 +9286,113 @@
         </p:nvSpPr>
         <p:spPr>
           <a:xfrm>
-            <a:off x="920100" y="2200000"/>
-            <a:ext cx="400000" cy="300000"/>
-          </a:xfrm>
-          <a:prstGeom prst="rect">
-            <a:avLst/>
-          </a:prstGeom>
-          <a:noFill/>
-        </p:spPr>
-        <p:txBody>
-          <a:bodyPr wrap="square" lIns="0" rIns="0" tIns="0" bIns="0">
-            <a:spAutoFit/>
-          </a:bodyPr>
-          <a:lstStyle/>
-          <a:p>
-            <a:pPr algn="l">
-              <a:spcAft>
-                <a:spcPts val="600"/>
-              </a:spcAft>
-            </a:pPr>
-            <a:r>
-              <a:rPr sz="1300" b="1">
+            <a:off x="920100" y="2100000"/>
+            <a:ext cx="10351495" cy="1100000"/>
+          </a:xfrm>
+          <a:prstGeom prst="rect">
+            <a:avLst/>
+          </a:prstGeom>
+          <a:noFill/>
+        </p:spPr>
+        <p:txBody>
+          <a:bodyPr wrap="square" lIns="0" rIns="0" tIns="0" bIns="0">
+            <a:spAutoFit/>
+          </a:bodyPr>
+          <a:lstStyle/>
+          <a:p>
+            <a:pPr algn="l">
+              <a:lnSpc>
+                <a:spcPct val="140000"/>
+              </a:lnSpc>
+              <a:spcAft>
+                <a:spcPts val="600"/>
+              </a:spcAft>
+            </a:pPr>
+            <a:r>
+              <a:rPr sz="1400" b="0">
+                <a:solidFill>
+                  <a:srgbClr val="16161A"/>
+                </a:solidFill>
+                <a:latin typeface="Georgia"/>
+              </a:rPr>
+              <a:t>Thí nghiệm đối chứng cho thấy giả thuyết ban đầu không đúng. Nguyên nhân đã xác định được:</a:t>
+            </a:r>
+          </a:p>
+          <a:p>
+            <a:pPr algn="l">
+              <a:lnSpc>
+                <a:spcPct val="140000"/>
+              </a:lnSpc>
+              <a:spcAft>
+                <a:spcPts val="600"/>
+              </a:spcAft>
+            </a:pPr>
+            <a:r>
+              <a:rPr sz="1400" b="0">
+                <a:solidFill>
+                  <a:srgbClr val="16161A"/>
+                </a:solidFill>
+                <a:latin typeface="Georgia"/>
+              </a:rPr>
+              <a:t>lỗi của máy chấm tuy nặng nhưng chỉ xảy ra ở 0,55% số bài.</a:t>
+            </a:r>
+          </a:p>
+          <a:p>
+            <a:pPr algn="l">
+              <a:lnSpc>
+                <a:spcPct val="140000"/>
+              </a:lnSpc>
+              <a:spcAft>
+                <a:spcPts val="600"/>
+              </a:spcAft>
+            </a:pPr>
+            <a:r>
+              <a:rPr sz="1400" b="0">
+                <a:solidFill>
+                  <a:srgbClr val="16161A"/>
+                </a:solidFill>
+                <a:latin typeface="Georgia"/>
+              </a:rPr>
+              <a:t>Đề tài chuyển sang cảnh báo về thiết kế đo — hẹp hơn, nhưng có cơ sở vững.</a:t>
+            </a:r>
+          </a:p>
+        </p:txBody>
+      </p:sp>
+      <p:sp>
+        <p:nvSpPr>
+          <p:cNvPr id="7" name="TextBox 6"/>
+          <p:cNvSpPr txBox="1"/>
+          <p:nvPr/>
+        </p:nvSpPr>
+        <p:spPr>
+          <a:xfrm>
+            <a:off x="800100" y="3560000"/>
+            <a:ext cx="1700000" cy="300000"/>
+          </a:xfrm>
+          <a:prstGeom prst="rect">
+            <a:avLst/>
+          </a:prstGeom>
+          <a:noFill/>
+        </p:spPr>
+        <p:txBody>
+          <a:bodyPr wrap="square" lIns="0" rIns="0" tIns="0" bIns="0">
+            <a:spAutoFit/>
+          </a:bodyPr>
+          <a:lstStyle/>
+          <a:p>
+            <a:pPr algn="l">
+              <a:spcAft>
+                <a:spcPts val="600"/>
+              </a:spcAft>
+            </a:pPr>
+            <a:r>
+              <a:rPr sz="1100" b="1">
                 <a:solidFill>
                   <a:srgbClr val="9E2B34"/>
                 </a:solidFill>
-                <a:latin typeface="Georgia"/>
-              </a:rPr>
-              <a:t>01</a:t>
-            </a:r>
-          </a:p>
-        </p:txBody>
-      </p:sp>
-      <p:sp>
-        <p:nvSpPr>
-          <p:cNvPr id="7" name="TextBox 6"/>
-          <p:cNvSpPr txBox="1"/>
-          <p:nvPr/>
-        </p:nvSpPr>
-        <p:spPr>
-          <a:xfrm>
-            <a:off x="1500100" y="2190000"/>
-            <a:ext cx="9500000" cy="300000"/>
-          </a:xfrm>
-          <a:prstGeom prst="rect">
-            <a:avLst/>
-          </a:prstGeom>
-          <a:noFill/>
-        </p:spPr>
-        <p:txBody>
-          <a:bodyPr wrap="square" lIns="0" rIns="0" tIns="0" bIns="0">
-            <a:spAutoFit/>
-          </a:bodyPr>
-          <a:lstStyle/>
-          <a:p>
-            <a:pPr algn="l">
-              <a:spcAft>
-                <a:spcPts val="600"/>
-              </a:spcAft>
-            </a:pPr>
-            <a:r>
-              <a:rPr sz="1400" b="1">
-                <a:solidFill>
-                  <a:srgbClr val="16161A"/>
-                </a:solidFill>
-                <a:latin typeface="Helvetica Neue"/>
-              </a:rPr>
-              <a:t>Đề thi chỉ có 150 đề</a:t>
+                <a:latin typeface="Helvetica Neue"/>
+              </a:rPr>
+              <a:t>ĐÃ LÀM</a:t>
             </a:r>
           </a:p>
         </p:txBody>
@@ -10685,330 +9405,306 @@
         </p:nvSpPr>
         <p:spPr>
           <a:xfrm>
-            <a:off x="1500100" y="2600000"/>
-            <a:ext cx="9500000" cy="450000"/>
-          </a:xfrm>
-          <a:prstGeom prst="rect">
-            <a:avLst/>
-          </a:prstGeom>
-          <a:noFill/>
-        </p:spPr>
-        <p:txBody>
-          <a:bodyPr wrap="square" lIns="0" rIns="0" tIns="0" bIns="0">
-            <a:spAutoFit/>
-          </a:bodyPr>
-          <a:lstStyle/>
-          <a:p>
-            <a:pPr algn="l">
-              <a:lnSpc>
-                <a:spcPct val="130000"/>
-              </a:lnSpc>
-              <a:spcAft>
-                <a:spcPts val="600"/>
-              </a:spcAft>
-            </a:pPr>
-            <a:r>
-              <a:rPr sz="1200" b="0">
+            <a:off x="2600100" y="3545000"/>
+            <a:ext cx="8700000" cy="330000"/>
+          </a:xfrm>
+          <a:prstGeom prst="rect">
+            <a:avLst/>
+          </a:prstGeom>
+          <a:noFill/>
+        </p:spPr>
+        <p:txBody>
+          <a:bodyPr wrap="square" lIns="0" rIns="0" tIns="0" bIns="0">
+            <a:spAutoFit/>
+          </a:bodyPr>
+          <a:lstStyle/>
+          <a:p>
+            <a:pPr algn="l">
+              <a:spcAft>
+                <a:spcPts val="600"/>
+              </a:spcAft>
+            </a:pPr>
+            <a:r>
+              <a:rPr sz="1250" b="0">
                 <a:solidFill>
                   <a:srgbClr val="3F4149"/>
                 </a:solidFill>
                 <a:latin typeface="Helvetica Neue"/>
               </a:rPr>
-              <a:t>Mỗi đề đáng 0,67 điểm. Chỉ đổi cách bốc đề thi thôi là điểm vòng 0 đã lệch 4,7 điểm, lớn hơn cả hiệu ứng đang đo.</a:t>
-            </a:r>
-          </a:p>
-        </p:txBody>
-      </p:sp>
-      <p:sp>
-        <p:nvSpPr>
-          <p:cNvPr id="9" name="Rounded Rectangle 8"/>
-          <p:cNvSpPr/>
-          <p:nvPr/>
-        </p:nvSpPr>
-        <p:spPr>
-          <a:xfrm>
-            <a:off x="680100" y="3330000"/>
-            <a:ext cx="10831495" cy="1150000"/>
-          </a:xfrm>
-          <a:prstGeom prst="roundRect">
-            <a:avLst>
-              <a:gd name="adj" fmla="val 4000"/>
-            </a:avLst>
-          </a:prstGeom>
-          <a:solidFill>
-            <a:srgbClr val="F5F5F7"/>
-          </a:solidFill>
-          <a:ln>
-            <a:noFill/>
+              <a:t>7 lần chạy, khoảng 40 giờ GPU. Phát hiện 2 lỗi độc lập trong máy chấm, cả hai đã vá và có test.</a:t>
+            </a:r>
+          </a:p>
+        </p:txBody>
+      </p:sp>
+      <p:sp>
+        <p:nvSpPr>
+          <p:cNvPr id="9" name="TextBox 8"/>
+          <p:cNvSpPr txBox="1"/>
+          <p:nvPr/>
+        </p:nvSpPr>
+        <p:spPr>
+          <a:xfrm>
+            <a:off x="800100" y="4130000"/>
+            <a:ext cx="1700000" cy="300000"/>
+          </a:xfrm>
+          <a:prstGeom prst="rect">
+            <a:avLst/>
+          </a:prstGeom>
+          <a:noFill/>
+        </p:spPr>
+        <p:txBody>
+          <a:bodyPr wrap="square" lIns="0" rIns="0" tIns="0" bIns="0">
+            <a:spAutoFit/>
+          </a:bodyPr>
+          <a:lstStyle/>
+          <a:p>
+            <a:pPr algn="l">
+              <a:spcAft>
+                <a:spcPts val="600"/>
+              </a:spcAft>
+            </a:pPr>
+            <a:r>
+              <a:rPr sz="1100" b="1">
+                <a:solidFill>
+                  <a:srgbClr val="9E2B34"/>
+                </a:solidFill>
+                <a:latin typeface="Helvetica Neue"/>
+              </a:rPr>
+              <a:t>KẾT QUẢ</a:t>
+            </a:r>
+          </a:p>
+        </p:txBody>
+      </p:sp>
+      <p:sp>
+        <p:nvSpPr>
+          <p:cNvPr id="10" name="TextBox 9"/>
+          <p:cNvSpPr txBox="1"/>
+          <p:nvPr/>
+        </p:nvSpPr>
+        <p:spPr>
+          <a:xfrm>
+            <a:off x="2600100" y="4115000"/>
+            <a:ext cx="8700000" cy="330000"/>
+          </a:xfrm>
+          <a:prstGeom prst="rect">
+            <a:avLst/>
+          </a:prstGeom>
+          <a:noFill/>
+        </p:spPr>
+        <p:txBody>
+          <a:bodyPr wrap="square" lIns="0" rIns="0" tIns="0" bIns="0">
+            <a:spAutoFit/>
+          </a:bodyPr>
+          <a:lstStyle/>
+          <a:p>
+            <a:pPr algn="l">
+              <a:spcAft>
+                <a:spcPts val="600"/>
+              </a:spcAft>
+            </a:pPr>
+            <a:r>
+              <a:rPr sz="1250" b="0">
+                <a:solidFill>
+                  <a:srgbClr val="3F4149"/>
+                </a:solidFill>
+                <a:latin typeface="Helvetica Neue"/>
+              </a:rPr>
+              <a:t>Giả thuyết ban đầu không đúng, và đo được nguyên nhân vì sao.</a:t>
+            </a:r>
+          </a:p>
+        </p:txBody>
+      </p:sp>
+      <p:sp>
+        <p:nvSpPr>
+          <p:cNvPr id="11" name="TextBox 10"/>
+          <p:cNvSpPr txBox="1"/>
+          <p:nvPr/>
+        </p:nvSpPr>
+        <p:spPr>
+          <a:xfrm>
+            <a:off x="800100" y="4700000"/>
+            <a:ext cx="1700000" cy="300000"/>
+          </a:xfrm>
+          <a:prstGeom prst="rect">
+            <a:avLst/>
+          </a:prstGeom>
+          <a:noFill/>
+        </p:spPr>
+        <p:txBody>
+          <a:bodyPr wrap="square" lIns="0" rIns="0" tIns="0" bIns="0">
+            <a:spAutoFit/>
+          </a:bodyPr>
+          <a:lstStyle/>
+          <a:p>
+            <a:pPr algn="l">
+              <a:spcAft>
+                <a:spcPts val="600"/>
+              </a:spcAft>
+            </a:pPr>
+            <a:r>
+              <a:rPr sz="1100" b="1">
+                <a:solidFill>
+                  <a:srgbClr val="9E2B34"/>
+                </a:solidFill>
+                <a:latin typeface="Helvetica Neue"/>
+              </a:rPr>
+              <a:t>SẮP TỚI</a:t>
+            </a:r>
+          </a:p>
+        </p:txBody>
+      </p:sp>
+      <p:sp>
+        <p:nvSpPr>
+          <p:cNvPr id="12" name="TextBox 11"/>
+          <p:cNvSpPr txBox="1"/>
+          <p:nvPr/>
+        </p:nvSpPr>
+        <p:spPr>
+          <a:xfrm>
+            <a:off x="2600100" y="4685000"/>
+            <a:ext cx="8700000" cy="330000"/>
+          </a:xfrm>
+          <a:prstGeom prst="rect">
+            <a:avLst/>
+          </a:prstGeom>
+          <a:noFill/>
+        </p:spPr>
+        <p:txBody>
+          <a:bodyPr wrap="square" lIns="0" rIns="0" tIns="0" bIns="0">
+            <a:spAutoFit/>
+          </a:bodyPr>
+          <a:lstStyle/>
+          <a:p>
+            <a:pPr algn="l">
+              <a:spcAft>
+                <a:spcPts val="600"/>
+              </a:spcAft>
+            </a:pPr>
+            <a:r>
+              <a:rPr sz="1250" b="0">
+                <a:solidFill>
+                  <a:srgbClr val="3F4149"/>
+                </a:solidFill>
+                <a:latin typeface="Helvetica Neue"/>
+              </a:rPr>
+              <a:t>Chạy thử lỗi phổ biến (\boxed) để tìm ngưỡng lỗi máy chấm bắt đầu gây hại.</a:t>
+            </a:r>
+          </a:p>
+        </p:txBody>
+      </p:sp>
+      <p:sp>
+        <p:nvSpPr>
+          <p:cNvPr id="13" name="TextBox 12"/>
+          <p:cNvSpPr txBox="1"/>
+          <p:nvPr/>
+        </p:nvSpPr>
+        <p:spPr>
+          <a:xfrm>
+            <a:off x="800100" y="5270000"/>
+            <a:ext cx="1700000" cy="300000"/>
+          </a:xfrm>
+          <a:prstGeom prst="rect">
+            <a:avLst/>
+          </a:prstGeom>
+          <a:noFill/>
+        </p:spPr>
+        <p:txBody>
+          <a:bodyPr wrap="square" lIns="0" rIns="0" tIns="0" bIns="0">
+            <a:spAutoFit/>
+          </a:bodyPr>
+          <a:lstStyle/>
+          <a:p>
+            <a:pPr algn="l">
+              <a:spcAft>
+                <a:spcPts val="600"/>
+              </a:spcAft>
+            </a:pPr>
+            <a:r>
+              <a:rPr sz="1100" b="1">
+                <a:solidFill>
+                  <a:srgbClr val="9E2B34"/>
+                </a:solidFill>
+                <a:latin typeface="Helvetica Neue"/>
+              </a:rPr>
+              <a:t>SAU ĐÓ</a:t>
+            </a:r>
+          </a:p>
+        </p:txBody>
+      </p:sp>
+      <p:sp>
+        <p:nvSpPr>
+          <p:cNvPr id="14" name="TextBox 13"/>
+          <p:cNvSpPr txBox="1"/>
+          <p:nvPr/>
+        </p:nvSpPr>
+        <p:spPr>
+          <a:xfrm>
+            <a:off x="2600100" y="5255000"/>
+            <a:ext cx="8700000" cy="330000"/>
+          </a:xfrm>
+          <a:prstGeom prst="rect">
+            <a:avLst/>
+          </a:prstGeom>
+          <a:noFill/>
+        </p:spPr>
+        <p:txBody>
+          <a:bodyPr wrap="square" lIns="0" rIns="0" tIns="0" bIns="0">
+            <a:spAutoFit/>
+          </a:bodyPr>
+          <a:lstStyle/>
+          <a:p>
+            <a:pPr algn="l">
+              <a:spcAft>
+                <a:spcPts val="600"/>
+              </a:spcAft>
+            </a:pPr>
+            <a:r>
+              <a:rPr sz="1250" b="0">
+                <a:solidFill>
+                  <a:srgbClr val="3F4149"/>
+                </a:solidFill>
+                <a:latin typeface="Helvetica Neue"/>
+              </a:rPr>
+              <a:t>Viết lại bài báo theo kết luận mới.</a:t>
+            </a:r>
+          </a:p>
+        </p:txBody>
+      </p:sp>
+      <p:cxnSp>
+        <p:nvCxnSpPr>
+          <p:cNvPr id="15" name="Connector 14"/>
+          <p:cNvCxnSpPr/>
+          <p:nvPr/>
+        </p:nvCxnSpPr>
+        <p:spPr>
+          <a:xfrm>
+            <a:off x="800100" y="5900000"/>
+            <a:ext cx="10591495" cy="0"/>
+          </a:xfrm>
+          <a:prstGeom prst="line">
+            <a:avLst/>
+          </a:prstGeom>
+          <a:ln w="9525">
+            <a:solidFill>
+              <a:srgbClr val="E6E6EA"/>
+            </a:solidFill>
           </a:ln>
-          <a:effectLst/>
         </p:spPr>
         <p:style>
-          <a:lnRef idx="1">
+          <a:lnRef idx="2">
             <a:schemeClr val="accent1"/>
           </a:lnRef>
-          <a:fillRef idx="3">
+          <a:fillRef idx="0">
             <a:schemeClr val="accent1"/>
           </a:fillRef>
-          <a:effectRef idx="2">
+          <a:effectRef idx="1">
             <a:schemeClr val="accent1"/>
           </a:effectRef>
           <a:fontRef idx="minor">
-            <a:schemeClr val="lt1"/>
+            <a:schemeClr val="tx1"/>
           </a:fontRef>
         </p:style>
-        <p:txBody>
-          <a:bodyPr rtlCol="0" anchor="ctr"/>
-          <a:lstStyle/>
-          <a:p>
-            <a:pPr algn="ctr"/>
-          </a:p>
-        </p:txBody>
-      </p:sp>
-      <p:sp>
-        <p:nvSpPr>
-          <p:cNvPr id="10" name="TextBox 9"/>
-          <p:cNvSpPr txBox="1"/>
-          <p:nvPr/>
-        </p:nvSpPr>
-        <p:spPr>
-          <a:xfrm>
-            <a:off x="920100" y="3530000"/>
-            <a:ext cx="400000" cy="300000"/>
-          </a:xfrm>
-          <a:prstGeom prst="rect">
-            <a:avLst/>
-          </a:prstGeom>
-          <a:noFill/>
-        </p:spPr>
-        <p:txBody>
-          <a:bodyPr wrap="square" lIns="0" rIns="0" tIns="0" bIns="0">
-            <a:spAutoFit/>
-          </a:bodyPr>
-          <a:lstStyle/>
-          <a:p>
-            <a:pPr algn="l">
-              <a:spcAft>
-                <a:spcPts val="600"/>
-              </a:spcAft>
-            </a:pPr>
-            <a:r>
-              <a:rPr sz="1300" b="1">
-                <a:solidFill>
-                  <a:srgbClr val="9E2B34"/>
-                </a:solidFill>
-                <a:latin typeface="Georgia"/>
-              </a:rPr>
-              <a:t>02</a:t>
-            </a:r>
-          </a:p>
-        </p:txBody>
-      </p:sp>
-      <p:sp>
-        <p:nvSpPr>
-          <p:cNvPr id="11" name="TextBox 10"/>
-          <p:cNvSpPr txBox="1"/>
-          <p:nvPr/>
-        </p:nvSpPr>
-        <p:spPr>
-          <a:xfrm>
-            <a:off x="1500100" y="3520000"/>
-            <a:ext cx="9500000" cy="300000"/>
-          </a:xfrm>
-          <a:prstGeom prst="rect">
-            <a:avLst/>
-          </a:prstGeom>
-          <a:noFill/>
-        </p:spPr>
-        <p:txBody>
-          <a:bodyPr wrap="square" lIns="0" rIns="0" tIns="0" bIns="0">
-            <a:spAutoFit/>
-          </a:bodyPr>
-          <a:lstStyle/>
-          <a:p>
-            <a:pPr algn="l">
-              <a:spcAft>
-                <a:spcPts val="600"/>
-              </a:spcAft>
-            </a:pPr>
-            <a:r>
-              <a:rPr sz="1400" b="1">
-                <a:solidFill>
-                  <a:srgbClr val="16161A"/>
-                </a:solidFill>
-                <a:latin typeface="Helvetica Neue"/>
-              </a:rPr>
-              <a:t>Mỗi cấu hình mới chạy 2 lần</a:t>
-            </a:r>
-          </a:p>
-        </p:txBody>
-      </p:sp>
-      <p:sp>
-        <p:nvSpPr>
-          <p:cNvPr id="12" name="TextBox 11"/>
-          <p:cNvSpPr txBox="1"/>
-          <p:nvPr/>
-        </p:nvSpPr>
-        <p:spPr>
-          <a:xfrm>
-            <a:off x="1500100" y="3930000"/>
-            <a:ext cx="9500000" cy="450000"/>
-          </a:xfrm>
-          <a:prstGeom prst="rect">
-            <a:avLst/>
-          </a:prstGeom>
-          <a:noFill/>
-        </p:spPr>
-        <p:txBody>
-          <a:bodyPr wrap="square" lIns="0" rIns="0" tIns="0" bIns="0">
-            <a:spAutoFit/>
-          </a:bodyPr>
-          <a:lstStyle/>
-          <a:p>
-            <a:pPr algn="l">
-              <a:lnSpc>
-                <a:spcPct val="130000"/>
-              </a:lnSpc>
-              <a:spcAft>
-                <a:spcPts val="600"/>
-              </a:spcAft>
-            </a:pPr>
-            <a:r>
-              <a:rPr sz="1200" b="0">
-                <a:solidFill>
-                  <a:srgbClr val="3F4149"/>
-                </a:solidFill>
-                <a:latin typeface="Helvetica Neue"/>
-              </a:rPr>
-              <a:t>Riêng lần chạy C và các lần chạy cũ mới có 1 lần. Chưa đủ cơ sở để khẳng định về cú tụt 12,7 điểm của GSM8K.</a:t>
-            </a:r>
-          </a:p>
-        </p:txBody>
-      </p:sp>
-      <p:sp>
-        <p:nvSpPr>
-          <p:cNvPr id="13" name="Rounded Rectangle 12"/>
-          <p:cNvSpPr/>
-          <p:nvPr/>
-        </p:nvSpPr>
-        <p:spPr>
-          <a:xfrm>
-            <a:off x="680100" y="4660000"/>
-            <a:ext cx="10831495" cy="1150000"/>
-          </a:xfrm>
-          <a:prstGeom prst="roundRect">
-            <a:avLst>
-              <a:gd name="adj" fmla="val 4000"/>
-            </a:avLst>
-          </a:prstGeom>
-          <a:solidFill>
-            <a:srgbClr val="F5F5F7"/>
-          </a:solidFill>
-          <a:ln>
-            <a:noFill/>
-          </a:ln>
-          <a:effectLst/>
-        </p:spPr>
-        <p:style>
-          <a:lnRef idx="1">
-            <a:schemeClr val="accent1"/>
-          </a:lnRef>
-          <a:fillRef idx="3">
-            <a:schemeClr val="accent1"/>
-          </a:fillRef>
-          <a:effectRef idx="2">
-            <a:schemeClr val="accent1"/>
-          </a:effectRef>
-          <a:fontRef idx="minor">
-            <a:schemeClr val="lt1"/>
-          </a:fontRef>
-        </p:style>
-        <p:txBody>
-          <a:bodyPr rtlCol="0" anchor="ctr"/>
-          <a:lstStyle/>
-          <a:p>
-            <a:pPr algn="ctr"/>
-          </a:p>
-        </p:txBody>
-      </p:sp>
-      <p:sp>
-        <p:nvSpPr>
-          <p:cNvPr id="14" name="TextBox 13"/>
-          <p:cNvSpPr txBox="1"/>
-          <p:nvPr/>
-        </p:nvSpPr>
-        <p:spPr>
-          <a:xfrm>
-            <a:off x="920100" y="4860000"/>
-            <a:ext cx="400000" cy="300000"/>
-          </a:xfrm>
-          <a:prstGeom prst="rect">
-            <a:avLst/>
-          </a:prstGeom>
-          <a:noFill/>
-        </p:spPr>
-        <p:txBody>
-          <a:bodyPr wrap="square" lIns="0" rIns="0" tIns="0" bIns="0">
-            <a:spAutoFit/>
-          </a:bodyPr>
-          <a:lstStyle/>
-          <a:p>
-            <a:pPr algn="l">
-              <a:spcAft>
-                <a:spcPts val="600"/>
-              </a:spcAft>
-            </a:pPr>
-            <a:r>
-              <a:rPr sz="1300" b="1">
-                <a:solidFill>
-                  <a:srgbClr val="9E2B34"/>
-                </a:solidFill>
-                <a:latin typeface="Georgia"/>
-              </a:rPr>
-              <a:t>03</a:t>
-            </a:r>
-          </a:p>
-        </p:txBody>
-      </p:sp>
-      <p:sp>
-        <p:nvSpPr>
-          <p:cNvPr id="15" name="TextBox 14"/>
-          <p:cNvSpPr txBox="1"/>
-          <p:nvPr/>
-        </p:nvSpPr>
-        <p:spPr>
-          <a:xfrm>
-            <a:off x="1500100" y="4850000"/>
-            <a:ext cx="9500000" cy="300000"/>
-          </a:xfrm>
-          <a:prstGeom prst="rect">
-            <a:avLst/>
-          </a:prstGeom>
-          <a:noFill/>
-        </p:spPr>
-        <p:txBody>
-          <a:bodyPr wrap="square" lIns="0" rIns="0" tIns="0" bIns="0">
-            <a:spAutoFit/>
-          </a:bodyPr>
-          <a:lstStyle/>
-          <a:p>
-            <a:pPr algn="l">
-              <a:spcAft>
-                <a:spcPts val="600"/>
-              </a:spcAft>
-            </a:pPr>
-            <a:r>
-              <a:rPr sz="1400" b="1">
-                <a:solidFill>
-                  <a:srgbClr val="16161A"/>
-                </a:solidFill>
-                <a:latin typeface="Helvetica Neue"/>
-              </a:rPr>
-              <a:t>Lần chạy mới khác lần cũ ba chỗ</a:t>
-            </a:r>
-          </a:p>
-        </p:txBody>
-      </p:sp>
+      </p:cxnSp>
       <p:sp>
         <p:nvSpPr>
           <p:cNvPr id="16" name="TextBox 15"/>
@@ -11017,36 +9713,33 @@
         </p:nvSpPr>
         <p:spPr>
           <a:xfrm>
-            <a:off x="1500100" y="5260000"/>
-            <a:ext cx="9500000" cy="450000"/>
-          </a:xfrm>
-          <a:prstGeom prst="rect">
-            <a:avLst/>
-          </a:prstGeom>
-          <a:noFill/>
-        </p:spPr>
-        <p:txBody>
-          <a:bodyPr wrap="square" lIns="0" rIns="0" tIns="0" bIns="0">
-            <a:spAutoFit/>
-          </a:bodyPr>
-          <a:lstStyle/>
-          <a:p>
-            <a:pPr algn="l">
-              <a:lnSpc>
-                <a:spcPct val="130000"/>
-              </a:lnSpc>
-              <a:spcAft>
-                <a:spcPts val="600"/>
-              </a:spcAft>
-            </a:pPr>
-            <a:r>
-              <a:rPr sz="1200" b="0">
-                <a:solidFill>
-                  <a:srgbClr val="3F4149"/>
-                </a:solidFill>
-                <a:latin typeface="Helvetica Neue"/>
-              </a:rPr>
-              <a:t>Bỏ gộp bộ đề, thêm đề thi riêng, giảm số đề. Nên kết luận chỉ dựa trên so sánh A với B, vì hai lần chạy đó chỉ khác nhau đúng một biến.</a:t>
+            <a:off x="800100" y="6100000"/>
+            <a:ext cx="10591495" cy="300000"/>
+          </a:xfrm>
+          <a:prstGeom prst="rect">
+            <a:avLst/>
+          </a:prstGeom>
+          <a:noFill/>
+        </p:spPr>
+        <p:txBody>
+          <a:bodyPr wrap="square" lIns="0" rIns="0" tIns="0" bIns="0">
+            <a:spAutoFit/>
+          </a:bodyPr>
+          <a:lstStyle/>
+          <a:p>
+            <a:pPr algn="l">
+              <a:spcAft>
+                <a:spcPts val="600"/>
+              </a:spcAft>
+            </a:pPr>
+            <a:r>
+              <a:rPr sz="1250" b="0">
+                <a:solidFill>
+                  <a:srgbClr val="8A8D96"/>
+                </a:solidFill>
+                <a:latin typeface="Helvetica Neue"/>
+              </a:rPr>
+              <a:t>Cảm ơn đã theo dõi. Rất mong nhận được góp ý.</a:t>
             </a:r>
           </a:p>
         </p:txBody>
@@ -12062,656 +10755,6 @@
                 <a:latin typeface="Helvetica Neue"/>
               </a:rPr>
               <a:t>hướng nghiên cứu sau khi điều chỉnh</a:t>
-            </a:r>
-          </a:p>
-        </p:txBody>
-      </p:sp>
-    </p:spTree>
-  </p:cSld>
-  <p:clrMapOvr>
-    <a:masterClrMapping/>
-  </p:clrMapOvr>
-</p:sld>
-</file>
-
-<file path=ppt/slides/slide20.xml><?xml version="1.0" encoding="utf-8"?>
-<p:sld xmlns:a="http://schemas.openxmlformats.org/drawingml/2006/main" xmlns:p="http://schemas.openxmlformats.org/presentationml/2006/main" xmlns:r="http://schemas.openxmlformats.org/officeDocument/2006/relationships">
-  <p:cSld>
-    <p:spTree>
-      <p:nvGrpSpPr>
-        <p:cNvPr id="1" name=""/>
-        <p:cNvGrpSpPr/>
-        <p:nvPr/>
-      </p:nvGrpSpPr>
-      <p:grpSpPr/>
-      <p:sp>
-        <p:nvSpPr>
-          <p:cNvPr id="2" name="TextBox 1"/>
-          <p:cNvSpPr txBox="1"/>
-          <p:nvPr/>
-        </p:nvSpPr>
-        <p:spPr>
-          <a:xfrm>
-            <a:off x="800100" y="430000"/>
-            <a:ext cx="7000000" cy="250000"/>
-          </a:xfrm>
-          <a:prstGeom prst="rect">
-            <a:avLst/>
-          </a:prstGeom>
-          <a:noFill/>
-        </p:spPr>
-        <p:txBody>
-          <a:bodyPr wrap="square" lIns="0" rIns="0" tIns="0" bIns="0">
-            <a:spAutoFit/>
-          </a:bodyPr>
-          <a:lstStyle/>
-          <a:p>
-            <a:pPr algn="l">
-              <a:spcAft>
-                <a:spcPts val="600"/>
-              </a:spcAft>
-            </a:pPr>
-            <a:r>
-              <a:rPr sz="1050" b="1">
-                <a:solidFill>
-                  <a:srgbClr val="9E2B34"/>
-                </a:solidFill>
-                <a:latin typeface="Helvetica Neue"/>
-              </a:rPr>
-              <a:t>TÓM TẮT</a:t>
-            </a:r>
-          </a:p>
-        </p:txBody>
-      </p:sp>
-      <p:sp>
-        <p:nvSpPr>
-          <p:cNvPr id="3" name="TextBox 2"/>
-          <p:cNvSpPr txBox="1"/>
-          <p:nvPr/>
-        </p:nvSpPr>
-        <p:spPr>
-          <a:xfrm>
-            <a:off x="10491595" y="400000"/>
-            <a:ext cx="900000" cy="400000"/>
-          </a:xfrm>
-          <a:prstGeom prst="rect">
-            <a:avLst/>
-          </a:prstGeom>
-          <a:noFill/>
-        </p:spPr>
-        <p:txBody>
-          <a:bodyPr wrap="square" lIns="0" rIns="0" tIns="0" bIns="0">
-            <a:spAutoFit/>
-          </a:bodyPr>
-          <a:lstStyle/>
-          <a:p>
-            <a:pPr algn="r">
-              <a:spcAft>
-                <a:spcPts val="600"/>
-              </a:spcAft>
-            </a:pPr>
-            <a:r>
-              <a:rPr sz="1500" b="1">
-                <a:solidFill>
-                  <a:srgbClr val="E6E6EA"/>
-                </a:solidFill>
-                <a:latin typeface="Georgia"/>
-              </a:rPr>
-              <a:t>18</a:t>
-            </a:r>
-          </a:p>
-        </p:txBody>
-      </p:sp>
-      <p:sp>
-        <p:nvSpPr>
-          <p:cNvPr id="4" name="TextBox 3"/>
-          <p:cNvSpPr txBox="1"/>
-          <p:nvPr/>
-        </p:nvSpPr>
-        <p:spPr>
-          <a:xfrm>
-            <a:off x="800100" y="790000"/>
-            <a:ext cx="10591495" cy="620000"/>
-          </a:xfrm>
-          <a:prstGeom prst="rect">
-            <a:avLst/>
-          </a:prstGeom>
-          <a:noFill/>
-        </p:spPr>
-        <p:txBody>
-          <a:bodyPr wrap="square" lIns="0" rIns="0" tIns="0" bIns="0">
-            <a:spAutoFit/>
-          </a:bodyPr>
-          <a:lstStyle/>
-          <a:p>
-            <a:pPr algn="l">
-              <a:lnSpc>
-                <a:spcPct val="105000"/>
-              </a:lnSpc>
-              <a:spcAft>
-                <a:spcPts val="600"/>
-              </a:spcAft>
-            </a:pPr>
-            <a:r>
-              <a:rPr sz="2900" b="1">
-                <a:solidFill>
-                  <a:srgbClr val="16161A"/>
-                </a:solidFill>
-                <a:latin typeface="Georgia"/>
-              </a:rPr>
-              <a:t>Kết quả ba tuần và hướng tiếp theo</a:t>
-            </a:r>
-          </a:p>
-        </p:txBody>
-      </p:sp>
-      <p:sp>
-        <p:nvSpPr>
-          <p:cNvPr id="5" name="Rounded Rectangle 4"/>
-          <p:cNvSpPr/>
-          <p:nvPr/>
-        </p:nvSpPr>
-        <p:spPr>
-          <a:xfrm>
-            <a:off x="680100" y="1900000"/>
-            <a:ext cx="10831495" cy="1460000"/>
-          </a:xfrm>
-          <a:prstGeom prst="roundRect">
-            <a:avLst>
-              <a:gd name="adj" fmla="val 4000"/>
-            </a:avLst>
-          </a:prstGeom>
-          <a:solidFill>
-            <a:srgbClr val="F0F6FA"/>
-          </a:solidFill>
-          <a:ln>
-            <a:noFill/>
-          </a:ln>
-          <a:effectLst/>
-        </p:spPr>
-        <p:style>
-          <a:lnRef idx="1">
-            <a:schemeClr val="accent1"/>
-          </a:lnRef>
-          <a:fillRef idx="3">
-            <a:schemeClr val="accent1"/>
-          </a:fillRef>
-          <a:effectRef idx="2">
-            <a:schemeClr val="accent1"/>
-          </a:effectRef>
-          <a:fontRef idx="minor">
-            <a:schemeClr val="lt1"/>
-          </a:fontRef>
-        </p:style>
-        <p:txBody>
-          <a:bodyPr rtlCol="0" anchor="ctr"/>
-          <a:lstStyle/>
-          <a:p>
-            <a:pPr algn="ctr"/>
-          </a:p>
-        </p:txBody>
-      </p:sp>
-      <p:sp>
-        <p:nvSpPr>
-          <p:cNvPr id="6" name="TextBox 5"/>
-          <p:cNvSpPr txBox="1"/>
-          <p:nvPr/>
-        </p:nvSpPr>
-        <p:spPr>
-          <a:xfrm>
-            <a:off x="920100" y="2100000"/>
-            <a:ext cx="10351495" cy="1100000"/>
-          </a:xfrm>
-          <a:prstGeom prst="rect">
-            <a:avLst/>
-          </a:prstGeom>
-          <a:noFill/>
-        </p:spPr>
-        <p:txBody>
-          <a:bodyPr wrap="square" lIns="0" rIns="0" tIns="0" bIns="0">
-            <a:spAutoFit/>
-          </a:bodyPr>
-          <a:lstStyle/>
-          <a:p>
-            <a:pPr algn="l">
-              <a:lnSpc>
-                <a:spcPct val="140000"/>
-              </a:lnSpc>
-              <a:spcAft>
-                <a:spcPts val="600"/>
-              </a:spcAft>
-            </a:pPr>
-            <a:r>
-              <a:rPr sz="1400" b="0">
-                <a:solidFill>
-                  <a:srgbClr val="16161A"/>
-                </a:solidFill>
-                <a:latin typeface="Georgia"/>
-              </a:rPr>
-              <a:t>Thí nghiệm đối chứng cho thấy giả thuyết ban đầu không đúng. Nguyên nhân đã xác định được:</a:t>
-            </a:r>
-          </a:p>
-          <a:p>
-            <a:pPr algn="l">
-              <a:lnSpc>
-                <a:spcPct val="140000"/>
-              </a:lnSpc>
-              <a:spcAft>
-                <a:spcPts val="600"/>
-              </a:spcAft>
-            </a:pPr>
-            <a:r>
-              <a:rPr sz="1400" b="0">
-                <a:solidFill>
-                  <a:srgbClr val="16161A"/>
-                </a:solidFill>
-                <a:latin typeface="Georgia"/>
-              </a:rPr>
-              <a:t>lỗi của máy chấm tuy nặng nhưng chỉ xảy ra ở 0,55% số bài.</a:t>
-            </a:r>
-          </a:p>
-          <a:p>
-            <a:pPr algn="l">
-              <a:lnSpc>
-                <a:spcPct val="140000"/>
-              </a:lnSpc>
-              <a:spcAft>
-                <a:spcPts val="600"/>
-              </a:spcAft>
-            </a:pPr>
-            <a:r>
-              <a:rPr sz="1400" b="0">
-                <a:solidFill>
-                  <a:srgbClr val="16161A"/>
-                </a:solidFill>
-                <a:latin typeface="Georgia"/>
-              </a:rPr>
-              <a:t>Đề tài chuyển sang cảnh báo về thiết kế đo — hẹp hơn, nhưng có cơ sở vững.</a:t>
-            </a:r>
-          </a:p>
-        </p:txBody>
-      </p:sp>
-      <p:sp>
-        <p:nvSpPr>
-          <p:cNvPr id="7" name="TextBox 6"/>
-          <p:cNvSpPr txBox="1"/>
-          <p:nvPr/>
-        </p:nvSpPr>
-        <p:spPr>
-          <a:xfrm>
-            <a:off x="800100" y="3560000"/>
-            <a:ext cx="1700000" cy="300000"/>
-          </a:xfrm>
-          <a:prstGeom prst="rect">
-            <a:avLst/>
-          </a:prstGeom>
-          <a:noFill/>
-        </p:spPr>
-        <p:txBody>
-          <a:bodyPr wrap="square" lIns="0" rIns="0" tIns="0" bIns="0">
-            <a:spAutoFit/>
-          </a:bodyPr>
-          <a:lstStyle/>
-          <a:p>
-            <a:pPr algn="l">
-              <a:spcAft>
-                <a:spcPts val="600"/>
-              </a:spcAft>
-            </a:pPr>
-            <a:r>
-              <a:rPr sz="1100" b="1">
-                <a:solidFill>
-                  <a:srgbClr val="9E2B34"/>
-                </a:solidFill>
-                <a:latin typeface="Helvetica Neue"/>
-              </a:rPr>
-              <a:t>ĐÃ LÀM</a:t>
-            </a:r>
-          </a:p>
-        </p:txBody>
-      </p:sp>
-      <p:sp>
-        <p:nvSpPr>
-          <p:cNvPr id="8" name="TextBox 7"/>
-          <p:cNvSpPr txBox="1"/>
-          <p:nvPr/>
-        </p:nvSpPr>
-        <p:spPr>
-          <a:xfrm>
-            <a:off x="2600100" y="3545000"/>
-            <a:ext cx="8700000" cy="330000"/>
-          </a:xfrm>
-          <a:prstGeom prst="rect">
-            <a:avLst/>
-          </a:prstGeom>
-          <a:noFill/>
-        </p:spPr>
-        <p:txBody>
-          <a:bodyPr wrap="square" lIns="0" rIns="0" tIns="0" bIns="0">
-            <a:spAutoFit/>
-          </a:bodyPr>
-          <a:lstStyle/>
-          <a:p>
-            <a:pPr algn="l">
-              <a:spcAft>
-                <a:spcPts val="600"/>
-              </a:spcAft>
-            </a:pPr>
-            <a:r>
-              <a:rPr sz="1250" b="0">
-                <a:solidFill>
-                  <a:srgbClr val="3F4149"/>
-                </a:solidFill>
-                <a:latin typeface="Helvetica Neue"/>
-              </a:rPr>
-              <a:t>7 lần chạy, khoảng 40 giờ GPU. Phát hiện 2 lỗi độc lập trong máy chấm, cả hai đã vá và có test.</a:t>
-            </a:r>
-          </a:p>
-        </p:txBody>
-      </p:sp>
-      <p:sp>
-        <p:nvSpPr>
-          <p:cNvPr id="9" name="TextBox 8"/>
-          <p:cNvSpPr txBox="1"/>
-          <p:nvPr/>
-        </p:nvSpPr>
-        <p:spPr>
-          <a:xfrm>
-            <a:off x="800100" y="4130000"/>
-            <a:ext cx="1700000" cy="300000"/>
-          </a:xfrm>
-          <a:prstGeom prst="rect">
-            <a:avLst/>
-          </a:prstGeom>
-          <a:noFill/>
-        </p:spPr>
-        <p:txBody>
-          <a:bodyPr wrap="square" lIns="0" rIns="0" tIns="0" bIns="0">
-            <a:spAutoFit/>
-          </a:bodyPr>
-          <a:lstStyle/>
-          <a:p>
-            <a:pPr algn="l">
-              <a:spcAft>
-                <a:spcPts val="600"/>
-              </a:spcAft>
-            </a:pPr>
-            <a:r>
-              <a:rPr sz="1100" b="1">
-                <a:solidFill>
-                  <a:srgbClr val="9E2B34"/>
-                </a:solidFill>
-                <a:latin typeface="Helvetica Neue"/>
-              </a:rPr>
-              <a:t>KẾT QUẢ</a:t>
-            </a:r>
-          </a:p>
-        </p:txBody>
-      </p:sp>
-      <p:sp>
-        <p:nvSpPr>
-          <p:cNvPr id="10" name="TextBox 9"/>
-          <p:cNvSpPr txBox="1"/>
-          <p:nvPr/>
-        </p:nvSpPr>
-        <p:spPr>
-          <a:xfrm>
-            <a:off x="2600100" y="4115000"/>
-            <a:ext cx="8700000" cy="330000"/>
-          </a:xfrm>
-          <a:prstGeom prst="rect">
-            <a:avLst/>
-          </a:prstGeom>
-          <a:noFill/>
-        </p:spPr>
-        <p:txBody>
-          <a:bodyPr wrap="square" lIns="0" rIns="0" tIns="0" bIns="0">
-            <a:spAutoFit/>
-          </a:bodyPr>
-          <a:lstStyle/>
-          <a:p>
-            <a:pPr algn="l">
-              <a:spcAft>
-                <a:spcPts val="600"/>
-              </a:spcAft>
-            </a:pPr>
-            <a:r>
-              <a:rPr sz="1250" b="0">
-                <a:solidFill>
-                  <a:srgbClr val="3F4149"/>
-                </a:solidFill>
-                <a:latin typeface="Helvetica Neue"/>
-              </a:rPr>
-              <a:t>Giả thuyết ban đầu không đúng, và đo được nguyên nhân vì sao.</a:t>
-            </a:r>
-          </a:p>
-        </p:txBody>
-      </p:sp>
-      <p:sp>
-        <p:nvSpPr>
-          <p:cNvPr id="11" name="TextBox 10"/>
-          <p:cNvSpPr txBox="1"/>
-          <p:nvPr/>
-        </p:nvSpPr>
-        <p:spPr>
-          <a:xfrm>
-            <a:off x="800100" y="4700000"/>
-            <a:ext cx="1700000" cy="300000"/>
-          </a:xfrm>
-          <a:prstGeom prst="rect">
-            <a:avLst/>
-          </a:prstGeom>
-          <a:noFill/>
-        </p:spPr>
-        <p:txBody>
-          <a:bodyPr wrap="square" lIns="0" rIns="0" tIns="0" bIns="0">
-            <a:spAutoFit/>
-          </a:bodyPr>
-          <a:lstStyle/>
-          <a:p>
-            <a:pPr algn="l">
-              <a:spcAft>
-                <a:spcPts val="600"/>
-              </a:spcAft>
-            </a:pPr>
-            <a:r>
-              <a:rPr sz="1100" b="1">
-                <a:solidFill>
-                  <a:srgbClr val="9E2B34"/>
-                </a:solidFill>
-                <a:latin typeface="Helvetica Neue"/>
-              </a:rPr>
-              <a:t>CHỜ GPU</a:t>
-            </a:r>
-          </a:p>
-        </p:txBody>
-      </p:sp>
-      <p:sp>
-        <p:nvSpPr>
-          <p:cNvPr id="12" name="TextBox 11"/>
-          <p:cNvSpPr txBox="1"/>
-          <p:nvPr/>
-        </p:nvSpPr>
-        <p:spPr>
-          <a:xfrm>
-            <a:off x="2600100" y="4685000"/>
-            <a:ext cx="8700000" cy="330000"/>
-          </a:xfrm>
-          <a:prstGeom prst="rect">
-            <a:avLst/>
-          </a:prstGeom>
-          <a:noFill/>
-        </p:spPr>
-        <p:txBody>
-          <a:bodyPr wrap="square" lIns="0" rIns="0" tIns="0" bIns="0">
-            <a:spAutoFit/>
-          </a:bodyPr>
-          <a:lstStyle/>
-          <a:p>
-            <a:pPr algn="l">
-              <a:spcAft>
-                <a:spcPts val="600"/>
-              </a:spcAft>
-            </a:pPr>
-            <a:r>
-              <a:rPr sz="1250" b="0">
-                <a:solidFill>
-                  <a:srgbClr val="3F4149"/>
-                </a:solidFill>
-                <a:latin typeface="Helvetica Neue"/>
-              </a:rPr>
-              <a:t>3 lượt đang xếp hàng: seed thứ hai GSM8K, ablation không lọc, Run D cho bug \boxed.</a:t>
-            </a:r>
-          </a:p>
-        </p:txBody>
-      </p:sp>
-      <p:sp>
-        <p:nvSpPr>
-          <p:cNvPr id="13" name="TextBox 12"/>
-          <p:cNvSpPr txBox="1"/>
-          <p:nvPr/>
-        </p:nvSpPr>
-        <p:spPr>
-          <a:xfrm>
-            <a:off x="800100" y="5270000"/>
-            <a:ext cx="1700000" cy="300000"/>
-          </a:xfrm>
-          <a:prstGeom prst="rect">
-            <a:avLst/>
-          </a:prstGeom>
-          <a:noFill/>
-        </p:spPr>
-        <p:txBody>
-          <a:bodyPr wrap="square" lIns="0" rIns="0" tIns="0" bIns="0">
-            <a:spAutoFit/>
-          </a:bodyPr>
-          <a:lstStyle/>
-          <a:p>
-            <a:pPr algn="l">
-              <a:spcAft>
-                <a:spcPts val="600"/>
-              </a:spcAft>
-            </a:pPr>
-            <a:r>
-              <a:rPr sz="1100" b="1">
-                <a:solidFill>
-                  <a:srgbClr val="9E2B34"/>
-                </a:solidFill>
-                <a:latin typeface="Helvetica Neue"/>
-              </a:rPr>
-              <a:t>SẮP TỚI</a:t>
-            </a:r>
-          </a:p>
-        </p:txBody>
-      </p:sp>
-      <p:sp>
-        <p:nvSpPr>
-          <p:cNvPr id="14" name="TextBox 13"/>
-          <p:cNvSpPr txBox="1"/>
-          <p:nvPr/>
-        </p:nvSpPr>
-        <p:spPr>
-          <a:xfrm>
-            <a:off x="2600100" y="5255000"/>
-            <a:ext cx="8700000" cy="330000"/>
-          </a:xfrm>
-          <a:prstGeom prst="rect">
-            <a:avLst/>
-          </a:prstGeom>
-          <a:noFill/>
-        </p:spPr>
-        <p:txBody>
-          <a:bodyPr wrap="square" lIns="0" rIns="0" tIns="0" bIns="0">
-            <a:spAutoFit/>
-          </a:bodyPr>
-          <a:lstStyle/>
-          <a:p>
-            <a:pPr algn="l">
-              <a:spcAft>
-                <a:spcPts val="600"/>
-              </a:spcAft>
-            </a:pPr>
-            <a:r>
-              <a:rPr sz="1250" b="0">
-                <a:solidFill>
-                  <a:srgbClr val="3F4149"/>
-                </a:solidFill>
-                <a:latin typeface="Helvetica Neue"/>
-              </a:rPr>
-              <a:t>Có đủ số liệu Run D thì viết lại bài báo theo kết luận mới.</a:t>
-            </a:r>
-          </a:p>
-        </p:txBody>
-      </p:sp>
-      <p:cxnSp>
-        <p:nvCxnSpPr>
-          <p:cNvPr id="15" name="Connector 14"/>
-          <p:cNvCxnSpPr/>
-          <p:nvPr/>
-        </p:nvCxnSpPr>
-        <p:spPr>
-          <a:xfrm>
-            <a:off x="800100" y="5900000"/>
-            <a:ext cx="10591495" cy="0"/>
-          </a:xfrm>
-          <a:prstGeom prst="line">
-            <a:avLst/>
-          </a:prstGeom>
-          <a:ln w="9525">
-            <a:solidFill>
-              <a:srgbClr val="E6E6EA"/>
-            </a:solidFill>
-          </a:ln>
-        </p:spPr>
-        <p:style>
-          <a:lnRef idx="2">
-            <a:schemeClr val="accent1"/>
-          </a:lnRef>
-          <a:fillRef idx="0">
-            <a:schemeClr val="accent1"/>
-          </a:fillRef>
-          <a:effectRef idx="1">
-            <a:schemeClr val="accent1"/>
-          </a:effectRef>
-          <a:fontRef idx="minor">
-            <a:schemeClr val="tx1"/>
-          </a:fontRef>
-        </p:style>
-      </p:cxnSp>
-      <p:sp>
-        <p:nvSpPr>
-          <p:cNvPr id="16" name="TextBox 15"/>
-          <p:cNvSpPr txBox="1"/>
-          <p:nvPr/>
-        </p:nvSpPr>
-        <p:spPr>
-          <a:xfrm>
-            <a:off x="800100" y="6100000"/>
-            <a:ext cx="10591495" cy="300000"/>
-          </a:xfrm>
-          <a:prstGeom prst="rect">
-            <a:avLst/>
-          </a:prstGeom>
-          <a:noFill/>
-        </p:spPr>
-        <p:txBody>
-          <a:bodyPr wrap="square" lIns="0" rIns="0" tIns="0" bIns="0">
-            <a:spAutoFit/>
-          </a:bodyPr>
-          <a:lstStyle/>
-          <a:p>
-            <a:pPr algn="l">
-              <a:spcAft>
-                <a:spcPts val="600"/>
-              </a:spcAft>
-            </a:pPr>
-            <a:r>
-              <a:rPr sz="1250" b="0">
-                <a:solidFill>
-                  <a:srgbClr val="8A8D96"/>
-                </a:solidFill>
-                <a:latin typeface="Helvetica Neue"/>
-              </a:rPr>
-              <a:t>Cảm ơn đã theo dõi. Rất mong nhận được góp ý.</a:t>
             </a:r>
           </a:p>
         </p:txBody>
